--- a/slides/YOLO_SAHI_FLISOL2026.pptx
+++ b/slides/YOLO_SAHI_FLISOL2026.pptx
@@ -30,9 +30,11 @@
     <p:sldId id="278" r:id="rId24"/>
     <p:sldId id="279" r:id="rId25"/>
     <p:sldId id="280" r:id="rId26"/>
+    <p:sldId id="281" r:id="rId27"/>
+    <p:sldId id="282" r:id="rId28"/>
   </p:sldIdLst>
   <p:notesMasterIdLst>
-    <p:notesMasterId r:id="rId27"/>
+    <p:notesMasterId r:id="rId29"/>
   </p:notesMasterIdLst>
   <p:sldSz cx="12191695" cy="6858000"/>
   <p:notesSz cx="6858000" cy="12191695"/>
@@ -188,61 +190,6 @@
             <c:showBubbleSize val="0"/>
             <c:showLeaderLines val="0"/>
           </c:dLbls>
-          <c:dPt>
-            <c:idx val="0"/>
-            <c:invertIfNegative val="0"/>
-            <c:bubble3D val="0"/>
-            <c:spPr>
-              <a:solidFill>
-                <a:srgbClr val="2E8B57"/>
-              </a:solidFill>
-              <a:effectLst/>
-            </c:spPr>
-          </c:dPt>
-          <c:dPt>
-            <c:idx val="1"/>
-            <c:invertIfNegative val="0"/>
-            <c:bubble3D val="0"/>
-            <c:spPr>
-              <a:solidFill>
-                <a:srgbClr val="E4572E"/>
-              </a:solidFill>
-              <a:effectLst/>
-            </c:spPr>
-          </c:dPt>
-          <c:dPt>
-            <c:idx val="2"/>
-            <c:invertIfNegative val="0"/>
-            <c:bubble3D val="0"/>
-            <c:spPr>
-              <a:solidFill>
-                <a:srgbClr val="2E8B57"/>
-              </a:solidFill>
-              <a:effectLst/>
-            </c:spPr>
-          </c:dPt>
-          <c:dPt>
-            <c:idx val="3"/>
-            <c:invertIfNegative val="0"/>
-            <c:bubble3D val="0"/>
-            <c:spPr>
-              <a:solidFill>
-                <a:srgbClr val="E4572E"/>
-              </a:solidFill>
-              <a:effectLst/>
-            </c:spPr>
-          </c:dPt>
-          <c:dPt>
-            <c:idx val="4"/>
-            <c:invertIfNegative val="0"/>
-            <c:bubble3D val="0"/>
-            <c:spPr>
-              <a:solidFill>
-                <a:srgbClr val="2E8B57"/>
-              </a:solidFill>
-              <a:effectLst/>
-            </c:spPr>
-          </c:dPt>
           <c:cat>
             <c:multiLvlStrRef>
               <c:f>Sheet1!$A$2:$A$6</c:f>
@@ -319,161 +266,10 @@
         </c:dLbls>
         <c:gapWidth val="150"/>
         <c:overlap val="0"/>
-        <c:axId val="2094734555"/>
-        <c:axId val="2094734553"/>
+        <c:axId val="2094734554"/>
+        <c:axId val="2094734552"/>
         <c:axId val="2094734556"/>
       </c:barChart>
-      <c:lineChart>
-        <c:varyColors val="0"/>
-        <c:ser>
-          <c:idx val="1"/>
-          <c:order val="1"/>
-          <c:tx>
-            <c:strRef>
-              <c:f>Sheet1!$C$1</c:f>
-              <c:strCache>
-                <c:ptCount val="1"/>
-                <c:pt idx="0">
-                  <c:v>Tiempo (s)</c:v>
-                </c:pt>
-              </c:strCache>
-            </c:strRef>
-          </c:tx>
-          <c:spPr>
-            <a:solidFill>
-              <a:srgbClr val="2E8B57"/>
-            </a:solidFill>
-            <a:ln w="25400" cap="flat">
-              <a:solidFill>
-                <a:srgbClr val="2E8B57"/>
-              </a:solidFill>
-              <a:prstDash val="solid"/>
-              <a:round/>
-            </a:ln>
-            <a:effectLst/>
-          </c:spPr>
-          <c:invertIfNegative val="0"/>
-          <c:dLbls>
-            <c:numFmt formatCode="#,##0" sourceLinked="0"/>
-            <c:txPr>
-              <a:bodyPr/>
-              <a:lstStyle/>
-              <a:p>
-                <a:pPr>
-                  <a:defRPr b="0" i="0" strike="noStrike" sz="1200" u="none">
-                    <a:solidFill>
-                      <a:srgbClr val="000000"/>
-                    </a:solidFill>
-                    <a:latin typeface="Arial"/>
-                  </a:defRPr>
-                </a:pPr>
-              </a:p>
-            </c:txPr>
-            <c:showLegendKey val="0"/>
-            <c:showVal val="0"/>
-            <c:showCatName val="0"/>
-            <c:showSerName val="0"/>
-            <c:showPercent val="0"/>
-            <c:showBubbleSize val="0"/>
-            <c:showLeaderLines val="0"/>
-          </c:dLbls>
-          <c:marker>
-            <c:symbol val="circle"/>
-            <c:size val="6"/>
-            <c:spPr>
-              <a:solidFill>
-                <a:srgbClr val="E4572E"/>
-              </a:solidFill>
-              <a:ln w="9525" cap="flat">
-                <a:solidFill>
-                  <a:srgbClr val="2E8B57"/>
-                </a:solidFill>
-                <a:prstDash val="solid"/>
-                <a:round/>
-              </a:ln>
-              <a:effectLst/>
-            </c:spPr>
-          </c:marker>
-          <c:cat>
-            <c:multiLvlStrRef>
-              <c:f>Sheet1!$A$2:$A$6</c:f>
-              <c:multiLvlStrCache>
-                <c:ptCount val="5"/>
-                <c:lvl>
-                  <c:pt idx="0">
-                    <c:v>320</c:v>
-                  </c:pt>
-                  <c:pt idx="1">
-                    <c:v>512</c:v>
-                  </c:pt>
-                  <c:pt idx="2">
-                    <c:v>640</c:v>
-                  </c:pt>
-                  <c:pt idx="3">
-                    <c:v>768</c:v>
-                  </c:pt>
-                  <c:pt idx="4">
-                    <c:v>1024</c:v>
-                  </c:pt>
-                </c:lvl>
-              </c:multiLvlStrCache>
-            </c:multiLvlStrRef>
-          </c:cat>
-          <c:val>
-            <c:numRef>
-              <c:f>Sheet1!$C$2:$C$6</c:f>
-              <c:numCache>
-                <c:formatCode>General</c:formatCode>
-                <c:ptCount val="5"/>
-                <c:pt idx="0">
-                  <c:v>2.6</c:v>
-                </c:pt>
-                <c:pt idx="1">
-                  <c:v>1.5</c:v>
-                </c:pt>
-                <c:pt idx="2">
-                  <c:v>1.1</c:v>
-                </c:pt>
-                <c:pt idx="3">
-                  <c:v>0.85</c:v>
-                </c:pt>
-                <c:pt idx="4">
-                  <c:v>0.6</c:v>
-                </c:pt>
-              </c:numCache>
-            </c:numRef>
-          </c:val>
-          <c:smooth val="0"/>
-        </c:ser>
-        <c:dLbls>
-          <c:numFmt formatCode="#,##0" sourceLinked="0"/>
-          <c:txPr>
-            <a:bodyPr/>
-            <a:lstStyle/>
-            <a:p>
-              <a:pPr>
-                <a:defRPr b="0" i="0" strike="noStrike" sz="1200" u="none">
-                  <a:solidFill>
-                    <a:srgbClr val="000000"/>
-                  </a:solidFill>
-                  <a:latin typeface="Arial"/>
-                </a:defRPr>
-              </a:pPr>
-            </a:p>
-          </c:txPr>
-          <c:showLegendKey val="0"/>
-          <c:showVal val="0"/>
-          <c:showCatName val="0"/>
-          <c:showSerName val="0"/>
-          <c:showPercent val="0"/>
-          <c:showBubbleSize val="0"/>
-          <c:showLeaderLines val="0"/>
-        </c:dLbls>
-        <c:marker val="1"/>
-        <c:axId val="2094734555"/>
-        <c:axId val="2094734553"/>
-        <c:axId val="2094734556"/>
-      </c:lineChart>
       <c:catAx>
         <c:axId val="2094734554"/>
         <c:scaling>
@@ -481,35 +277,6 @@
         </c:scaling>
         <c:delete val="0"/>
         <c:axPos val="b"/>
-        <c:title>
-          <c:tx>
-            <c:rich>
-              <a:bodyPr/>
-              <a:lstStyle/>
-              <a:p>
-                <a:pPr>
-                  <a:defRPr sz="1000" b="0" i="0" u="none" strike="noStrike">
-                    <a:solidFill>
-                      <a:srgbClr val="64748B"/>
-                    </a:solidFill>
-                    <a:latin typeface="Calibri"/>
-                  </a:defRPr>
-                </a:pPr>
-                <a:r>
-                  <a:rPr sz="1000" b="0" i="0" u="none" strike="noStrike">
-                    <a:solidFill>
-                      <a:srgbClr val="64748B"/>
-                    </a:solidFill>
-                    <a:latin typeface="Calibri"/>
-                  </a:rPr>
-                  <a:t>tamaño de slice (px)</a:t>
-                </a:r>
-              </a:p>
-            </c:rich>
-          </c:tx>
-          <c:layout/>
-          <c:overlay val="0"/>
-        </c:title>
         <c:numFmt formatCode="General" sourceLinked="1"/>
         <c:majorTickMark val="out"/>
         <c:minorTickMark val="none"/>
@@ -594,13 +361,268 @@
         <c:crosses val="autoZero"/>
         <c:crossBetween val="between"/>
       </c:valAx>
-      <c:valAx>
-        <c:axId val="2094734553"/>
+      <c:spPr>
+        <a:noFill/>
+        <a:ln>
+          <a:noFill/>
+        </a:ln>
+        <a:effectLst/>
+      </c:spPr>
+    </c:plotArea>
+    <c:plotVisOnly val="1"/>
+    <c:dispBlanksAs val="span"/>
+  </c:chart>
+  <c:spPr>
+    <a:solidFill>
+      <a:srgbClr val="FFFFFF"/>
+    </a:solidFill>
+    <a:ln>
+      <a:noFill/>
+    </a:ln>
+    <a:effectLst/>
+  </c:spPr>
+  <c:externalData r:id="rId1">
+    <c:autoUpdate val="0"/>
+  </c:externalData>
+</c:chartSpace>
+</file>
+
+<file path=ppt/charts/chart2.xml><?xml version="1.0" encoding="utf-8"?>
+<c:chartSpace xmlns:c="http://schemas.openxmlformats.org/drawingml/2006/chart" xmlns:a="http://schemas.openxmlformats.org/drawingml/2006/main" xmlns:r="http://schemas.openxmlformats.org/officeDocument/2006/relationships">
+  <c:date1904 val="0"/>
+  <c:roundedCorners val="1"/>
+  <c:chart>
+    <c:autoTitleDeleted val="1"/>
+    <c:plotArea>
+      <c:layout/>
+      <c:lineChart>
+        <c:varyColors val="0"/>
+        <c:ser>
+          <c:idx val="0"/>
+          <c:order val="0"/>
+          <c:tx>
+            <c:strRef>
+              <c:f>Sheet1!$B$1</c:f>
+              <c:strCache>
+                <c:ptCount val="1"/>
+                <c:pt idx="0">
+                  <c:v>Tiempo (s)</c:v>
+                </c:pt>
+              </c:strCache>
+            </c:strRef>
+          </c:tx>
+          <c:spPr>
+            <a:solidFill>
+              <a:srgbClr val="E4572E"/>
+            </a:solidFill>
+            <a:ln w="38100" cap="flat">
+              <a:solidFill>
+                <a:srgbClr val="E4572E"/>
+              </a:solidFill>
+              <a:prstDash val="solid"/>
+              <a:round/>
+            </a:ln>
+            <a:effectLst/>
+          </c:spPr>
+          <c:invertIfNegative val="0"/>
+          <c:dLbls>
+            <c:numFmt formatCode="#,##0" sourceLinked="0"/>
+            <c:txPr>
+              <a:bodyPr/>
+              <a:lstStyle/>
+              <a:p>
+                <a:pPr>
+                  <a:defRPr b="0" i="0" strike="noStrike" sz="1200" u="none">
+                    <a:solidFill>
+                      <a:srgbClr val="000000"/>
+                    </a:solidFill>
+                    <a:latin typeface="Arial"/>
+                  </a:defRPr>
+                </a:pPr>
+              </a:p>
+            </c:txPr>
+            <c:showLegendKey val="0"/>
+            <c:showVal val="0"/>
+            <c:showCatName val="0"/>
+            <c:showSerName val="0"/>
+            <c:showPercent val="0"/>
+            <c:showBubbleSize val="0"/>
+            <c:showLeaderLines val="0"/>
+          </c:dLbls>
+          <c:marker>
+            <c:symbol val="circle"/>
+            <c:size val="6"/>
+            <c:spPr>
+              <a:solidFill>
+                <a:srgbClr val="E4572E"/>
+              </a:solidFill>
+              <a:ln w="9525" cap="flat">
+                <a:solidFill>
+                  <a:srgbClr val="E4572E"/>
+                </a:solidFill>
+                <a:prstDash val="solid"/>
+                <a:round/>
+              </a:ln>
+              <a:effectLst/>
+            </c:spPr>
+          </c:marker>
+          <c:cat>
+            <c:multiLvlStrRef>
+              <c:f>Sheet1!$A$2:$A$6</c:f>
+              <c:multiLvlStrCache>
+                <c:ptCount val="5"/>
+                <c:lvl>
+                  <c:pt idx="0">
+                    <c:v>320</c:v>
+                  </c:pt>
+                  <c:pt idx="1">
+                    <c:v>512</c:v>
+                  </c:pt>
+                  <c:pt idx="2">
+                    <c:v>640</c:v>
+                  </c:pt>
+                  <c:pt idx="3">
+                    <c:v>768</c:v>
+                  </c:pt>
+                  <c:pt idx="4">
+                    <c:v>1024</c:v>
+                  </c:pt>
+                </c:lvl>
+              </c:multiLvlStrCache>
+            </c:multiLvlStrRef>
+          </c:cat>
+          <c:val>
+            <c:numRef>
+              <c:f>Sheet1!$B$2:$B$6</c:f>
+              <c:numCache>
+                <c:formatCode>General</c:formatCode>
+                <c:ptCount val="5"/>
+                <c:pt idx="0">
+                  <c:v>2.6</c:v>
+                </c:pt>
+                <c:pt idx="1">
+                  <c:v>1.5</c:v>
+                </c:pt>
+                <c:pt idx="2">
+                  <c:v>1.1</c:v>
+                </c:pt>
+                <c:pt idx="3">
+                  <c:v>0.85</c:v>
+                </c:pt>
+                <c:pt idx="4">
+                  <c:v>0.6</c:v>
+                </c:pt>
+              </c:numCache>
+            </c:numRef>
+          </c:val>
+          <c:smooth val="1"/>
+        </c:ser>
+        <c:dLbls>
+          <c:numFmt formatCode="#,##0" sourceLinked="0"/>
+          <c:txPr>
+            <a:bodyPr/>
+            <a:lstStyle/>
+            <a:p>
+              <a:pPr>
+                <a:defRPr b="0" i="0" strike="noStrike" sz="1200" u="none">
+                  <a:solidFill>
+                    <a:srgbClr val="000000"/>
+                  </a:solidFill>
+                  <a:latin typeface="Arial"/>
+                </a:defRPr>
+              </a:pPr>
+            </a:p>
+          </c:txPr>
+          <c:showLegendKey val="0"/>
+          <c:showVal val="0"/>
+          <c:showCatName val="0"/>
+          <c:showSerName val="0"/>
+          <c:showPercent val="0"/>
+          <c:showBubbleSize val="0"/>
+          <c:showLeaderLines val="0"/>
+        </c:dLbls>
+        <c:marker val="1"/>
+        <c:axId val="2094734554"/>
+        <c:axId val="2094734552"/>
+        <c:axId val="2094734556"/>
+      </c:lineChart>
+      <c:catAx>
+        <c:axId val="2094734554"/>
         <c:scaling>
           <c:orientation val="minMax"/>
         </c:scaling>
         <c:delete val="0"/>
-        <c:axPos val="r"/>
+        <c:axPos val="b"/>
+        <c:title>
+          <c:tx>
+            <c:rich>
+              <a:bodyPr/>
+              <a:lstStyle/>
+              <a:p>
+                <a:pPr>
+                  <a:defRPr sz="1000" b="0" i="0" u="none" strike="noStrike">
+                    <a:solidFill>
+                      <a:srgbClr val="64748B"/>
+                    </a:solidFill>
+                    <a:latin typeface="Arial"/>
+                  </a:defRPr>
+                </a:pPr>
+                <a:r>
+                  <a:rPr sz="1000" b="0" i="0" u="none" strike="noStrike">
+                    <a:solidFill>
+                      <a:srgbClr val="64748B"/>
+                    </a:solidFill>
+                    <a:latin typeface="Arial"/>
+                  </a:rPr>
+                  <a:t>tamaño de slice (px)</a:t>
+                </a:r>
+              </a:p>
+            </c:rich>
+          </c:tx>
+          <c:layout/>
+          <c:overlay val="0"/>
+        </c:title>
+        <c:numFmt formatCode="General" sourceLinked="1"/>
+        <c:majorTickMark val="out"/>
+        <c:minorTickMark val="none"/>
+        <c:tickLblPos val="low"/>
+        <c:spPr>
+          <a:ln w="12700" cap="flat">
+            <a:solidFill>
+              <a:srgbClr val="888888"/>
+            </a:solidFill>
+            <a:prstDash val="solid"/>
+            <a:round/>
+          </a:ln>
+        </c:spPr>
+        <c:txPr>
+          <a:bodyPr/>
+          <a:lstStyle/>
+          <a:p>
+            <a:pPr>
+              <a:defRPr sz="1100" b="0" i="0" u="none" strike="noStrike">
+                <a:solidFill>
+                  <a:srgbClr val="64748B"/>
+                </a:solidFill>
+                <a:latin typeface="Calibri"/>
+              </a:defRPr>
+            </a:pPr>
+            <a:endParaRPr lang="en-US"/>
+          </a:p>
+        </c:txPr>
+        <c:crossAx val="2094734552"/>
+        <c:crosses val="autoZero"/>
+        <c:auto val="1"/>
+        <c:lblAlgn val="ctr"/>
+        <c:noMultiLvlLbl val="1"/>
+      </c:catAx>
+      <c:valAx>
+        <c:axId val="2094734552"/>
+        <c:scaling>
+          <c:orientation val="minMax"/>
+        </c:scaling>
+        <c:delete val="0"/>
+        <c:axPos val="l"/>
         <c:majorGridlines>
           <c:spPr>
             <a:ln w="6350" cap="flat">
@@ -640,80 +662,10 @@
             <a:endParaRPr lang="en-US"/>
           </a:p>
         </c:txPr>
-        <c:crossAx val="2094734555"/>
-        <c:crosses val="max"/>
+        <c:crossAx val="2094734554"/>
+        <c:crosses val="autoZero"/>
         <c:crossBetween val="between"/>
       </c:valAx>
-      <c:catAx>
-        <c:axId val="2094734555"/>
-        <c:scaling>
-          <c:orientation val="minMax"/>
-        </c:scaling>
-        <c:delete val="1"/>
-        <c:axPos val="b"/>
-        <c:title>
-          <c:tx>
-            <c:rich>
-              <a:bodyPr/>
-              <a:lstStyle/>
-              <a:p>
-                <a:pPr>
-                  <a:defRPr sz="1000" b="0" i="0" u="none" strike="noStrike">
-                    <a:solidFill>
-                      <a:srgbClr val="64748B"/>
-                    </a:solidFill>
-                    <a:latin typeface="Calibri"/>
-                  </a:defRPr>
-                </a:pPr>
-                <a:r>
-                  <a:rPr sz="1000" b="0" i="0" u="none" strike="noStrike">
-                    <a:solidFill>
-                      <a:srgbClr val="64748B"/>
-                    </a:solidFill>
-                    <a:latin typeface="Calibri"/>
-                  </a:rPr>
-                  <a:t>tamaño de slice (px)</a:t>
-                </a:r>
-              </a:p>
-            </c:rich>
-          </c:tx>
-          <c:layout/>
-          <c:overlay val="0"/>
-        </c:title>
-        <c:numFmt formatCode="General" sourceLinked="1"/>
-        <c:majorTickMark val="out"/>
-        <c:minorTickMark val="none"/>
-        <c:tickLblPos val="low"/>
-        <c:spPr>
-          <a:ln w="12700" cap="flat">
-            <a:solidFill>
-              <a:srgbClr val="888888"/>
-            </a:solidFill>
-            <a:prstDash val="solid"/>
-            <a:round/>
-          </a:ln>
-        </c:spPr>
-        <c:txPr>
-          <a:bodyPr/>
-          <a:lstStyle/>
-          <a:p>
-            <a:pPr>
-              <a:defRPr sz="1100" b="0" i="0" u="none" strike="noStrike">
-                <a:solidFill>
-                  <a:srgbClr val="64748B"/>
-                </a:solidFill>
-                <a:latin typeface="Calibri"/>
-              </a:defRPr>
-            </a:pPr>
-            <a:endParaRPr lang="en-US"/>
-          </a:p>
-        </c:txPr>
-        <c:crossAx val="2094734553"/>
-        <c:crosses val="autoZero"/>
-        <c:auto val="1"/>
-        <c:lblAlgn val="ctr"/>
-        <c:noMultiLvlLbl val="1"/>
-      </c:catAx>
       <c:spPr>
         <a:noFill/>
         <a:ln>
@@ -722,26 +674,6 @@
         <a:effectLst/>
       </c:spPr>
     </c:plotArea>
-    <c:legend>
-      <c:legendPos val="b"/>
-      <c:overlay val="0"/>
-      <c:txPr>
-        <a:bodyPr/>
-        <a:lstStyle/>
-        <a:p>
-          <a:pPr>
-            <a:defRPr>
-              <a:solidFill>
-                <a:srgbClr val="64748B"/>
-              </a:solidFill>
-              <a:latin typeface="Calibri"/>
-              <a:cs typeface="Calibri"/>
-            </a:defRPr>
-          </a:pPr>
-          <a:endParaRPr lang="en-US"/>
-        </a:p>
-      </c:txPr>
-    </c:legend>
     <c:plotVisOnly val="1"/>
     <c:dispBlanksAs val="span"/>
   </c:chart>
@@ -760,7 +692,7 @@
 </c:chartSpace>
 </file>
 
-<file path=ppt/charts/chart2.xml><?xml version="1.0" encoding="utf-8"?>
+<file path=ppt/charts/chart3.xml><?xml version="1.0" encoding="utf-8"?>
 <c:chartSpace xmlns:c="http://schemas.openxmlformats.org/drawingml/2006/chart" xmlns:a="http://schemas.openxmlformats.org/drawingml/2006/main" xmlns:r="http://schemas.openxmlformats.org/officeDocument/2006/relationships">
   <c:date1904 val="0"/>
   <c:roundedCorners val="1"/>
@@ -1105,7 +1037,7 @@
 </c:chartSpace>
 </file>
 
-<file path=ppt/charts/chart3.xml><?xml version="1.0" encoding="utf-8"?>
+<file path=ppt/charts/chart4.xml><?xml version="1.0" encoding="utf-8"?>
 <c:chartSpace xmlns:c="http://schemas.openxmlformats.org/drawingml/2006/chart" xmlns:a="http://schemas.openxmlformats.org/drawingml/2006/main" xmlns:r="http://schemas.openxmlformats.org/officeDocument/2006/relationships">
   <c:date1904 val="0"/>
   <c:roundedCorners val="1"/>
@@ -1139,7 +1071,7 @@
           </c:spPr>
           <c:invertIfNegative val="0"/>
           <c:dLbls>
-            <c:numFmt formatCode="#,##0" sourceLinked="0"/>
+            <c:numFmt formatCode="0.00" sourceLinked="0"/>
             <c:txPr>
               <a:bodyPr/>
               <a:lstStyle/>
@@ -1222,7 +1154,7 @@
           </c:spPr>
           <c:invertIfNegative val="0"/>
           <c:dLbls>
-            <c:numFmt formatCode="#,##0" sourceLinked="0"/>
+            <c:numFmt formatCode="0.00" sourceLinked="0"/>
             <c:txPr>
               <a:bodyPr/>
               <a:lstStyle/>
@@ -1284,7 +1216,7 @@
           </c:val>
         </c:ser>
         <c:dLbls>
-          <c:numFmt formatCode="#,##0" sourceLinked="0"/>
+          <c:numFmt formatCode="0.00" sourceLinked="0"/>
           <c:txPr>
             <a:bodyPr/>
             <a:lstStyle/>
@@ -1450,7 +1382,7 @@
 </c:chartSpace>
 </file>
 
-<file path=ppt/charts/chart4.xml><?xml version="1.0" encoding="utf-8"?>
+<file path=ppt/charts/chart5.xml><?xml version="1.0" encoding="utf-8"?>
 <c:chartSpace xmlns:c="http://schemas.openxmlformats.org/drawingml/2006/chart" xmlns:a="http://schemas.openxmlformats.org/drawingml/2006/main" xmlns:r="http://schemas.openxmlformats.org/officeDocument/2006/relationships">
   <c:date1904 val="0"/>
   <c:roundedCorners val="1"/>
@@ -1484,7 +1416,7 @@
           </c:spPr>
           <c:invertIfNegative val="0"/>
           <c:dLbls>
-            <c:numFmt formatCode="#,##0" sourceLinked="0"/>
+            <c:numFmt formatCode="0.00" sourceLinked="0"/>
             <c:txPr>
               <a:bodyPr/>
               <a:lstStyle/>
@@ -1567,7 +1499,7 @@
           </c:spPr>
           <c:invertIfNegative val="0"/>
           <c:dLbls>
-            <c:numFmt formatCode="#,##0" sourceLinked="0"/>
+            <c:numFmt formatCode="0.00" sourceLinked="0"/>
             <c:txPr>
               <a:bodyPr/>
               <a:lstStyle/>
@@ -1629,7 +1561,7 @@
           </c:val>
         </c:ser>
         <c:dLbls>
-          <c:numFmt formatCode="#,##0" sourceLinked="0"/>
+          <c:numFmt formatCode="0.00" sourceLinked="0"/>
           <c:txPr>
             <a:bodyPr/>
             <a:lstStyle/>
@@ -1795,7 +1727,7 @@
 </c:chartSpace>
 </file>
 
-<file path=ppt/charts/chart5.xml><?xml version="1.0" encoding="utf-8"?>
+<file path=ppt/charts/chart6.xml><?xml version="1.0" encoding="utf-8"?>
 <c:chartSpace xmlns:c="http://schemas.openxmlformats.org/drawingml/2006/chart" xmlns:a="http://schemas.openxmlformats.org/drawingml/2006/main" xmlns:r="http://schemas.openxmlformats.org/officeDocument/2006/relationships">
   <c:date1904 val="0"/>
   <c:roundedCorners val="1"/>
@@ -4079,6 +4011,182 @@
             <a:fld id="{F7021451-1387-4CA6-816F-3879F97B5CBC}" type="slidenum">
               <a:rPr lang="en-US"/>
               <a:t>25</a:t>
+            </a:fld>
+            <a:endParaRPr lang="en-US"/>
+          </a:p>
+        </p:txBody>
+      </p:sp>
+    </p:spTree>
+    <p:extLst>
+      <p:ext uri="{BB962C8B-B14F-4D97-AF65-F5344CB8AC3E}">
+        <p14:creationId xmlns:p14="http://schemas.microsoft.com/office/powerpoint/2010/main" val="1024086991"/>
+      </p:ext>
+    </p:extLst>
+  </p:cSld>
+  <p:clrMapOvr>
+    <a:masterClrMapping/>
+  </p:clrMapOvr>
+</p:notes>
+</file>
+
+<file path=ppt/notesSlides/notesSlide26.xml><?xml version="1.0" encoding="utf-8"?>
+<p:notes xmlns:a="http://schemas.openxmlformats.org/drawingml/2006/main" xmlns:r="http://schemas.openxmlformats.org/officeDocument/2006/relationships" xmlns:p="http://schemas.openxmlformats.org/presentationml/2006/main">
+  <p:cSld>
+    <p:spTree>
+      <p:nvGrpSpPr>
+        <p:cNvPr id="1" name=""/>
+        <p:cNvGrpSpPr/>
+        <p:nvPr/>
+      </p:nvGrpSpPr>
+      <p:grpSpPr>
+        <a:xfrm>
+          <a:off x="0" y="0"/>
+          <a:ext cx="0" cy="0"/>
+          <a:chOff x="0" y="0"/>
+          <a:chExt cx="0" cy="0"/>
+        </a:xfrm>
+      </p:grpSpPr>
+      <p:sp>
+        <p:nvSpPr>
+          <p:cNvPr id="2" name="Slide Image Placeholder 1"/>
+          <p:cNvSpPr>
+            <a:spLocks noGrp="1" noRot="1" noChangeAspect="1"/>
+          </p:cNvSpPr>
+          <p:nvPr>
+            <p:ph type="sldImg"/>
+          </p:nvPr>
+        </p:nvSpPr>
+        <p:spPr/>
+      </p:sp>
+      <p:sp>
+        <p:nvSpPr>
+          <p:cNvPr id="3" name="Notes Placeholder 2"/>
+          <p:cNvSpPr>
+            <a:spLocks noGrp="1"/>
+          </p:cNvSpPr>
+          <p:nvPr>
+            <p:ph type="body" idx="1"/>
+          </p:nvPr>
+        </p:nvSpPr>
+        <p:spPr/>
+        <p:txBody>
+          <a:bodyPr/>
+          <a:lstStyle/>
+          <a:p>
+            <a:r>
+              <a:rPr lang="en-US" dirty="0"/>
+              <a:t/>
+            </a:r>
+            <a:endParaRPr lang="en-US" dirty="0"/>
+          </a:p>
+        </p:txBody>
+      </p:sp>
+      <p:sp>
+        <p:nvSpPr>
+          <p:cNvPr id="4" name="Slide Number Placeholder 3"/>
+          <p:cNvSpPr>
+            <a:spLocks noGrp="1"/>
+          </p:cNvSpPr>
+          <p:nvPr>
+            <p:ph type="sldNum" sz="quarter" idx="10"/>
+          </p:nvPr>
+        </p:nvSpPr>
+        <p:spPr/>
+        <p:txBody>
+          <a:bodyPr/>
+          <a:lstStyle/>
+          <a:p>
+            <a:fld id="{F7021451-1387-4CA6-816F-3879F97B5CBC}" type="slidenum">
+              <a:rPr lang="en-US"/>
+              <a:t>26</a:t>
+            </a:fld>
+            <a:endParaRPr lang="en-US"/>
+          </a:p>
+        </p:txBody>
+      </p:sp>
+    </p:spTree>
+    <p:extLst>
+      <p:ext uri="{BB962C8B-B14F-4D97-AF65-F5344CB8AC3E}">
+        <p14:creationId xmlns:p14="http://schemas.microsoft.com/office/powerpoint/2010/main" val="1024086991"/>
+      </p:ext>
+    </p:extLst>
+  </p:cSld>
+  <p:clrMapOvr>
+    <a:masterClrMapping/>
+  </p:clrMapOvr>
+</p:notes>
+</file>
+
+<file path=ppt/notesSlides/notesSlide27.xml><?xml version="1.0" encoding="utf-8"?>
+<p:notes xmlns:a="http://schemas.openxmlformats.org/drawingml/2006/main" xmlns:r="http://schemas.openxmlformats.org/officeDocument/2006/relationships" xmlns:p="http://schemas.openxmlformats.org/presentationml/2006/main">
+  <p:cSld>
+    <p:spTree>
+      <p:nvGrpSpPr>
+        <p:cNvPr id="1" name=""/>
+        <p:cNvGrpSpPr/>
+        <p:nvPr/>
+      </p:nvGrpSpPr>
+      <p:grpSpPr>
+        <a:xfrm>
+          <a:off x="0" y="0"/>
+          <a:ext cx="0" cy="0"/>
+          <a:chOff x="0" y="0"/>
+          <a:chExt cx="0" cy="0"/>
+        </a:xfrm>
+      </p:grpSpPr>
+      <p:sp>
+        <p:nvSpPr>
+          <p:cNvPr id="2" name="Slide Image Placeholder 1"/>
+          <p:cNvSpPr>
+            <a:spLocks noGrp="1" noRot="1" noChangeAspect="1"/>
+          </p:cNvSpPr>
+          <p:nvPr>
+            <p:ph type="sldImg"/>
+          </p:nvPr>
+        </p:nvSpPr>
+        <p:spPr/>
+      </p:sp>
+      <p:sp>
+        <p:nvSpPr>
+          <p:cNvPr id="3" name="Notes Placeholder 2"/>
+          <p:cNvSpPr>
+            <a:spLocks noGrp="1"/>
+          </p:cNvSpPr>
+          <p:nvPr>
+            <p:ph type="body" idx="1"/>
+          </p:nvPr>
+        </p:nvSpPr>
+        <p:spPr/>
+        <p:txBody>
+          <a:bodyPr/>
+          <a:lstStyle/>
+          <a:p>
+            <a:r>
+              <a:rPr lang="en-US" dirty="0"/>
+              <a:t/>
+            </a:r>
+            <a:endParaRPr lang="en-US" dirty="0"/>
+          </a:p>
+        </p:txBody>
+      </p:sp>
+      <p:sp>
+        <p:nvSpPr>
+          <p:cNvPr id="4" name="Slide Number Placeholder 3"/>
+          <p:cNvSpPr>
+            <a:spLocks noGrp="1"/>
+          </p:cNvSpPr>
+          <p:nvPr>
+            <p:ph type="sldNum" sz="quarter" idx="10"/>
+          </p:nvPr>
+        </p:nvSpPr>
+        <p:spPr/>
+        <p:txBody>
+          <a:bodyPr/>
+          <a:lstStyle/>
+          <a:p>
+            <a:fld id="{F7021451-1387-4CA6-816F-3879F97B5CBC}" type="slidenum">
+              <a:rPr lang="en-US"/>
+              <a:t>27</a:t>
             </a:fld>
             <a:endParaRPr lang="en-US"/>
           </a:p>
@@ -6541,15 +6649,54 @@
           </a:p>
         </p:txBody>
       </p:sp>
+      <p:sp>
+        <p:nvSpPr>
+          <p:cNvPr id="7" name="Text 5"/>
+          <p:cNvSpPr/>
+          <p:nvPr/>
+        </p:nvSpPr>
+        <p:spPr>
+          <a:xfrm>
+            <a:off x="5120640" y="1783080"/>
+            <a:ext cx="6492240" cy="274320"/>
+          </a:xfrm>
+          <a:prstGeom prst="rect">
+            <a:avLst/>
+          </a:prstGeom>
+          <a:noFill/>
+          <a:ln/>
+        </p:spPr>
+        <p:txBody>
+          <a:bodyPr wrap="square" lIns="0" tIns="0" rIns="0" bIns="0" rtlCol="0" anchor="ctr"/>
+          <a:lstStyle/>
+          <a:p>
+            <a:pPr indent="0" marL="0">
+              <a:buNone/>
+            </a:pPr>
+            <a:r>
+              <a:rPr lang="en-US" sz="1200" b="1" dirty="0">
+                <a:solidFill>
+                  <a:srgbClr val="2E8B57"/>
+                </a:solidFill>
+                <a:latin typeface="Calibri" pitchFamily="34" charset="0"/>
+                <a:ea typeface="Calibri" pitchFamily="34" charset="-122"/>
+                <a:cs typeface="Calibri" pitchFamily="34" charset="-120"/>
+              </a:rPr>
+              <a:t>Detecciones  (más = mejor)</a:t>
+            </a:r>
+            <a:endParaRPr lang="en-US" sz="1200" dirty="0"/>
+          </a:p>
+        </p:txBody>
+      </p:sp>
       <p:graphicFrame>
         <p:nvGraphicFramePr>
-          <p:cNvPr id="7" name="Chart 0" descr=""/>
+          <p:cNvPr id="8" name="Chart 0" descr=""/>
           <p:cNvGraphicFramePr/>
           <p:nvPr/>
         </p:nvGraphicFramePr>
         <p:xfrm>
-          <a:off x="4937760" y="1828800"/>
-          <a:ext cx="6675120" cy="3931920"/>
+          <a:off x="5029200" y="2057400"/>
+          <a:ext cx="6583680" cy="1783080"/>
         </p:xfrm>
         <a:graphic xmlns:a="http://schemas.openxmlformats.org/drawingml/2006/main">
           <a:graphicData uri="http://schemas.openxmlformats.org/drawingml/2006/chart">
@@ -6559,7 +6706,62 @@
       </p:graphicFrame>
       <p:sp>
         <p:nvSpPr>
-          <p:cNvPr id="8" name="Text 5"/>
+          <p:cNvPr id="9" name="Text 6"/>
+          <p:cNvSpPr/>
+          <p:nvPr/>
+        </p:nvSpPr>
+        <p:spPr>
+          <a:xfrm>
+            <a:off x="5120640" y="3977640"/>
+            <a:ext cx="6492240" cy="274320"/>
+          </a:xfrm>
+          <a:prstGeom prst="rect">
+            <a:avLst/>
+          </a:prstGeom>
+          <a:noFill/>
+          <a:ln/>
+        </p:spPr>
+        <p:txBody>
+          <a:bodyPr wrap="square" lIns="0" tIns="0" rIns="0" bIns="0" rtlCol="0" anchor="ctr"/>
+          <a:lstStyle/>
+          <a:p>
+            <a:pPr indent="0" marL="0">
+              <a:buNone/>
+            </a:pPr>
+            <a:r>
+              <a:rPr lang="en-US" sz="1200" b="1" dirty="0">
+                <a:solidFill>
+                  <a:srgbClr val="E4572E"/>
+                </a:solidFill>
+                <a:latin typeface="Calibri" pitchFamily="34" charset="0"/>
+                <a:ea typeface="Calibri" pitchFamily="34" charset="-122"/>
+                <a:cs typeface="Calibri" pitchFamily="34" charset="-120"/>
+              </a:rPr>
+              <a:t>Tiempo de inferencia (s)  ·  menos = mejor</a:t>
+            </a:r>
+            <a:endParaRPr lang="en-US" sz="1200" dirty="0"/>
+          </a:p>
+        </p:txBody>
+      </p:sp>
+      <p:graphicFrame>
+        <p:nvGraphicFramePr>
+          <p:cNvPr id="10" name="Chart 1" descr=""/>
+          <p:cNvGraphicFramePr/>
+          <p:nvPr/>
+        </p:nvGraphicFramePr>
+        <p:xfrm>
+          <a:off x="5029200" y="4251960"/>
+          <a:ext cx="6583680" cy="1783080"/>
+        </p:xfrm>
+        <a:graphic xmlns:a="http://schemas.openxmlformats.org/drawingml/2006/main">
+          <a:graphicData uri="http://schemas.openxmlformats.org/drawingml/2006/chart">
+            <c:chart xmlns:c="http://schemas.openxmlformats.org/drawingml/2006/chart" r:id="rId2"/>
+          </a:graphicData>
+        </a:graphic>
+      </p:graphicFrame>
+      <p:sp>
+        <p:nvSpPr>
+          <p:cNvPr id="11" name="Text 7"/>
           <p:cNvSpPr/>
           <p:nvPr/>
         </p:nvSpPr>
@@ -6598,7 +6800,7 @@
       </p:sp>
       <p:sp>
         <p:nvSpPr>
-          <p:cNvPr id="9" name="Text 6"/>
+          <p:cNvPr id="12" name="Text 8"/>
           <p:cNvSpPr/>
           <p:nvPr/>
         </p:nvSpPr>
@@ -6637,7 +6839,7 @@
       </p:sp>
       <p:sp>
         <p:nvSpPr>
-          <p:cNvPr id="10" name="Text 7"/>
+          <p:cNvPr id="13" name="Text 9"/>
           <p:cNvSpPr/>
           <p:nvPr/>
         </p:nvSpPr>
@@ -8000,7 +8202,7 @@
                 <a:ea typeface="Calibri" pitchFamily="34" charset="-122"/>
                 <a:cs typeface="Calibri" pitchFamily="34" charset="-120"/>
               </a:rPr>
-              <a:t>NIVEL 4 · MODOS DE INFERENCIA</a:t>
+              <a:t>NIVEL 3 · EN PROFUNDIDAD</a:t>
             </a:r>
             <a:endParaRPr lang="en-US" sz="1300" dirty="0"/>
           </a:p>
@@ -8064,7 +8266,7 @@
                 <a:ea typeface="Georgia" pitchFamily="34" charset="-122"/>
                 <a:cs typeface="Georgia" pitchFamily="34" charset="-120"/>
               </a:rPr>
-              <a:t>N4</a:t>
+              <a:t>N3</a:t>
             </a:r>
             <a:endParaRPr lang="en-US" sz="2200" dirty="0"/>
           </a:p>
@@ -8103,7 +8305,7 @@
                 <a:ea typeface="Georgia" pitchFamily="34" charset="-122"/>
                 <a:cs typeface="Georgia" pitchFamily="34" charset="-120"/>
               </a:rPr>
-              <a:t>Sliced, standard o combinado</a:t>
+              <a:t>Fusión: ¿suprimir o combinar?</a:t>
             </a:r>
             <a:endParaRPr lang="en-US" sz="3000" dirty="0"/>
           </a:p>
@@ -8111,26 +8313,65 @@
       </p:sp>
       <p:sp>
         <p:nvSpPr>
-          <p:cNvPr id="6" name="Shape 4"/>
-          <p:cNvSpPr/>
-          <p:nvPr/>
-        </p:nvSpPr>
-        <p:spPr>
-          <a:xfrm>
-            <a:off x="640080" y="2011680"/>
-            <a:ext cx="3474720" cy="2468880"/>
+          <p:cNvPr id="6" name="Text 4"/>
+          <p:cNvSpPr/>
+          <p:nvPr/>
+        </p:nvSpPr>
+        <p:spPr>
+          <a:xfrm>
+            <a:off x="640080" y="1755648"/>
+            <a:ext cx="10972800" cy="365760"/>
+          </a:xfrm>
+          <a:prstGeom prst="rect">
+            <a:avLst/>
+          </a:prstGeom>
+          <a:noFill/>
+          <a:ln/>
+        </p:spPr>
+        <p:txBody>
+          <a:bodyPr wrap="square" lIns="0" tIns="0" rIns="0" bIns="0" rtlCol="0" anchor="ctr"/>
+          <a:lstStyle/>
+          <a:p>
+            <a:pPr indent="0" marL="0">
+              <a:buNone/>
+            </a:pPr>
+            <a:r>
+              <a:rPr lang="en-US" sz="1400" dirty="0">
+                <a:solidFill>
+                  <a:srgbClr val="1E293B"/>
+                </a:solidFill>
+                <a:latin typeface="Calibri" pitchFamily="34" charset="0"/>
+                <a:ea typeface="Calibri" pitchFamily="34" charset="-122"/>
+                <a:cs typeface="Calibri" pitchFamily="34" charset="-120"/>
+              </a:rPr>
+              <a:t>El solape hace que un mismo objeto aparezca en varias cajas. Hay tres formas de resolver los duplicados:</a:t>
+            </a:r>
+            <a:endParaRPr lang="en-US" sz="1400" dirty="0"/>
+          </a:p>
+        </p:txBody>
+      </p:sp>
+      <p:sp>
+        <p:nvSpPr>
+          <p:cNvPr id="7" name="Shape 5"/>
+          <p:cNvSpPr/>
+          <p:nvPr/>
+        </p:nvSpPr>
+        <p:spPr>
+          <a:xfrm>
+            <a:off x="640080" y="2240280"/>
+            <a:ext cx="3520440" cy="3703320"/>
           </a:xfrm>
           <a:prstGeom prst="roundRect">
             <a:avLst>
-              <a:gd name="adj" fmla="val 2963"/>
+              <a:gd name="adj" fmla="val 2078"/>
             </a:avLst>
           </a:prstGeom>
           <a:solidFill>
-            <a:srgbClr val="F4F7FA"/>
+            <a:srgbClr val="FFFFFF"/>
           </a:solidFill>
-          <a:ln w="19050">
+          <a:ln w="12700">
             <a:solidFill>
-              <a:srgbClr val="2E8B57"/>
+              <a:srgbClr val="D8E0E8"/>
             </a:solidFill>
             <a:prstDash val="solid"/>
           </a:ln>
@@ -8145,22 +8386,152 @@
       </p:sp>
       <p:sp>
         <p:nvSpPr>
-          <p:cNvPr id="7" name="Shape 5"/>
-          <p:cNvSpPr/>
-          <p:nvPr/>
-        </p:nvSpPr>
-        <p:spPr>
-          <a:xfrm>
-            <a:off x="640080" y="2011680"/>
-            <a:ext cx="3474720" cy="640080"/>
+          <p:cNvPr id="8" name="Shape 6"/>
+          <p:cNvSpPr/>
+          <p:nvPr/>
+        </p:nvSpPr>
+        <p:spPr>
+          <a:xfrm>
+            <a:off x="640080" y="2240280"/>
+            <a:ext cx="3520440" cy="822960"/>
           </a:xfrm>
           <a:prstGeom prst="rect">
             <a:avLst/>
           </a:prstGeom>
           <a:solidFill>
-            <a:srgbClr val="2E8B57"/>
+            <a:srgbClr val="0F2A43"/>
           </a:solidFill>
           <a:ln w="12700">
+            <a:solidFill>
+              <a:srgbClr val="0F2A43"/>
+            </a:solidFill>
+            <a:prstDash val="solid"/>
+          </a:ln>
+        </p:spPr>
+      </p:sp>
+      <p:sp>
+        <p:nvSpPr>
+          <p:cNvPr id="9" name="Text 7"/>
+          <p:cNvSpPr/>
+          <p:nvPr/>
+        </p:nvSpPr>
+        <p:spPr>
+          <a:xfrm>
+            <a:off x="868680" y="2331720"/>
+            <a:ext cx="3063240" cy="411480"/>
+          </a:xfrm>
+          <a:prstGeom prst="rect">
+            <a:avLst/>
+          </a:prstGeom>
+          <a:noFill/>
+          <a:ln/>
+        </p:spPr>
+        <p:txBody>
+          <a:bodyPr wrap="square" lIns="0" tIns="0" rIns="0" bIns="0" rtlCol="0" anchor="ctr"/>
+          <a:lstStyle/>
+          <a:p>
+            <a:pPr indent="0" marL="0">
+              <a:buNone/>
+            </a:pPr>
+            <a:r>
+              <a:rPr lang="en-US" sz="1800" b="1" dirty="0">
+                <a:solidFill>
+                  <a:srgbClr val="FFFFFF"/>
+                </a:solidFill>
+                <a:latin typeface="Georgia" pitchFamily="34" charset="0"/>
+                <a:ea typeface="Georgia" pitchFamily="34" charset="-122"/>
+                <a:cs typeface="Georgia" pitchFamily="34" charset="-120"/>
+              </a:rPr>
+              <a:t>NMS</a:t>
+            </a:r>
+            <a:endParaRPr lang="en-US" sz="1800" dirty="0"/>
+          </a:p>
+        </p:txBody>
+      </p:sp>
+      <p:sp>
+        <p:nvSpPr>
+          <p:cNvPr id="10" name="Text 8"/>
+          <p:cNvSpPr/>
+          <p:nvPr/>
+        </p:nvSpPr>
+        <p:spPr>
+          <a:xfrm>
+            <a:off x="868680" y="2743200"/>
+            <a:ext cx="3063240" cy="274320"/>
+          </a:xfrm>
+          <a:prstGeom prst="rect">
+            <a:avLst/>
+          </a:prstGeom>
+          <a:noFill/>
+          <a:ln/>
+        </p:spPr>
+        <p:txBody>
+          <a:bodyPr wrap="square" lIns="0" tIns="0" rIns="0" bIns="0" rtlCol="0" anchor="ctr"/>
+          <a:lstStyle/>
+          <a:p>
+            <a:pPr indent="0" marL="0">
+              <a:buNone/>
+            </a:pPr>
+            <a:r>
+              <a:rPr lang="en-US" sz="1050" dirty="0">
+                <a:solidFill>
+                  <a:srgbClr val="CADCFC"/>
+                </a:solidFill>
+                <a:latin typeface="Calibri" pitchFamily="34" charset="0"/>
+                <a:ea typeface="Calibri" pitchFamily="34" charset="-122"/>
+                <a:cs typeface="Calibri" pitchFamily="34" charset="-120"/>
+              </a:rPr>
+              <a:t>Non-Maximum Suppression</a:t>
+            </a:r>
+            <a:endParaRPr lang="en-US" sz="1050" dirty="0"/>
+          </a:p>
+        </p:txBody>
+      </p:sp>
+      <p:sp>
+        <p:nvSpPr>
+          <p:cNvPr id="11" name="Shape 9"/>
+          <p:cNvSpPr/>
+          <p:nvPr/>
+        </p:nvSpPr>
+        <p:spPr>
+          <a:xfrm>
+            <a:off x="1051560" y="3246120"/>
+            <a:ext cx="2697480" cy="1143000"/>
+          </a:xfrm>
+          <a:prstGeom prst="rect">
+            <a:avLst/>
+          </a:prstGeom>
+          <a:solidFill>
+            <a:srgbClr val="F4F7FA"/>
+          </a:solidFill>
+          <a:ln w="12700">
+            <a:solidFill>
+              <a:srgbClr val="D8E0E8"/>
+            </a:solidFill>
+            <a:prstDash val="solid"/>
+          </a:ln>
+        </p:spPr>
+      </p:sp>
+      <p:sp>
+        <p:nvSpPr>
+          <p:cNvPr id="12" name="Shape 10"/>
+          <p:cNvSpPr/>
+          <p:nvPr/>
+        </p:nvSpPr>
+        <p:spPr>
+          <a:xfrm>
+            <a:off x="1371600" y="3520440"/>
+            <a:ext cx="1143000" cy="594360"/>
+          </a:xfrm>
+          <a:prstGeom prst="rect">
+            <a:avLst/>
+          </a:prstGeom>
+          <a:solidFill>
+            <a:srgbClr val="2E8B57">
+              <a:alpha val="30000"/>
+            </a:srgbClr>
+          </a:solidFill>
+          <a:ln w="25400">
             <a:solidFill>
               <a:srgbClr val="2E8B57"/>
             </a:solidFill>
@@ -8170,14 +8541,14 @@
       </p:sp>
       <p:sp>
         <p:nvSpPr>
-          <p:cNvPr id="8" name="Text 6"/>
-          <p:cNvSpPr/>
-          <p:nvPr/>
-        </p:nvSpPr>
-        <p:spPr>
-          <a:xfrm>
-            <a:off x="640080" y="2011680"/>
-            <a:ext cx="3474720" cy="640080"/>
+          <p:cNvPr id="13" name="Text 11"/>
+          <p:cNvSpPr/>
+          <p:nvPr/>
+        </p:nvSpPr>
+        <p:spPr>
+          <a:xfrm>
+            <a:off x="1234440" y="3319272"/>
+            <a:ext cx="1417320" cy="182880"/>
           </a:xfrm>
           <a:prstGeom prst="rect">
             <a:avLst/>
@@ -8193,98 +8564,186 @@
               <a:buNone/>
             </a:pPr>
             <a:r>
-              <a:rPr lang="en-US" sz="1900" b="1" dirty="0">
-                <a:solidFill>
-                  <a:srgbClr val="FFFFFF"/>
-                </a:solidFill>
-                <a:latin typeface="Georgia" pitchFamily="34" charset="0"/>
-                <a:ea typeface="Georgia" pitchFamily="34" charset="-122"/>
-                <a:cs typeface="Georgia" pitchFamily="34" charset="-120"/>
-              </a:rPr>
-              <a:t>Sliced</a:t>
-            </a:r>
-            <a:endParaRPr lang="en-US" sz="1900" dirty="0"/>
-          </a:p>
-        </p:txBody>
-      </p:sp>
-      <p:sp>
-        <p:nvSpPr>
-          <p:cNvPr id="9" name="Text 7"/>
-          <p:cNvSpPr/>
-          <p:nvPr/>
-        </p:nvSpPr>
-        <p:spPr>
-          <a:xfrm>
-            <a:off x="868680" y="2880360"/>
-            <a:ext cx="3017520" cy="1371600"/>
-          </a:xfrm>
-          <a:prstGeom prst="rect">
-            <a:avLst/>
-          </a:prstGeom>
-          <a:noFill/>
-          <a:ln/>
-        </p:spPr>
-        <p:txBody>
-          <a:bodyPr wrap="square" lIns="0" tIns="0" rIns="0" bIns="0" rtlCol="0" anchor="t"/>
-          <a:lstStyle/>
-          <a:p>
-            <a:pPr indent="0" marL="0">
-              <a:buNone/>
-            </a:pPr>
-            <a:r>
-              <a:rPr lang="en-US" sz="1500" b="1" dirty="0">
-                <a:solidFill>
-                  <a:srgbClr val="1E293B"/>
-                </a:solidFill>
-                <a:latin typeface="Calibri" pitchFamily="34" charset="0"/>
-                <a:ea typeface="Calibri" pitchFamily="34" charset="-122"/>
-                <a:cs typeface="Calibri" pitchFamily="34" charset="-120"/>
-              </a:rPr>
-              <a:t>Solo mosaicos.</a:t>
-            </a:r>
-            <a:endParaRPr lang="en-US" sz="1500" dirty="0"/>
-          </a:p>
-          <a:p>
-            <a:pPr indent="0" marL="0">
-              <a:buNone/>
-            </a:pPr>
-            <a:r>
-              <a:rPr lang="en-US" sz="1300" dirty="0">
-                <a:solidFill>
-                  <a:srgbClr val="64748B"/>
-                </a:solidFill>
-                <a:latin typeface="Calibri" pitchFamily="34" charset="0"/>
-                <a:ea typeface="Calibri" pitchFamily="34" charset="-122"/>
-                <a:cs typeface="Calibri" pitchFamily="34" charset="-120"/>
-              </a:rPr>
-              <a:t>Mejor para objetos pequeños.</a:t>
-            </a:r>
-            <a:endParaRPr lang="en-US" sz="1500" dirty="0"/>
-          </a:p>
-        </p:txBody>
-      </p:sp>
-      <p:sp>
-        <p:nvSpPr>
-          <p:cNvPr id="10" name="Shape 8"/>
-          <p:cNvSpPr/>
-          <p:nvPr/>
-        </p:nvSpPr>
-        <p:spPr>
-          <a:xfrm>
-            <a:off x="4389120" y="2011680"/>
-            <a:ext cx="3474720" cy="2468880"/>
-          </a:xfrm>
-          <a:prstGeom prst="roundRect">
-            <a:avLst>
-              <a:gd name="adj" fmla="val 2963"/>
-            </a:avLst>
+              <a:rPr lang="en-US" sz="900" b="1" dirty="0">
+                <a:solidFill>
+                  <a:srgbClr val="2E8B57"/>
+                </a:solidFill>
+                <a:latin typeface="Calibri" pitchFamily="34" charset="0"/>
+                <a:ea typeface="Calibri" pitchFamily="34" charset="-122"/>
+                <a:cs typeface="Calibri" pitchFamily="34" charset="-120"/>
+              </a:rPr>
+              <a:t>0.91 ✓</a:t>
+            </a:r>
+            <a:endParaRPr lang="en-US" sz="900" dirty="0"/>
+          </a:p>
+        </p:txBody>
+      </p:sp>
+      <p:sp>
+        <p:nvSpPr>
+          <p:cNvPr id="14" name="Shape 12"/>
+          <p:cNvSpPr/>
+          <p:nvPr/>
+        </p:nvSpPr>
+        <p:spPr>
+          <a:xfrm>
+            <a:off x="2148840" y="3749040"/>
+            <a:ext cx="1143000" cy="502920"/>
+          </a:xfrm>
+          <a:prstGeom prst="rect">
+            <a:avLst/>
           </a:prstGeom>
           <a:solidFill>
-            <a:srgbClr val="F4F7FA"/>
+            <a:srgbClr val="FFFFFF">
+              <a:alpha val="0"/>
+            </a:srgbClr>
           </a:solidFill>
           <a:ln w="19050">
             <a:solidFill>
-              <a:srgbClr val="3A6EA5"/>
+              <a:srgbClr val="E4572E"/>
+            </a:solidFill>
+            <a:prstDash val="dash"/>
+          </a:ln>
+        </p:spPr>
+      </p:sp>
+      <p:sp>
+        <p:nvSpPr>
+          <p:cNvPr id="15" name="Text 13"/>
+          <p:cNvSpPr/>
+          <p:nvPr/>
+        </p:nvSpPr>
+        <p:spPr>
+          <a:xfrm>
+            <a:off x="2057400" y="4187952"/>
+            <a:ext cx="1371600" cy="182880"/>
+          </a:xfrm>
+          <a:prstGeom prst="rect">
+            <a:avLst/>
+          </a:prstGeom>
+          <a:noFill/>
+          <a:ln/>
+        </p:spPr>
+        <p:txBody>
+          <a:bodyPr wrap="square" lIns="0" tIns="0" rIns="0" bIns="0" rtlCol="0" anchor="ctr"/>
+          <a:lstStyle/>
+          <a:p>
+            <a:pPr algn="ctr" indent="0" marL="0">
+              <a:buNone/>
+            </a:pPr>
+            <a:r>
+              <a:rPr lang="en-US" sz="900" b="1" dirty="0">
+                <a:solidFill>
+                  <a:srgbClr val="E4572E"/>
+                </a:solidFill>
+                <a:latin typeface="Calibri" pitchFamily="34" charset="0"/>
+                <a:ea typeface="Calibri" pitchFamily="34" charset="-122"/>
+                <a:cs typeface="Calibri" pitchFamily="34" charset="-120"/>
+              </a:rPr>
+              <a:t>0.86 ✕</a:t>
+            </a:r>
+            <a:endParaRPr lang="en-US" sz="900" dirty="0"/>
+          </a:p>
+        </p:txBody>
+      </p:sp>
+      <p:sp>
+        <p:nvSpPr>
+          <p:cNvPr id="16" name="Text 14"/>
+          <p:cNvSpPr/>
+          <p:nvPr/>
+        </p:nvSpPr>
+        <p:spPr>
+          <a:xfrm>
+            <a:off x="868680" y="4572000"/>
+            <a:ext cx="3063240" cy="914400"/>
+          </a:xfrm>
+          <a:prstGeom prst="rect">
+            <a:avLst/>
+          </a:prstGeom>
+          <a:noFill/>
+          <a:ln/>
+        </p:spPr>
+        <p:txBody>
+          <a:bodyPr wrap="square" lIns="0" tIns="0" rIns="0" bIns="0" rtlCol="0" anchor="ctr"/>
+          <a:lstStyle/>
+          <a:p>
+            <a:pPr indent="0" marL="0">
+              <a:buNone/>
+            </a:pPr>
+            <a:r>
+              <a:rPr lang="en-US" sz="1250" dirty="0">
+                <a:solidFill>
+                  <a:srgbClr val="1E293B"/>
+                </a:solidFill>
+                <a:latin typeface="Calibri" pitchFamily="34" charset="0"/>
+                <a:ea typeface="Calibri" pitchFamily="34" charset="-122"/>
+                <a:cs typeface="Calibri" pitchFamily="34" charset="-120"/>
+              </a:rPr>
+              <a:t>Conserva la caja de mayor score y descarta las que se solapan demasiado.</a:t>
+            </a:r>
+            <a:endParaRPr lang="en-US" sz="1250" dirty="0"/>
+          </a:p>
+        </p:txBody>
+      </p:sp>
+      <p:sp>
+        <p:nvSpPr>
+          <p:cNvPr id="17" name="Text 15"/>
+          <p:cNvSpPr/>
+          <p:nvPr/>
+        </p:nvSpPr>
+        <p:spPr>
+          <a:xfrm>
+            <a:off x="868680" y="5486400"/>
+            <a:ext cx="3063240" cy="320040"/>
+          </a:xfrm>
+          <a:prstGeom prst="rect">
+            <a:avLst/>
+          </a:prstGeom>
+          <a:noFill/>
+          <a:ln/>
+        </p:spPr>
+        <p:txBody>
+          <a:bodyPr wrap="square" lIns="0" tIns="0" rIns="0" bIns="0" rtlCol="0" anchor="ctr"/>
+          <a:lstStyle/>
+          <a:p>
+            <a:pPr indent="0" marL="0">
+              <a:buNone/>
+            </a:pPr>
+            <a:r>
+              <a:rPr lang="en-US" sz="1100" b="1" i="1" dirty="0">
+                <a:solidFill>
+                  <a:srgbClr val="3A6EA5"/>
+                </a:solidFill>
+                <a:latin typeface="Calibri" pitchFamily="34" charset="0"/>
+                <a:ea typeface="Calibri" pitchFamily="34" charset="-122"/>
+                <a:cs typeface="Calibri" pitchFamily="34" charset="-120"/>
+              </a:rPr>
+              <a:t>Rápido · puede borrar vecinos</a:t>
+            </a:r>
+            <a:endParaRPr lang="en-US" sz="1100" dirty="0"/>
+          </a:p>
+        </p:txBody>
+      </p:sp>
+      <p:sp>
+        <p:nvSpPr>
+          <p:cNvPr id="18" name="Shape 16"/>
+          <p:cNvSpPr/>
+          <p:nvPr/>
+        </p:nvSpPr>
+        <p:spPr>
+          <a:xfrm>
+            <a:off x="4434840" y="2240280"/>
+            <a:ext cx="3520440" cy="3703320"/>
+          </a:xfrm>
+          <a:prstGeom prst="roundRect">
+            <a:avLst>
+              <a:gd name="adj" fmla="val 2078"/>
+            </a:avLst>
+          </a:prstGeom>
+          <a:solidFill>
+            <a:srgbClr val="FFFFFF"/>
+          </a:solidFill>
+          <a:ln w="12700">
+            <a:solidFill>
+              <a:srgbClr val="D8E0E8"/>
             </a:solidFill>
             <a:prstDash val="solid"/>
           </a:ln>
@@ -8299,24 +8758,24 @@
       </p:sp>
       <p:sp>
         <p:nvSpPr>
-          <p:cNvPr id="11" name="Shape 9"/>
-          <p:cNvSpPr/>
-          <p:nvPr/>
-        </p:nvSpPr>
-        <p:spPr>
-          <a:xfrm>
-            <a:off x="4389120" y="2011680"/>
-            <a:ext cx="3474720" cy="640080"/>
+          <p:cNvPr id="19" name="Shape 17"/>
+          <p:cNvSpPr/>
+          <p:nvPr/>
+        </p:nvSpPr>
+        <p:spPr>
+          <a:xfrm>
+            <a:off x="4434840" y="2240280"/>
+            <a:ext cx="3520440" cy="822960"/>
           </a:xfrm>
           <a:prstGeom prst="rect">
             <a:avLst/>
           </a:prstGeom>
           <a:solidFill>
-            <a:srgbClr val="3A6EA5"/>
+            <a:srgbClr val="0F2A43"/>
           </a:solidFill>
           <a:ln w="12700">
             <a:solidFill>
-              <a:srgbClr val="3A6EA5"/>
+              <a:srgbClr val="0F2A43"/>
             </a:solidFill>
             <a:prstDash val="solid"/>
           </a:ln>
@@ -8324,14 +8783,14 @@
       </p:sp>
       <p:sp>
         <p:nvSpPr>
-          <p:cNvPr id="12" name="Text 10"/>
-          <p:cNvSpPr/>
-          <p:nvPr/>
-        </p:nvSpPr>
-        <p:spPr>
-          <a:xfrm>
-            <a:off x="4389120" y="2011680"/>
-            <a:ext cx="3474720" cy="640080"/>
+          <p:cNvPr id="20" name="Text 18"/>
+          <p:cNvSpPr/>
+          <p:nvPr/>
+        </p:nvSpPr>
+        <p:spPr>
+          <a:xfrm>
+            <a:off x="4663440" y="2331720"/>
+            <a:ext cx="3063240" cy="411480"/>
           </a:xfrm>
           <a:prstGeom prst="rect">
             <a:avLst/>
@@ -8343,11 +8802,11 @@
           <a:bodyPr wrap="square" lIns="0" tIns="0" rIns="0" bIns="0" rtlCol="0" anchor="ctr"/>
           <a:lstStyle/>
           <a:p>
-            <a:pPr algn="ctr" indent="0" marL="0">
-              <a:buNone/>
-            </a:pPr>
-            <a:r>
-              <a:rPr lang="en-US" sz="1900" b="1" dirty="0">
+            <a:pPr indent="0" marL="0">
+              <a:buNone/>
+            </a:pPr>
+            <a:r>
+              <a:rPr lang="en-US" sz="1800" b="1" dirty="0">
                 <a:solidFill>
                   <a:srgbClr val="FFFFFF"/>
                 </a:solidFill>
@@ -8355,90 +8814,296 @@
                 <a:ea typeface="Georgia" pitchFamily="34" charset="-122"/>
                 <a:cs typeface="Georgia" pitchFamily="34" charset="-120"/>
               </a:rPr>
-              <a:t>Standard</a:t>
-            </a:r>
-            <a:endParaRPr lang="en-US" sz="1900" dirty="0"/>
-          </a:p>
-        </p:txBody>
-      </p:sp>
-      <p:sp>
-        <p:nvSpPr>
-          <p:cNvPr id="13" name="Text 11"/>
-          <p:cNvSpPr/>
-          <p:nvPr/>
-        </p:nvSpPr>
-        <p:spPr>
-          <a:xfrm>
-            <a:off x="4617720" y="2880360"/>
-            <a:ext cx="3017520" cy="1371600"/>
-          </a:xfrm>
-          <a:prstGeom prst="rect">
-            <a:avLst/>
-          </a:prstGeom>
-          <a:noFill/>
-          <a:ln/>
-        </p:spPr>
-        <p:txBody>
-          <a:bodyPr wrap="square" lIns="0" tIns="0" rIns="0" bIns="0" rtlCol="0" anchor="t"/>
+              <a:t>NMM</a:t>
+            </a:r>
+            <a:endParaRPr lang="en-US" sz="1800" dirty="0"/>
+          </a:p>
+        </p:txBody>
+      </p:sp>
+      <p:sp>
+        <p:nvSpPr>
+          <p:cNvPr id="21" name="Text 19"/>
+          <p:cNvSpPr/>
+          <p:nvPr/>
+        </p:nvSpPr>
+        <p:spPr>
+          <a:xfrm>
+            <a:off x="4663440" y="2743200"/>
+            <a:ext cx="3063240" cy="274320"/>
+          </a:xfrm>
+          <a:prstGeom prst="rect">
+            <a:avLst/>
+          </a:prstGeom>
+          <a:noFill/>
+          <a:ln/>
+        </p:spPr>
+        <p:txBody>
+          <a:bodyPr wrap="square" lIns="0" tIns="0" rIns="0" bIns="0" rtlCol="0" anchor="ctr"/>
           <a:lstStyle/>
           <a:p>
             <a:pPr indent="0" marL="0">
               <a:buNone/>
             </a:pPr>
             <a:r>
-              <a:rPr lang="en-US" sz="1500" b="1" dirty="0">
-                <a:solidFill>
-                  <a:srgbClr val="1E293B"/>
-                </a:solidFill>
-                <a:latin typeface="Calibri" pitchFamily="34" charset="0"/>
-                <a:ea typeface="Calibri" pitchFamily="34" charset="-122"/>
-                <a:cs typeface="Calibri" pitchFamily="34" charset="-120"/>
-              </a:rPr>
-              <a:t>Imagen completa.</a:t>
-            </a:r>
-            <a:endParaRPr lang="en-US" sz="1500" dirty="0"/>
-          </a:p>
-          <a:p>
-            <a:pPr indent="0" marL="0">
-              <a:buNone/>
-            </a:pPr>
-            <a:r>
-              <a:rPr lang="en-US" sz="1300" dirty="0">
-                <a:solidFill>
-                  <a:srgbClr val="64748B"/>
-                </a:solidFill>
-                <a:latin typeface="Calibri" pitchFamily="34" charset="0"/>
-                <a:ea typeface="Calibri" pitchFamily="34" charset="-122"/>
-                <a:cs typeface="Calibri" pitchFamily="34" charset="-120"/>
-              </a:rPr>
-              <a:t>Mejor para objetos grandes.</a:t>
-            </a:r>
-            <a:endParaRPr lang="en-US" sz="1500" dirty="0"/>
-          </a:p>
-        </p:txBody>
-      </p:sp>
-      <p:sp>
-        <p:nvSpPr>
-          <p:cNvPr id="14" name="Shape 12"/>
-          <p:cNvSpPr/>
-          <p:nvPr/>
-        </p:nvSpPr>
-        <p:spPr>
-          <a:xfrm>
-            <a:off x="8138160" y="2011680"/>
-            <a:ext cx="3474720" cy="2468880"/>
-          </a:xfrm>
-          <a:prstGeom prst="roundRect">
-            <a:avLst>
-              <a:gd name="adj" fmla="val 2963"/>
-            </a:avLst>
+              <a:rPr lang="en-US" sz="1050" dirty="0">
+                <a:solidFill>
+                  <a:srgbClr val="CADCFC"/>
+                </a:solidFill>
+                <a:latin typeface="Calibri" pitchFamily="34" charset="0"/>
+                <a:ea typeface="Calibri" pitchFamily="34" charset="-122"/>
+                <a:cs typeface="Calibri" pitchFamily="34" charset="-120"/>
+              </a:rPr>
+              <a:t>Non-Maximum Merging</a:t>
+            </a:r>
+            <a:endParaRPr lang="en-US" sz="1050" dirty="0"/>
+          </a:p>
+        </p:txBody>
+      </p:sp>
+      <p:sp>
+        <p:nvSpPr>
+          <p:cNvPr id="22" name="Shape 20"/>
+          <p:cNvSpPr/>
+          <p:nvPr/>
+        </p:nvSpPr>
+        <p:spPr>
+          <a:xfrm>
+            <a:off x="4846320" y="3246120"/>
+            <a:ext cx="2697480" cy="1143000"/>
+          </a:xfrm>
+          <a:prstGeom prst="rect">
+            <a:avLst/>
           </a:prstGeom>
           <a:solidFill>
             <a:srgbClr val="F4F7FA"/>
           </a:solidFill>
-          <a:ln w="19050">
+          <a:ln w="12700">
             <a:solidFill>
-              <a:srgbClr val="0F2A43"/>
+              <a:srgbClr val="D8E0E8"/>
+            </a:solidFill>
+            <a:prstDash val="solid"/>
+          </a:ln>
+        </p:spPr>
+      </p:sp>
+      <p:sp>
+        <p:nvSpPr>
+          <p:cNvPr id="23" name="Shape 21"/>
+          <p:cNvSpPr/>
+          <p:nvPr/>
+        </p:nvSpPr>
+        <p:spPr>
+          <a:xfrm>
+            <a:off x="5166360" y="3520440"/>
+            <a:ext cx="1097280" cy="594360"/>
+          </a:xfrm>
+          <a:prstGeom prst="rect">
+            <a:avLst/>
+          </a:prstGeom>
+          <a:solidFill>
+            <a:srgbClr val="FFFFFF">
+              <a:alpha val="0"/>
+            </a:srgbClr>
+          </a:solidFill>
+          <a:ln w="12700">
+            <a:solidFill>
+              <a:srgbClr val="64748B"/>
+            </a:solidFill>
+            <a:prstDash val="dash"/>
+          </a:ln>
+        </p:spPr>
+      </p:sp>
+      <p:sp>
+        <p:nvSpPr>
+          <p:cNvPr id="24" name="Shape 22"/>
+          <p:cNvSpPr/>
+          <p:nvPr/>
+        </p:nvSpPr>
+        <p:spPr>
+          <a:xfrm>
+            <a:off x="5897880" y="3703320"/>
+            <a:ext cx="1097280" cy="502920"/>
+          </a:xfrm>
+          <a:prstGeom prst="rect">
+            <a:avLst/>
+          </a:prstGeom>
+          <a:solidFill>
+            <a:srgbClr val="FFFFFF">
+              <a:alpha val="0"/>
+            </a:srgbClr>
+          </a:solidFill>
+          <a:ln w="12700">
+            <a:solidFill>
+              <a:srgbClr val="64748B"/>
+            </a:solidFill>
+            <a:prstDash val="dash"/>
+          </a:ln>
+        </p:spPr>
+      </p:sp>
+      <p:sp>
+        <p:nvSpPr>
+          <p:cNvPr id="25" name="Shape 23"/>
+          <p:cNvSpPr/>
+          <p:nvPr/>
+        </p:nvSpPr>
+        <p:spPr>
+          <a:xfrm>
+            <a:off x="5166360" y="3520440"/>
+            <a:ext cx="1828800" cy="685800"/>
+          </a:xfrm>
+          <a:prstGeom prst="rect">
+            <a:avLst/>
+          </a:prstGeom>
+          <a:solidFill>
+            <a:srgbClr val="2E8B57">
+              <a:alpha val="40000"/>
+            </a:srgbClr>
+          </a:solidFill>
+          <a:ln w="31750">
+            <a:solidFill>
+              <a:srgbClr val="2E8B57"/>
+            </a:solidFill>
+            <a:prstDash val="solid"/>
+          </a:ln>
+        </p:spPr>
+      </p:sp>
+      <p:sp>
+        <p:nvSpPr>
+          <p:cNvPr id="26" name="Text 24"/>
+          <p:cNvSpPr/>
+          <p:nvPr/>
+        </p:nvSpPr>
+        <p:spPr>
+          <a:xfrm>
+            <a:off x="4846320" y="4187952"/>
+            <a:ext cx="2697480" cy="182880"/>
+          </a:xfrm>
+          <a:prstGeom prst="rect">
+            <a:avLst/>
+          </a:prstGeom>
+          <a:noFill/>
+          <a:ln/>
+        </p:spPr>
+        <p:txBody>
+          <a:bodyPr wrap="square" lIns="0" tIns="0" rIns="0" bIns="0" rtlCol="0" anchor="ctr"/>
+          <a:lstStyle/>
+          <a:p>
+            <a:pPr algn="ctr" indent="0" marL="0">
+              <a:buNone/>
+            </a:pPr>
+            <a:r>
+              <a:rPr lang="en-US" sz="900" b="1" dirty="0">
+                <a:solidFill>
+                  <a:srgbClr val="2E8B57"/>
+                </a:solidFill>
+                <a:latin typeface="Calibri" pitchFamily="34" charset="0"/>
+                <a:ea typeface="Calibri" pitchFamily="34" charset="-122"/>
+                <a:cs typeface="Calibri" pitchFamily="34" charset="-120"/>
+              </a:rPr>
+              <a:t>→ una sola caja</a:t>
+            </a:r>
+            <a:endParaRPr lang="en-US" sz="900" dirty="0"/>
+          </a:p>
+        </p:txBody>
+      </p:sp>
+      <p:sp>
+        <p:nvSpPr>
+          <p:cNvPr id="27" name="Text 25"/>
+          <p:cNvSpPr/>
+          <p:nvPr/>
+        </p:nvSpPr>
+        <p:spPr>
+          <a:xfrm>
+            <a:off x="4663440" y="4572000"/>
+            <a:ext cx="3063240" cy="914400"/>
+          </a:xfrm>
+          <a:prstGeom prst="rect">
+            <a:avLst/>
+          </a:prstGeom>
+          <a:noFill/>
+          <a:ln/>
+        </p:spPr>
+        <p:txBody>
+          <a:bodyPr wrap="square" lIns="0" tIns="0" rIns="0" bIns="0" rtlCol="0" anchor="ctr"/>
+          <a:lstStyle/>
+          <a:p>
+            <a:pPr indent="0" marL="0">
+              <a:buNone/>
+            </a:pPr>
+            <a:r>
+              <a:rPr lang="en-US" sz="1250" dirty="0">
+                <a:solidFill>
+                  <a:srgbClr val="1E293B"/>
+                </a:solidFill>
+                <a:latin typeface="Calibri" pitchFamily="34" charset="0"/>
+                <a:ea typeface="Calibri" pitchFamily="34" charset="-122"/>
+                <a:cs typeface="Calibri" pitchFamily="34" charset="-120"/>
+              </a:rPr>
+              <a:t>En vez de descartar, fusiona las cajas solapadas en una sola.</a:t>
+            </a:r>
+            <a:endParaRPr lang="en-US" sz="1250" dirty="0"/>
+          </a:p>
+        </p:txBody>
+      </p:sp>
+      <p:sp>
+        <p:nvSpPr>
+          <p:cNvPr id="28" name="Text 26"/>
+          <p:cNvSpPr/>
+          <p:nvPr/>
+        </p:nvSpPr>
+        <p:spPr>
+          <a:xfrm>
+            <a:off x="4663440" y="5486400"/>
+            <a:ext cx="3063240" cy="320040"/>
+          </a:xfrm>
+          <a:prstGeom prst="rect">
+            <a:avLst/>
+          </a:prstGeom>
+          <a:noFill/>
+          <a:ln/>
+        </p:spPr>
+        <p:txBody>
+          <a:bodyPr wrap="square" lIns="0" tIns="0" rIns="0" bIns="0" rtlCol="0" anchor="ctr"/>
+          <a:lstStyle/>
+          <a:p>
+            <a:pPr indent="0" marL="0">
+              <a:buNone/>
+            </a:pPr>
+            <a:r>
+              <a:rPr lang="en-US" sz="1100" b="1" i="1" dirty="0">
+                <a:solidFill>
+                  <a:srgbClr val="3A6EA5"/>
+                </a:solidFill>
+                <a:latin typeface="Calibri" pitchFamily="34" charset="0"/>
+                <a:ea typeface="Calibri" pitchFamily="34" charset="-122"/>
+                <a:cs typeface="Calibri" pitchFamily="34" charset="-120"/>
+              </a:rPr>
+              <a:t>Mejor para objetos partidos</a:t>
+            </a:r>
+            <a:endParaRPr lang="en-US" sz="1100" dirty="0"/>
+          </a:p>
+        </p:txBody>
+      </p:sp>
+      <p:sp>
+        <p:nvSpPr>
+          <p:cNvPr id="29" name="Shape 27"/>
+          <p:cNvSpPr/>
+          <p:nvPr/>
+        </p:nvSpPr>
+        <p:spPr>
+          <a:xfrm>
+            <a:off x="8229600" y="2240280"/>
+            <a:ext cx="3520440" cy="3703320"/>
+          </a:xfrm>
+          <a:prstGeom prst="roundRect">
+            <a:avLst>
+              <a:gd name="adj" fmla="val 2078"/>
+            </a:avLst>
+          </a:prstGeom>
+          <a:solidFill>
+            <a:srgbClr val="FFFFFF"/>
+          </a:solidFill>
+          <a:ln w="12700">
+            <a:solidFill>
+              <a:srgbClr val="D8E0E8"/>
             </a:solidFill>
             <a:prstDash val="solid"/>
           </a:ln>
@@ -8453,24 +9118,24 @@
       </p:sp>
       <p:sp>
         <p:nvSpPr>
-          <p:cNvPr id="15" name="Shape 13"/>
-          <p:cNvSpPr/>
-          <p:nvPr/>
-        </p:nvSpPr>
-        <p:spPr>
-          <a:xfrm>
-            <a:off x="8138160" y="2011680"/>
-            <a:ext cx="3474720" cy="640080"/>
+          <p:cNvPr id="30" name="Shape 28"/>
+          <p:cNvSpPr/>
+          <p:nvPr/>
+        </p:nvSpPr>
+        <p:spPr>
+          <a:xfrm>
+            <a:off x="8229600" y="2240280"/>
+            <a:ext cx="3520440" cy="822960"/>
           </a:xfrm>
           <a:prstGeom prst="rect">
             <a:avLst/>
           </a:prstGeom>
           <a:solidFill>
-            <a:srgbClr val="0F2A43"/>
+            <a:srgbClr val="2E8B57"/>
           </a:solidFill>
           <a:ln w="12700">
             <a:solidFill>
-              <a:srgbClr val="0F2A43"/>
+              <a:srgbClr val="2E8B57"/>
             </a:solidFill>
             <a:prstDash val="solid"/>
           </a:ln>
@@ -8478,14 +9143,14 @@
       </p:sp>
       <p:sp>
         <p:nvSpPr>
-          <p:cNvPr id="16" name="Text 14"/>
-          <p:cNvSpPr/>
-          <p:nvPr/>
-        </p:nvSpPr>
-        <p:spPr>
-          <a:xfrm>
-            <a:off x="8138160" y="2011680"/>
-            <a:ext cx="3474720" cy="640080"/>
+          <p:cNvPr id="31" name="Text 29"/>
+          <p:cNvSpPr/>
+          <p:nvPr/>
+        </p:nvSpPr>
+        <p:spPr>
+          <a:xfrm>
+            <a:off x="8458200" y="2331720"/>
+            <a:ext cx="3063240" cy="411480"/>
           </a:xfrm>
           <a:prstGeom prst="rect">
             <a:avLst/>
@@ -8497,11 +9162,11 @@
           <a:bodyPr wrap="square" lIns="0" tIns="0" rIns="0" bIns="0" rtlCol="0" anchor="ctr"/>
           <a:lstStyle/>
           <a:p>
-            <a:pPr algn="ctr" indent="0" marL="0">
-              <a:buNone/>
-            </a:pPr>
-            <a:r>
-              <a:rPr lang="en-US" sz="1900" b="1" dirty="0">
+            <a:pPr indent="0" marL="0">
+              <a:buNone/>
+            </a:pPr>
+            <a:r>
+              <a:rPr lang="en-US" sz="1800" b="1" dirty="0">
                 <a:solidFill>
                   <a:srgbClr val="FFFFFF"/>
                 </a:solidFill>
@@ -8509,38 +9174,249 @@
                 <a:ea typeface="Georgia" pitchFamily="34" charset="-122"/>
                 <a:cs typeface="Georgia" pitchFamily="34" charset="-120"/>
               </a:rPr>
-              <a:t>Combinado</a:t>
-            </a:r>
-            <a:endParaRPr lang="en-US" sz="1900" dirty="0"/>
-          </a:p>
-        </p:txBody>
-      </p:sp>
-      <p:sp>
-        <p:nvSpPr>
-          <p:cNvPr id="17" name="Text 15"/>
-          <p:cNvSpPr/>
-          <p:nvPr/>
-        </p:nvSpPr>
-        <p:spPr>
-          <a:xfrm>
-            <a:off x="8366760" y="2880360"/>
-            <a:ext cx="3017520" cy="1371600"/>
-          </a:xfrm>
-          <a:prstGeom prst="rect">
-            <a:avLst/>
-          </a:prstGeom>
-          <a:noFill/>
-          <a:ln/>
-        </p:spPr>
-        <p:txBody>
-          <a:bodyPr wrap="square" lIns="0" tIns="0" rIns="0" bIns="0" rtlCol="0" anchor="t"/>
+              <a:t>GREEDYNMM</a:t>
+            </a:r>
+            <a:endParaRPr lang="en-US" sz="1800" dirty="0"/>
+          </a:p>
+        </p:txBody>
+      </p:sp>
+      <p:sp>
+        <p:nvSpPr>
+          <p:cNvPr id="32" name="Text 30"/>
+          <p:cNvSpPr/>
+          <p:nvPr/>
+        </p:nvSpPr>
+        <p:spPr>
+          <a:xfrm>
+            <a:off x="8458200" y="2743200"/>
+            <a:ext cx="3063240" cy="274320"/>
+          </a:xfrm>
+          <a:prstGeom prst="rect">
+            <a:avLst/>
+          </a:prstGeom>
+          <a:noFill/>
+          <a:ln/>
+        </p:spPr>
+        <p:txBody>
+          <a:bodyPr wrap="square" lIns="0" tIns="0" rIns="0" bIns="0" rtlCol="0" anchor="ctr"/>
           <a:lstStyle/>
           <a:p>
             <a:pPr indent="0" marL="0">
               <a:buNone/>
             </a:pPr>
             <a:r>
-              <a:rPr lang="en-US" sz="1500" b="1" dirty="0">
+              <a:rPr lang="en-US" sz="1050" dirty="0">
+                <a:solidFill>
+                  <a:srgbClr val="CADCFC"/>
+                </a:solidFill>
+                <a:latin typeface="Calibri" pitchFamily="34" charset="0"/>
+                <a:ea typeface="Calibri" pitchFamily="34" charset="-122"/>
+                <a:cs typeface="Calibri" pitchFamily="34" charset="-120"/>
+              </a:rPr>
+              <a:t>Greedy NMM</a:t>
+            </a:r>
+            <a:endParaRPr lang="en-US" sz="1050" dirty="0"/>
+          </a:p>
+        </p:txBody>
+      </p:sp>
+      <p:sp>
+        <p:nvSpPr>
+          <p:cNvPr id="33" name="Shape 31"/>
+          <p:cNvSpPr/>
+          <p:nvPr/>
+        </p:nvSpPr>
+        <p:spPr>
+          <a:xfrm>
+            <a:off x="8641080" y="3246120"/>
+            <a:ext cx="2697480" cy="1143000"/>
+          </a:xfrm>
+          <a:prstGeom prst="rect">
+            <a:avLst/>
+          </a:prstGeom>
+          <a:solidFill>
+            <a:srgbClr val="F4F7FA"/>
+          </a:solidFill>
+          <a:ln w="12700">
+            <a:solidFill>
+              <a:srgbClr val="D8E0E8"/>
+            </a:solidFill>
+            <a:prstDash val="solid"/>
+          </a:ln>
+        </p:spPr>
+      </p:sp>
+      <p:sp>
+        <p:nvSpPr>
+          <p:cNvPr id="34" name="Shape 32"/>
+          <p:cNvSpPr/>
+          <p:nvPr/>
+        </p:nvSpPr>
+        <p:spPr>
+          <a:xfrm>
+            <a:off x="8915400" y="3538728"/>
+            <a:ext cx="868680" cy="502920"/>
+          </a:xfrm>
+          <a:prstGeom prst="rect">
+            <a:avLst/>
+          </a:prstGeom>
+          <a:solidFill>
+            <a:srgbClr val="FFFFFF">
+              <a:alpha val="0"/>
+            </a:srgbClr>
+          </a:solidFill>
+          <a:ln w="12700">
+            <a:solidFill>
+              <a:srgbClr val="64748B"/>
+            </a:solidFill>
+            <a:prstDash val="dash"/>
+          </a:ln>
+        </p:spPr>
+      </p:sp>
+      <p:sp>
+        <p:nvSpPr>
+          <p:cNvPr id="35" name="Shape 33"/>
+          <p:cNvSpPr/>
+          <p:nvPr/>
+        </p:nvSpPr>
+        <p:spPr>
+          <a:xfrm>
+            <a:off x="9418320" y="3630168"/>
+            <a:ext cx="868680" cy="502920"/>
+          </a:xfrm>
+          <a:prstGeom prst="rect">
+            <a:avLst/>
+          </a:prstGeom>
+          <a:solidFill>
+            <a:srgbClr val="FFFFFF">
+              <a:alpha val="0"/>
+            </a:srgbClr>
+          </a:solidFill>
+          <a:ln w="12700">
+            <a:solidFill>
+              <a:srgbClr val="64748B"/>
+            </a:solidFill>
+            <a:prstDash val="dash"/>
+          </a:ln>
+        </p:spPr>
+      </p:sp>
+      <p:sp>
+        <p:nvSpPr>
+          <p:cNvPr id="36" name="Shape 34"/>
+          <p:cNvSpPr/>
+          <p:nvPr/>
+        </p:nvSpPr>
+        <p:spPr>
+          <a:xfrm>
+            <a:off x="9921240" y="3520440"/>
+            <a:ext cx="868680" cy="502920"/>
+          </a:xfrm>
+          <a:prstGeom prst="rect">
+            <a:avLst/>
+          </a:prstGeom>
+          <a:solidFill>
+            <a:srgbClr val="FFFFFF">
+              <a:alpha val="0"/>
+            </a:srgbClr>
+          </a:solidFill>
+          <a:ln w="12700">
+            <a:solidFill>
+              <a:srgbClr val="64748B"/>
+            </a:solidFill>
+            <a:prstDash val="dash"/>
+          </a:ln>
+        </p:spPr>
+      </p:sp>
+      <p:sp>
+        <p:nvSpPr>
+          <p:cNvPr id="37" name="Shape 35"/>
+          <p:cNvSpPr/>
+          <p:nvPr/>
+        </p:nvSpPr>
+        <p:spPr>
+          <a:xfrm>
+            <a:off x="8915400" y="3520440"/>
+            <a:ext cx="1874520" cy="685800"/>
+          </a:xfrm>
+          <a:prstGeom prst="rect">
+            <a:avLst/>
+          </a:prstGeom>
+          <a:solidFill>
+            <a:srgbClr val="2E8B57">
+              <a:alpha val="40000"/>
+            </a:srgbClr>
+          </a:solidFill>
+          <a:ln w="31750">
+            <a:solidFill>
+              <a:srgbClr val="2E8B57"/>
+            </a:solidFill>
+            <a:prstDash val="solid"/>
+          </a:ln>
+        </p:spPr>
+      </p:sp>
+      <p:sp>
+        <p:nvSpPr>
+          <p:cNvPr id="38" name="Text 36"/>
+          <p:cNvSpPr/>
+          <p:nvPr/>
+        </p:nvSpPr>
+        <p:spPr>
+          <a:xfrm>
+            <a:off x="8641080" y="4187952"/>
+            <a:ext cx="2697480" cy="182880"/>
+          </a:xfrm>
+          <a:prstGeom prst="rect">
+            <a:avLst/>
+          </a:prstGeom>
+          <a:noFill/>
+          <a:ln/>
+        </p:spPr>
+        <p:txBody>
+          <a:bodyPr wrap="square" lIns="0" tIns="0" rIns="0" bIns="0" rtlCol="0" anchor="ctr"/>
+          <a:lstStyle/>
+          <a:p>
+            <a:pPr algn="ctr" indent="0" marL="0">
+              <a:buNone/>
+            </a:pPr>
+            <a:r>
+              <a:rPr lang="en-US" sz="850" b="1" dirty="0">
+                <a:solidFill>
+                  <a:srgbClr val="2E8B57"/>
+                </a:solidFill>
+                <a:latin typeface="Calibri" pitchFamily="34" charset="0"/>
+                <a:ea typeface="Calibri" pitchFamily="34" charset="-122"/>
+                <a:cs typeface="Calibri" pitchFamily="34" charset="-120"/>
+              </a:rPr>
+              <a:t>ordena por score → fusiona</a:t>
+            </a:r>
+            <a:endParaRPr lang="en-US" sz="850" dirty="0"/>
+          </a:p>
+        </p:txBody>
+      </p:sp>
+      <p:sp>
+        <p:nvSpPr>
+          <p:cNvPr id="39" name="Text 37"/>
+          <p:cNvSpPr/>
+          <p:nvPr/>
+        </p:nvSpPr>
+        <p:spPr>
+          <a:xfrm>
+            <a:off x="8458200" y="4572000"/>
+            <a:ext cx="3063240" cy="914400"/>
+          </a:xfrm>
+          <a:prstGeom prst="rect">
+            <a:avLst/>
+          </a:prstGeom>
+          <a:noFill/>
+          <a:ln/>
+        </p:spPr>
+        <p:txBody>
+          <a:bodyPr wrap="square" lIns="0" tIns="0" rIns="0" bIns="0" rtlCol="0" anchor="ctr"/>
+          <a:lstStyle/>
+          <a:p>
+            <a:pPr indent="0" marL="0">
+              <a:buNone/>
+            </a:pPr>
+            <a:r>
+              <a:rPr lang="en-US" sz="1250" dirty="0">
                 <a:solidFill>
                   <a:srgbClr val="1E293B"/>
                 </a:solidFill>
@@ -8548,99 +9424,54 @@
                 <a:ea typeface="Calibri" pitchFamily="34" charset="-122"/>
                 <a:cs typeface="Calibri" pitchFamily="34" charset="-120"/>
               </a:rPr>
-              <a:t>Ambos + fusión.</a:t>
-            </a:r>
-            <a:endParaRPr lang="en-US" sz="1500" dirty="0"/>
-          </a:p>
+              <a:t>NMM en cascada, de mayor a menor score. Valor por defecto de SAHI.</a:t>
+            </a:r>
+            <a:endParaRPr lang="en-US" sz="1250" dirty="0"/>
+          </a:p>
+        </p:txBody>
+      </p:sp>
+      <p:sp>
+        <p:nvSpPr>
+          <p:cNvPr id="40" name="Text 38"/>
+          <p:cNvSpPr/>
+          <p:nvPr/>
+        </p:nvSpPr>
+        <p:spPr>
+          <a:xfrm>
+            <a:off x="8458200" y="5486400"/>
+            <a:ext cx="3063240" cy="320040"/>
+          </a:xfrm>
+          <a:prstGeom prst="rect">
+            <a:avLst/>
+          </a:prstGeom>
+          <a:noFill/>
+          <a:ln/>
+        </p:spPr>
+        <p:txBody>
+          <a:bodyPr wrap="square" lIns="0" tIns="0" rIns="0" bIns="0" rtlCol="0" anchor="ctr"/>
+          <a:lstStyle/>
           <a:p>
             <a:pPr indent="0" marL="0">
               <a:buNone/>
             </a:pPr>
             <a:r>
-              <a:rPr lang="en-US" sz="1300" dirty="0">
-                <a:solidFill>
-                  <a:srgbClr val="64748B"/>
-                </a:solidFill>
-                <a:latin typeface="Calibri" pitchFamily="34" charset="0"/>
-                <a:ea typeface="Calibri" pitchFamily="34" charset="-122"/>
-                <a:cs typeface="Calibri" pitchFamily="34" charset="-120"/>
-              </a:rPr>
-              <a:t>Lo más robusto, lo más lento.</a:t>
-            </a:r>
-            <a:endParaRPr lang="en-US" sz="1500" dirty="0"/>
-          </a:p>
-        </p:txBody>
-      </p:sp>
-      <p:sp>
-        <p:nvSpPr>
-          <p:cNvPr id="18" name="Text 16"/>
-          <p:cNvSpPr/>
-          <p:nvPr/>
-        </p:nvSpPr>
-        <p:spPr>
-          <a:xfrm>
-            <a:off x="640080" y="5029200"/>
-            <a:ext cx="10972800" cy="457200"/>
-          </a:xfrm>
-          <a:prstGeom prst="rect">
-            <a:avLst/>
-          </a:prstGeom>
-          <a:noFill/>
-          <a:ln/>
-        </p:spPr>
-        <p:txBody>
-          <a:bodyPr wrap="square" lIns="0" tIns="0" rIns="0" bIns="0" rtlCol="0" anchor="ctr"/>
-          <a:lstStyle/>
-          <a:p>
-            <a:pPr algn="ctr" indent="0" marL="0">
-              <a:buNone/>
-            </a:pPr>
-            <a:r>
-              <a:rPr lang="en-US" sz="1400" dirty="0">
-                <a:solidFill>
-                  <a:srgbClr val="1E293B"/>
-                </a:solidFill>
-                <a:latin typeface="Calibri" pitchFamily="34" charset="0"/>
-                <a:ea typeface="Calibri" pitchFamily="34" charset="-122"/>
-                <a:cs typeface="Calibri" pitchFamily="34" charset="-120"/>
-              </a:rPr>
-              <a:t>En código solo cambia un flag:  </a:t>
-            </a:r>
-            <a:pPr algn="ctr" indent="0" marL="0">
-              <a:buNone/>
-            </a:pPr>
-            <a:r>
-              <a:rPr lang="en-US" sz="1400" b="1" dirty="0">
-                <a:solidFill>
-                  <a:srgbClr val="0F2A43"/>
-                </a:solidFill>
-                <a:latin typeface="Consolas" pitchFamily="34" charset="0"/>
-                <a:ea typeface="Consolas" pitchFamily="34" charset="-122"/>
-                <a:cs typeface="Consolas" pitchFamily="34" charset="-120"/>
-              </a:rPr>
-              <a:t>perform_standard_pred=True</a:t>
-            </a:r>
-            <a:pPr algn="ctr" indent="0" marL="0">
-              <a:buNone/>
-            </a:pPr>
-            <a:r>
-              <a:rPr lang="en-US" sz="1400" dirty="0">
-                <a:solidFill>
-                  <a:srgbClr val="1E293B"/>
-                </a:solidFill>
-                <a:latin typeface="Calibri" pitchFamily="34" charset="0"/>
-                <a:ea typeface="Calibri" pitchFamily="34" charset="-122"/>
-                <a:cs typeface="Calibri" pitchFamily="34" charset="-120"/>
-              </a:rPr>
-              <a:t>  activa el modo combinado.</a:t>
-            </a:r>
-            <a:endParaRPr lang="en-US" sz="1400" dirty="0"/>
-          </a:p>
-        </p:txBody>
-      </p:sp>
-      <p:sp>
-        <p:nvSpPr>
-          <p:cNvPr id="19" name="Text 17"/>
+              <a:rPr lang="en-US" sz="1100" b="1" i="1" dirty="0">
+                <a:solidFill>
+                  <a:srgbClr val="2E8B57"/>
+                </a:solidFill>
+                <a:latin typeface="Calibri" pitchFamily="34" charset="0"/>
+                <a:ea typeface="Calibri" pitchFamily="34" charset="-122"/>
+                <a:cs typeface="Calibri" pitchFamily="34" charset="-120"/>
+              </a:rPr>
+              <a:t>Buen balance general</a:t>
+            </a:r>
+            <a:endParaRPr lang="en-US" sz="1100" dirty="0"/>
+          </a:p>
+        </p:txBody>
+      </p:sp>
+      <p:sp>
+        <p:nvSpPr>
+          <p:cNvPr id="41" name="Text 39"/>
           <p:cNvSpPr/>
           <p:nvPr/>
         </p:nvSpPr>
@@ -8679,7 +9510,7 @@
       </p:sp>
       <p:sp>
         <p:nvSpPr>
-          <p:cNvPr id="20" name="Text 18"/>
+          <p:cNvPr id="42" name="Text 40"/>
           <p:cNvSpPr/>
           <p:nvPr/>
         </p:nvSpPr>
@@ -8781,7 +9612,7 @@
                 <a:ea typeface="Calibri" pitchFamily="34" charset="-122"/>
                 <a:cs typeface="Calibri" pitchFamily="34" charset="-120"/>
               </a:rPr>
-              <a:t>NIVEL 5 · SEGMENTACIÓN</a:t>
+              <a:t>NIVEL 3 · MÉTRICA DE MATCH</a:t>
             </a:r>
             <a:endParaRPr lang="en-US" sz="1300" dirty="0"/>
           </a:p>
@@ -8845,7 +9676,7 @@
                 <a:ea typeface="Georgia" pitchFamily="34" charset="-122"/>
                 <a:cs typeface="Georgia" pitchFamily="34" charset="-120"/>
               </a:rPr>
-              <a:t>N5</a:t>
+              <a:t>N3</a:t>
             </a:r>
             <a:endParaRPr lang="en-US" sz="2200" dirty="0"/>
           </a:p>
@@ -8884,7 +9715,7 @@
                 <a:ea typeface="Georgia" pitchFamily="34" charset="-122"/>
                 <a:cs typeface="Georgia" pitchFamily="34" charset="-120"/>
               </a:rPr>
-              <a:t>SAHI también mejora las máscaras</a:t>
+              <a:t>¿Son la misma caja? IoU vs IOS</a:t>
             </a:r>
             <a:endParaRPr lang="en-US" sz="3000" dirty="0"/>
           </a:p>
@@ -8892,22 +9723,61 @@
       </p:sp>
       <p:sp>
         <p:nvSpPr>
-          <p:cNvPr id="6" name="Shape 4"/>
-          <p:cNvSpPr/>
-          <p:nvPr/>
-        </p:nvSpPr>
-        <p:spPr>
-          <a:xfrm>
-            <a:off x="822960" y="1920240"/>
-            <a:ext cx="7589520" cy="3657600"/>
+          <p:cNvPr id="6" name="Text 4"/>
+          <p:cNvSpPr/>
+          <p:nvPr/>
+        </p:nvSpPr>
+        <p:spPr>
+          <a:xfrm>
+            <a:off x="640080" y="1755648"/>
+            <a:ext cx="10972800" cy="365760"/>
+          </a:xfrm>
+          <a:prstGeom prst="rect">
+            <a:avLst/>
+          </a:prstGeom>
+          <a:noFill/>
+          <a:ln/>
+        </p:spPr>
+        <p:txBody>
+          <a:bodyPr wrap="square" lIns="0" tIns="0" rIns="0" bIns="0" rtlCol="0" anchor="ctr"/>
+          <a:lstStyle/>
+          <a:p>
+            <a:pPr indent="0" marL="0">
+              <a:buNone/>
+            </a:pPr>
+            <a:r>
+              <a:rPr lang="en-US" sz="1400" dirty="0">
+                <a:solidFill>
+                  <a:srgbClr val="1E293B"/>
+                </a:solidFill>
+                <a:latin typeface="Calibri" pitchFamily="34" charset="0"/>
+                <a:ea typeface="Calibri" pitchFamily="34" charset="-122"/>
+                <a:cs typeface="Calibri" pitchFamily="34" charset="-120"/>
+              </a:rPr>
+              <a:t>Antes de fusionar hay que decidir si dos cajas son el mismo objeto. Dos maneras de medir el solape:</a:t>
+            </a:r>
+            <a:endParaRPr lang="en-US" sz="1400" dirty="0"/>
+          </a:p>
+        </p:txBody>
+      </p:sp>
+      <p:sp>
+        <p:nvSpPr>
+          <p:cNvPr id="7" name="Shape 5"/>
+          <p:cNvSpPr/>
+          <p:nvPr/>
+        </p:nvSpPr>
+        <p:spPr>
+          <a:xfrm>
+            <a:off x="640080" y="2240280"/>
+            <a:ext cx="5349240" cy="2926080"/>
           </a:xfrm>
           <a:prstGeom prst="roundRect">
             <a:avLst>
-              <a:gd name="adj" fmla="val 2000"/>
+              <a:gd name="adj" fmla="val 2500"/>
             </a:avLst>
           </a:prstGeom>
           <a:solidFill>
-            <a:srgbClr val="F4F7FA"/>
+            <a:srgbClr val="FFFFFF"/>
           </a:solidFill>
           <a:ln w="12700">
             <a:solidFill>
@@ -8915,18 +9785,25 @@
             </a:solidFill>
             <a:prstDash val="solid"/>
           </a:ln>
-        </p:spPr>
-      </p:sp>
-      <p:sp>
-        <p:nvSpPr>
-          <p:cNvPr id="7" name="Text 5"/>
-          <p:cNvSpPr/>
-          <p:nvPr/>
-        </p:nvSpPr>
-        <p:spPr>
-          <a:xfrm>
-            <a:off x="822960" y="3566160"/>
-            <a:ext cx="7589520" cy="457200"/>
+          <a:effectLst>
+            <a:outerShdw sx="100000" sy="100000" kx="0" ky="0" algn="bl" rotWithShape="0" blurRad="114300" dist="38100" dir="5400000">
+              <a:srgbClr val="000000">
+                <a:alpha val="18000"/>
+              </a:srgbClr>
+            </a:outerShdw>
+          </a:effectLst>
+        </p:spPr>
+      </p:sp>
+      <p:sp>
+        <p:nvSpPr>
+          <p:cNvPr id="8" name="Text 6"/>
+          <p:cNvSpPr/>
+          <p:nvPr/>
+        </p:nvSpPr>
+        <p:spPr>
+          <a:xfrm>
+            <a:off x="914400" y="2377440"/>
+            <a:ext cx="4846320" cy="365760"/>
           </a:xfrm>
           <a:prstGeom prst="rect">
             <a:avLst/>
@@ -8938,11 +9815,182 @@
           <a:bodyPr wrap="square" lIns="0" tIns="0" rIns="0" bIns="0" rtlCol="0" anchor="ctr"/>
           <a:lstStyle/>
           <a:p>
+            <a:pPr indent="0" marL="0">
+              <a:buNone/>
+            </a:pPr>
+            <a:r>
+              <a:rPr lang="en-US" sz="1900" b="1" dirty="0">
+                <a:solidFill>
+                  <a:srgbClr val="1E293B"/>
+                </a:solidFill>
+                <a:latin typeface="Georgia" pitchFamily="34" charset="0"/>
+                <a:ea typeface="Georgia" pitchFamily="34" charset="-122"/>
+                <a:cs typeface="Georgia" pitchFamily="34" charset="-120"/>
+              </a:rPr>
+              <a:t>IoU — Intersection over Union</a:t>
+            </a:r>
+            <a:endParaRPr lang="en-US" sz="1900" dirty="0"/>
+          </a:p>
+        </p:txBody>
+      </p:sp>
+      <p:sp>
+        <p:nvSpPr>
+          <p:cNvPr id="9" name="Text 7"/>
+          <p:cNvSpPr/>
+          <p:nvPr/>
+        </p:nvSpPr>
+        <p:spPr>
+          <a:xfrm>
+            <a:off x="914400" y="2788920"/>
+            <a:ext cx="2743200" cy="365760"/>
+          </a:xfrm>
+          <a:prstGeom prst="rect">
+            <a:avLst/>
+          </a:prstGeom>
+          <a:noFill/>
+          <a:ln/>
+        </p:spPr>
+        <p:txBody>
+          <a:bodyPr wrap="square" lIns="0" tIns="0" rIns="0" bIns="0" rtlCol="0" anchor="ctr"/>
+          <a:lstStyle/>
+          <a:p>
+            <a:pPr indent="0" marL="0">
+              <a:buNone/>
+            </a:pPr>
+            <a:r>
+              <a:rPr lang="en-US" sz="1300" b="1" dirty="0">
+                <a:solidFill>
+                  <a:srgbClr val="3A6EA5"/>
+                </a:solidFill>
+                <a:latin typeface="Consolas" pitchFamily="34" charset="0"/>
+                <a:ea typeface="Consolas" pitchFamily="34" charset="-122"/>
+                <a:cs typeface="Consolas" pitchFamily="34" charset="-120"/>
+              </a:rPr>
+              <a:t>IoU = ∩ / ∪</a:t>
+            </a:r>
+            <a:endParaRPr lang="en-US" sz="1300" dirty="0"/>
+          </a:p>
+        </p:txBody>
+      </p:sp>
+      <p:sp>
+        <p:nvSpPr>
+          <p:cNvPr id="10" name="Shape 8"/>
+          <p:cNvSpPr/>
+          <p:nvPr/>
+        </p:nvSpPr>
+        <p:spPr>
+          <a:xfrm>
+            <a:off x="960120" y="3291840"/>
+            <a:ext cx="2103120" cy="1371600"/>
+          </a:xfrm>
+          <a:prstGeom prst="rect">
+            <a:avLst/>
+          </a:prstGeom>
+          <a:solidFill>
+            <a:srgbClr val="3A6EA5">
+              <a:alpha val="14000"/>
+            </a:srgbClr>
+          </a:solidFill>
+          <a:ln w="25400">
+            <a:solidFill>
+              <a:srgbClr val="0F2A43"/>
+            </a:solidFill>
+            <a:prstDash val="solid"/>
+          </a:ln>
+        </p:spPr>
+      </p:sp>
+      <p:sp>
+        <p:nvSpPr>
+          <p:cNvPr id="11" name="Shape 9"/>
+          <p:cNvSpPr/>
+          <p:nvPr/>
+        </p:nvSpPr>
+        <p:spPr>
+          <a:xfrm>
+            <a:off x="1280160" y="3657600"/>
+            <a:ext cx="868680" cy="640080"/>
+          </a:xfrm>
+          <a:prstGeom prst="rect">
+            <a:avLst/>
+          </a:prstGeom>
+          <a:solidFill>
+            <a:srgbClr val="3A6EA5">
+              <a:alpha val="65000"/>
+            </a:srgbClr>
+          </a:solidFill>
+          <a:ln w="25400">
+            <a:solidFill>
+              <a:srgbClr val="3A6EA5"/>
+            </a:solidFill>
+            <a:prstDash val="solid"/>
+          </a:ln>
+        </p:spPr>
+      </p:sp>
+      <p:sp>
+        <p:nvSpPr>
+          <p:cNvPr id="12" name="Text 10"/>
+          <p:cNvSpPr/>
+          <p:nvPr/>
+        </p:nvSpPr>
+        <p:spPr>
+          <a:xfrm>
+            <a:off x="1234440" y="3858768"/>
+            <a:ext cx="960120" cy="228600"/>
+          </a:xfrm>
+          <a:prstGeom prst="rect">
+            <a:avLst/>
+          </a:prstGeom>
+          <a:noFill/>
+          <a:ln/>
+        </p:spPr>
+        <p:txBody>
+          <a:bodyPr wrap="square" lIns="0" tIns="0" rIns="0" bIns="0" rtlCol="0" anchor="ctr"/>
+          <a:lstStyle/>
+          <a:p>
             <a:pPr algn="ctr" indent="0" marL="0">
               <a:buNone/>
             </a:pPr>
             <a:r>
-              <a:rPr lang="en-US" sz="1300" dirty="0">
+              <a:rPr lang="en-US" sz="800" b="1" dirty="0">
+                <a:solidFill>
+                  <a:srgbClr val="3A6EA5"/>
+                </a:solidFill>
+                <a:latin typeface="Calibri" pitchFamily="34" charset="0"/>
+                <a:ea typeface="Calibri" pitchFamily="34" charset="-122"/>
+                <a:cs typeface="Calibri" pitchFamily="34" charset="-120"/>
+              </a:rPr>
+              <a:t>menor</a:t>
+            </a:r>
+            <a:endParaRPr lang="en-US" sz="800" dirty="0"/>
+          </a:p>
+        </p:txBody>
+      </p:sp>
+      <p:sp>
+        <p:nvSpPr>
+          <p:cNvPr id="13" name="Text 11"/>
+          <p:cNvSpPr/>
+          <p:nvPr/>
+        </p:nvSpPr>
+        <p:spPr>
+          <a:xfrm>
+            <a:off x="2148840" y="4407408"/>
+            <a:ext cx="868680" cy="201168"/>
+          </a:xfrm>
+          <a:prstGeom prst="rect">
+            <a:avLst/>
+          </a:prstGeom>
+          <a:noFill/>
+          <a:ln/>
+        </p:spPr>
+        <p:txBody>
+          <a:bodyPr wrap="square" lIns="0" tIns="0" rIns="0" bIns="0" rtlCol="0" anchor="ctr"/>
+          <a:lstStyle/>
+          <a:p>
+            <a:pPr algn="r" indent="0" marL="0">
+              <a:buNone/>
+            </a:pPr>
+            <a:r>
+              <a:rPr lang="en-US" sz="800" dirty="0">
                 <a:solidFill>
                   <a:srgbClr val="64748B"/>
                 </a:solidFill>
@@ -8950,26 +9998,504 @@
                 <a:ea typeface="Calibri" pitchFamily="34" charset="-122"/>
                 <a:cs typeface="Calibri" pitchFamily="34" charset="-120"/>
               </a:rPr>
-              <a:t>(Genera con notebook 02 → outputs/segmentation/)</a:t>
-            </a:r>
-            <a:endParaRPr lang="en-US" sz="1300" dirty="0"/>
-          </a:p>
-        </p:txBody>
-      </p:sp>
-      <p:sp>
-        <p:nvSpPr>
-          <p:cNvPr id="8" name="Shape 6"/>
-          <p:cNvSpPr/>
-          <p:nvPr/>
-        </p:nvSpPr>
-        <p:spPr>
-          <a:xfrm>
-            <a:off x="8686800" y="1920240"/>
-            <a:ext cx="2880360" cy="3657600"/>
+              <a:t>grande</a:t>
+            </a:r>
+            <a:endParaRPr lang="en-US" sz="800" dirty="0"/>
+          </a:p>
+        </p:txBody>
+      </p:sp>
+      <p:sp>
+        <p:nvSpPr>
+          <p:cNvPr id="14" name="Text 12"/>
+          <p:cNvSpPr/>
+          <p:nvPr/>
+        </p:nvSpPr>
+        <p:spPr>
+          <a:xfrm>
+            <a:off x="3337560" y="3246120"/>
+            <a:ext cx="2423160" cy="1143000"/>
+          </a:xfrm>
+          <a:prstGeom prst="rect">
+            <a:avLst/>
+          </a:prstGeom>
+          <a:noFill/>
+          <a:ln/>
+        </p:spPr>
+        <p:txBody>
+          <a:bodyPr wrap="square" lIns="0" tIns="0" rIns="0" bIns="0" rtlCol="0" anchor="ctr"/>
+          <a:lstStyle/>
+          <a:p>
+            <a:pPr indent="0" marL="0">
+              <a:buNone/>
+            </a:pPr>
+            <a:r>
+              <a:rPr lang="en-US" sz="1200" dirty="0">
+                <a:solidFill>
+                  <a:srgbClr val="1E293B"/>
+                </a:solidFill>
+                <a:latin typeface="Calibri" pitchFamily="34" charset="0"/>
+                <a:ea typeface="Calibri" pitchFamily="34" charset="-122"/>
+                <a:cs typeface="Calibri" pitchFamily="34" charset="-120"/>
+              </a:rPr>
+              <a:t>Solape respecto al área total. Una caja pequeña dentro de una grande da un valor bajo.</a:t>
+            </a:r>
+            <a:endParaRPr lang="en-US" sz="1200" dirty="0"/>
+          </a:p>
+        </p:txBody>
+      </p:sp>
+      <p:sp>
+        <p:nvSpPr>
+          <p:cNvPr id="15" name="Text 13"/>
+          <p:cNvSpPr/>
+          <p:nvPr/>
+        </p:nvSpPr>
+        <p:spPr>
+          <a:xfrm>
+            <a:off x="3337560" y="4434840"/>
+            <a:ext cx="2423160" cy="411480"/>
+          </a:xfrm>
+          <a:prstGeom prst="rect">
+            <a:avLst/>
+          </a:prstGeom>
+          <a:noFill/>
+          <a:ln/>
+        </p:spPr>
+        <p:txBody>
+          <a:bodyPr wrap="square" lIns="0" tIns="0" rIns="0" bIns="0" rtlCol="0" anchor="ctr"/>
+          <a:lstStyle/>
+          <a:p>
+            <a:pPr indent="0" marL="0">
+              <a:buNone/>
+            </a:pPr>
+            <a:r>
+              <a:rPr lang="en-US" sz="2200" b="1" dirty="0">
+                <a:solidFill>
+                  <a:srgbClr val="E4572E"/>
+                </a:solidFill>
+                <a:latin typeface="Georgia" pitchFamily="34" charset="0"/>
+                <a:ea typeface="Georgia" pitchFamily="34" charset="-122"/>
+                <a:cs typeface="Georgia" pitchFamily="34" charset="-120"/>
+              </a:rPr>
+              <a:t>IoU ≈ 0.25</a:t>
+            </a:r>
+            <a:endParaRPr lang="en-US" sz="2200" dirty="0"/>
+          </a:p>
+        </p:txBody>
+      </p:sp>
+      <p:sp>
+        <p:nvSpPr>
+          <p:cNvPr id="16" name="Text 14"/>
+          <p:cNvSpPr/>
+          <p:nvPr/>
+        </p:nvSpPr>
+        <p:spPr>
+          <a:xfrm>
+            <a:off x="3337560" y="4828032"/>
+            <a:ext cx="2423160" cy="274320"/>
+          </a:xfrm>
+          <a:prstGeom prst="rect">
+            <a:avLst/>
+          </a:prstGeom>
+          <a:noFill/>
+          <a:ln/>
+        </p:spPr>
+        <p:txBody>
+          <a:bodyPr wrap="square" lIns="0" tIns="0" rIns="0" bIns="0" rtlCol="0" anchor="ctr"/>
+          <a:lstStyle/>
+          <a:p>
+            <a:pPr indent="0" marL="0">
+              <a:buNone/>
+            </a:pPr>
+            <a:r>
+              <a:rPr lang="en-US" sz="1100" i="1" dirty="0">
+                <a:solidFill>
+                  <a:srgbClr val="E4572E"/>
+                </a:solidFill>
+                <a:latin typeface="Calibri" pitchFamily="34" charset="0"/>
+                <a:ea typeface="Calibri" pitchFamily="34" charset="-122"/>
+                <a:cs typeface="Calibri" pitchFamily="34" charset="-120"/>
+              </a:rPr>
+              <a:t>→ no las fusiona</a:t>
+            </a:r>
+            <a:endParaRPr lang="en-US" sz="1100" dirty="0"/>
+          </a:p>
+        </p:txBody>
+      </p:sp>
+      <p:sp>
+        <p:nvSpPr>
+          <p:cNvPr id="17" name="Shape 15"/>
+          <p:cNvSpPr/>
+          <p:nvPr/>
+        </p:nvSpPr>
+        <p:spPr>
+          <a:xfrm>
+            <a:off x="6217920" y="2240280"/>
+            <a:ext cx="5349240" cy="2926080"/>
           </a:xfrm>
           <a:prstGeom prst="roundRect">
             <a:avLst>
-              <a:gd name="adj" fmla="val 2540"/>
+              <a:gd name="adj" fmla="val 2500"/>
+            </a:avLst>
+          </a:prstGeom>
+          <a:solidFill>
+            <a:srgbClr val="FFFFFF"/>
+          </a:solidFill>
+          <a:ln w="12700">
+            <a:solidFill>
+              <a:srgbClr val="D8E0E8"/>
+            </a:solidFill>
+            <a:prstDash val="solid"/>
+          </a:ln>
+          <a:effectLst>
+            <a:outerShdw sx="100000" sy="100000" kx="0" ky="0" algn="bl" rotWithShape="0" blurRad="114300" dist="38100" dir="5400000">
+              <a:srgbClr val="000000">
+                <a:alpha val="18000"/>
+              </a:srgbClr>
+            </a:outerShdw>
+          </a:effectLst>
+        </p:spPr>
+      </p:sp>
+      <p:sp>
+        <p:nvSpPr>
+          <p:cNvPr id="18" name="Text 16"/>
+          <p:cNvSpPr/>
+          <p:nvPr/>
+        </p:nvSpPr>
+        <p:spPr>
+          <a:xfrm>
+            <a:off x="6492240" y="2377440"/>
+            <a:ext cx="4846320" cy="365760"/>
+          </a:xfrm>
+          <a:prstGeom prst="rect">
+            <a:avLst/>
+          </a:prstGeom>
+          <a:noFill/>
+          <a:ln/>
+        </p:spPr>
+        <p:txBody>
+          <a:bodyPr wrap="square" lIns="0" tIns="0" rIns="0" bIns="0" rtlCol="0" anchor="ctr"/>
+          <a:lstStyle/>
+          <a:p>
+            <a:pPr indent="0" marL="0">
+              <a:buNone/>
+            </a:pPr>
+            <a:r>
+              <a:rPr lang="en-US" sz="1900" b="1" dirty="0">
+                <a:solidFill>
+                  <a:srgbClr val="1E293B"/>
+                </a:solidFill>
+                <a:latin typeface="Georgia" pitchFamily="34" charset="0"/>
+                <a:ea typeface="Georgia" pitchFamily="34" charset="-122"/>
+                <a:cs typeface="Georgia" pitchFamily="34" charset="-120"/>
+              </a:rPr>
+              <a:t>IOS — Intersection over Smaller</a:t>
+            </a:r>
+            <a:endParaRPr lang="en-US" sz="1900" dirty="0"/>
+          </a:p>
+        </p:txBody>
+      </p:sp>
+      <p:sp>
+        <p:nvSpPr>
+          <p:cNvPr id="19" name="Text 17"/>
+          <p:cNvSpPr/>
+          <p:nvPr/>
+        </p:nvSpPr>
+        <p:spPr>
+          <a:xfrm>
+            <a:off x="6492240" y="2788920"/>
+            <a:ext cx="2743200" cy="365760"/>
+          </a:xfrm>
+          <a:prstGeom prst="rect">
+            <a:avLst/>
+          </a:prstGeom>
+          <a:noFill/>
+          <a:ln/>
+        </p:spPr>
+        <p:txBody>
+          <a:bodyPr wrap="square" lIns="0" tIns="0" rIns="0" bIns="0" rtlCol="0" anchor="ctr"/>
+          <a:lstStyle/>
+          <a:p>
+            <a:pPr indent="0" marL="0">
+              <a:buNone/>
+            </a:pPr>
+            <a:r>
+              <a:rPr lang="en-US" sz="1300" b="1" dirty="0">
+                <a:solidFill>
+                  <a:srgbClr val="3A6EA5"/>
+                </a:solidFill>
+                <a:latin typeface="Consolas" pitchFamily="34" charset="0"/>
+                <a:ea typeface="Consolas" pitchFamily="34" charset="-122"/>
+                <a:cs typeface="Consolas" pitchFamily="34" charset="-120"/>
+              </a:rPr>
+              <a:t>IOS = ∩ / menor</a:t>
+            </a:r>
+            <a:endParaRPr lang="en-US" sz="1300" dirty="0"/>
+          </a:p>
+        </p:txBody>
+      </p:sp>
+      <p:sp>
+        <p:nvSpPr>
+          <p:cNvPr id="20" name="Shape 18"/>
+          <p:cNvSpPr/>
+          <p:nvPr/>
+        </p:nvSpPr>
+        <p:spPr>
+          <a:xfrm>
+            <a:off x="6537960" y="3291840"/>
+            <a:ext cx="2103120" cy="1371600"/>
+          </a:xfrm>
+          <a:prstGeom prst="rect">
+            <a:avLst/>
+          </a:prstGeom>
+          <a:solidFill>
+            <a:srgbClr val="FFFFFF">
+              <a:alpha val="0"/>
+            </a:srgbClr>
+          </a:solidFill>
+          <a:ln w="25400">
+            <a:solidFill>
+              <a:srgbClr val="0F2A43"/>
+            </a:solidFill>
+            <a:prstDash val="solid"/>
+          </a:ln>
+        </p:spPr>
+      </p:sp>
+      <p:sp>
+        <p:nvSpPr>
+          <p:cNvPr id="21" name="Shape 19"/>
+          <p:cNvSpPr/>
+          <p:nvPr/>
+        </p:nvSpPr>
+        <p:spPr>
+          <a:xfrm>
+            <a:off x="6858000" y="3657600"/>
+            <a:ext cx="868680" cy="640080"/>
+          </a:xfrm>
+          <a:prstGeom prst="rect">
+            <a:avLst/>
+          </a:prstGeom>
+          <a:solidFill>
+            <a:srgbClr val="2E8B57">
+              <a:alpha val="65000"/>
+            </a:srgbClr>
+          </a:solidFill>
+          <a:ln w="25400">
+            <a:solidFill>
+              <a:srgbClr val="2E8B57"/>
+            </a:solidFill>
+            <a:prstDash val="solid"/>
+          </a:ln>
+        </p:spPr>
+      </p:sp>
+      <p:sp>
+        <p:nvSpPr>
+          <p:cNvPr id="22" name="Text 20"/>
+          <p:cNvSpPr/>
+          <p:nvPr/>
+        </p:nvSpPr>
+        <p:spPr>
+          <a:xfrm>
+            <a:off x="6812280" y="3858768"/>
+            <a:ext cx="960120" cy="228600"/>
+          </a:xfrm>
+          <a:prstGeom prst="rect">
+            <a:avLst/>
+          </a:prstGeom>
+          <a:noFill/>
+          <a:ln/>
+        </p:spPr>
+        <p:txBody>
+          <a:bodyPr wrap="square" lIns="0" tIns="0" rIns="0" bIns="0" rtlCol="0" anchor="ctr"/>
+          <a:lstStyle/>
+          <a:p>
+            <a:pPr algn="ctr" indent="0" marL="0">
+              <a:buNone/>
+            </a:pPr>
+            <a:r>
+              <a:rPr lang="en-US" sz="800" b="1" dirty="0">
+                <a:solidFill>
+                  <a:srgbClr val="2E8B57"/>
+                </a:solidFill>
+                <a:latin typeface="Calibri" pitchFamily="34" charset="0"/>
+                <a:ea typeface="Calibri" pitchFamily="34" charset="-122"/>
+                <a:cs typeface="Calibri" pitchFamily="34" charset="-120"/>
+              </a:rPr>
+              <a:t>menor</a:t>
+            </a:r>
+            <a:endParaRPr lang="en-US" sz="800" dirty="0"/>
+          </a:p>
+        </p:txBody>
+      </p:sp>
+      <p:sp>
+        <p:nvSpPr>
+          <p:cNvPr id="23" name="Text 21"/>
+          <p:cNvSpPr/>
+          <p:nvPr/>
+        </p:nvSpPr>
+        <p:spPr>
+          <a:xfrm>
+            <a:off x="7726680" y="4407408"/>
+            <a:ext cx="868680" cy="201168"/>
+          </a:xfrm>
+          <a:prstGeom prst="rect">
+            <a:avLst/>
+          </a:prstGeom>
+          <a:noFill/>
+          <a:ln/>
+        </p:spPr>
+        <p:txBody>
+          <a:bodyPr wrap="square" lIns="0" tIns="0" rIns="0" bIns="0" rtlCol="0" anchor="ctr"/>
+          <a:lstStyle/>
+          <a:p>
+            <a:pPr algn="r" indent="0" marL="0">
+              <a:buNone/>
+            </a:pPr>
+            <a:r>
+              <a:rPr lang="en-US" sz="800" dirty="0">
+                <a:solidFill>
+                  <a:srgbClr val="64748B"/>
+                </a:solidFill>
+                <a:latin typeface="Calibri" pitchFamily="34" charset="0"/>
+                <a:ea typeface="Calibri" pitchFamily="34" charset="-122"/>
+                <a:cs typeface="Calibri" pitchFamily="34" charset="-120"/>
+              </a:rPr>
+              <a:t>grande</a:t>
+            </a:r>
+            <a:endParaRPr lang="en-US" sz="800" dirty="0"/>
+          </a:p>
+        </p:txBody>
+      </p:sp>
+      <p:sp>
+        <p:nvSpPr>
+          <p:cNvPr id="24" name="Text 22"/>
+          <p:cNvSpPr/>
+          <p:nvPr/>
+        </p:nvSpPr>
+        <p:spPr>
+          <a:xfrm>
+            <a:off x="8915400" y="3246120"/>
+            <a:ext cx="2423160" cy="1143000"/>
+          </a:xfrm>
+          <a:prstGeom prst="rect">
+            <a:avLst/>
+          </a:prstGeom>
+          <a:noFill/>
+          <a:ln/>
+        </p:spPr>
+        <p:txBody>
+          <a:bodyPr wrap="square" lIns="0" tIns="0" rIns="0" bIns="0" rtlCol="0" anchor="ctr"/>
+          <a:lstStyle/>
+          <a:p>
+            <a:pPr indent="0" marL="0">
+              <a:buNone/>
+            </a:pPr>
+            <a:r>
+              <a:rPr lang="en-US" sz="1200" dirty="0">
+                <a:solidFill>
+                  <a:srgbClr val="1E293B"/>
+                </a:solidFill>
+                <a:latin typeface="Calibri" pitchFamily="34" charset="0"/>
+                <a:ea typeface="Calibri" pitchFamily="34" charset="-122"/>
+                <a:cs typeface="Calibri" pitchFamily="34" charset="-120"/>
+              </a:rPr>
+              <a:t>Solape respecto a la caja MENOR. Si la pequeña está contenida, el valor es máximo.</a:t>
+            </a:r>
+            <a:endParaRPr lang="en-US" sz="1200" dirty="0"/>
+          </a:p>
+        </p:txBody>
+      </p:sp>
+      <p:sp>
+        <p:nvSpPr>
+          <p:cNvPr id="25" name="Text 23"/>
+          <p:cNvSpPr/>
+          <p:nvPr/>
+        </p:nvSpPr>
+        <p:spPr>
+          <a:xfrm>
+            <a:off x="8915400" y="4434840"/>
+            <a:ext cx="2423160" cy="411480"/>
+          </a:xfrm>
+          <a:prstGeom prst="rect">
+            <a:avLst/>
+          </a:prstGeom>
+          <a:noFill/>
+          <a:ln/>
+        </p:spPr>
+        <p:txBody>
+          <a:bodyPr wrap="square" lIns="0" tIns="0" rIns="0" bIns="0" rtlCol="0" anchor="ctr"/>
+          <a:lstStyle/>
+          <a:p>
+            <a:pPr indent="0" marL="0">
+              <a:buNone/>
+            </a:pPr>
+            <a:r>
+              <a:rPr lang="en-US" sz="2200" b="1" dirty="0">
+                <a:solidFill>
+                  <a:srgbClr val="2E8B57"/>
+                </a:solidFill>
+                <a:latin typeface="Georgia" pitchFamily="34" charset="0"/>
+                <a:ea typeface="Georgia" pitchFamily="34" charset="-122"/>
+                <a:cs typeface="Georgia" pitchFamily="34" charset="-120"/>
+              </a:rPr>
+              <a:t>IOS = 1.0</a:t>
+            </a:r>
+            <a:endParaRPr lang="en-US" sz="2200" dirty="0"/>
+          </a:p>
+        </p:txBody>
+      </p:sp>
+      <p:sp>
+        <p:nvSpPr>
+          <p:cNvPr id="26" name="Text 24"/>
+          <p:cNvSpPr/>
+          <p:nvPr/>
+        </p:nvSpPr>
+        <p:spPr>
+          <a:xfrm>
+            <a:off x="8915400" y="4828032"/>
+            <a:ext cx="2423160" cy="274320"/>
+          </a:xfrm>
+          <a:prstGeom prst="rect">
+            <a:avLst/>
+          </a:prstGeom>
+          <a:noFill/>
+          <a:ln/>
+        </p:spPr>
+        <p:txBody>
+          <a:bodyPr wrap="square" lIns="0" tIns="0" rIns="0" bIns="0" rtlCol="0" anchor="ctr"/>
+          <a:lstStyle/>
+          <a:p>
+            <a:pPr indent="0" marL="0">
+              <a:buNone/>
+            </a:pPr>
+            <a:r>
+              <a:rPr lang="en-US" sz="1100" i="1" dirty="0">
+                <a:solidFill>
+                  <a:srgbClr val="2E8B57"/>
+                </a:solidFill>
+                <a:latin typeface="Calibri" pitchFamily="34" charset="0"/>
+                <a:ea typeface="Calibri" pitchFamily="34" charset="-122"/>
+                <a:cs typeface="Calibri" pitchFamily="34" charset="-120"/>
+              </a:rPr>
+              <a:t>→ sí las fusiona</a:t>
+            </a:r>
+            <a:endParaRPr lang="en-US" sz="1100" dirty="0"/>
+          </a:p>
+        </p:txBody>
+      </p:sp>
+      <p:sp>
+        <p:nvSpPr>
+          <p:cNvPr id="27" name="Shape 25"/>
+          <p:cNvSpPr/>
+          <p:nvPr/>
+        </p:nvSpPr>
+        <p:spPr>
+          <a:xfrm>
+            <a:off x="640080" y="5349240"/>
+            <a:ext cx="10927080" cy="749808"/>
+          </a:xfrm>
+          <a:prstGeom prst="roundRect">
+            <a:avLst>
+              <a:gd name="adj" fmla="val 7317"/>
             </a:avLst>
           </a:prstGeom>
           <a:solidFill>
@@ -8985,14 +10511,14 @@
       </p:sp>
       <p:sp>
         <p:nvSpPr>
-          <p:cNvPr id="9" name="Text 7"/>
-          <p:cNvSpPr/>
-          <p:nvPr/>
-        </p:nvSpPr>
-        <p:spPr>
-          <a:xfrm>
-            <a:off x="8915400" y="2148840"/>
-            <a:ext cx="2468880" cy="365760"/>
+          <p:cNvPr id="28" name="Text 26"/>
+          <p:cNvSpPr/>
+          <p:nvPr/>
+        </p:nvSpPr>
+        <p:spPr>
+          <a:xfrm>
+            <a:off x="914400" y="5349240"/>
+            <a:ext cx="10424160" cy="749808"/>
           </a:xfrm>
           <a:prstGeom prst="rect">
             <a:avLst/>
@@ -9008,50 +10534,35 @@
               <a:buNone/>
             </a:pPr>
             <a:r>
-              <a:rPr lang="en-US" sz="1600" b="1" dirty="0">
+              <a:rPr lang="en-US" sz="1300" dirty="0">
+                <a:solidFill>
+                  <a:srgbClr val="CADCFC"/>
+                </a:solidFill>
+                <a:latin typeface="Calibri" pitchFamily="34" charset="0"/>
+                <a:ea typeface="Calibri" pitchFamily="34" charset="-122"/>
+                <a:cs typeface="Calibri" pitchFamily="34" charset="-120"/>
+              </a:rPr>
+              <a:t>Al rebanar, </a:t>
+            </a:r>
+            <a:pPr indent="0" marL="0">
+              <a:buNone/>
+            </a:pPr>
+            <a:r>
+              <a:rPr lang="en-US" sz="1300" b="1" dirty="0">
                 <a:solidFill>
                   <a:srgbClr val="FFFFFF"/>
                 </a:solidFill>
-                <a:latin typeface="Georgia" pitchFamily="34" charset="0"/>
-                <a:ea typeface="Georgia" pitchFamily="34" charset="-122"/>
-                <a:cs typeface="Georgia" pitchFamily="34" charset="-120"/>
-              </a:rPr>
-              <a:t>YOLO-seg + SAHI</a:t>
-            </a:r>
-            <a:endParaRPr lang="en-US" sz="1600" dirty="0"/>
-          </a:p>
-        </p:txBody>
-      </p:sp>
-      <p:sp>
-        <p:nvSpPr>
-          <p:cNvPr id="10" name="Text 8"/>
-          <p:cNvSpPr/>
-          <p:nvPr/>
-        </p:nvSpPr>
-        <p:spPr>
-          <a:xfrm>
-            <a:off x="8915400" y="2651760"/>
-            <a:ext cx="2468880" cy="2743200"/>
-          </a:xfrm>
-          <a:prstGeom prst="rect">
-            <a:avLst/>
-          </a:prstGeom>
-          <a:noFill/>
-          <a:ln/>
-        </p:spPr>
-        <p:txBody>
-          <a:bodyPr wrap="square" lIns="0" tIns="0" rIns="0" bIns="0" rtlCol="0" anchor="ctr"/>
-          <a:lstStyle/>
-          <a:p>
-            <a:pPr marL="342900" indent="-342900">
-              <a:spcAft>
-                <a:spcPts val="900"/>
-              </a:spcAft>
-              <a:buSzPct val="100000"/>
-              <a:buChar char="•"/>
-            </a:pPr>
-            <a:r>
-              <a:rPr lang="en-US" sz="1250" dirty="0">
+                <a:latin typeface="Calibri" pitchFamily="34" charset="0"/>
+                <a:ea typeface="Calibri" pitchFamily="34" charset="-122"/>
+                <a:cs typeface="Calibri" pitchFamily="34" charset="-120"/>
+              </a:rPr>
+              <a:t>un objeto suele quedar como caja pequeña dentro de otra</a:t>
+            </a:r>
+            <a:pPr indent="0" marL="0">
+              <a:buNone/>
+            </a:pPr>
+            <a:r>
+              <a:rPr lang="en-US" sz="1300" dirty="0">
                 <a:solidFill>
                   <a:srgbClr val="CADCFC"/>
                 </a:solidFill>
@@ -9059,78 +10570,29 @@
                 <a:ea typeface="Calibri" pitchFamily="34" charset="-122"/>
                 <a:cs typeface="Calibri" pitchFamily="34" charset="-120"/>
               </a:rPr>
-              <a:t>Mismo pipeline, modelo -seg.</a:t>
-            </a:r>
-            <a:endParaRPr lang="en-US" sz="1250" dirty="0"/>
-          </a:p>
-          <a:p>
-            <a:pPr marL="342900" indent="-342900">
-              <a:spcAft>
-                <a:spcPts val="900"/>
-              </a:spcAft>
-              <a:buSzPct val="100000"/>
-              <a:buChar char="•"/>
-            </a:pPr>
-            <a:r>
-              <a:rPr lang="en-US" sz="1250" dirty="0">
-                <a:solidFill>
-                  <a:srgbClr val="CADCFC"/>
-                </a:solidFill>
-                <a:latin typeface="Calibri" pitchFamily="34" charset="0"/>
-                <a:ea typeface="Calibri" pitchFamily="34" charset="-122"/>
-                <a:cs typeface="Calibri" pitchFamily="34" charset="-120"/>
-              </a:rPr>
-              <a:t>Máscaras a resolución nativa por slice.</a:t>
-            </a:r>
-            <a:endParaRPr lang="en-US" sz="1250" dirty="0"/>
-          </a:p>
-          <a:p>
-            <a:pPr marL="342900" indent="-342900">
-              <a:spcAft>
-                <a:spcPts val="900"/>
-              </a:spcAft>
-              <a:buSzPct val="100000"/>
-              <a:buChar char="•"/>
-            </a:pPr>
-            <a:r>
-              <a:rPr lang="en-US" sz="1250" dirty="0">
-                <a:solidFill>
-                  <a:srgbClr val="CADCFC"/>
-                </a:solidFill>
-                <a:latin typeface="Calibri" pitchFamily="34" charset="0"/>
-                <a:ea typeface="Calibri" pitchFamily="34" charset="-122"/>
-                <a:cs typeface="Calibri" pitchFamily="34" charset="-120"/>
-              </a:rPr>
-              <a:t>Instancias pequeñas que antes no se segmentaban.</a:t>
-            </a:r>
-            <a:endParaRPr lang="en-US" sz="1250" dirty="0"/>
-          </a:p>
-          <a:p>
-            <a:pPr marL="342900" indent="-342900">
-              <a:spcAft>
-                <a:spcPts val="900"/>
-              </a:spcAft>
-              <a:buSzPct val="100000"/>
-              <a:buChar char="•"/>
-            </a:pPr>
-            <a:r>
-              <a:rPr lang="en-US" sz="1250" i="1" dirty="0">
-                <a:solidFill>
-                  <a:srgbClr val="9FB3C8"/>
-                </a:solidFill>
-                <a:latin typeface="Calibri" pitchFamily="34" charset="0"/>
-                <a:ea typeface="Calibri" pitchFamily="34" charset="-122"/>
-                <a:cs typeface="Calibri" pitchFamily="34" charset="-120"/>
-              </a:rPr>
-              <a:t>Cualitativo: VisDrone no trae máscaras GT.</a:t>
-            </a:r>
-            <a:endParaRPr lang="en-US" sz="1250" dirty="0"/>
-          </a:p>
-        </p:txBody>
-      </p:sp>
-      <p:sp>
-        <p:nvSpPr>
-          <p:cNvPr id="11" name="Text 9"/>
+              <a:t> → IoU lo subestima, IOS lo capta. Por eso SAHI usa </a:t>
+            </a:r>
+            <a:pPr indent="0" marL="0">
+              <a:buNone/>
+            </a:pPr>
+            <a:r>
+              <a:rPr lang="en-US" sz="1300" b="1" dirty="0">
+                <a:solidFill>
+                  <a:srgbClr val="9FE6C0"/>
+                </a:solidFill>
+                <a:latin typeface="Calibri" pitchFamily="34" charset="0"/>
+                <a:ea typeface="Calibri" pitchFamily="34" charset="-122"/>
+                <a:cs typeface="Calibri" pitchFamily="34" charset="-120"/>
+              </a:rPr>
+              <a:t>IOS por defecto.</a:t>
+            </a:r>
+            <a:endParaRPr lang="en-US" sz="1300" dirty="0"/>
+          </a:p>
+        </p:txBody>
+      </p:sp>
+      <p:sp>
+        <p:nvSpPr>
+          <p:cNvPr id="29" name="Text 27"/>
           <p:cNvSpPr/>
           <p:nvPr/>
         </p:nvSpPr>
@@ -9169,7 +10631,7 @@
       </p:sp>
       <p:sp>
         <p:nvSpPr>
-          <p:cNvPr id="12" name="Text 10"/>
+          <p:cNvPr id="30" name="Text 28"/>
           <p:cNvSpPr/>
           <p:nvPr/>
         </p:nvSpPr>
@@ -9271,7 +10733,7 @@
                 <a:ea typeface="Calibri" pitchFamily="34" charset="-122"/>
                 <a:cs typeface="Calibri" pitchFamily="34" charset="-120"/>
               </a:rPr>
-              <a:t>NIVEL 6 · ENTRENAR EN EL DOMINIO</a:t>
+              <a:t>NIVEL 4 · MODOS DE INFERENCIA</a:t>
             </a:r>
             <a:endParaRPr lang="en-US" sz="1300" dirty="0"/>
           </a:p>
@@ -9335,7 +10797,7 @@
                 <a:ea typeface="Georgia" pitchFamily="34" charset="-122"/>
                 <a:cs typeface="Georgia" pitchFamily="34" charset="-120"/>
               </a:rPr>
-              <a:t>N6</a:t>
+              <a:t>N4</a:t>
             </a:r>
             <a:endParaRPr lang="en-US" sz="2200" dirty="0"/>
           </a:p>
@@ -9374,7 +10836,7 @@
                 <a:ea typeface="Georgia" pitchFamily="34" charset="-122"/>
                 <a:cs typeface="Georgia" pitchFamily="34" charset="-120"/>
               </a:rPr>
-              <a:t>El paso que desbloquea el mAP real</a:t>
+              <a:t>Sliced, standard o combinado</a:t>
             </a:r>
             <a:endParaRPr lang="en-US" sz="3000" dirty="0"/>
           </a:p>
@@ -9382,122 +10844,26 @@
       </p:sp>
       <p:sp>
         <p:nvSpPr>
-          <p:cNvPr id="6" name="Text 4"/>
-          <p:cNvSpPr/>
-          <p:nvPr/>
-        </p:nvSpPr>
-        <p:spPr>
-          <a:xfrm>
-            <a:off x="640080" y="1920240"/>
-            <a:ext cx="5760720" cy="2743200"/>
-          </a:xfrm>
-          <a:prstGeom prst="rect">
-            <a:avLst/>
-          </a:prstGeom>
-          <a:noFill/>
-          <a:ln/>
-        </p:spPr>
-        <p:txBody>
-          <a:bodyPr wrap="square" lIns="0" tIns="0" rIns="0" bIns="0" rtlCol="0" anchor="ctr"/>
-          <a:lstStyle/>
-          <a:p>
-            <a:pPr indent="0" marL="0">
-              <a:buNone/>
-            </a:pPr>
-            <a:r>
-              <a:rPr lang="en-US" sz="1600" b="1" dirty="0">
-                <a:solidFill>
-                  <a:srgbClr val="E4572E"/>
-                </a:solidFill>
-                <a:latin typeface="Calibri" pitchFamily="34" charset="0"/>
-                <a:ea typeface="Calibri" pitchFamily="34" charset="-122"/>
-                <a:cs typeface="Calibri" pitchFamily="34" charset="-120"/>
-              </a:rPr>
-              <a:t>Un modelo COCO evaluado en VisDrone da mAP ≈ 0</a:t>
-            </a:r>
-            <a:endParaRPr lang="en-US" sz="1600" dirty="0"/>
-          </a:p>
-          <a:p>
-            <a:pPr indent="0" marL="0">
-              <a:buNone/>
-            </a:pPr>
-            <a:r>
-              <a:rPr lang="en-US" sz="1300" dirty="0">
-                <a:solidFill>
-                  <a:srgbClr val="64748B"/>
-                </a:solidFill>
-                <a:latin typeface="Calibri" pitchFamily="34" charset="0"/>
-                <a:ea typeface="Calibri" pitchFamily="34" charset="-122"/>
-                <a:cs typeface="Calibri" pitchFamily="34" charset="-120"/>
-              </a:rPr>
-              <a:t>Las 80 clases de COCO no coinciden con las 10 de VisDrone (zero-shot).</a:t>
-            </a:r>
-            <a:endParaRPr lang="en-US" sz="1600" dirty="0"/>
-          </a:p>
-          <a:p>
-            <a:pPr indent="0" marL="0">
-              <a:buNone/>
-            </a:pPr>
-            <a:endParaRPr lang="en-US" sz="1600" dirty="0"/>
-          </a:p>
-          <a:p>
-            <a:pPr indent="0" marL="0">
-              <a:buNone/>
-            </a:pPr>
-            <a:r>
-              <a:rPr lang="en-US" sz="1600" b="1" dirty="0">
-                <a:solidFill>
-                  <a:srgbClr val="2E8B57"/>
-                </a:solidFill>
-                <a:latin typeface="Calibri" pitchFamily="34" charset="0"/>
-                <a:ea typeface="Calibri" pitchFamily="34" charset="-122"/>
-                <a:cs typeface="Calibri" pitchFamily="34" charset="-120"/>
-              </a:rPr>
-              <a:t>Fine-tune en VisDrone alinea las clases</a:t>
-            </a:r>
-            <a:endParaRPr lang="en-US" sz="1600" dirty="0"/>
-          </a:p>
-          <a:p>
-            <a:pPr indent="0" marL="0">
-              <a:buNone/>
-            </a:pPr>
-            <a:r>
-              <a:rPr lang="en-US" sz="1300" dirty="0">
-                <a:solidFill>
-                  <a:srgbClr val="64748B"/>
-                </a:solidFill>
-                <a:latin typeface="Calibri" pitchFamily="34" charset="0"/>
-                <a:ea typeface="Calibri" pitchFamily="34" charset="-122"/>
-                <a:cs typeface="Calibri" pitchFamily="34" charset="-120"/>
-              </a:rPr>
-              <a:t>Una línea: yolo train data=VisDrone.yaml. Luego SAHI exprime el AP_small.</a:t>
-            </a:r>
-            <a:endParaRPr lang="en-US" sz="1600" dirty="0"/>
-          </a:p>
-        </p:txBody>
-      </p:sp>
-      <p:sp>
-        <p:nvSpPr>
-          <p:cNvPr id="7" name="Shape 5"/>
-          <p:cNvSpPr/>
-          <p:nvPr/>
-        </p:nvSpPr>
-        <p:spPr>
-          <a:xfrm>
-            <a:off x="6766560" y="2103120"/>
-            <a:ext cx="2286000" cy="1417320"/>
+          <p:cNvPr id="6" name="Shape 4"/>
+          <p:cNvSpPr/>
+          <p:nvPr/>
+        </p:nvSpPr>
+        <p:spPr>
+          <a:xfrm>
+            <a:off x="640080" y="2011680"/>
+            <a:ext cx="3474720" cy="2468880"/>
           </a:xfrm>
           <a:prstGeom prst="roundRect">
             <a:avLst>
-              <a:gd name="adj" fmla="val 5161"/>
+              <a:gd name="adj" fmla="val 2963"/>
             </a:avLst>
           </a:prstGeom>
           <a:solidFill>
             <a:srgbClr val="F4F7FA"/>
           </a:solidFill>
-          <a:ln w="12700">
+          <a:ln w="19050">
             <a:solidFill>
-              <a:srgbClr val="D8E0E8"/>
+              <a:srgbClr val="2E8B57"/>
             </a:solidFill>
             <a:prstDash val="solid"/>
           </a:ln>
@@ -9512,14 +10878,39 @@
       </p:sp>
       <p:sp>
         <p:nvSpPr>
+          <p:cNvPr id="7" name="Shape 5"/>
+          <p:cNvSpPr/>
+          <p:nvPr/>
+        </p:nvSpPr>
+        <p:spPr>
+          <a:xfrm>
+            <a:off x="640080" y="2011680"/>
+            <a:ext cx="3474720" cy="640080"/>
+          </a:xfrm>
+          <a:prstGeom prst="rect">
+            <a:avLst/>
+          </a:prstGeom>
+          <a:solidFill>
+            <a:srgbClr val="2E8B57"/>
+          </a:solidFill>
+          <a:ln w="12700">
+            <a:solidFill>
+              <a:srgbClr val="2E8B57"/>
+            </a:solidFill>
+            <a:prstDash val="solid"/>
+          </a:ln>
+        </p:spPr>
+      </p:sp>
+      <p:sp>
+        <p:nvSpPr>
           <p:cNvPr id="8" name="Text 6"/>
           <p:cNvSpPr/>
           <p:nvPr/>
         </p:nvSpPr>
         <p:spPr>
           <a:xfrm>
-            <a:off x="6766560" y="2212848"/>
-            <a:ext cx="2286000" cy="777240"/>
+            <a:off x="640080" y="2011680"/>
+            <a:ext cx="3474720" cy="640080"/>
           </a:xfrm>
           <a:prstGeom prst="rect">
             <a:avLst/>
@@ -9535,17 +10926,17 @@
               <a:buNone/>
             </a:pPr>
             <a:r>
-              <a:rPr lang="en-US" sz="4000" b="1" dirty="0">
-                <a:solidFill>
-                  <a:srgbClr val="E4572E"/>
+              <a:rPr lang="en-US" sz="1900" b="1" dirty="0">
+                <a:solidFill>
+                  <a:srgbClr val="FFFFFF"/>
                 </a:solidFill>
                 <a:latin typeface="Georgia" pitchFamily="34" charset="0"/>
                 <a:ea typeface="Georgia" pitchFamily="34" charset="-122"/>
                 <a:cs typeface="Georgia" pitchFamily="34" charset="-120"/>
               </a:rPr>
-              <a:t>≈ 0.00</a:t>
-            </a:r>
-            <a:endParaRPr lang="en-US" sz="4000" dirty="0"/>
+              <a:t>Sliced</a:t>
+            </a:r>
+            <a:endParaRPr lang="en-US" sz="1900" dirty="0"/>
           </a:p>
         </p:txBody>
       </p:sp>
@@ -9557,8 +10948,8 @@
         </p:nvSpPr>
         <p:spPr>
           <a:xfrm>
-            <a:off x="6903720" y="2999232"/>
-            <a:ext cx="2011680" cy="457200"/>
+            <a:off x="868680" y="2880360"/>
+            <a:ext cx="3017520" cy="1371600"/>
           </a:xfrm>
           <a:prstGeom prst="rect">
             <a:avLst/>
@@ -9570,11 +10961,28 @@
           <a:bodyPr wrap="square" lIns="0" tIns="0" rIns="0" bIns="0" rtlCol="0" anchor="t"/>
           <a:lstStyle/>
           <a:p>
-            <a:pPr algn="ctr" indent="0" marL="0">
-              <a:buNone/>
-            </a:pPr>
-            <a:r>
-              <a:rPr lang="en-US" sz="1200" dirty="0">
+            <a:pPr indent="0" marL="0">
+              <a:buNone/>
+            </a:pPr>
+            <a:r>
+              <a:rPr lang="en-US" sz="1500" b="1" dirty="0">
+                <a:solidFill>
+                  <a:srgbClr val="1E293B"/>
+                </a:solidFill>
+                <a:latin typeface="Calibri" pitchFamily="34" charset="0"/>
+                <a:ea typeface="Calibri" pitchFamily="34" charset="-122"/>
+                <a:cs typeface="Calibri" pitchFamily="34" charset="-120"/>
+              </a:rPr>
+              <a:t>Solo mosaicos.</a:t>
+            </a:r>
+            <a:endParaRPr lang="en-US" sz="1500" dirty="0"/>
+          </a:p>
+          <a:p>
+            <a:pPr indent="0" marL="0">
+              <a:buNone/>
+            </a:pPr>
+            <a:r>
+              <a:rPr lang="en-US" sz="1300" dirty="0">
                 <a:solidFill>
                   <a:srgbClr val="64748B"/>
                 </a:solidFill>
@@ -9582,9 +10990,9 @@
                 <a:ea typeface="Calibri" pitchFamily="34" charset="-122"/>
                 <a:cs typeface="Calibri" pitchFamily="34" charset="-120"/>
               </a:rPr>
-              <a:t>mAP zero-shot (COCO)</a:t>
-            </a:r>
-            <a:endParaRPr lang="en-US" sz="1200" dirty="0"/>
+              <a:t>Mejor para objetos pequeños.</a:t>
+            </a:r>
+            <a:endParaRPr lang="en-US" sz="1500" dirty="0"/>
           </a:p>
         </p:txBody>
       </p:sp>
@@ -9596,44 +11004,20 @@
         </p:nvSpPr>
         <p:spPr>
           <a:xfrm>
-            <a:off x="9189720" y="2788920"/>
-            <a:ext cx="502920" cy="0"/>
-          </a:xfrm>
-          <a:prstGeom prst="line">
-            <a:avLst/>
-          </a:prstGeom>
-          <a:noFill/>
-          <a:ln w="25400">
-            <a:solidFill>
-              <a:srgbClr val="1E293B"/>
-            </a:solidFill>
-            <a:prstDash val="solid"/>
-            <a:tailEnd type="triangle"/>
-          </a:ln>
-        </p:spPr>
-      </p:sp>
-      <p:sp>
-        <p:nvSpPr>
-          <p:cNvPr id="11" name="Shape 9"/>
-          <p:cNvSpPr/>
-          <p:nvPr/>
-        </p:nvSpPr>
-        <p:spPr>
-          <a:xfrm>
-            <a:off x="9326880" y="2103120"/>
-            <a:ext cx="2286000" cy="1417320"/>
+            <a:off x="4389120" y="2011680"/>
+            <a:ext cx="3474720" cy="2468880"/>
           </a:xfrm>
           <a:prstGeom prst="roundRect">
             <a:avLst>
-              <a:gd name="adj" fmla="val 5161"/>
+              <a:gd name="adj" fmla="val 2963"/>
             </a:avLst>
           </a:prstGeom>
           <a:solidFill>
             <a:srgbClr val="F4F7FA"/>
           </a:solidFill>
-          <a:ln w="12700">
+          <a:ln w="19050">
             <a:solidFill>
-              <a:srgbClr val="D8E0E8"/>
+              <a:srgbClr val="3A6EA5"/>
             </a:solidFill>
             <a:prstDash val="solid"/>
           </a:ln>
@@ -9648,14 +11032,39 @@
       </p:sp>
       <p:sp>
         <p:nvSpPr>
+          <p:cNvPr id="11" name="Shape 9"/>
+          <p:cNvSpPr/>
+          <p:nvPr/>
+        </p:nvSpPr>
+        <p:spPr>
+          <a:xfrm>
+            <a:off x="4389120" y="2011680"/>
+            <a:ext cx="3474720" cy="640080"/>
+          </a:xfrm>
+          <a:prstGeom prst="rect">
+            <a:avLst/>
+          </a:prstGeom>
+          <a:solidFill>
+            <a:srgbClr val="3A6EA5"/>
+          </a:solidFill>
+          <a:ln w="12700">
+            <a:solidFill>
+              <a:srgbClr val="3A6EA5"/>
+            </a:solidFill>
+            <a:prstDash val="solid"/>
+          </a:ln>
+        </p:spPr>
+      </p:sp>
+      <p:sp>
+        <p:nvSpPr>
           <p:cNvPr id="12" name="Text 10"/>
           <p:cNvSpPr/>
           <p:nvPr/>
         </p:nvSpPr>
         <p:spPr>
           <a:xfrm>
-            <a:off x="9326880" y="2212848"/>
-            <a:ext cx="2286000" cy="777240"/>
+            <a:off x="4389120" y="2011680"/>
+            <a:ext cx="3474720" cy="640080"/>
           </a:xfrm>
           <a:prstGeom prst="rect">
             <a:avLst/>
@@ -9671,17 +11080,17 @@
               <a:buNone/>
             </a:pPr>
             <a:r>
-              <a:rPr lang="en-US" sz="4000" b="1" dirty="0">
-                <a:solidFill>
-                  <a:srgbClr val="2E8B57"/>
+              <a:rPr lang="en-US" sz="1900" b="1" dirty="0">
+                <a:solidFill>
+                  <a:srgbClr val="FFFFFF"/>
                 </a:solidFill>
                 <a:latin typeface="Georgia" pitchFamily="34" charset="0"/>
                 <a:ea typeface="Georgia" pitchFamily="34" charset="-122"/>
                 <a:cs typeface="Georgia" pitchFamily="34" charset="-120"/>
               </a:rPr>
-              <a:t>0.22+</a:t>
-            </a:r>
-            <a:endParaRPr lang="en-US" sz="4000" dirty="0"/>
+              <a:t>Standard</a:t>
+            </a:r>
+            <a:endParaRPr lang="en-US" sz="1900" dirty="0"/>
           </a:p>
         </p:txBody>
       </p:sp>
@@ -9693,8 +11102,8 @@
         </p:nvSpPr>
         <p:spPr>
           <a:xfrm>
-            <a:off x="9464040" y="2999232"/>
-            <a:ext cx="2011680" cy="457200"/>
+            <a:off x="4617720" y="2880360"/>
+            <a:ext cx="3017520" cy="1371600"/>
           </a:xfrm>
           <a:prstGeom prst="rect">
             <a:avLst/>
@@ -9706,11 +11115,182 @@
           <a:bodyPr wrap="square" lIns="0" tIns="0" rIns="0" bIns="0" rtlCol="0" anchor="t"/>
           <a:lstStyle/>
           <a:p>
+            <a:pPr indent="0" marL="0">
+              <a:buNone/>
+            </a:pPr>
+            <a:r>
+              <a:rPr lang="en-US" sz="1500" b="1" dirty="0">
+                <a:solidFill>
+                  <a:srgbClr val="1E293B"/>
+                </a:solidFill>
+                <a:latin typeface="Calibri" pitchFamily="34" charset="0"/>
+                <a:ea typeface="Calibri" pitchFamily="34" charset="-122"/>
+                <a:cs typeface="Calibri" pitchFamily="34" charset="-120"/>
+              </a:rPr>
+              <a:t>Imagen completa.</a:t>
+            </a:r>
+            <a:endParaRPr lang="en-US" sz="1500" dirty="0"/>
+          </a:p>
+          <a:p>
+            <a:pPr indent="0" marL="0">
+              <a:buNone/>
+            </a:pPr>
+            <a:r>
+              <a:rPr lang="en-US" sz="1300" dirty="0">
+                <a:solidFill>
+                  <a:srgbClr val="64748B"/>
+                </a:solidFill>
+                <a:latin typeface="Calibri" pitchFamily="34" charset="0"/>
+                <a:ea typeface="Calibri" pitchFamily="34" charset="-122"/>
+                <a:cs typeface="Calibri" pitchFamily="34" charset="-120"/>
+              </a:rPr>
+              <a:t>Mejor para objetos grandes.</a:t>
+            </a:r>
+            <a:endParaRPr lang="en-US" sz="1500" dirty="0"/>
+          </a:p>
+        </p:txBody>
+      </p:sp>
+      <p:sp>
+        <p:nvSpPr>
+          <p:cNvPr id="14" name="Shape 12"/>
+          <p:cNvSpPr/>
+          <p:nvPr/>
+        </p:nvSpPr>
+        <p:spPr>
+          <a:xfrm>
+            <a:off x="8138160" y="2011680"/>
+            <a:ext cx="3474720" cy="2468880"/>
+          </a:xfrm>
+          <a:prstGeom prst="roundRect">
+            <a:avLst>
+              <a:gd name="adj" fmla="val 2963"/>
+            </a:avLst>
+          </a:prstGeom>
+          <a:solidFill>
+            <a:srgbClr val="F4F7FA"/>
+          </a:solidFill>
+          <a:ln w="19050">
+            <a:solidFill>
+              <a:srgbClr val="0F2A43"/>
+            </a:solidFill>
+            <a:prstDash val="solid"/>
+          </a:ln>
+          <a:effectLst>
+            <a:outerShdw sx="100000" sy="100000" kx="0" ky="0" algn="bl" rotWithShape="0" blurRad="114300" dist="38100" dir="5400000">
+              <a:srgbClr val="000000">
+                <a:alpha val="18000"/>
+              </a:srgbClr>
+            </a:outerShdw>
+          </a:effectLst>
+        </p:spPr>
+      </p:sp>
+      <p:sp>
+        <p:nvSpPr>
+          <p:cNvPr id="15" name="Shape 13"/>
+          <p:cNvSpPr/>
+          <p:nvPr/>
+        </p:nvSpPr>
+        <p:spPr>
+          <a:xfrm>
+            <a:off x="8138160" y="2011680"/>
+            <a:ext cx="3474720" cy="640080"/>
+          </a:xfrm>
+          <a:prstGeom prst="rect">
+            <a:avLst/>
+          </a:prstGeom>
+          <a:solidFill>
+            <a:srgbClr val="0F2A43"/>
+          </a:solidFill>
+          <a:ln w="12700">
+            <a:solidFill>
+              <a:srgbClr val="0F2A43"/>
+            </a:solidFill>
+            <a:prstDash val="solid"/>
+          </a:ln>
+        </p:spPr>
+      </p:sp>
+      <p:sp>
+        <p:nvSpPr>
+          <p:cNvPr id="16" name="Text 14"/>
+          <p:cNvSpPr/>
+          <p:nvPr/>
+        </p:nvSpPr>
+        <p:spPr>
+          <a:xfrm>
+            <a:off x="8138160" y="2011680"/>
+            <a:ext cx="3474720" cy="640080"/>
+          </a:xfrm>
+          <a:prstGeom prst="rect">
+            <a:avLst/>
+          </a:prstGeom>
+          <a:noFill/>
+          <a:ln/>
+        </p:spPr>
+        <p:txBody>
+          <a:bodyPr wrap="square" lIns="0" tIns="0" rIns="0" bIns="0" rtlCol="0" anchor="ctr"/>
+          <a:lstStyle/>
+          <a:p>
             <a:pPr algn="ctr" indent="0" marL="0">
               <a:buNone/>
             </a:pPr>
             <a:r>
-              <a:rPr lang="en-US" sz="1200" dirty="0">
+              <a:rPr lang="en-US" sz="1900" b="1" dirty="0">
+                <a:solidFill>
+                  <a:srgbClr val="FFFFFF"/>
+                </a:solidFill>
+                <a:latin typeface="Georgia" pitchFamily="34" charset="0"/>
+                <a:ea typeface="Georgia" pitchFamily="34" charset="-122"/>
+                <a:cs typeface="Georgia" pitchFamily="34" charset="-120"/>
+              </a:rPr>
+              <a:t>Combinado</a:t>
+            </a:r>
+            <a:endParaRPr lang="en-US" sz="1900" dirty="0"/>
+          </a:p>
+        </p:txBody>
+      </p:sp>
+      <p:sp>
+        <p:nvSpPr>
+          <p:cNvPr id="17" name="Text 15"/>
+          <p:cNvSpPr/>
+          <p:nvPr/>
+        </p:nvSpPr>
+        <p:spPr>
+          <a:xfrm>
+            <a:off x="8366760" y="2880360"/>
+            <a:ext cx="3017520" cy="1371600"/>
+          </a:xfrm>
+          <a:prstGeom prst="rect">
+            <a:avLst/>
+          </a:prstGeom>
+          <a:noFill/>
+          <a:ln/>
+        </p:spPr>
+        <p:txBody>
+          <a:bodyPr wrap="square" lIns="0" tIns="0" rIns="0" bIns="0" rtlCol="0" anchor="t"/>
+          <a:lstStyle/>
+          <a:p>
+            <a:pPr indent="0" marL="0">
+              <a:buNone/>
+            </a:pPr>
+            <a:r>
+              <a:rPr lang="en-US" sz="1500" b="1" dirty="0">
+                <a:solidFill>
+                  <a:srgbClr val="1E293B"/>
+                </a:solidFill>
+                <a:latin typeface="Calibri" pitchFamily="34" charset="0"/>
+                <a:ea typeface="Calibri" pitchFamily="34" charset="-122"/>
+                <a:cs typeface="Calibri" pitchFamily="34" charset="-120"/>
+              </a:rPr>
+              <a:t>Ambos + fusión.</a:t>
+            </a:r>
+            <a:endParaRPr lang="en-US" sz="1500" dirty="0"/>
+          </a:p>
+          <a:p>
+            <a:pPr indent="0" marL="0">
+              <a:buNone/>
+            </a:pPr>
+            <a:r>
+              <a:rPr lang="en-US" sz="1300" dirty="0">
                 <a:solidFill>
                   <a:srgbClr val="64748B"/>
                 </a:solidFill>
@@ -9718,22 +11298,22 @@
                 <a:ea typeface="Calibri" pitchFamily="34" charset="-122"/>
                 <a:cs typeface="Calibri" pitchFamily="34" charset="-120"/>
               </a:rPr>
-              <a:t>mAP fine-tuned</a:t>
-            </a:r>
-            <a:endParaRPr lang="en-US" sz="1200" dirty="0"/>
-          </a:p>
-        </p:txBody>
-      </p:sp>
-      <p:sp>
-        <p:nvSpPr>
-          <p:cNvPr id="14" name="Text 12"/>
-          <p:cNvSpPr/>
-          <p:nvPr/>
-        </p:nvSpPr>
-        <p:spPr>
-          <a:xfrm>
-            <a:off x="6766560" y="3840480"/>
-            <a:ext cx="4846320" cy="457200"/>
+              <a:t>Lo más robusto, lo más lento.</a:t>
+            </a:r>
+            <a:endParaRPr lang="en-US" sz="1500" dirty="0"/>
+          </a:p>
+        </p:txBody>
+      </p:sp>
+      <p:sp>
+        <p:nvSpPr>
+          <p:cNvPr id="18" name="Text 16"/>
+          <p:cNvSpPr/>
+          <p:nvPr/>
+        </p:nvSpPr>
+        <p:spPr>
+          <a:xfrm>
+            <a:off x="640080" y="5029200"/>
+            <a:ext cx="10972800" cy="457200"/>
           </a:xfrm>
           <a:prstGeom prst="rect">
             <a:avLst/>
@@ -9749,46 +11329,7 @@
               <a:buNone/>
             </a:pPr>
             <a:r>
-              <a:rPr lang="en-US" sz="1300" i="1" dirty="0">
-                <a:solidFill>
-                  <a:srgbClr val="64748B"/>
-                </a:solidFill>
-                <a:latin typeface="Calibri" pitchFamily="34" charset="0"/>
-                <a:ea typeface="Calibri" pitchFamily="34" charset="-122"/>
-                <a:cs typeface="Calibri" pitchFamily="34" charset="-120"/>
-              </a:rPr>
-              <a:t>Por eso el notebook 00 entrena ANTES de medir.</a:t>
-            </a:r>
-            <a:endParaRPr lang="en-US" sz="1300" dirty="0"/>
-          </a:p>
-        </p:txBody>
-      </p:sp>
-      <p:sp>
-        <p:nvSpPr>
-          <p:cNvPr id="15" name="Text 13"/>
-          <p:cNvSpPr/>
-          <p:nvPr/>
-        </p:nvSpPr>
-        <p:spPr>
-          <a:xfrm>
-            <a:off x="640080" y="5212080"/>
-            <a:ext cx="10972800" cy="457200"/>
-          </a:xfrm>
-          <a:prstGeom prst="rect">
-            <a:avLst/>
-          </a:prstGeom>
-          <a:noFill/>
-          <a:ln/>
-        </p:spPr>
-        <p:txBody>
-          <a:bodyPr wrap="square" lIns="0" tIns="0" rIns="0" bIns="0" rtlCol="0" anchor="ctr"/>
-          <a:lstStyle/>
-          <a:p>
-            <a:pPr indent="0" marL="0">
-              <a:buNone/>
-            </a:pPr>
-            <a:r>
-              <a:rPr lang="en-US" sz="1300" b="1" dirty="0">
+              <a:rPr lang="en-US" sz="1400" dirty="0">
                 <a:solidFill>
                   <a:srgbClr val="1E293B"/>
                 </a:solidFill>
@@ -9796,29 +11337,43 @@
                 <a:ea typeface="Calibri" pitchFamily="34" charset="-122"/>
                 <a:cs typeface="Calibri" pitchFamily="34" charset="-120"/>
               </a:rPr>
-              <a:t>Tip objetos pequeños: </a:t>
-            </a:r>
-            <a:pPr indent="0" marL="0">
-              <a:buNone/>
-            </a:pPr>
-            <a:r>
-              <a:rPr lang="en-US" sz="1300" dirty="0">
-                <a:solidFill>
-                  <a:srgbClr val="64748B"/>
-                </a:solidFill>
-                <a:latin typeface="Calibri" pitchFamily="34" charset="0"/>
-                <a:ea typeface="Calibri" pitchFamily="34" charset="-122"/>
-                <a:cs typeface="Calibri" pitchFamily="34" charset="-120"/>
-              </a:rPr>
-              <a:t>entrena con imgsz mayor (960/1024) para afinar aún más lo diminuto.</a:t>
-            </a:r>
-            <a:endParaRPr lang="en-US" sz="1300" dirty="0"/>
-          </a:p>
-        </p:txBody>
-      </p:sp>
-      <p:sp>
-        <p:nvSpPr>
-          <p:cNvPr id="16" name="Text 14"/>
+              <a:t>En código solo cambia un flag:  </a:t>
+            </a:r>
+            <a:pPr algn="ctr" indent="0" marL="0">
+              <a:buNone/>
+            </a:pPr>
+            <a:r>
+              <a:rPr lang="en-US" sz="1400" b="1" dirty="0">
+                <a:solidFill>
+                  <a:srgbClr val="0F2A43"/>
+                </a:solidFill>
+                <a:latin typeface="Consolas" pitchFamily="34" charset="0"/>
+                <a:ea typeface="Consolas" pitchFamily="34" charset="-122"/>
+                <a:cs typeface="Consolas" pitchFamily="34" charset="-120"/>
+              </a:rPr>
+              <a:t>perform_standard_pred=True</a:t>
+            </a:r>
+            <a:pPr algn="ctr" indent="0" marL="0">
+              <a:buNone/>
+            </a:pPr>
+            <a:r>
+              <a:rPr lang="en-US" sz="1400" dirty="0">
+                <a:solidFill>
+                  <a:srgbClr val="1E293B"/>
+                </a:solidFill>
+                <a:latin typeface="Calibri" pitchFamily="34" charset="0"/>
+                <a:ea typeface="Calibri" pitchFamily="34" charset="-122"/>
+                <a:cs typeface="Calibri" pitchFamily="34" charset="-120"/>
+              </a:rPr>
+              <a:t>  activa el modo combinado.</a:t>
+            </a:r>
+            <a:endParaRPr lang="en-US" sz="1400" dirty="0"/>
+          </a:p>
+        </p:txBody>
+      </p:sp>
+      <p:sp>
+        <p:nvSpPr>
+          <p:cNvPr id="19" name="Text 17"/>
           <p:cNvSpPr/>
           <p:nvPr/>
         </p:nvSpPr>
@@ -9857,7 +11412,7 @@
       </p:sp>
       <p:sp>
         <p:nvSpPr>
-          <p:cNvPr id="17" name="Text 15"/>
+          <p:cNvPr id="20" name="Text 18"/>
           <p:cNvSpPr/>
           <p:nvPr/>
         </p:nvSpPr>
@@ -9908,7 +11463,7 @@
     <p:bg>
       <p:bgPr>
         <a:solidFill>
-          <a:srgbClr val="0F2A43"/>
+          <a:srgbClr val="FFFFFF"/>
         </a:solidFill>
       </p:bgPr>
     </p:bg>
@@ -9928,24 +11483,63 @@
       </p:grpSpPr>
       <p:sp>
         <p:nvSpPr>
-          <p:cNvPr id="2" name="Shape 0"/>
-          <p:cNvSpPr/>
-          <p:nvPr/>
-        </p:nvSpPr>
-        <p:spPr>
-          <a:xfrm>
-            <a:off x="822960" y="2331720"/>
-            <a:ext cx="1371600" cy="1371600"/>
+          <p:cNvPr id="2" name="Text 0"/>
+          <p:cNvSpPr/>
+          <p:nvPr/>
+        </p:nvSpPr>
+        <p:spPr>
+          <a:xfrm>
+            <a:off x="640080" y="502920"/>
+            <a:ext cx="10058400" cy="320040"/>
+          </a:xfrm>
+          <a:prstGeom prst="rect">
+            <a:avLst/>
+          </a:prstGeom>
+          <a:noFill/>
+          <a:ln/>
+        </p:spPr>
+        <p:txBody>
+          <a:bodyPr wrap="square" lIns="0" tIns="0" rIns="0" bIns="0" rtlCol="0" anchor="ctr"/>
+          <a:lstStyle/>
+          <a:p>
+            <a:pPr indent="0" marL="0">
+              <a:buNone/>
+            </a:pPr>
+            <a:r>
+              <a:rPr lang="en-US" sz="1300" b="1" spc="300" kern="0" dirty="0">
+                <a:solidFill>
+                  <a:srgbClr val="E8A93B"/>
+                </a:solidFill>
+                <a:latin typeface="Calibri" pitchFamily="34" charset="0"/>
+                <a:ea typeface="Calibri" pitchFamily="34" charset="-122"/>
+                <a:cs typeface="Calibri" pitchFamily="34" charset="-120"/>
+              </a:rPr>
+              <a:t>NIVEL 5 · SEGMENTACIÓN</a:t>
+            </a:r>
+            <a:endParaRPr lang="en-US" sz="1300" dirty="0"/>
+          </a:p>
+        </p:txBody>
+      </p:sp>
+      <p:sp>
+        <p:nvSpPr>
+          <p:cNvPr id="3" name="Shape 1"/>
+          <p:cNvSpPr/>
+          <p:nvPr/>
+        </p:nvSpPr>
+        <p:spPr>
+          <a:xfrm>
+            <a:off x="10698480" y="502920"/>
+            <a:ext cx="914400" cy="914400"/>
           </a:xfrm>
           <a:prstGeom prst="ellipse">
             <a:avLst/>
           </a:prstGeom>
           <a:solidFill>
-            <a:srgbClr val="2E8B57"/>
+            <a:srgbClr val="0F2A43"/>
           </a:solidFill>
           <a:ln w="12700">
             <a:solidFill>
-              <a:srgbClr val="2E8B57"/>
+              <a:srgbClr val="0F2A43"/>
             </a:solidFill>
             <a:prstDash val="solid"/>
           </a:ln>
@@ -9953,14 +11547,14 @@
       </p:sp>
       <p:sp>
         <p:nvSpPr>
-          <p:cNvPr id="3" name="Text 1"/>
-          <p:cNvSpPr/>
-          <p:nvPr/>
-        </p:nvSpPr>
-        <p:spPr>
-          <a:xfrm>
-            <a:off x="822960" y="2331720"/>
-            <a:ext cx="1371600" cy="1371600"/>
+          <p:cNvPr id="4" name="Text 2"/>
+          <p:cNvSpPr/>
+          <p:nvPr/>
+        </p:nvSpPr>
+        <p:spPr>
+          <a:xfrm>
+            <a:off x="10698480" y="502920"/>
+            <a:ext cx="914400" cy="914400"/>
           </a:xfrm>
           <a:prstGeom prst="rect">
             <a:avLst/>
@@ -9976,30 +11570,30 @@
               <a:buNone/>
             </a:pPr>
             <a:r>
-              <a:rPr lang="en-US" sz="4400" b="1" dirty="0">
-                <a:solidFill>
-                  <a:srgbClr val="FFFFFF"/>
+              <a:rPr lang="en-US" sz="2200" b="1" dirty="0">
+                <a:solidFill>
+                  <a:srgbClr val="E8A93B"/>
                 </a:solidFill>
                 <a:latin typeface="Georgia" pitchFamily="34" charset="0"/>
                 <a:ea typeface="Georgia" pitchFamily="34" charset="-122"/>
                 <a:cs typeface="Georgia" pitchFamily="34" charset="-120"/>
               </a:rPr>
-              <a:t>05</a:t>
-            </a:r>
-            <a:endParaRPr lang="en-US" sz="4400" dirty="0"/>
-          </a:p>
-        </p:txBody>
-      </p:sp>
-      <p:sp>
-        <p:nvSpPr>
-          <p:cNvPr id="4" name="Text 2"/>
-          <p:cNvSpPr/>
-          <p:nvPr/>
-        </p:nvSpPr>
-        <p:spPr>
-          <a:xfrm>
-            <a:off x="2560320" y="2514600"/>
-            <a:ext cx="8686800" cy="914400"/>
+              <a:t>N5</a:t>
+            </a:r>
+            <a:endParaRPr lang="en-US" sz="2200" dirty="0"/>
+          </a:p>
+        </p:txBody>
+      </p:sp>
+      <p:sp>
+        <p:nvSpPr>
+          <p:cNvPr id="5" name="Text 3"/>
+          <p:cNvSpPr/>
+          <p:nvPr/>
+        </p:nvSpPr>
+        <p:spPr>
+          <a:xfrm>
+            <a:off x="640080" y="841248"/>
+            <a:ext cx="10972800" cy="868680"/>
           </a:xfrm>
           <a:prstGeom prst="rect">
             <a:avLst/>
@@ -10015,56 +11609,17 @@
               <a:buNone/>
             </a:pPr>
             <a:r>
-              <a:rPr lang="en-US" sz="4000" b="1" dirty="0">
-                <a:solidFill>
-                  <a:srgbClr val="FFFFFF"/>
+              <a:rPr lang="en-US" sz="3000" b="1" dirty="0">
+                <a:solidFill>
+                  <a:srgbClr val="1E293B"/>
                 </a:solidFill>
                 <a:latin typeface="Georgia" pitchFamily="34" charset="0"/>
                 <a:ea typeface="Georgia" pitchFamily="34" charset="-122"/>
                 <a:cs typeface="Georgia" pitchFamily="34" charset="-120"/>
               </a:rPr>
-              <a:t>Resultados</a:t>
-            </a:r>
-            <a:endParaRPr lang="en-US" sz="4000" dirty="0"/>
-          </a:p>
-        </p:txBody>
-      </p:sp>
-      <p:sp>
-        <p:nvSpPr>
-          <p:cNvPr id="5" name="Text 3"/>
-          <p:cNvSpPr/>
-          <p:nvPr/>
-        </p:nvSpPr>
-        <p:spPr>
-          <a:xfrm>
-            <a:off x="2606040" y="3429000"/>
-            <a:ext cx="8503920" cy="548640"/>
-          </a:xfrm>
-          <a:prstGeom prst="rect">
-            <a:avLst/>
-          </a:prstGeom>
-          <a:noFill/>
-          <a:ln/>
-        </p:spPr>
-        <p:txBody>
-          <a:bodyPr wrap="square" lIns="0" tIns="0" rIns="0" bIns="0" rtlCol="0" anchor="ctr"/>
-          <a:lstStyle/>
-          <a:p>
-            <a:pPr indent="0" marL="0">
-              <a:buNone/>
-            </a:pPr>
-            <a:r>
-              <a:rPr lang="en-US" sz="1600" dirty="0">
-                <a:solidFill>
-                  <a:srgbClr val="9FB3C8"/>
-                </a:solidFill>
-                <a:latin typeface="Calibri" pitchFamily="34" charset="0"/>
-                <a:ea typeface="Calibri" pitchFamily="34" charset="-122"/>
-                <a:cs typeface="Calibri" pitchFamily="34" charset="-120"/>
-              </a:rPr>
-              <a:t>Lo que ganamos, medido contra el ground truth</a:t>
-            </a:r>
-            <a:endParaRPr lang="en-US" sz="1600" dirty="0"/>
+              <a:t>SAHI también mejora las máscaras</a:t>
+            </a:r>
+            <a:endParaRPr lang="en-US" sz="3000" dirty="0"/>
           </a:p>
         </p:txBody>
       </p:sp>
@@ -10076,18 +11631,20 @@
         </p:nvSpPr>
         <p:spPr>
           <a:xfrm>
-            <a:off x="2606040" y="4206240"/>
-            <a:ext cx="310896" cy="310896"/>
-          </a:xfrm>
-          <a:prstGeom prst="rect">
-            <a:avLst/>
+            <a:off x="822960" y="1920240"/>
+            <a:ext cx="7589520" cy="3657600"/>
+          </a:xfrm>
+          <a:prstGeom prst="roundRect">
+            <a:avLst>
+              <a:gd name="adj" fmla="val 2000"/>
+            </a:avLst>
           </a:prstGeom>
           <a:solidFill>
-            <a:srgbClr val="1C4A73"/>
+            <a:srgbClr val="F4F7FA"/>
           </a:solidFill>
-          <a:ln w="6350">
+          <a:ln w="12700">
             <a:solidFill>
-              <a:srgbClr val="1C4A73"/>
+              <a:srgbClr val="D8E0E8"/>
             </a:solidFill>
             <a:prstDash val="solid"/>
           </a:ln>
@@ -10095,24 +11652,65 @@
       </p:sp>
       <p:sp>
         <p:nvSpPr>
-          <p:cNvPr id="7" name="Shape 5"/>
-          <p:cNvSpPr/>
-          <p:nvPr/>
-        </p:nvSpPr>
-        <p:spPr>
-          <a:xfrm>
-            <a:off x="2990088" y="4206240"/>
-            <a:ext cx="310896" cy="310896"/>
-          </a:xfrm>
-          <a:prstGeom prst="rect">
-            <a:avLst/>
+          <p:cNvPr id="7" name="Text 5"/>
+          <p:cNvSpPr/>
+          <p:nvPr/>
+        </p:nvSpPr>
+        <p:spPr>
+          <a:xfrm>
+            <a:off x="822960" y="3566160"/>
+            <a:ext cx="7589520" cy="457200"/>
+          </a:xfrm>
+          <a:prstGeom prst="rect">
+            <a:avLst/>
+          </a:prstGeom>
+          <a:noFill/>
+          <a:ln/>
+        </p:spPr>
+        <p:txBody>
+          <a:bodyPr wrap="square" lIns="0" tIns="0" rIns="0" bIns="0" rtlCol="0" anchor="ctr"/>
+          <a:lstStyle/>
+          <a:p>
+            <a:pPr algn="ctr" indent="0" marL="0">
+              <a:buNone/>
+            </a:pPr>
+            <a:r>
+              <a:rPr lang="en-US" sz="1300" dirty="0">
+                <a:solidFill>
+                  <a:srgbClr val="64748B"/>
+                </a:solidFill>
+                <a:latin typeface="Calibri" pitchFamily="34" charset="0"/>
+                <a:ea typeface="Calibri" pitchFamily="34" charset="-122"/>
+                <a:cs typeface="Calibri" pitchFamily="34" charset="-120"/>
+              </a:rPr>
+              <a:t>(Genera con notebook 02 → outputs/segmentation/)</a:t>
+            </a:r>
+            <a:endParaRPr lang="en-US" sz="1300" dirty="0"/>
+          </a:p>
+        </p:txBody>
+      </p:sp>
+      <p:sp>
+        <p:nvSpPr>
+          <p:cNvPr id="8" name="Shape 6"/>
+          <p:cNvSpPr/>
+          <p:nvPr/>
+        </p:nvSpPr>
+        <p:spPr>
+          <a:xfrm>
+            <a:off x="8686800" y="1920240"/>
+            <a:ext cx="2880360" cy="3657600"/>
+          </a:xfrm>
+          <a:prstGeom prst="roundRect">
+            <a:avLst>
+              <a:gd name="adj" fmla="val 2540"/>
+            </a:avLst>
           </a:prstGeom>
           <a:solidFill>
-            <a:srgbClr val="2E8B57"/>
+            <a:srgbClr val="0F2A43"/>
           </a:solidFill>
-          <a:ln w="6350">
+          <a:ln w="12700">
             <a:solidFill>
-              <a:srgbClr val="1C4A73"/>
+              <a:srgbClr val="0F2A43"/>
             </a:solidFill>
             <a:prstDash val="solid"/>
           </a:ln>
@@ -10120,157 +11718,152 @@
       </p:sp>
       <p:sp>
         <p:nvSpPr>
-          <p:cNvPr id="8" name="Shape 6"/>
-          <p:cNvSpPr/>
-          <p:nvPr/>
-        </p:nvSpPr>
-        <p:spPr>
-          <a:xfrm>
-            <a:off x="3374136" y="4206240"/>
-            <a:ext cx="310896" cy="310896"/>
-          </a:xfrm>
-          <a:prstGeom prst="rect">
-            <a:avLst/>
-          </a:prstGeom>
-          <a:solidFill>
-            <a:srgbClr val="1C4A73"/>
-          </a:solidFill>
-          <a:ln w="6350">
-            <a:solidFill>
-              <a:srgbClr val="1C4A73"/>
-            </a:solidFill>
-            <a:prstDash val="solid"/>
-          </a:ln>
-        </p:spPr>
-      </p:sp>
-      <p:sp>
-        <p:nvSpPr>
-          <p:cNvPr id="9" name="Shape 7"/>
-          <p:cNvSpPr/>
-          <p:nvPr/>
-        </p:nvSpPr>
-        <p:spPr>
-          <a:xfrm>
-            <a:off x="3758184" y="4206240"/>
-            <a:ext cx="310896" cy="310896"/>
-          </a:xfrm>
-          <a:prstGeom prst="rect">
-            <a:avLst/>
-          </a:prstGeom>
-          <a:solidFill>
-            <a:srgbClr val="2E8B57"/>
-          </a:solidFill>
-          <a:ln w="6350">
-            <a:solidFill>
-              <a:srgbClr val="1C4A73"/>
-            </a:solidFill>
-            <a:prstDash val="solid"/>
-          </a:ln>
-        </p:spPr>
-      </p:sp>
-      <p:sp>
-        <p:nvSpPr>
-          <p:cNvPr id="10" name="Shape 8"/>
-          <p:cNvSpPr/>
-          <p:nvPr/>
-        </p:nvSpPr>
-        <p:spPr>
-          <a:xfrm>
-            <a:off x="4142232" y="4206240"/>
-            <a:ext cx="310896" cy="310896"/>
-          </a:xfrm>
-          <a:prstGeom prst="rect">
-            <a:avLst/>
-          </a:prstGeom>
-          <a:solidFill>
-            <a:srgbClr val="1C4A73"/>
-          </a:solidFill>
-          <a:ln w="6350">
-            <a:solidFill>
-              <a:srgbClr val="1C4A73"/>
-            </a:solidFill>
-            <a:prstDash val="solid"/>
-          </a:ln>
-        </p:spPr>
-      </p:sp>
-      <p:sp>
-        <p:nvSpPr>
-          <p:cNvPr id="11" name="Shape 9"/>
-          <p:cNvSpPr/>
-          <p:nvPr/>
-        </p:nvSpPr>
-        <p:spPr>
-          <a:xfrm>
-            <a:off x="4526280" y="4206240"/>
-            <a:ext cx="310896" cy="310896"/>
-          </a:xfrm>
-          <a:prstGeom prst="rect">
-            <a:avLst/>
-          </a:prstGeom>
-          <a:solidFill>
-            <a:srgbClr val="2E8B57"/>
-          </a:solidFill>
-          <a:ln w="6350">
-            <a:solidFill>
-              <a:srgbClr val="1C4A73"/>
-            </a:solidFill>
-            <a:prstDash val="solid"/>
-          </a:ln>
-        </p:spPr>
-      </p:sp>
-      <p:sp>
-        <p:nvSpPr>
-          <p:cNvPr id="12" name="Shape 10"/>
-          <p:cNvSpPr/>
-          <p:nvPr/>
-        </p:nvSpPr>
-        <p:spPr>
-          <a:xfrm>
-            <a:off x="4910328" y="4206240"/>
-            <a:ext cx="310896" cy="310896"/>
-          </a:xfrm>
-          <a:prstGeom prst="rect">
-            <a:avLst/>
-          </a:prstGeom>
-          <a:solidFill>
-            <a:srgbClr val="1C4A73"/>
-          </a:solidFill>
-          <a:ln w="6350">
-            <a:solidFill>
-              <a:srgbClr val="1C4A73"/>
-            </a:solidFill>
-            <a:prstDash val="solid"/>
-          </a:ln>
-        </p:spPr>
-      </p:sp>
-      <p:sp>
-        <p:nvSpPr>
-          <p:cNvPr id="13" name="Shape 11"/>
-          <p:cNvSpPr/>
-          <p:nvPr/>
-        </p:nvSpPr>
-        <p:spPr>
-          <a:xfrm>
-            <a:off x="5294376" y="4206240"/>
-            <a:ext cx="310896" cy="310896"/>
-          </a:xfrm>
-          <a:prstGeom prst="rect">
-            <a:avLst/>
-          </a:prstGeom>
-          <a:solidFill>
-            <a:srgbClr val="2E8B57"/>
-          </a:solidFill>
-          <a:ln w="6350">
-            <a:solidFill>
-              <a:srgbClr val="1C4A73"/>
-            </a:solidFill>
-            <a:prstDash val="solid"/>
-          </a:ln>
-        </p:spPr>
-      </p:sp>
-      <p:sp>
-        <p:nvSpPr>
-          <p:cNvPr id="14" name="Text 12"/>
+          <p:cNvPr id="9" name="Text 7"/>
+          <p:cNvSpPr/>
+          <p:nvPr/>
+        </p:nvSpPr>
+        <p:spPr>
+          <a:xfrm>
+            <a:off x="8915400" y="2148840"/>
+            <a:ext cx="2468880" cy="365760"/>
+          </a:xfrm>
+          <a:prstGeom prst="rect">
+            <a:avLst/>
+          </a:prstGeom>
+          <a:noFill/>
+          <a:ln/>
+        </p:spPr>
+        <p:txBody>
+          <a:bodyPr wrap="square" lIns="0" tIns="0" rIns="0" bIns="0" rtlCol="0" anchor="ctr"/>
+          <a:lstStyle/>
+          <a:p>
+            <a:pPr indent="0" marL="0">
+              <a:buNone/>
+            </a:pPr>
+            <a:r>
+              <a:rPr lang="en-US" sz="1600" b="1" dirty="0">
+                <a:solidFill>
+                  <a:srgbClr val="FFFFFF"/>
+                </a:solidFill>
+                <a:latin typeface="Georgia" pitchFamily="34" charset="0"/>
+                <a:ea typeface="Georgia" pitchFamily="34" charset="-122"/>
+                <a:cs typeface="Georgia" pitchFamily="34" charset="-120"/>
+              </a:rPr>
+              <a:t>YOLO-seg + SAHI</a:t>
+            </a:r>
+            <a:endParaRPr lang="en-US" sz="1600" dirty="0"/>
+          </a:p>
+        </p:txBody>
+      </p:sp>
+      <p:sp>
+        <p:nvSpPr>
+          <p:cNvPr id="10" name="Text 8"/>
+          <p:cNvSpPr/>
+          <p:nvPr/>
+        </p:nvSpPr>
+        <p:spPr>
+          <a:xfrm>
+            <a:off x="8915400" y="2651760"/>
+            <a:ext cx="2468880" cy="2743200"/>
+          </a:xfrm>
+          <a:prstGeom prst="rect">
+            <a:avLst/>
+          </a:prstGeom>
+          <a:noFill/>
+          <a:ln/>
+        </p:spPr>
+        <p:txBody>
+          <a:bodyPr wrap="square" lIns="0" tIns="0" rIns="0" bIns="0" rtlCol="0" anchor="ctr"/>
+          <a:lstStyle/>
+          <a:p>
+            <a:pPr marL="342900" indent="-342900">
+              <a:spcAft>
+                <a:spcPts val="900"/>
+              </a:spcAft>
+              <a:buSzPct val="100000"/>
+              <a:buChar char="•"/>
+            </a:pPr>
+            <a:r>
+              <a:rPr lang="en-US" sz="1250" dirty="0">
+                <a:solidFill>
+                  <a:srgbClr val="CADCFC"/>
+                </a:solidFill>
+                <a:latin typeface="Calibri" pitchFamily="34" charset="0"/>
+                <a:ea typeface="Calibri" pitchFamily="34" charset="-122"/>
+                <a:cs typeface="Calibri" pitchFamily="34" charset="-120"/>
+              </a:rPr>
+              <a:t>Mismo pipeline, modelo -seg.</a:t>
+            </a:r>
+            <a:endParaRPr lang="en-US" sz="1250" dirty="0"/>
+          </a:p>
+          <a:p>
+            <a:pPr marL="342900" indent="-342900">
+              <a:spcAft>
+                <a:spcPts val="900"/>
+              </a:spcAft>
+              <a:buSzPct val="100000"/>
+              <a:buChar char="•"/>
+            </a:pPr>
+            <a:r>
+              <a:rPr lang="en-US" sz="1250" dirty="0">
+                <a:solidFill>
+                  <a:srgbClr val="CADCFC"/>
+                </a:solidFill>
+                <a:latin typeface="Calibri" pitchFamily="34" charset="0"/>
+                <a:ea typeface="Calibri" pitchFamily="34" charset="-122"/>
+                <a:cs typeface="Calibri" pitchFamily="34" charset="-120"/>
+              </a:rPr>
+              <a:t>Máscaras a resolución nativa por slice.</a:t>
+            </a:r>
+            <a:endParaRPr lang="en-US" sz="1250" dirty="0"/>
+          </a:p>
+          <a:p>
+            <a:pPr marL="342900" indent="-342900">
+              <a:spcAft>
+                <a:spcPts val="900"/>
+              </a:spcAft>
+              <a:buSzPct val="100000"/>
+              <a:buChar char="•"/>
+            </a:pPr>
+            <a:r>
+              <a:rPr lang="en-US" sz="1250" dirty="0">
+                <a:solidFill>
+                  <a:srgbClr val="CADCFC"/>
+                </a:solidFill>
+                <a:latin typeface="Calibri" pitchFamily="34" charset="0"/>
+                <a:ea typeface="Calibri" pitchFamily="34" charset="-122"/>
+                <a:cs typeface="Calibri" pitchFamily="34" charset="-120"/>
+              </a:rPr>
+              <a:t>Instancias pequeñas que antes no se segmentaban.</a:t>
+            </a:r>
+            <a:endParaRPr lang="en-US" sz="1250" dirty="0"/>
+          </a:p>
+          <a:p>
+            <a:pPr marL="342900" indent="-342900">
+              <a:spcAft>
+                <a:spcPts val="900"/>
+              </a:spcAft>
+              <a:buSzPct val="100000"/>
+              <a:buChar char="•"/>
+            </a:pPr>
+            <a:r>
+              <a:rPr lang="en-US" sz="1250" i="1" dirty="0">
+                <a:solidFill>
+                  <a:srgbClr val="9FB3C8"/>
+                </a:solidFill>
+                <a:latin typeface="Calibri" pitchFamily="34" charset="0"/>
+                <a:ea typeface="Calibri" pitchFamily="34" charset="-122"/>
+                <a:cs typeface="Calibri" pitchFamily="34" charset="-120"/>
+              </a:rPr>
+              <a:t>Cualitativo: VisDrone no trae máscaras GT.</a:t>
+            </a:r>
+            <a:endParaRPr lang="en-US" sz="1250" dirty="0"/>
+          </a:p>
+        </p:txBody>
+      </p:sp>
+      <p:sp>
+        <p:nvSpPr>
+          <p:cNvPr id="11" name="Text 9"/>
           <p:cNvSpPr/>
           <p:nvPr/>
         </p:nvSpPr>
@@ -10295,7 +11888,7 @@
             <a:r>
               <a:rPr lang="en-US" sz="900" dirty="0">
                 <a:solidFill>
-                  <a:srgbClr val="9FB3C8"/>
+                  <a:srgbClr val="64748B"/>
                 </a:solidFill>
                 <a:latin typeface="Calibri" pitchFamily="34" charset="0"/>
                 <a:ea typeface="Calibri" pitchFamily="34" charset="-122"/>
@@ -10309,7 +11902,7 @@
       </p:sp>
       <p:sp>
         <p:nvSpPr>
-          <p:cNvPr id="15" name="Text 13"/>
+          <p:cNvPr id="12" name="Text 10"/>
           <p:cNvSpPr/>
           <p:nvPr/>
         </p:nvSpPr>
@@ -10334,7 +11927,7 @@
             <a:r>
               <a:rPr lang="en-US" sz="900" dirty="0">
                 <a:solidFill>
-                  <a:srgbClr val="9FB3C8"/>
+                  <a:srgbClr val="64748B"/>
                 </a:solidFill>
                 <a:latin typeface="Calibri" pitchFamily="34" charset="0"/>
                 <a:ea typeface="Calibri" pitchFamily="34" charset="-122"/>
@@ -10405,13 +11998,13 @@
             <a:r>
               <a:rPr lang="en-US" sz="1300" b="1" spc="300" kern="0" dirty="0">
                 <a:solidFill>
-                  <a:srgbClr val="2E8B57"/>
-                </a:solidFill>
-                <a:latin typeface="Calibri" pitchFamily="34" charset="0"/>
-                <a:ea typeface="Calibri" pitchFamily="34" charset="-122"/>
-                <a:cs typeface="Calibri" pitchFamily="34" charset="-120"/>
-              </a:rPr>
-              <a:t>BENCHMARK</a:t>
+                  <a:srgbClr val="E8A93B"/>
+                </a:solidFill>
+                <a:latin typeface="Calibri" pitchFamily="34" charset="0"/>
+                <a:ea typeface="Calibri" pitchFamily="34" charset="-122"/>
+                <a:cs typeface="Calibri" pitchFamily="34" charset="-120"/>
+              </a:rPr>
+              <a:t>NIVEL 6 · ENTRENAR EN EL DOMINIO</a:t>
             </a:r>
             <a:endParaRPr lang="en-US" sz="1300" dirty="0"/>
           </a:p>
@@ -10419,14 +12012,39 @@
       </p:sp>
       <p:sp>
         <p:nvSpPr>
-          <p:cNvPr id="3" name="Text 1"/>
-          <p:cNvSpPr/>
-          <p:nvPr/>
-        </p:nvSpPr>
-        <p:spPr>
-          <a:xfrm>
-            <a:off x="640080" y="841248"/>
-            <a:ext cx="10972800" cy="868680"/>
+          <p:cNvPr id="3" name="Shape 1"/>
+          <p:cNvSpPr/>
+          <p:nvPr/>
+        </p:nvSpPr>
+        <p:spPr>
+          <a:xfrm>
+            <a:off x="10698480" y="502920"/>
+            <a:ext cx="914400" cy="914400"/>
+          </a:xfrm>
+          <a:prstGeom prst="ellipse">
+            <a:avLst/>
+          </a:prstGeom>
+          <a:solidFill>
+            <a:srgbClr val="0F2A43"/>
+          </a:solidFill>
+          <a:ln w="12700">
+            <a:solidFill>
+              <a:srgbClr val="0F2A43"/>
+            </a:solidFill>
+            <a:prstDash val="solid"/>
+          </a:ln>
+        </p:spPr>
+      </p:sp>
+      <p:sp>
+        <p:nvSpPr>
+          <p:cNvPr id="4" name="Text 2"/>
+          <p:cNvSpPr/>
+          <p:nvPr/>
+        </p:nvSpPr>
+        <p:spPr>
+          <a:xfrm>
+            <a:off x="10698480" y="502920"/>
+            <a:ext cx="914400" cy="914400"/>
           </a:xfrm>
           <a:prstGeom prst="rect">
             <a:avLst/>
@@ -10438,54 +12056,173 @@
           <a:bodyPr wrap="square" lIns="0" tIns="0" rIns="0" bIns="0" rtlCol="0" anchor="ctr"/>
           <a:lstStyle/>
           <a:p>
-            <a:pPr indent="0" marL="0">
-              <a:buNone/>
-            </a:pPr>
-            <a:r>
-              <a:rPr lang="en-US" sz="3000" b="1" dirty="0">
-                <a:solidFill>
-                  <a:srgbClr val="1E293B"/>
+            <a:pPr algn="ctr" indent="0" marL="0">
+              <a:buNone/>
+            </a:pPr>
+            <a:r>
+              <a:rPr lang="en-US" sz="2200" b="1" dirty="0">
+                <a:solidFill>
+                  <a:srgbClr val="E8A93B"/>
                 </a:solidFill>
                 <a:latin typeface="Georgia" pitchFamily="34" charset="0"/>
                 <a:ea typeface="Georgia" pitchFamily="34" charset="-122"/>
                 <a:cs typeface="Georgia" pitchFamily="34" charset="-120"/>
               </a:rPr>
-              <a:t>YOLO vs YOLO + SAHI (mAP COCO)</a:t>
+              <a:t>N6</a:t>
+            </a:r>
+            <a:endParaRPr lang="en-US" sz="2200" dirty="0"/>
+          </a:p>
+        </p:txBody>
+      </p:sp>
+      <p:sp>
+        <p:nvSpPr>
+          <p:cNvPr id="5" name="Text 3"/>
+          <p:cNvSpPr/>
+          <p:nvPr/>
+        </p:nvSpPr>
+        <p:spPr>
+          <a:xfrm>
+            <a:off x="640080" y="841248"/>
+            <a:ext cx="10972800" cy="868680"/>
+          </a:xfrm>
+          <a:prstGeom prst="rect">
+            <a:avLst/>
+          </a:prstGeom>
+          <a:noFill/>
+          <a:ln/>
+        </p:spPr>
+        <p:txBody>
+          <a:bodyPr wrap="square" lIns="0" tIns="0" rIns="0" bIns="0" rtlCol="0" anchor="ctr"/>
+          <a:lstStyle/>
+          <a:p>
+            <a:pPr indent="0" marL="0">
+              <a:buNone/>
+            </a:pPr>
+            <a:r>
+              <a:rPr lang="en-US" sz="3000" b="1" dirty="0">
+                <a:solidFill>
+                  <a:srgbClr val="1E293B"/>
+                </a:solidFill>
+                <a:latin typeface="Georgia" pitchFamily="34" charset="0"/>
+                <a:ea typeface="Georgia" pitchFamily="34" charset="-122"/>
+                <a:cs typeface="Georgia" pitchFamily="34" charset="-120"/>
+              </a:rPr>
+              <a:t>El paso que desbloquea el mAP real</a:t>
             </a:r>
             <a:endParaRPr lang="en-US" sz="3000" dirty="0"/>
           </a:p>
         </p:txBody>
       </p:sp>
-      <p:graphicFrame>
-        <p:nvGraphicFramePr>
-          <p:cNvPr id="4" name="Chart 0" descr=""/>
-          <p:cNvGraphicFramePr/>
-          <p:nvPr/>
-        </p:nvGraphicFramePr>
-        <p:xfrm>
-          <a:off x="640080" y="1920240"/>
-          <a:ext cx="7315200" cy="3840480"/>
-        </p:xfrm>
-        <a:graphic xmlns:a="http://schemas.openxmlformats.org/drawingml/2006/main">
-          <a:graphicData uri="http://schemas.openxmlformats.org/drawingml/2006/chart">
-            <c:chart xmlns:c="http://schemas.openxmlformats.org/drawingml/2006/chart" r:id="rId1"/>
-          </a:graphicData>
-        </a:graphic>
-      </p:graphicFrame>
-      <p:sp>
-        <p:nvSpPr>
-          <p:cNvPr id="5" name="Shape 2"/>
-          <p:cNvSpPr/>
-          <p:nvPr/>
-        </p:nvSpPr>
-        <p:spPr>
-          <a:xfrm>
-            <a:off x="8321040" y="2103120"/>
-            <a:ext cx="3246120" cy="3383280"/>
+      <p:sp>
+        <p:nvSpPr>
+          <p:cNvPr id="6" name="Text 4"/>
+          <p:cNvSpPr/>
+          <p:nvPr/>
+        </p:nvSpPr>
+        <p:spPr>
+          <a:xfrm>
+            <a:off x="640080" y="1920240"/>
+            <a:ext cx="5760720" cy="2743200"/>
+          </a:xfrm>
+          <a:prstGeom prst="rect">
+            <a:avLst/>
+          </a:prstGeom>
+          <a:noFill/>
+          <a:ln/>
+        </p:spPr>
+        <p:txBody>
+          <a:bodyPr wrap="square" lIns="0" tIns="0" rIns="0" bIns="0" rtlCol="0" anchor="ctr"/>
+          <a:lstStyle/>
+          <a:p>
+            <a:pPr indent="0" marL="0">
+              <a:buNone/>
+            </a:pPr>
+            <a:r>
+              <a:rPr lang="en-US" sz="1600" b="1" dirty="0">
+                <a:solidFill>
+                  <a:srgbClr val="E4572E"/>
+                </a:solidFill>
+                <a:latin typeface="Calibri" pitchFamily="34" charset="0"/>
+                <a:ea typeface="Calibri" pitchFamily="34" charset="-122"/>
+                <a:cs typeface="Calibri" pitchFamily="34" charset="-120"/>
+              </a:rPr>
+              <a:t>Un modelo COCO evaluado en VisDrone da mAP ≈ 0</a:t>
+            </a:r>
+            <a:endParaRPr lang="en-US" sz="1600" dirty="0"/>
+          </a:p>
+          <a:p>
+            <a:pPr indent="0" marL="0">
+              <a:buNone/>
+            </a:pPr>
+            <a:r>
+              <a:rPr lang="en-US" sz="1300" dirty="0">
+                <a:solidFill>
+                  <a:srgbClr val="64748B"/>
+                </a:solidFill>
+                <a:latin typeface="Calibri" pitchFamily="34" charset="0"/>
+                <a:ea typeface="Calibri" pitchFamily="34" charset="-122"/>
+                <a:cs typeface="Calibri" pitchFamily="34" charset="-120"/>
+              </a:rPr>
+              <a:t>Las 80 clases de COCO no coinciden con las 10 de VisDrone (zero-shot).</a:t>
+            </a:r>
+            <a:endParaRPr lang="en-US" sz="1600" dirty="0"/>
+          </a:p>
+          <a:p>
+            <a:pPr indent="0" marL="0">
+              <a:buNone/>
+            </a:pPr>
+            <a:endParaRPr lang="en-US" sz="1600" dirty="0"/>
+          </a:p>
+          <a:p>
+            <a:pPr indent="0" marL="0">
+              <a:buNone/>
+            </a:pPr>
+            <a:r>
+              <a:rPr lang="en-US" sz="1600" b="1" dirty="0">
+                <a:solidFill>
+                  <a:srgbClr val="2E8B57"/>
+                </a:solidFill>
+                <a:latin typeface="Calibri" pitchFamily="34" charset="0"/>
+                <a:ea typeface="Calibri" pitchFamily="34" charset="-122"/>
+                <a:cs typeface="Calibri" pitchFamily="34" charset="-120"/>
+              </a:rPr>
+              <a:t>Fine-tune en VisDrone alinea las clases</a:t>
+            </a:r>
+            <a:endParaRPr lang="en-US" sz="1600" dirty="0"/>
+          </a:p>
+          <a:p>
+            <a:pPr indent="0" marL="0">
+              <a:buNone/>
+            </a:pPr>
+            <a:r>
+              <a:rPr lang="en-US" sz="1300" dirty="0">
+                <a:solidFill>
+                  <a:srgbClr val="64748B"/>
+                </a:solidFill>
+                <a:latin typeface="Calibri" pitchFamily="34" charset="0"/>
+                <a:ea typeface="Calibri" pitchFamily="34" charset="-122"/>
+                <a:cs typeface="Calibri" pitchFamily="34" charset="-120"/>
+              </a:rPr>
+              <a:t>Una línea: yolo train data=VisDrone.yaml. Luego SAHI exprime el AP_small.</a:t>
+            </a:r>
+            <a:endParaRPr lang="en-US" sz="1600" dirty="0"/>
+          </a:p>
+        </p:txBody>
+      </p:sp>
+      <p:sp>
+        <p:nvSpPr>
+          <p:cNvPr id="7" name="Shape 5"/>
+          <p:cNvSpPr/>
+          <p:nvPr/>
+        </p:nvSpPr>
+        <p:spPr>
+          <a:xfrm>
+            <a:off x="6766560" y="2103120"/>
+            <a:ext cx="2286000" cy="1417320"/>
           </a:xfrm>
           <a:prstGeom prst="roundRect">
             <a:avLst>
-              <a:gd name="adj" fmla="val 2254"/>
+              <a:gd name="adj" fmla="val 5161"/>
             </a:avLst>
           </a:prstGeom>
           <a:solidFill>
@@ -10497,18 +12234,25 @@
             </a:solidFill>
             <a:prstDash val="solid"/>
           </a:ln>
-        </p:spPr>
-      </p:sp>
-      <p:sp>
-        <p:nvSpPr>
-          <p:cNvPr id="6" name="Text 3"/>
-          <p:cNvSpPr/>
-          <p:nvPr/>
-        </p:nvSpPr>
-        <p:spPr>
-          <a:xfrm>
-            <a:off x="8549640" y="2286000"/>
-            <a:ext cx="2834640" cy="365760"/>
+          <a:effectLst>
+            <a:outerShdw sx="100000" sy="100000" kx="0" ky="0" algn="bl" rotWithShape="0" blurRad="114300" dist="38100" dir="5400000">
+              <a:srgbClr val="000000">
+                <a:alpha val="18000"/>
+              </a:srgbClr>
+            </a:outerShdw>
+          </a:effectLst>
+        </p:spPr>
+      </p:sp>
+      <p:sp>
+        <p:nvSpPr>
+          <p:cNvPr id="8" name="Text 6"/>
+          <p:cNvSpPr/>
+          <p:nvPr/>
+        </p:nvSpPr>
+        <p:spPr>
+          <a:xfrm>
+            <a:off x="6766560" y="2212848"/>
+            <a:ext cx="2286000" cy="777240"/>
           </a:xfrm>
           <a:prstGeom prst="rect">
             <a:avLst/>
@@ -10520,34 +12264,131 @@
           <a:bodyPr wrap="square" lIns="0" tIns="0" rIns="0" bIns="0" rtlCol="0" anchor="ctr"/>
           <a:lstStyle/>
           <a:p>
-            <a:pPr indent="0" marL="0">
-              <a:buNone/>
-            </a:pPr>
-            <a:r>
-              <a:rPr lang="en-US" sz="1600" b="1" dirty="0">
-                <a:solidFill>
-                  <a:srgbClr val="1E293B"/>
+            <a:pPr algn="ctr" indent="0" marL="0">
+              <a:buNone/>
+            </a:pPr>
+            <a:r>
+              <a:rPr lang="en-US" sz="4000" b="1" dirty="0">
+                <a:solidFill>
+                  <a:srgbClr val="E4572E"/>
                 </a:solidFill>
                 <a:latin typeface="Georgia" pitchFamily="34" charset="0"/>
                 <a:ea typeface="Georgia" pitchFamily="34" charset="-122"/>
                 <a:cs typeface="Georgia" pitchFamily="34" charset="-120"/>
               </a:rPr>
-              <a:t>Lectura rápida</a:t>
-            </a:r>
-            <a:endParaRPr lang="en-US" sz="1600" dirty="0"/>
-          </a:p>
-        </p:txBody>
-      </p:sp>
-      <p:sp>
-        <p:nvSpPr>
-          <p:cNvPr id="7" name="Text 4"/>
-          <p:cNvSpPr/>
-          <p:nvPr/>
-        </p:nvSpPr>
-        <p:spPr>
-          <a:xfrm>
-            <a:off x="8549640" y="2788920"/>
-            <a:ext cx="2834640" cy="2468880"/>
+              <a:t>≈ 0.00</a:t>
+            </a:r>
+            <a:endParaRPr lang="en-US" sz="4000" dirty="0"/>
+          </a:p>
+        </p:txBody>
+      </p:sp>
+      <p:sp>
+        <p:nvSpPr>
+          <p:cNvPr id="9" name="Text 7"/>
+          <p:cNvSpPr/>
+          <p:nvPr/>
+        </p:nvSpPr>
+        <p:spPr>
+          <a:xfrm>
+            <a:off x="6903720" y="2999232"/>
+            <a:ext cx="2011680" cy="457200"/>
+          </a:xfrm>
+          <a:prstGeom prst="rect">
+            <a:avLst/>
+          </a:prstGeom>
+          <a:noFill/>
+          <a:ln/>
+        </p:spPr>
+        <p:txBody>
+          <a:bodyPr wrap="square" lIns="0" tIns="0" rIns="0" bIns="0" rtlCol="0" anchor="t"/>
+          <a:lstStyle/>
+          <a:p>
+            <a:pPr algn="ctr" indent="0" marL="0">
+              <a:buNone/>
+            </a:pPr>
+            <a:r>
+              <a:rPr lang="en-US" sz="1200" dirty="0">
+                <a:solidFill>
+                  <a:srgbClr val="64748B"/>
+                </a:solidFill>
+                <a:latin typeface="Calibri" pitchFamily="34" charset="0"/>
+                <a:ea typeface="Calibri" pitchFamily="34" charset="-122"/>
+                <a:cs typeface="Calibri" pitchFamily="34" charset="-120"/>
+              </a:rPr>
+              <a:t>mAP zero-shot (COCO)</a:t>
+            </a:r>
+            <a:endParaRPr lang="en-US" sz="1200" dirty="0"/>
+          </a:p>
+        </p:txBody>
+      </p:sp>
+      <p:sp>
+        <p:nvSpPr>
+          <p:cNvPr id="10" name="Shape 8"/>
+          <p:cNvSpPr/>
+          <p:nvPr/>
+        </p:nvSpPr>
+        <p:spPr>
+          <a:xfrm>
+            <a:off x="9189720" y="2788920"/>
+            <a:ext cx="502920" cy="0"/>
+          </a:xfrm>
+          <a:prstGeom prst="line">
+            <a:avLst/>
+          </a:prstGeom>
+          <a:noFill/>
+          <a:ln w="25400">
+            <a:solidFill>
+              <a:srgbClr val="1E293B"/>
+            </a:solidFill>
+            <a:prstDash val="solid"/>
+            <a:tailEnd type="triangle"/>
+          </a:ln>
+        </p:spPr>
+      </p:sp>
+      <p:sp>
+        <p:nvSpPr>
+          <p:cNvPr id="11" name="Shape 9"/>
+          <p:cNvSpPr/>
+          <p:nvPr/>
+        </p:nvSpPr>
+        <p:spPr>
+          <a:xfrm>
+            <a:off x="9326880" y="2103120"/>
+            <a:ext cx="2286000" cy="1417320"/>
+          </a:xfrm>
+          <a:prstGeom prst="roundRect">
+            <a:avLst>
+              <a:gd name="adj" fmla="val 5161"/>
+            </a:avLst>
+          </a:prstGeom>
+          <a:solidFill>
+            <a:srgbClr val="F4F7FA"/>
+          </a:solidFill>
+          <a:ln w="12700">
+            <a:solidFill>
+              <a:srgbClr val="D8E0E8"/>
+            </a:solidFill>
+            <a:prstDash val="solid"/>
+          </a:ln>
+          <a:effectLst>
+            <a:outerShdw sx="100000" sy="100000" kx="0" ky="0" algn="bl" rotWithShape="0" blurRad="114300" dist="38100" dir="5400000">
+              <a:srgbClr val="000000">
+                <a:alpha val="18000"/>
+              </a:srgbClr>
+            </a:outerShdw>
+          </a:effectLst>
+        </p:spPr>
+      </p:sp>
+      <p:sp>
+        <p:nvSpPr>
+          <p:cNvPr id="12" name="Text 10"/>
+          <p:cNvSpPr/>
+          <p:nvPr/>
+        </p:nvSpPr>
+        <p:spPr>
+          <a:xfrm>
+            <a:off x="9326880" y="2212848"/>
+            <a:ext cx="2286000" cy="777240"/>
           </a:xfrm>
           <a:prstGeom prst="rect">
             <a:avLst/>
@@ -10559,112 +12400,158 @@
           <a:bodyPr wrap="square" lIns="0" tIns="0" rIns="0" bIns="0" rtlCol="0" anchor="ctr"/>
           <a:lstStyle/>
           <a:p>
-            <a:pPr marL="342900" indent="-342900">
-              <a:spcAft>
-                <a:spcPts val="1000"/>
-              </a:spcAft>
-              <a:buSzPct val="100000"/>
-              <a:buChar char="•"/>
+            <a:pPr algn="ctr" indent="0" marL="0">
+              <a:buNone/>
+            </a:pPr>
+            <a:r>
+              <a:rPr lang="en-US" sz="4000" b="1" dirty="0">
+                <a:solidFill>
+                  <a:srgbClr val="2E8B57"/>
+                </a:solidFill>
+                <a:latin typeface="Georgia" pitchFamily="34" charset="0"/>
+                <a:ea typeface="Georgia" pitchFamily="34" charset="-122"/>
+                <a:cs typeface="Georgia" pitchFamily="34" charset="-120"/>
+              </a:rPr>
+              <a:t>0.22+</a:t>
+            </a:r>
+            <a:endParaRPr lang="en-US" sz="4000" dirty="0"/>
+          </a:p>
+        </p:txBody>
+      </p:sp>
+      <p:sp>
+        <p:nvSpPr>
+          <p:cNvPr id="13" name="Text 11"/>
+          <p:cNvSpPr/>
+          <p:nvPr/>
+        </p:nvSpPr>
+        <p:spPr>
+          <a:xfrm>
+            <a:off x="9464040" y="2999232"/>
+            <a:ext cx="2011680" cy="457200"/>
+          </a:xfrm>
+          <a:prstGeom prst="rect">
+            <a:avLst/>
+          </a:prstGeom>
+          <a:noFill/>
+          <a:ln/>
+        </p:spPr>
+        <p:txBody>
+          <a:bodyPr wrap="square" lIns="0" tIns="0" rIns="0" bIns="0" rtlCol="0" anchor="t"/>
+          <a:lstStyle/>
+          <a:p>
+            <a:pPr algn="ctr" indent="0" marL="0">
+              <a:buNone/>
+            </a:pPr>
+            <a:r>
+              <a:rPr lang="en-US" sz="1200" dirty="0">
+                <a:solidFill>
+                  <a:srgbClr val="64748B"/>
+                </a:solidFill>
+                <a:latin typeface="Calibri" pitchFamily="34" charset="0"/>
+                <a:ea typeface="Calibri" pitchFamily="34" charset="-122"/>
+                <a:cs typeface="Calibri" pitchFamily="34" charset="-120"/>
+              </a:rPr>
+              <a:t>mAP fine-tuned</a:t>
+            </a:r>
+            <a:endParaRPr lang="en-US" sz="1200" dirty="0"/>
+          </a:p>
+        </p:txBody>
+      </p:sp>
+      <p:sp>
+        <p:nvSpPr>
+          <p:cNvPr id="14" name="Text 12"/>
+          <p:cNvSpPr/>
+          <p:nvPr/>
+        </p:nvSpPr>
+        <p:spPr>
+          <a:xfrm>
+            <a:off x="6766560" y="3840480"/>
+            <a:ext cx="4846320" cy="457200"/>
+          </a:xfrm>
+          <a:prstGeom prst="rect">
+            <a:avLst/>
+          </a:prstGeom>
+          <a:noFill/>
+          <a:ln/>
+        </p:spPr>
+        <p:txBody>
+          <a:bodyPr wrap="square" lIns="0" tIns="0" rIns="0" bIns="0" rtlCol="0" anchor="ctr"/>
+          <a:lstStyle/>
+          <a:p>
+            <a:pPr algn="ctr" indent="0" marL="0">
+              <a:buNone/>
+            </a:pPr>
+            <a:r>
+              <a:rPr lang="en-US" sz="1300" i="1" dirty="0">
+                <a:solidFill>
+                  <a:srgbClr val="64748B"/>
+                </a:solidFill>
+                <a:latin typeface="Calibri" pitchFamily="34" charset="0"/>
+                <a:ea typeface="Calibri" pitchFamily="34" charset="-122"/>
+                <a:cs typeface="Calibri" pitchFamily="34" charset="-120"/>
+              </a:rPr>
+              <a:t>Por eso el notebook 00 entrena ANTES de medir.</a:t>
+            </a:r>
+            <a:endParaRPr lang="en-US" sz="1300" dirty="0"/>
+          </a:p>
+        </p:txBody>
+      </p:sp>
+      <p:sp>
+        <p:nvSpPr>
+          <p:cNvPr id="15" name="Text 13"/>
+          <p:cNvSpPr/>
+          <p:nvPr/>
+        </p:nvSpPr>
+        <p:spPr>
+          <a:xfrm>
+            <a:off x="640080" y="5212080"/>
+            <a:ext cx="10972800" cy="457200"/>
+          </a:xfrm>
+          <a:prstGeom prst="rect">
+            <a:avLst/>
+          </a:prstGeom>
+          <a:noFill/>
+          <a:ln/>
+        </p:spPr>
+        <p:txBody>
+          <a:bodyPr wrap="square" lIns="0" tIns="0" rIns="0" bIns="0" rtlCol="0" anchor="ctr"/>
+          <a:lstStyle/>
+          <a:p>
+            <a:pPr indent="0" marL="0">
+              <a:buNone/>
+            </a:pPr>
+            <a:r>
+              <a:rPr lang="en-US" sz="1300" b="1" dirty="0">
+                <a:solidFill>
+                  <a:srgbClr val="1E293B"/>
+                </a:solidFill>
+                <a:latin typeface="Calibri" pitchFamily="34" charset="0"/>
+                <a:ea typeface="Calibri" pitchFamily="34" charset="-122"/>
+                <a:cs typeface="Calibri" pitchFamily="34" charset="-120"/>
+              </a:rPr>
+              <a:t>Tip objetos pequeños: </a:t>
+            </a:r>
+            <a:pPr indent="0" marL="0">
+              <a:buNone/>
             </a:pPr>
             <a:r>
               <a:rPr lang="en-US" sz="1300" dirty="0">
                 <a:solidFill>
-                  <a:srgbClr val="1E293B"/>
-                </a:solidFill>
-                <a:latin typeface="Calibri" pitchFamily="34" charset="0"/>
-                <a:ea typeface="Calibri" pitchFamily="34" charset="-122"/>
-                <a:cs typeface="Calibri" pitchFamily="34" charset="-120"/>
-              </a:rPr>
-              <a:t>Mejora en todas las métricas.</a:t>
+                  <a:srgbClr val="64748B"/>
+                </a:solidFill>
+                <a:latin typeface="Calibri" pitchFamily="34" charset="0"/>
+                <a:ea typeface="Calibri" pitchFamily="34" charset="-122"/>
+                <a:cs typeface="Calibri" pitchFamily="34" charset="-120"/>
+              </a:rPr>
+              <a:t>entrena con imgsz mayor (960/1024) para afinar aún más lo diminuto.</a:t>
             </a:r>
             <a:endParaRPr lang="en-US" sz="1300" dirty="0"/>
           </a:p>
-          <a:p>
-            <a:pPr marL="342900" indent="-342900">
-              <a:spcAft>
-                <a:spcPts val="1000"/>
-              </a:spcAft>
-              <a:buSzPct val="100000"/>
-              <a:buChar char="•"/>
-            </a:pPr>
-            <a:r>
-              <a:rPr lang="en-US" sz="1300" dirty="0">
-                <a:solidFill>
-                  <a:srgbClr val="1E293B"/>
-                </a:solidFill>
-                <a:latin typeface="Calibri" pitchFamily="34" charset="0"/>
-                <a:ea typeface="Calibri" pitchFamily="34" charset="-122"/>
-                <a:cs typeface="Calibri" pitchFamily="34" charset="-120"/>
-              </a:rPr>
-              <a:t>El salto más grande está en el umbral estricto (.75).</a:t>
-            </a:r>
-            <a:endParaRPr lang="en-US" sz="1300" dirty="0"/>
-          </a:p>
-          <a:p>
-            <a:pPr marL="342900" indent="-342900">
-              <a:spcAft>
-                <a:spcPts val="1000"/>
-              </a:spcAft>
-              <a:buSzPct val="100000"/>
-              <a:buChar char="•"/>
-            </a:pPr>
-            <a:r>
-              <a:rPr lang="en-US" sz="1300" b="1" dirty="0">
-                <a:solidFill>
-                  <a:srgbClr val="2E8B57"/>
-                </a:solidFill>
-                <a:latin typeface="Calibri" pitchFamily="34" charset="0"/>
-                <a:ea typeface="Calibri" pitchFamily="34" charset="-122"/>
-                <a:cs typeface="Calibri" pitchFamily="34" charset="-120"/>
-              </a:rPr>
-              <a:t>SAHI = más recall sin perder precisión.</a:t>
-            </a:r>
-            <a:endParaRPr lang="en-US" sz="1300" dirty="0"/>
-          </a:p>
-        </p:txBody>
-      </p:sp>
-      <p:sp>
-        <p:nvSpPr>
-          <p:cNvPr id="8" name="Text 5"/>
-          <p:cNvSpPr/>
-          <p:nvPr/>
-        </p:nvSpPr>
-        <p:spPr>
-          <a:xfrm>
-            <a:off x="640080" y="6144768"/>
-            <a:ext cx="10972800" cy="274320"/>
-          </a:xfrm>
-          <a:prstGeom prst="rect">
-            <a:avLst/>
-          </a:prstGeom>
-          <a:noFill/>
-          <a:ln/>
-        </p:spPr>
-        <p:txBody>
-          <a:bodyPr wrap="square" lIns="0" tIns="0" rIns="0" bIns="0" rtlCol="0" anchor="ctr"/>
-          <a:lstStyle/>
-          <a:p>
-            <a:pPr indent="0" marL="0">
-              <a:buNone/>
-            </a:pPr>
-            <a:r>
-              <a:rPr lang="en-US" sz="900" i="1" dirty="0">
-                <a:solidFill>
-                  <a:srgbClr val="64748B"/>
-                </a:solidFill>
-                <a:latin typeface="Calibri" pitchFamily="34" charset="0"/>
-                <a:ea typeface="Calibri" pitchFamily="34" charset="-122"/>
-                <a:cs typeface="Calibri" pitchFamily="34" charset="-120"/>
-              </a:rPr>
-              <a:t>◆ Valores de referencia (yolo11s fine-tuned en VisDrone); reemplaza con tu corrida (notebook 02).</a:t>
-            </a:r>
-            <a:endParaRPr lang="en-US" sz="900" dirty="0"/>
-          </a:p>
-        </p:txBody>
-      </p:sp>
-      <p:sp>
-        <p:nvSpPr>
-          <p:cNvPr id="9" name="Text 6"/>
+        </p:txBody>
+      </p:sp>
+      <p:sp>
+        <p:nvSpPr>
+          <p:cNvPr id="16" name="Text 14"/>
           <p:cNvSpPr/>
           <p:nvPr/>
         </p:nvSpPr>
@@ -10703,7 +12590,7 @@
       </p:sp>
       <p:sp>
         <p:nvSpPr>
-          <p:cNvPr id="10" name="Text 7"/>
+          <p:cNvPr id="17" name="Text 15"/>
           <p:cNvSpPr/>
           <p:nvPr/>
         </p:nvSpPr>
@@ -11527,7 +13414,7 @@
     <p:bg>
       <p:bgPr>
         <a:solidFill>
-          <a:srgbClr val="FFFFFF"/>
+          <a:srgbClr val="0F2A43"/>
         </a:solidFill>
       </p:bgPr>
     </p:bg>
@@ -11547,14 +13434,39 @@
       </p:grpSpPr>
       <p:sp>
         <p:nvSpPr>
-          <p:cNvPr id="2" name="Text 0"/>
-          <p:cNvSpPr/>
-          <p:nvPr/>
-        </p:nvSpPr>
-        <p:spPr>
-          <a:xfrm>
-            <a:off x="640080" y="502920"/>
-            <a:ext cx="10058400" cy="320040"/>
+          <p:cNvPr id="2" name="Shape 0"/>
+          <p:cNvSpPr/>
+          <p:nvPr/>
+        </p:nvSpPr>
+        <p:spPr>
+          <a:xfrm>
+            <a:off x="822960" y="2331720"/>
+            <a:ext cx="1371600" cy="1371600"/>
+          </a:xfrm>
+          <a:prstGeom prst="ellipse">
+            <a:avLst/>
+          </a:prstGeom>
+          <a:solidFill>
+            <a:srgbClr val="2E8B57"/>
+          </a:solidFill>
+          <a:ln w="12700">
+            <a:solidFill>
+              <a:srgbClr val="2E8B57"/>
+            </a:solidFill>
+            <a:prstDash val="solid"/>
+          </a:ln>
+        </p:spPr>
+      </p:sp>
+      <p:sp>
+        <p:nvSpPr>
+          <p:cNvPr id="3" name="Text 1"/>
+          <p:cNvSpPr/>
+          <p:nvPr/>
+        </p:nvSpPr>
+        <p:spPr>
+          <a:xfrm>
+            <a:off x="822960" y="2331720"/>
+            <a:ext cx="1371600" cy="1371600"/>
           </a:xfrm>
           <a:prstGeom prst="rect">
             <a:avLst/>
@@ -11566,272 +13478,305 @@
           <a:bodyPr wrap="square" lIns="0" tIns="0" rIns="0" bIns="0" rtlCol="0" anchor="ctr"/>
           <a:lstStyle/>
           <a:p>
-            <a:pPr indent="0" marL="0">
-              <a:buNone/>
-            </a:pPr>
-            <a:r>
-              <a:rPr lang="en-US" sz="1300" b="1" spc="300" kern="0" dirty="0">
-                <a:solidFill>
-                  <a:srgbClr val="2E8B57"/>
-                </a:solidFill>
-                <a:latin typeface="Calibri" pitchFamily="34" charset="0"/>
-                <a:ea typeface="Calibri" pitchFamily="34" charset="-122"/>
-                <a:cs typeface="Calibri" pitchFamily="34" charset="-120"/>
-              </a:rPr>
-              <a:t>EL RESULTADO ESTRELLA</a:t>
-            </a:r>
-            <a:endParaRPr lang="en-US" sz="1300" dirty="0"/>
-          </a:p>
-        </p:txBody>
-      </p:sp>
-      <p:sp>
-        <p:nvSpPr>
-          <p:cNvPr id="3" name="Text 1"/>
-          <p:cNvSpPr/>
-          <p:nvPr/>
-        </p:nvSpPr>
-        <p:spPr>
-          <a:xfrm>
-            <a:off x="640080" y="841248"/>
-            <a:ext cx="10972800" cy="868680"/>
-          </a:xfrm>
-          <a:prstGeom prst="rect">
-            <a:avLst/>
-          </a:prstGeom>
-          <a:noFill/>
-          <a:ln/>
-        </p:spPr>
-        <p:txBody>
-          <a:bodyPr wrap="square" lIns="0" tIns="0" rIns="0" bIns="0" rtlCol="0" anchor="ctr"/>
-          <a:lstStyle/>
-          <a:p>
-            <a:pPr indent="0" marL="0">
-              <a:buNone/>
-            </a:pPr>
-            <a:r>
-              <a:rPr lang="en-US" sz="3000" b="1" dirty="0">
-                <a:solidFill>
-                  <a:srgbClr val="1E293B"/>
+            <a:pPr algn="ctr" indent="0" marL="0">
+              <a:buNone/>
+            </a:pPr>
+            <a:r>
+              <a:rPr lang="en-US" sz="4400" b="1" dirty="0">
+                <a:solidFill>
+                  <a:srgbClr val="FFFFFF"/>
                 </a:solidFill>
                 <a:latin typeface="Georgia" pitchFamily="34" charset="0"/>
                 <a:ea typeface="Georgia" pitchFamily="34" charset="-122"/>
                 <a:cs typeface="Georgia" pitchFamily="34" charset="-120"/>
               </a:rPr>
-              <a:t>Donde SAHI brilla: objetos pequeños</a:t>
-            </a:r>
-            <a:endParaRPr lang="en-US" sz="3000" dirty="0"/>
-          </a:p>
-        </p:txBody>
-      </p:sp>
-      <p:graphicFrame>
-        <p:nvGraphicFramePr>
-          <p:cNvPr id="4" name="Chart 0" descr=""/>
-          <p:cNvGraphicFramePr/>
-          <p:nvPr/>
-        </p:nvGraphicFramePr>
-        <p:xfrm>
-          <a:off x="640080" y="1920240"/>
-          <a:ext cx="7498080" cy="3840480"/>
-        </p:xfrm>
-        <a:graphic xmlns:a="http://schemas.openxmlformats.org/drawingml/2006/main">
-          <a:graphicData uri="http://schemas.openxmlformats.org/drawingml/2006/chart">
-            <c:chart xmlns:c="http://schemas.openxmlformats.org/drawingml/2006/chart" r:id="rId1"/>
-          </a:graphicData>
-        </a:graphic>
-      </p:graphicFrame>
-      <p:sp>
-        <p:nvSpPr>
-          <p:cNvPr id="5" name="Shape 2"/>
-          <p:cNvSpPr/>
-          <p:nvPr/>
-        </p:nvSpPr>
-        <p:spPr>
-          <a:xfrm>
-            <a:off x="8503920" y="2377440"/>
-            <a:ext cx="3017520" cy="1417320"/>
-          </a:xfrm>
-          <a:prstGeom prst="roundRect">
-            <a:avLst>
-              <a:gd name="adj" fmla="val 5161"/>
-            </a:avLst>
+              <a:t>05</a:t>
+            </a:r>
+            <a:endParaRPr lang="en-US" sz="4400" dirty="0"/>
+          </a:p>
+        </p:txBody>
+      </p:sp>
+      <p:sp>
+        <p:nvSpPr>
+          <p:cNvPr id="4" name="Text 2"/>
+          <p:cNvSpPr/>
+          <p:nvPr/>
+        </p:nvSpPr>
+        <p:spPr>
+          <a:xfrm>
+            <a:off x="2560320" y="2514600"/>
+            <a:ext cx="8686800" cy="914400"/>
+          </a:xfrm>
+          <a:prstGeom prst="rect">
+            <a:avLst/>
+          </a:prstGeom>
+          <a:noFill/>
+          <a:ln/>
+        </p:spPr>
+        <p:txBody>
+          <a:bodyPr wrap="square" lIns="0" tIns="0" rIns="0" bIns="0" rtlCol="0" anchor="ctr"/>
+          <a:lstStyle/>
+          <a:p>
+            <a:pPr indent="0" marL="0">
+              <a:buNone/>
+            </a:pPr>
+            <a:r>
+              <a:rPr lang="en-US" sz="4000" b="1" dirty="0">
+                <a:solidFill>
+                  <a:srgbClr val="FFFFFF"/>
+                </a:solidFill>
+                <a:latin typeface="Georgia" pitchFamily="34" charset="0"/>
+                <a:ea typeface="Georgia" pitchFamily="34" charset="-122"/>
+                <a:cs typeface="Georgia" pitchFamily="34" charset="-120"/>
+              </a:rPr>
+              <a:t>Resultados</a:t>
+            </a:r>
+            <a:endParaRPr lang="en-US" sz="4000" dirty="0"/>
+          </a:p>
+        </p:txBody>
+      </p:sp>
+      <p:sp>
+        <p:nvSpPr>
+          <p:cNvPr id="5" name="Text 3"/>
+          <p:cNvSpPr/>
+          <p:nvPr/>
+        </p:nvSpPr>
+        <p:spPr>
+          <a:xfrm>
+            <a:off x="2606040" y="3429000"/>
+            <a:ext cx="8503920" cy="548640"/>
+          </a:xfrm>
+          <a:prstGeom prst="rect">
+            <a:avLst/>
+          </a:prstGeom>
+          <a:noFill/>
+          <a:ln/>
+        </p:spPr>
+        <p:txBody>
+          <a:bodyPr wrap="square" lIns="0" tIns="0" rIns="0" bIns="0" rtlCol="0" anchor="ctr"/>
+          <a:lstStyle/>
+          <a:p>
+            <a:pPr indent="0" marL="0">
+              <a:buNone/>
+            </a:pPr>
+            <a:r>
+              <a:rPr lang="en-US" sz="1600" dirty="0">
+                <a:solidFill>
+                  <a:srgbClr val="9FB3C8"/>
+                </a:solidFill>
+                <a:latin typeface="Calibri" pitchFamily="34" charset="0"/>
+                <a:ea typeface="Calibri" pitchFamily="34" charset="-122"/>
+                <a:cs typeface="Calibri" pitchFamily="34" charset="-120"/>
+              </a:rPr>
+              <a:t>Lo que ganamos, medido contra el ground truth</a:t>
+            </a:r>
+            <a:endParaRPr lang="en-US" sz="1600" dirty="0"/>
+          </a:p>
+        </p:txBody>
+      </p:sp>
+      <p:sp>
+        <p:nvSpPr>
+          <p:cNvPr id="6" name="Shape 4"/>
+          <p:cNvSpPr/>
+          <p:nvPr/>
+        </p:nvSpPr>
+        <p:spPr>
+          <a:xfrm>
+            <a:off x="2606040" y="4206240"/>
+            <a:ext cx="310896" cy="310896"/>
+          </a:xfrm>
+          <a:prstGeom prst="rect">
+            <a:avLst/>
           </a:prstGeom>
           <a:solidFill>
-            <a:srgbClr val="F4F7FA"/>
+            <a:srgbClr val="1C4A73"/>
           </a:solidFill>
-          <a:ln w="12700">
+          <a:ln w="6350">
             <a:solidFill>
-              <a:srgbClr val="D8E0E8"/>
+              <a:srgbClr val="1C4A73"/>
             </a:solidFill>
             <a:prstDash val="solid"/>
           </a:ln>
-          <a:effectLst>
-            <a:outerShdw sx="100000" sy="100000" kx="0" ky="0" algn="bl" rotWithShape="0" blurRad="114300" dist="38100" dir="5400000">
-              <a:srgbClr val="000000">
-                <a:alpha val="18000"/>
-              </a:srgbClr>
-            </a:outerShdw>
-          </a:effectLst>
-        </p:spPr>
-      </p:sp>
-      <p:sp>
-        <p:nvSpPr>
-          <p:cNvPr id="6" name="Text 3"/>
-          <p:cNvSpPr/>
-          <p:nvPr/>
-        </p:nvSpPr>
-        <p:spPr>
-          <a:xfrm>
-            <a:off x="8503920" y="2487168"/>
-            <a:ext cx="3017520" cy="777240"/>
-          </a:xfrm>
-          <a:prstGeom prst="rect">
-            <a:avLst/>
-          </a:prstGeom>
-          <a:noFill/>
-          <a:ln/>
-        </p:spPr>
-        <p:txBody>
-          <a:bodyPr wrap="square" lIns="0" tIns="0" rIns="0" bIns="0" rtlCol="0" anchor="ctr"/>
-          <a:lstStyle/>
-          <a:p>
-            <a:pPr algn="ctr" indent="0" marL="0">
-              <a:buNone/>
-            </a:pPr>
-            <a:r>
-              <a:rPr lang="en-US" sz="4000" b="1" dirty="0">
-                <a:solidFill>
-                  <a:srgbClr val="2E8B57"/>
-                </a:solidFill>
-                <a:latin typeface="Georgia" pitchFamily="34" charset="0"/>
-                <a:ea typeface="Georgia" pitchFamily="34" charset="-122"/>
-                <a:cs typeface="Georgia" pitchFamily="34" charset="-120"/>
-              </a:rPr>
-              <a:t>+100%</a:t>
-            </a:r>
-            <a:endParaRPr lang="en-US" sz="4000" dirty="0"/>
-          </a:p>
-        </p:txBody>
-      </p:sp>
-      <p:sp>
-        <p:nvSpPr>
-          <p:cNvPr id="7" name="Text 4"/>
-          <p:cNvSpPr/>
-          <p:nvPr/>
-        </p:nvSpPr>
-        <p:spPr>
-          <a:xfrm>
-            <a:off x="8641080" y="3273552"/>
-            <a:ext cx="2743200" cy="457200"/>
-          </a:xfrm>
-          <a:prstGeom prst="rect">
-            <a:avLst/>
-          </a:prstGeom>
-          <a:noFill/>
-          <a:ln/>
-        </p:spPr>
-        <p:txBody>
-          <a:bodyPr wrap="square" lIns="0" tIns="0" rIns="0" bIns="0" rtlCol="0" anchor="t"/>
-          <a:lstStyle/>
-          <a:p>
-            <a:pPr algn="ctr" indent="0" marL="0">
-              <a:buNone/>
-            </a:pPr>
-            <a:r>
-              <a:rPr lang="en-US" sz="1200" dirty="0">
-                <a:solidFill>
-                  <a:srgbClr val="64748B"/>
-                </a:solidFill>
-                <a:latin typeface="Calibri" pitchFamily="34" charset="0"/>
-                <a:ea typeface="Calibri" pitchFamily="34" charset="-122"/>
-                <a:cs typeface="Calibri" pitchFamily="34" charset="-120"/>
-              </a:rPr>
-              <a:t>AP en objetos pequeños</a:t>
-            </a:r>
-            <a:endParaRPr lang="en-US" sz="1200" dirty="0"/>
-          </a:p>
-        </p:txBody>
-      </p:sp>
-      <p:sp>
-        <p:nvSpPr>
-          <p:cNvPr id="8" name="Text 5"/>
-          <p:cNvSpPr/>
-          <p:nvPr/>
-        </p:nvSpPr>
-        <p:spPr>
-          <a:xfrm>
-            <a:off x="8503920" y="3977640"/>
-            <a:ext cx="3063240" cy="1645920"/>
-          </a:xfrm>
-          <a:prstGeom prst="rect">
-            <a:avLst/>
-          </a:prstGeom>
-          <a:noFill/>
-          <a:ln/>
-        </p:spPr>
-        <p:txBody>
-          <a:bodyPr wrap="square" lIns="0" tIns="0" rIns="0" bIns="0" rtlCol="0" anchor="ctr"/>
-          <a:lstStyle/>
-          <a:p>
-            <a:pPr indent="0" marL="0">
-              <a:buNone/>
-            </a:pPr>
-            <a:r>
-              <a:rPr lang="en-US" sz="1300" dirty="0">
-                <a:solidFill>
-                  <a:srgbClr val="1E293B"/>
-                </a:solidFill>
-                <a:latin typeface="Calibri" pitchFamily="34" charset="0"/>
-                <a:ea typeface="Calibri" pitchFamily="34" charset="-122"/>
-                <a:cs typeface="Calibri" pitchFamily="34" charset="-120"/>
-              </a:rPr>
-              <a:t>El AP_small casi se duplica. En objetos grandes, SAHI no aporta (y puede bajar un poco): por eso existe el modo combinado.</a:t>
-            </a:r>
-            <a:endParaRPr lang="en-US" sz="1300" dirty="0"/>
-          </a:p>
-        </p:txBody>
-      </p:sp>
-      <p:sp>
-        <p:nvSpPr>
-          <p:cNvPr id="9" name="Text 6"/>
-          <p:cNvSpPr/>
-          <p:nvPr/>
-        </p:nvSpPr>
-        <p:spPr>
-          <a:xfrm>
-            <a:off x="640080" y="6144768"/>
-            <a:ext cx="10972800" cy="274320"/>
-          </a:xfrm>
-          <a:prstGeom prst="rect">
-            <a:avLst/>
-          </a:prstGeom>
-          <a:noFill/>
-          <a:ln/>
-        </p:spPr>
-        <p:txBody>
-          <a:bodyPr wrap="square" lIns="0" tIns="0" rIns="0" bIns="0" rtlCol="0" anchor="ctr"/>
-          <a:lstStyle/>
-          <a:p>
-            <a:pPr indent="0" marL="0">
-              <a:buNone/>
-            </a:pPr>
-            <a:r>
-              <a:rPr lang="en-US" sz="900" i="1" dirty="0">
-                <a:solidFill>
-                  <a:srgbClr val="64748B"/>
-                </a:solidFill>
-                <a:latin typeface="Calibri" pitchFamily="34" charset="0"/>
-                <a:ea typeface="Calibri" pitchFamily="34" charset="-122"/>
-                <a:cs typeface="Calibri" pitchFamily="34" charset="-120"/>
-              </a:rPr>
-              <a:t>◆ Valores de referencia; reemplaza con tu corrida (notebook 02).</a:t>
-            </a:r>
-            <a:endParaRPr lang="en-US" sz="900" dirty="0"/>
-          </a:p>
-        </p:txBody>
-      </p:sp>
-      <p:sp>
-        <p:nvSpPr>
-          <p:cNvPr id="10" name="Text 7"/>
+        </p:spPr>
+      </p:sp>
+      <p:sp>
+        <p:nvSpPr>
+          <p:cNvPr id="7" name="Shape 5"/>
+          <p:cNvSpPr/>
+          <p:nvPr/>
+        </p:nvSpPr>
+        <p:spPr>
+          <a:xfrm>
+            <a:off x="2990088" y="4206240"/>
+            <a:ext cx="310896" cy="310896"/>
+          </a:xfrm>
+          <a:prstGeom prst="rect">
+            <a:avLst/>
+          </a:prstGeom>
+          <a:solidFill>
+            <a:srgbClr val="2E8B57"/>
+          </a:solidFill>
+          <a:ln w="6350">
+            <a:solidFill>
+              <a:srgbClr val="1C4A73"/>
+            </a:solidFill>
+            <a:prstDash val="solid"/>
+          </a:ln>
+        </p:spPr>
+      </p:sp>
+      <p:sp>
+        <p:nvSpPr>
+          <p:cNvPr id="8" name="Shape 6"/>
+          <p:cNvSpPr/>
+          <p:nvPr/>
+        </p:nvSpPr>
+        <p:spPr>
+          <a:xfrm>
+            <a:off x="3374136" y="4206240"/>
+            <a:ext cx="310896" cy="310896"/>
+          </a:xfrm>
+          <a:prstGeom prst="rect">
+            <a:avLst/>
+          </a:prstGeom>
+          <a:solidFill>
+            <a:srgbClr val="1C4A73"/>
+          </a:solidFill>
+          <a:ln w="6350">
+            <a:solidFill>
+              <a:srgbClr val="1C4A73"/>
+            </a:solidFill>
+            <a:prstDash val="solid"/>
+          </a:ln>
+        </p:spPr>
+      </p:sp>
+      <p:sp>
+        <p:nvSpPr>
+          <p:cNvPr id="9" name="Shape 7"/>
+          <p:cNvSpPr/>
+          <p:nvPr/>
+        </p:nvSpPr>
+        <p:spPr>
+          <a:xfrm>
+            <a:off x="3758184" y="4206240"/>
+            <a:ext cx="310896" cy="310896"/>
+          </a:xfrm>
+          <a:prstGeom prst="rect">
+            <a:avLst/>
+          </a:prstGeom>
+          <a:solidFill>
+            <a:srgbClr val="2E8B57"/>
+          </a:solidFill>
+          <a:ln w="6350">
+            <a:solidFill>
+              <a:srgbClr val="1C4A73"/>
+            </a:solidFill>
+            <a:prstDash val="solid"/>
+          </a:ln>
+        </p:spPr>
+      </p:sp>
+      <p:sp>
+        <p:nvSpPr>
+          <p:cNvPr id="10" name="Shape 8"/>
+          <p:cNvSpPr/>
+          <p:nvPr/>
+        </p:nvSpPr>
+        <p:spPr>
+          <a:xfrm>
+            <a:off x="4142232" y="4206240"/>
+            <a:ext cx="310896" cy="310896"/>
+          </a:xfrm>
+          <a:prstGeom prst="rect">
+            <a:avLst/>
+          </a:prstGeom>
+          <a:solidFill>
+            <a:srgbClr val="1C4A73"/>
+          </a:solidFill>
+          <a:ln w="6350">
+            <a:solidFill>
+              <a:srgbClr val="1C4A73"/>
+            </a:solidFill>
+            <a:prstDash val="solid"/>
+          </a:ln>
+        </p:spPr>
+      </p:sp>
+      <p:sp>
+        <p:nvSpPr>
+          <p:cNvPr id="11" name="Shape 9"/>
+          <p:cNvSpPr/>
+          <p:nvPr/>
+        </p:nvSpPr>
+        <p:spPr>
+          <a:xfrm>
+            <a:off x="4526280" y="4206240"/>
+            <a:ext cx="310896" cy="310896"/>
+          </a:xfrm>
+          <a:prstGeom prst="rect">
+            <a:avLst/>
+          </a:prstGeom>
+          <a:solidFill>
+            <a:srgbClr val="2E8B57"/>
+          </a:solidFill>
+          <a:ln w="6350">
+            <a:solidFill>
+              <a:srgbClr val="1C4A73"/>
+            </a:solidFill>
+            <a:prstDash val="solid"/>
+          </a:ln>
+        </p:spPr>
+      </p:sp>
+      <p:sp>
+        <p:nvSpPr>
+          <p:cNvPr id="12" name="Shape 10"/>
+          <p:cNvSpPr/>
+          <p:nvPr/>
+        </p:nvSpPr>
+        <p:spPr>
+          <a:xfrm>
+            <a:off x="4910328" y="4206240"/>
+            <a:ext cx="310896" cy="310896"/>
+          </a:xfrm>
+          <a:prstGeom prst="rect">
+            <a:avLst/>
+          </a:prstGeom>
+          <a:solidFill>
+            <a:srgbClr val="1C4A73"/>
+          </a:solidFill>
+          <a:ln w="6350">
+            <a:solidFill>
+              <a:srgbClr val="1C4A73"/>
+            </a:solidFill>
+            <a:prstDash val="solid"/>
+          </a:ln>
+        </p:spPr>
+      </p:sp>
+      <p:sp>
+        <p:nvSpPr>
+          <p:cNvPr id="13" name="Shape 11"/>
+          <p:cNvSpPr/>
+          <p:nvPr/>
+        </p:nvSpPr>
+        <p:spPr>
+          <a:xfrm>
+            <a:off x="5294376" y="4206240"/>
+            <a:ext cx="310896" cy="310896"/>
+          </a:xfrm>
+          <a:prstGeom prst="rect">
+            <a:avLst/>
+          </a:prstGeom>
+          <a:solidFill>
+            <a:srgbClr val="2E8B57"/>
+          </a:solidFill>
+          <a:ln w="6350">
+            <a:solidFill>
+              <a:srgbClr val="1C4A73"/>
+            </a:solidFill>
+            <a:prstDash val="solid"/>
+          </a:ln>
+        </p:spPr>
+      </p:sp>
+      <p:sp>
+        <p:nvSpPr>
+          <p:cNvPr id="14" name="Text 12"/>
           <p:cNvSpPr/>
           <p:nvPr/>
         </p:nvSpPr>
@@ -11856,7 +13801,7 @@
             <a:r>
               <a:rPr lang="en-US" sz="900" dirty="0">
                 <a:solidFill>
-                  <a:srgbClr val="64748B"/>
+                  <a:srgbClr val="9FB3C8"/>
                 </a:solidFill>
                 <a:latin typeface="Calibri" pitchFamily="34" charset="0"/>
                 <a:ea typeface="Calibri" pitchFamily="34" charset="-122"/>
@@ -11870,7 +13815,7 @@
       </p:sp>
       <p:sp>
         <p:nvSpPr>
-          <p:cNvPr id="11" name="Text 8"/>
+          <p:cNvPr id="15" name="Text 13"/>
           <p:cNvSpPr/>
           <p:nvPr/>
         </p:nvSpPr>
@@ -11895,7 +13840,7 @@
             <a:r>
               <a:rPr lang="en-US" sz="900" dirty="0">
                 <a:solidFill>
-                  <a:srgbClr val="64748B"/>
+                  <a:srgbClr val="9FB3C8"/>
                 </a:solidFill>
                 <a:latin typeface="Calibri" pitchFamily="34" charset="0"/>
                 <a:ea typeface="Calibri" pitchFamily="34" charset="-122"/>
@@ -11972,7 +13917,7 @@
                 <a:ea typeface="Calibri" pitchFamily="34" charset="-122"/>
                 <a:cs typeface="Calibri" pitchFamily="34" charset="-120"/>
               </a:rPr>
-              <a:t>CASO DE USO · SEGURIDAD CIUDADANA</a:t>
+              <a:t>BENCHMARK</a:t>
             </a:r>
             <a:endParaRPr lang="en-US" sz="1300" dirty="0"/>
           </a:p>
@@ -12011,7 +13956,7 @@
                 <a:ea typeface="Georgia" pitchFamily="34" charset="-122"/>
                 <a:cs typeface="Georgia" pitchFamily="34" charset="-120"/>
               </a:rPr>
-              <a:t>Más personas y motos detectadas</a:t>
+              <a:t>YOLO vs YOLO + SAHI (mAP COCO)</a:t>
             </a:r>
             <a:endParaRPr lang="en-US" sz="3000" dirty="0"/>
           </a:p>
@@ -12025,7 +13970,7 @@
         </p:nvGraphicFramePr>
         <p:xfrm>
           <a:off x="640080" y="1920240"/>
-          <a:ext cx="7498080" cy="3840480"/>
+          <a:ext cx="7315200" cy="3840480"/>
         </p:xfrm>
         <a:graphic xmlns:a="http://schemas.openxmlformats.org/drawingml/2006/main">
           <a:graphicData uri="http://schemas.openxmlformats.org/drawingml/2006/chart">
@@ -12041,20 +13986,20 @@
         </p:nvSpPr>
         <p:spPr>
           <a:xfrm>
-            <a:off x="8503920" y="2103120"/>
-            <a:ext cx="3063240" cy="3474720"/>
+            <a:off x="8321040" y="2103120"/>
+            <a:ext cx="3246120" cy="3383280"/>
           </a:xfrm>
           <a:prstGeom prst="roundRect">
             <a:avLst>
-              <a:gd name="adj" fmla="val 2388"/>
+              <a:gd name="adj" fmla="val 2254"/>
             </a:avLst>
           </a:prstGeom>
           <a:solidFill>
-            <a:srgbClr val="0F2A43"/>
+            <a:srgbClr val="F4F7FA"/>
           </a:solidFill>
           <a:ln w="12700">
             <a:solidFill>
-              <a:srgbClr val="0F2A43"/>
+              <a:srgbClr val="D8E0E8"/>
             </a:solidFill>
             <a:prstDash val="solid"/>
           </a:ln>
@@ -12068,8 +14013,8 @@
         </p:nvSpPr>
         <p:spPr>
           <a:xfrm>
-            <a:off x="8732520" y="2331720"/>
-            <a:ext cx="2651760" cy="365760"/>
+            <a:off x="8549640" y="2286000"/>
+            <a:ext cx="2834640" cy="365760"/>
           </a:xfrm>
           <a:prstGeom prst="rect">
             <a:avLst/>
@@ -12087,13 +14032,13 @@
             <a:r>
               <a:rPr lang="en-US" sz="1600" b="1" dirty="0">
                 <a:solidFill>
-                  <a:srgbClr val="FFFFFF"/>
+                  <a:srgbClr val="1E293B"/>
                 </a:solidFill>
                 <a:latin typeface="Georgia" pitchFamily="34" charset="0"/>
                 <a:ea typeface="Georgia" pitchFamily="34" charset="-122"/>
                 <a:cs typeface="Georgia" pitchFamily="34" charset="-120"/>
               </a:rPr>
-              <a:t>Lo que importa</a:t>
+              <a:t>Lectura rápida</a:t>
             </a:r>
             <a:endParaRPr lang="en-US" sz="1600" dirty="0"/>
           </a:p>
@@ -12107,8 +14052,8 @@
         </p:nvSpPr>
         <p:spPr>
           <a:xfrm>
-            <a:off x="8732520" y="2834640"/>
-            <a:ext cx="2651760" cy="2743200"/>
+            <a:off x="8549640" y="2788920"/>
+            <a:ext cx="2834640" cy="2468880"/>
           </a:xfrm>
           <a:prstGeom prst="rect">
             <a:avLst/>
@@ -12130,13 +14075,13 @@
             <a:r>
               <a:rPr lang="en-US" sz="1300" dirty="0">
                 <a:solidFill>
-                  <a:srgbClr val="CADCFC"/>
-                </a:solidFill>
-                <a:latin typeface="Calibri" pitchFamily="34" charset="0"/>
-                <a:ea typeface="Calibri" pitchFamily="34" charset="-122"/>
-                <a:cs typeface="Calibri" pitchFamily="34" charset="-120"/>
-              </a:rPr>
-              <a:t>El mayor salto está en peatones, personas y motos.</a:t>
+                  <a:srgbClr val="1E293B"/>
+                </a:solidFill>
+                <a:latin typeface="Calibri" pitchFamily="34" charset="0"/>
+                <a:ea typeface="Calibri" pitchFamily="34" charset="-122"/>
+                <a:cs typeface="Calibri" pitchFamily="34" charset="-120"/>
+              </a:rPr>
+              <a:t>Mejora en todas las métricas.</a:t>
             </a:r>
             <a:endParaRPr lang="en-US" sz="1300" dirty="0"/>
           </a:p>
@@ -12151,13 +14096,13 @@
             <a:r>
               <a:rPr lang="en-US" sz="1300" dirty="0">
                 <a:solidFill>
-                  <a:srgbClr val="CADCFC"/>
-                </a:solidFill>
-                <a:latin typeface="Calibri" pitchFamily="34" charset="0"/>
-                <a:ea typeface="Calibri" pitchFamily="34" charset="-122"/>
-                <a:cs typeface="Calibri" pitchFamily="34" charset="-120"/>
-              </a:rPr>
-              <a:t>Justo las clases críticas para cámaras urbanas.</a:t>
+                  <a:srgbClr val="1E293B"/>
+                </a:solidFill>
+                <a:latin typeface="Calibri" pitchFamily="34" charset="0"/>
+                <a:ea typeface="Calibri" pitchFamily="34" charset="-122"/>
+                <a:cs typeface="Calibri" pitchFamily="34" charset="-120"/>
+              </a:rPr>
+              <a:t>El salto más grande está en el umbral estricto (.75).</a:t>
             </a:r>
             <a:endParaRPr lang="en-US" sz="1300" dirty="0"/>
           </a:p>
@@ -12172,13 +14117,13 @@
             <a:r>
               <a:rPr lang="en-US" sz="1300" b="1" dirty="0">
                 <a:solidFill>
-                  <a:srgbClr val="9FE6C0"/>
-                </a:solidFill>
-                <a:latin typeface="Calibri" pitchFamily="34" charset="0"/>
-                <a:ea typeface="Calibri" pitchFamily="34" charset="-122"/>
-                <a:cs typeface="Calibri" pitchFamily="34" charset="-120"/>
-              </a:rPr>
-              <a:t>Más cobertura = menos puntos ciegos.</a:t>
+                  <a:srgbClr val="2E8B57"/>
+                </a:solidFill>
+                <a:latin typeface="Calibri" pitchFamily="34" charset="0"/>
+                <a:ea typeface="Calibri" pitchFamily="34" charset="-122"/>
+                <a:cs typeface="Calibri" pitchFamily="34" charset="-120"/>
+              </a:rPr>
+              <a:t>SAHI = más recall sin perder precisión.</a:t>
             </a:r>
             <a:endParaRPr lang="en-US" sz="1300" dirty="0"/>
           </a:p>
@@ -12217,7 +14162,7 @@
                 <a:ea typeface="Calibri" pitchFamily="34" charset="-122"/>
                 <a:cs typeface="Calibri" pitchFamily="34" charset="-120"/>
               </a:rPr>
-              <a:t>◆ Detecciones por clase; valores de referencia (notebook 02 · analyze_classes).</a:t>
+              <a:t>◆ Valores de referencia (yolo11s fine-tuned en VisDrone); reemplaza con tu corrida (notebook 02).</a:t>
             </a:r>
             <a:endParaRPr lang="en-US" sz="900" dirty="0"/>
           </a:p>
@@ -12360,13 +14305,13 @@
             <a:r>
               <a:rPr lang="en-US" sz="1300" b="1" spc="300" kern="0" dirty="0">
                 <a:solidFill>
-                  <a:srgbClr val="3A6EA5"/>
-                </a:solidFill>
-                <a:latin typeface="Calibri" pitchFamily="34" charset="0"/>
-                <a:ea typeface="Calibri" pitchFamily="34" charset="-122"/>
-                <a:cs typeface="Calibri" pitchFamily="34" charset="-120"/>
-              </a:rPr>
-              <a:t>CRITERIO DE INGENIERÍA</a:t>
+                  <a:srgbClr val="2E8B57"/>
+                </a:solidFill>
+                <a:latin typeface="Calibri" pitchFamily="34" charset="0"/>
+                <a:ea typeface="Calibri" pitchFamily="34" charset="-122"/>
+                <a:cs typeface="Calibri" pitchFamily="34" charset="-120"/>
+              </a:rPr>
+              <a:t>EL RESULTADO ESTRELLA</a:t>
             </a:r>
             <a:endParaRPr lang="en-US" sz="1300" dirty="0"/>
           </a:p>
@@ -12405,34 +14350,50 @@
                 <a:ea typeface="Georgia" pitchFamily="34" charset="-122"/>
                 <a:cs typeface="Georgia" pitchFamily="34" charset="-120"/>
               </a:rPr>
-              <a:t>Cuándo usar SAHI (y cuándo no)</a:t>
+              <a:t>Donde SAHI brilla: objetos pequeños</a:t>
             </a:r>
             <a:endParaRPr lang="en-US" sz="3000" dirty="0"/>
           </a:p>
         </p:txBody>
       </p:sp>
-      <p:sp>
-        <p:nvSpPr>
-          <p:cNvPr id="4" name="Shape 2"/>
-          <p:cNvSpPr/>
-          <p:nvPr/>
-        </p:nvSpPr>
-        <p:spPr>
-          <a:xfrm>
-            <a:off x="640080" y="1965960"/>
-            <a:ext cx="5394960" cy="3657600"/>
+      <p:graphicFrame>
+        <p:nvGraphicFramePr>
+          <p:cNvPr id="4" name="Chart 0" descr=""/>
+          <p:cNvGraphicFramePr/>
+          <p:nvPr/>
+        </p:nvGraphicFramePr>
+        <p:xfrm>
+          <a:off x="640080" y="1920240"/>
+          <a:ext cx="7498080" cy="3840480"/>
+        </p:xfrm>
+        <a:graphic xmlns:a="http://schemas.openxmlformats.org/drawingml/2006/main">
+          <a:graphicData uri="http://schemas.openxmlformats.org/drawingml/2006/chart">
+            <c:chart xmlns:c="http://schemas.openxmlformats.org/drawingml/2006/chart" r:id="rId1"/>
+          </a:graphicData>
+        </a:graphic>
+      </p:graphicFrame>
+      <p:sp>
+        <p:nvSpPr>
+          <p:cNvPr id="5" name="Shape 2"/>
+          <p:cNvSpPr/>
+          <p:nvPr/>
+        </p:nvSpPr>
+        <p:spPr>
+          <a:xfrm>
+            <a:off x="8503920" y="2377440"/>
+            <a:ext cx="3017520" cy="1417320"/>
           </a:xfrm>
           <a:prstGeom prst="roundRect">
             <a:avLst>
-              <a:gd name="adj" fmla="val 2000"/>
+              <a:gd name="adj" fmla="val 5161"/>
             </a:avLst>
           </a:prstGeom>
           <a:solidFill>
             <a:srgbClr val="F4F7FA"/>
           </a:solidFill>
-          <a:ln w="19050">
+          <a:ln w="12700">
             <a:solidFill>
-              <a:srgbClr val="2E8B57"/>
+              <a:srgbClr val="D8E0E8"/>
             </a:solidFill>
             <a:prstDash val="solid"/>
           </a:ln>
@@ -12447,14 +14408,14 @@
       </p:sp>
       <p:sp>
         <p:nvSpPr>
-          <p:cNvPr id="5" name="Text 3"/>
-          <p:cNvSpPr/>
-          <p:nvPr/>
-        </p:nvSpPr>
-        <p:spPr>
-          <a:xfrm>
-            <a:off x="868680" y="2148840"/>
-            <a:ext cx="4937760" cy="457200"/>
+          <p:cNvPr id="6" name="Text 3"/>
+          <p:cNvSpPr/>
+          <p:nvPr/>
+        </p:nvSpPr>
+        <p:spPr>
+          <a:xfrm>
+            <a:off x="8503920" y="2487168"/>
+            <a:ext cx="3017520" cy="777240"/>
           </a:xfrm>
           <a:prstGeom prst="rect">
             <a:avLst/>
@@ -12466,11 +14427,11 @@
           <a:bodyPr wrap="square" lIns="0" tIns="0" rIns="0" bIns="0" rtlCol="0" anchor="ctr"/>
           <a:lstStyle/>
           <a:p>
-            <a:pPr indent="0" marL="0">
-              <a:buNone/>
-            </a:pPr>
-            <a:r>
-              <a:rPr lang="en-US" sz="2000" b="1" dirty="0">
+            <a:pPr algn="ctr" indent="0" marL="0">
+              <a:buNone/>
+            </a:pPr>
+            <a:r>
+              <a:rPr lang="en-US" sz="4000" b="1" dirty="0">
                 <a:solidFill>
                   <a:srgbClr val="2E8B57"/>
                 </a:solidFill>
@@ -12478,22 +14439,61 @@
                 <a:ea typeface="Georgia" pitchFamily="34" charset="-122"/>
                 <a:cs typeface="Georgia" pitchFamily="34" charset="-120"/>
               </a:rPr>
-              <a:t>SÍ conviene</a:t>
-            </a:r>
-            <a:endParaRPr lang="en-US" sz="2000" dirty="0"/>
-          </a:p>
-        </p:txBody>
-      </p:sp>
-      <p:sp>
-        <p:nvSpPr>
-          <p:cNvPr id="6" name="Text 4"/>
-          <p:cNvSpPr/>
-          <p:nvPr/>
-        </p:nvSpPr>
-        <p:spPr>
-          <a:xfrm>
-            <a:off x="868680" y="2743200"/>
-            <a:ext cx="4937760" cy="2743200"/>
+              <a:t>+100%</a:t>
+            </a:r>
+            <a:endParaRPr lang="en-US" sz="4000" dirty="0"/>
+          </a:p>
+        </p:txBody>
+      </p:sp>
+      <p:sp>
+        <p:nvSpPr>
+          <p:cNvPr id="7" name="Text 4"/>
+          <p:cNvSpPr/>
+          <p:nvPr/>
+        </p:nvSpPr>
+        <p:spPr>
+          <a:xfrm>
+            <a:off x="8641080" y="3273552"/>
+            <a:ext cx="2743200" cy="457200"/>
+          </a:xfrm>
+          <a:prstGeom prst="rect">
+            <a:avLst/>
+          </a:prstGeom>
+          <a:noFill/>
+          <a:ln/>
+        </p:spPr>
+        <p:txBody>
+          <a:bodyPr wrap="square" lIns="0" tIns="0" rIns="0" bIns="0" rtlCol="0" anchor="t"/>
+          <a:lstStyle/>
+          <a:p>
+            <a:pPr algn="ctr" indent="0" marL="0">
+              <a:buNone/>
+            </a:pPr>
+            <a:r>
+              <a:rPr lang="en-US" sz="1200" dirty="0">
+                <a:solidFill>
+                  <a:srgbClr val="64748B"/>
+                </a:solidFill>
+                <a:latin typeface="Calibri" pitchFamily="34" charset="0"/>
+                <a:ea typeface="Calibri" pitchFamily="34" charset="-122"/>
+                <a:cs typeface="Calibri" pitchFamily="34" charset="-120"/>
+              </a:rPr>
+              <a:t>AP en objetos pequeños</a:t>
+            </a:r>
+            <a:endParaRPr lang="en-US" sz="1200" dirty="0"/>
+          </a:p>
+        </p:txBody>
+      </p:sp>
+      <p:sp>
+        <p:nvSpPr>
+          <p:cNvPr id="8" name="Text 5"/>
+          <p:cNvSpPr/>
+          <p:nvPr/>
+        </p:nvSpPr>
+        <p:spPr>
+          <a:xfrm>
+            <a:off x="8503920" y="3977640"/>
+            <a:ext cx="3063240" cy="1645920"/>
           </a:xfrm>
           <a:prstGeom prst="rect">
             <a:avLst/>
@@ -12505,15 +14505,11 @@
           <a:bodyPr wrap="square" lIns="0" tIns="0" rIns="0" bIns="0" rtlCol="0" anchor="ctr"/>
           <a:lstStyle/>
           <a:p>
-            <a:pPr marL="342900" indent="-342900">
-              <a:spcAft>
-                <a:spcPts val="1200"/>
-              </a:spcAft>
-              <a:buSzPct val="100000"/>
-              <a:buChar char="•"/>
-            </a:pPr>
-            <a:r>
-              <a:rPr lang="en-US" sz="1400" dirty="0">
+            <a:pPr indent="0" marL="0">
+              <a:buNone/>
+            </a:pPr>
+            <a:r>
+              <a:rPr lang="en-US" sz="1300" dirty="0">
                 <a:solidFill>
                   <a:srgbClr val="1E293B"/>
                 </a:solidFill>
@@ -12521,119 +14517,22 @@
                 <a:ea typeface="Calibri" pitchFamily="34" charset="-122"/>
                 <a:cs typeface="Calibri" pitchFamily="34" charset="-120"/>
               </a:rPr>
-              <a:t>Objetos pequeños / lejanos (dron, satélite, CCTV).</a:t>
-            </a:r>
-            <a:endParaRPr lang="en-US" sz="1400" dirty="0"/>
-          </a:p>
-          <a:p>
-            <a:pPr marL="342900" indent="-342900">
-              <a:spcAft>
-                <a:spcPts val="1200"/>
-              </a:spcAft>
-              <a:buSzPct val="100000"/>
-              <a:buChar char="•"/>
-            </a:pPr>
-            <a:r>
-              <a:rPr lang="en-US" sz="1400" dirty="0">
-                <a:solidFill>
-                  <a:srgbClr val="1E293B"/>
-                </a:solidFill>
-                <a:latin typeface="Calibri" pitchFamily="34" charset="0"/>
-                <a:ea typeface="Calibri" pitchFamily="34" charset="-122"/>
-                <a:cs typeface="Calibri" pitchFamily="34" charset="-120"/>
-              </a:rPr>
-              <a:t>Imágenes de alta resolución.</a:t>
-            </a:r>
-            <a:endParaRPr lang="en-US" sz="1400" dirty="0"/>
-          </a:p>
-          <a:p>
-            <a:pPr marL="342900" indent="-342900">
-              <a:spcAft>
-                <a:spcPts val="1200"/>
-              </a:spcAft>
-              <a:buSzPct val="100000"/>
-              <a:buChar char="•"/>
-            </a:pPr>
-            <a:r>
-              <a:rPr lang="en-US" sz="1400" dirty="0">
-                <a:solidFill>
-                  <a:srgbClr val="1E293B"/>
-                </a:solidFill>
-                <a:latin typeface="Calibri" pitchFamily="34" charset="0"/>
-                <a:ea typeface="Calibri" pitchFamily="34" charset="-122"/>
-                <a:cs typeface="Calibri" pitchFamily="34" charset="-120"/>
-              </a:rPr>
-              <a:t>Escenas densas con muchos objetos.</a:t>
-            </a:r>
-            <a:endParaRPr lang="en-US" sz="1400" dirty="0"/>
-          </a:p>
-          <a:p>
-            <a:pPr marL="342900" indent="-342900">
-              <a:spcAft>
-                <a:spcPts val="1200"/>
-              </a:spcAft>
-              <a:buSzPct val="100000"/>
-              <a:buChar char="•"/>
-            </a:pPr>
-            <a:r>
-              <a:rPr lang="en-US" sz="1400" dirty="0">
-                <a:solidFill>
-                  <a:srgbClr val="1E293B"/>
-                </a:solidFill>
-                <a:latin typeface="Calibri" pitchFamily="34" charset="0"/>
-                <a:ea typeface="Calibri" pitchFamily="34" charset="-122"/>
-                <a:cs typeface="Calibri" pitchFamily="34" charset="-120"/>
-              </a:rPr>
-              <a:t>La precisión importa más que el tiempo real.</a:t>
-            </a:r>
-            <a:endParaRPr lang="en-US" sz="1400" dirty="0"/>
-          </a:p>
-        </p:txBody>
-      </p:sp>
-      <p:sp>
-        <p:nvSpPr>
-          <p:cNvPr id="7" name="Shape 5"/>
-          <p:cNvSpPr/>
-          <p:nvPr/>
-        </p:nvSpPr>
-        <p:spPr>
-          <a:xfrm>
-            <a:off x="6309360" y="1965960"/>
-            <a:ext cx="5257800" cy="3657600"/>
-          </a:xfrm>
-          <a:prstGeom prst="roundRect">
-            <a:avLst>
-              <a:gd name="adj" fmla="val 2000"/>
-            </a:avLst>
-          </a:prstGeom>
-          <a:solidFill>
-            <a:srgbClr val="F4F7FA"/>
-          </a:solidFill>
-          <a:ln w="19050">
-            <a:solidFill>
-              <a:srgbClr val="E4572E"/>
-            </a:solidFill>
-            <a:prstDash val="solid"/>
-          </a:ln>
-          <a:effectLst>
-            <a:outerShdw sx="100000" sy="100000" kx="0" ky="0" algn="bl" rotWithShape="0" blurRad="114300" dist="38100" dir="5400000">
-              <a:srgbClr val="000000">
-                <a:alpha val="18000"/>
-              </a:srgbClr>
-            </a:outerShdw>
-          </a:effectLst>
-        </p:spPr>
-      </p:sp>
-      <p:sp>
-        <p:nvSpPr>
-          <p:cNvPr id="8" name="Text 6"/>
-          <p:cNvSpPr/>
-          <p:nvPr/>
-        </p:nvSpPr>
-        <p:spPr>
-          <a:xfrm>
-            <a:off x="6537960" y="2148840"/>
-            <a:ext cx="4846320" cy="457200"/>
+              <a:t>El AP_small casi se duplica. En objetos grandes, SAHI no aporta (y puede bajar un poco): por eso existe el modo combinado.</a:t>
+            </a:r>
+            <a:endParaRPr lang="en-US" sz="1300" dirty="0"/>
+          </a:p>
+        </p:txBody>
+      </p:sp>
+      <p:sp>
+        <p:nvSpPr>
+          <p:cNvPr id="9" name="Text 6"/>
+          <p:cNvSpPr/>
+          <p:nvPr/>
+        </p:nvSpPr>
+        <p:spPr>
+          <a:xfrm>
+            <a:off x="640080" y="6144768"/>
+            <a:ext cx="10972800" cy="274320"/>
           </a:xfrm>
           <a:prstGeom prst="rect">
             <a:avLst/>
@@ -12649,129 +14548,23 @@
               <a:buNone/>
             </a:pPr>
             <a:r>
-              <a:rPr lang="en-US" sz="2000" b="1" dirty="0">
-                <a:solidFill>
-                  <a:srgbClr val="E4572E"/>
-                </a:solidFill>
-                <a:latin typeface="Georgia" pitchFamily="34" charset="0"/>
-                <a:ea typeface="Georgia" pitchFamily="34" charset="-122"/>
-                <a:cs typeface="Georgia" pitchFamily="34" charset="-120"/>
-              </a:rPr>
-              <a:t>NO hace falta</a:t>
-            </a:r>
-            <a:endParaRPr lang="en-US" sz="2000" dirty="0"/>
-          </a:p>
-        </p:txBody>
-      </p:sp>
-      <p:sp>
-        <p:nvSpPr>
-          <p:cNvPr id="9" name="Text 7"/>
-          <p:cNvSpPr/>
-          <p:nvPr/>
-        </p:nvSpPr>
-        <p:spPr>
-          <a:xfrm>
-            <a:off x="6537960" y="2743200"/>
-            <a:ext cx="4846320" cy="2743200"/>
-          </a:xfrm>
-          <a:prstGeom prst="rect">
-            <a:avLst/>
-          </a:prstGeom>
-          <a:noFill/>
-          <a:ln/>
-        </p:spPr>
-        <p:txBody>
-          <a:bodyPr wrap="square" lIns="0" tIns="0" rIns="0" bIns="0" rtlCol="0" anchor="ctr"/>
-          <a:lstStyle/>
-          <a:p>
-            <a:pPr marL="342900" indent="-342900">
-              <a:spcAft>
-                <a:spcPts val="1200"/>
-              </a:spcAft>
-              <a:buSzPct val="100000"/>
-              <a:buChar char="•"/>
-            </a:pPr>
-            <a:r>
-              <a:rPr lang="en-US" sz="1400" dirty="0">
-                <a:solidFill>
-                  <a:srgbClr val="1E293B"/>
-                </a:solidFill>
-                <a:latin typeface="Calibri" pitchFamily="34" charset="0"/>
-                <a:ea typeface="Calibri" pitchFamily="34" charset="-122"/>
-                <a:cs typeface="Calibri" pitchFamily="34" charset="-120"/>
-              </a:rPr>
-              <a:t>Objetos grandes que llenan el frame.</a:t>
-            </a:r>
-            <a:endParaRPr lang="en-US" sz="1400" dirty="0"/>
-          </a:p>
-          <a:p>
-            <a:pPr marL="342900" indent="-342900">
-              <a:spcAft>
-                <a:spcPts val="1200"/>
-              </a:spcAft>
-              <a:buSzPct val="100000"/>
-              <a:buChar char="•"/>
-            </a:pPr>
-            <a:r>
-              <a:rPr lang="en-US" sz="1400" dirty="0">
-                <a:solidFill>
-                  <a:srgbClr val="1E293B"/>
-                </a:solidFill>
-                <a:latin typeface="Calibri" pitchFamily="34" charset="0"/>
-                <a:ea typeface="Calibri" pitchFamily="34" charset="-122"/>
-                <a:cs typeface="Calibri" pitchFamily="34" charset="-120"/>
-              </a:rPr>
-              <a:t>Tiempo real estricto sin GPU.</a:t>
-            </a:r>
-            <a:endParaRPr lang="en-US" sz="1400" dirty="0"/>
-          </a:p>
-          <a:p>
-            <a:pPr marL="342900" indent="-342900">
-              <a:spcAft>
-                <a:spcPts val="1200"/>
-              </a:spcAft>
-              <a:buSzPct val="100000"/>
-              <a:buChar char="•"/>
-            </a:pPr>
-            <a:r>
-              <a:rPr lang="en-US" sz="1400" dirty="0">
-                <a:solidFill>
-                  <a:srgbClr val="1E293B"/>
-                </a:solidFill>
-                <a:latin typeface="Calibri" pitchFamily="34" charset="0"/>
-                <a:ea typeface="Calibri" pitchFamily="34" charset="-122"/>
-                <a:cs typeface="Calibri" pitchFamily="34" charset="-120"/>
-              </a:rPr>
-              <a:t>Costo ≈ proporcional al nº de slices.</a:t>
-            </a:r>
-            <a:endParaRPr lang="en-US" sz="1400" dirty="0"/>
-          </a:p>
-          <a:p>
-            <a:pPr marL="342900" indent="-342900">
-              <a:spcAft>
-                <a:spcPts val="1200"/>
-              </a:spcAft>
-              <a:buSzPct val="100000"/>
-              <a:buChar char="•"/>
-            </a:pPr>
-            <a:r>
-              <a:rPr lang="en-US" sz="1400" b="1" dirty="0">
-                <a:solidFill>
-                  <a:srgbClr val="1E293B"/>
-                </a:solidFill>
-                <a:latin typeface="Calibri" pitchFamily="34" charset="0"/>
-                <a:ea typeface="Calibri" pitchFamily="34" charset="-122"/>
-                <a:cs typeface="Calibri" pitchFamily="34" charset="-120"/>
-              </a:rPr>
-              <a:t>Regla: bisturí para lo pequeño, no martillo para todo.</a:t>
-            </a:r>
-            <a:endParaRPr lang="en-US" sz="1400" dirty="0"/>
-          </a:p>
-        </p:txBody>
-      </p:sp>
-      <p:sp>
-        <p:nvSpPr>
-          <p:cNvPr id="10" name="Text 8"/>
+              <a:rPr lang="en-US" sz="900" i="1" dirty="0">
+                <a:solidFill>
+                  <a:srgbClr val="64748B"/>
+                </a:solidFill>
+                <a:latin typeface="Calibri" pitchFamily="34" charset="0"/>
+                <a:ea typeface="Calibri" pitchFamily="34" charset="-122"/>
+                <a:cs typeface="Calibri" pitchFamily="34" charset="-120"/>
+              </a:rPr>
+              <a:t>◆ Valores de referencia; reemplaza con tu corrida (notebook 02).</a:t>
+            </a:r>
+            <a:endParaRPr lang="en-US" sz="900" dirty="0"/>
+          </a:p>
+        </p:txBody>
+      </p:sp>
+      <p:sp>
+        <p:nvSpPr>
+          <p:cNvPr id="10" name="Text 7"/>
           <p:cNvSpPr/>
           <p:nvPr/>
         </p:nvSpPr>
@@ -12810,7 +14603,7 @@
       </p:sp>
       <p:sp>
         <p:nvSpPr>
-          <p:cNvPr id="11" name="Text 9"/>
+          <p:cNvPr id="11" name="Text 8"/>
           <p:cNvSpPr/>
           <p:nvPr/>
         </p:nvSpPr>
@@ -12906,6 +14699,946 @@
             <a:r>
               <a:rPr lang="en-US" sz="1300" b="1" spc="300" kern="0" dirty="0">
                 <a:solidFill>
+                  <a:srgbClr val="2E8B57"/>
+                </a:solidFill>
+                <a:latin typeface="Calibri" pitchFamily="34" charset="0"/>
+                <a:ea typeface="Calibri" pitchFamily="34" charset="-122"/>
+                <a:cs typeface="Calibri" pitchFamily="34" charset="-120"/>
+              </a:rPr>
+              <a:t>CASO DE USO · SEGURIDAD CIUDADANA</a:t>
+            </a:r>
+            <a:endParaRPr lang="en-US" sz="1300" dirty="0"/>
+          </a:p>
+        </p:txBody>
+      </p:sp>
+      <p:sp>
+        <p:nvSpPr>
+          <p:cNvPr id="3" name="Text 1"/>
+          <p:cNvSpPr/>
+          <p:nvPr/>
+        </p:nvSpPr>
+        <p:spPr>
+          <a:xfrm>
+            <a:off x="640080" y="841248"/>
+            <a:ext cx="10972800" cy="868680"/>
+          </a:xfrm>
+          <a:prstGeom prst="rect">
+            <a:avLst/>
+          </a:prstGeom>
+          <a:noFill/>
+          <a:ln/>
+        </p:spPr>
+        <p:txBody>
+          <a:bodyPr wrap="square" lIns="0" tIns="0" rIns="0" bIns="0" rtlCol="0" anchor="ctr"/>
+          <a:lstStyle/>
+          <a:p>
+            <a:pPr indent="0" marL="0">
+              <a:buNone/>
+            </a:pPr>
+            <a:r>
+              <a:rPr lang="en-US" sz="3000" b="1" dirty="0">
+                <a:solidFill>
+                  <a:srgbClr val="1E293B"/>
+                </a:solidFill>
+                <a:latin typeface="Georgia" pitchFamily="34" charset="0"/>
+                <a:ea typeface="Georgia" pitchFamily="34" charset="-122"/>
+                <a:cs typeface="Georgia" pitchFamily="34" charset="-120"/>
+              </a:rPr>
+              <a:t>Más personas y motos detectadas</a:t>
+            </a:r>
+            <a:endParaRPr lang="en-US" sz="3000" dirty="0"/>
+          </a:p>
+        </p:txBody>
+      </p:sp>
+      <p:graphicFrame>
+        <p:nvGraphicFramePr>
+          <p:cNvPr id="4" name="Chart 0" descr=""/>
+          <p:cNvGraphicFramePr/>
+          <p:nvPr/>
+        </p:nvGraphicFramePr>
+        <p:xfrm>
+          <a:off x="640080" y="1920240"/>
+          <a:ext cx="7498080" cy="3840480"/>
+        </p:xfrm>
+        <a:graphic xmlns:a="http://schemas.openxmlformats.org/drawingml/2006/main">
+          <a:graphicData uri="http://schemas.openxmlformats.org/drawingml/2006/chart">
+            <c:chart xmlns:c="http://schemas.openxmlformats.org/drawingml/2006/chart" r:id="rId1"/>
+          </a:graphicData>
+        </a:graphic>
+      </p:graphicFrame>
+      <p:sp>
+        <p:nvSpPr>
+          <p:cNvPr id="5" name="Shape 2"/>
+          <p:cNvSpPr/>
+          <p:nvPr/>
+        </p:nvSpPr>
+        <p:spPr>
+          <a:xfrm>
+            <a:off x="8503920" y="2103120"/>
+            <a:ext cx="3063240" cy="3474720"/>
+          </a:xfrm>
+          <a:prstGeom prst="roundRect">
+            <a:avLst>
+              <a:gd name="adj" fmla="val 2388"/>
+            </a:avLst>
+          </a:prstGeom>
+          <a:solidFill>
+            <a:srgbClr val="0F2A43"/>
+          </a:solidFill>
+          <a:ln w="12700">
+            <a:solidFill>
+              <a:srgbClr val="0F2A43"/>
+            </a:solidFill>
+            <a:prstDash val="solid"/>
+          </a:ln>
+        </p:spPr>
+      </p:sp>
+      <p:sp>
+        <p:nvSpPr>
+          <p:cNvPr id="6" name="Text 3"/>
+          <p:cNvSpPr/>
+          <p:nvPr/>
+        </p:nvSpPr>
+        <p:spPr>
+          <a:xfrm>
+            <a:off x="8732520" y="2331720"/>
+            <a:ext cx="2651760" cy="365760"/>
+          </a:xfrm>
+          <a:prstGeom prst="rect">
+            <a:avLst/>
+          </a:prstGeom>
+          <a:noFill/>
+          <a:ln/>
+        </p:spPr>
+        <p:txBody>
+          <a:bodyPr wrap="square" lIns="0" tIns="0" rIns="0" bIns="0" rtlCol="0" anchor="ctr"/>
+          <a:lstStyle/>
+          <a:p>
+            <a:pPr indent="0" marL="0">
+              <a:buNone/>
+            </a:pPr>
+            <a:r>
+              <a:rPr lang="en-US" sz="1600" b="1" dirty="0">
+                <a:solidFill>
+                  <a:srgbClr val="FFFFFF"/>
+                </a:solidFill>
+                <a:latin typeface="Georgia" pitchFamily="34" charset="0"/>
+                <a:ea typeface="Georgia" pitchFamily="34" charset="-122"/>
+                <a:cs typeface="Georgia" pitchFamily="34" charset="-120"/>
+              </a:rPr>
+              <a:t>Lo que importa</a:t>
+            </a:r>
+            <a:endParaRPr lang="en-US" sz="1600" dirty="0"/>
+          </a:p>
+        </p:txBody>
+      </p:sp>
+      <p:sp>
+        <p:nvSpPr>
+          <p:cNvPr id="7" name="Text 4"/>
+          <p:cNvSpPr/>
+          <p:nvPr/>
+        </p:nvSpPr>
+        <p:spPr>
+          <a:xfrm>
+            <a:off x="8732520" y="2834640"/>
+            <a:ext cx="2651760" cy="2743200"/>
+          </a:xfrm>
+          <a:prstGeom prst="rect">
+            <a:avLst/>
+          </a:prstGeom>
+          <a:noFill/>
+          <a:ln/>
+        </p:spPr>
+        <p:txBody>
+          <a:bodyPr wrap="square" lIns="0" tIns="0" rIns="0" bIns="0" rtlCol="0" anchor="ctr"/>
+          <a:lstStyle/>
+          <a:p>
+            <a:pPr marL="342900" indent="-342900">
+              <a:spcAft>
+                <a:spcPts val="1000"/>
+              </a:spcAft>
+              <a:buSzPct val="100000"/>
+              <a:buChar char="•"/>
+            </a:pPr>
+            <a:r>
+              <a:rPr lang="en-US" sz="1300" dirty="0">
+                <a:solidFill>
+                  <a:srgbClr val="CADCFC"/>
+                </a:solidFill>
+                <a:latin typeface="Calibri" pitchFamily="34" charset="0"/>
+                <a:ea typeface="Calibri" pitchFamily="34" charset="-122"/>
+                <a:cs typeface="Calibri" pitchFamily="34" charset="-120"/>
+              </a:rPr>
+              <a:t>El mayor salto está en peatones, personas y motos.</a:t>
+            </a:r>
+            <a:endParaRPr lang="en-US" sz="1300" dirty="0"/>
+          </a:p>
+          <a:p>
+            <a:pPr marL="342900" indent="-342900">
+              <a:spcAft>
+                <a:spcPts val="1000"/>
+              </a:spcAft>
+              <a:buSzPct val="100000"/>
+              <a:buChar char="•"/>
+            </a:pPr>
+            <a:r>
+              <a:rPr lang="en-US" sz="1300" dirty="0">
+                <a:solidFill>
+                  <a:srgbClr val="CADCFC"/>
+                </a:solidFill>
+                <a:latin typeface="Calibri" pitchFamily="34" charset="0"/>
+                <a:ea typeface="Calibri" pitchFamily="34" charset="-122"/>
+                <a:cs typeface="Calibri" pitchFamily="34" charset="-120"/>
+              </a:rPr>
+              <a:t>Justo las clases críticas para cámaras urbanas.</a:t>
+            </a:r>
+            <a:endParaRPr lang="en-US" sz="1300" dirty="0"/>
+          </a:p>
+          <a:p>
+            <a:pPr marL="342900" indent="-342900">
+              <a:spcAft>
+                <a:spcPts val="1000"/>
+              </a:spcAft>
+              <a:buSzPct val="100000"/>
+              <a:buChar char="•"/>
+            </a:pPr>
+            <a:r>
+              <a:rPr lang="en-US" sz="1300" b="1" dirty="0">
+                <a:solidFill>
+                  <a:srgbClr val="9FE6C0"/>
+                </a:solidFill>
+                <a:latin typeface="Calibri" pitchFamily="34" charset="0"/>
+                <a:ea typeface="Calibri" pitchFamily="34" charset="-122"/>
+                <a:cs typeface="Calibri" pitchFamily="34" charset="-120"/>
+              </a:rPr>
+              <a:t>Más cobertura = menos puntos ciegos.</a:t>
+            </a:r>
+            <a:endParaRPr lang="en-US" sz="1300" dirty="0"/>
+          </a:p>
+        </p:txBody>
+      </p:sp>
+      <p:sp>
+        <p:nvSpPr>
+          <p:cNvPr id="8" name="Text 5"/>
+          <p:cNvSpPr/>
+          <p:nvPr/>
+        </p:nvSpPr>
+        <p:spPr>
+          <a:xfrm>
+            <a:off x="640080" y="6144768"/>
+            <a:ext cx="10972800" cy="274320"/>
+          </a:xfrm>
+          <a:prstGeom prst="rect">
+            <a:avLst/>
+          </a:prstGeom>
+          <a:noFill/>
+          <a:ln/>
+        </p:spPr>
+        <p:txBody>
+          <a:bodyPr wrap="square" lIns="0" tIns="0" rIns="0" bIns="0" rtlCol="0" anchor="ctr"/>
+          <a:lstStyle/>
+          <a:p>
+            <a:pPr indent="0" marL="0">
+              <a:buNone/>
+            </a:pPr>
+            <a:r>
+              <a:rPr lang="en-US" sz="900" i="1" dirty="0">
+                <a:solidFill>
+                  <a:srgbClr val="64748B"/>
+                </a:solidFill>
+                <a:latin typeface="Calibri" pitchFamily="34" charset="0"/>
+                <a:ea typeface="Calibri" pitchFamily="34" charset="-122"/>
+                <a:cs typeface="Calibri" pitchFamily="34" charset="-120"/>
+              </a:rPr>
+              <a:t>◆ Detecciones por clase; valores de referencia (notebook 02 · analyze_classes).</a:t>
+            </a:r>
+            <a:endParaRPr lang="en-US" sz="900" dirty="0"/>
+          </a:p>
+        </p:txBody>
+      </p:sp>
+      <p:sp>
+        <p:nvSpPr>
+          <p:cNvPr id="9" name="Text 6"/>
+          <p:cNvSpPr/>
+          <p:nvPr/>
+        </p:nvSpPr>
+        <p:spPr>
+          <a:xfrm>
+            <a:off x="457200" y="6446520"/>
+            <a:ext cx="7315200" cy="274320"/>
+          </a:xfrm>
+          <a:prstGeom prst="rect">
+            <a:avLst/>
+          </a:prstGeom>
+          <a:noFill/>
+          <a:ln/>
+        </p:spPr>
+        <p:txBody>
+          <a:bodyPr wrap="square" rtlCol="0" anchor="ctr"/>
+          <a:lstStyle/>
+          <a:p>
+            <a:pPr algn="l" indent="0" marL="0">
+              <a:buNone/>
+            </a:pPr>
+            <a:r>
+              <a:rPr lang="en-US" sz="900" dirty="0">
+                <a:solidFill>
+                  <a:srgbClr val="64748B"/>
+                </a:solidFill>
+                <a:latin typeface="Calibri" pitchFamily="34" charset="0"/>
+                <a:ea typeface="Calibri" pitchFamily="34" charset="-122"/>
+                <a:cs typeface="Calibri" pitchFamily="34" charset="-120"/>
+              </a:rPr>
+              <a:t>Computer Vision Open Source · YOLO + SAHI</a:t>
+            </a:r>
+            <a:endParaRPr lang="en-US" sz="900" dirty="0"/>
+          </a:p>
+        </p:txBody>
+      </p:sp>
+      <p:sp>
+        <p:nvSpPr>
+          <p:cNvPr id="10" name="Text 7"/>
+          <p:cNvSpPr/>
+          <p:nvPr/>
+        </p:nvSpPr>
+        <p:spPr>
+          <a:xfrm>
+            <a:off x="9905695" y="6446520"/>
+            <a:ext cx="1828800" cy="274320"/>
+          </a:xfrm>
+          <a:prstGeom prst="rect">
+            <a:avLst/>
+          </a:prstGeom>
+          <a:noFill/>
+          <a:ln/>
+        </p:spPr>
+        <p:txBody>
+          <a:bodyPr wrap="square" rtlCol="0" anchor="ctr"/>
+          <a:lstStyle/>
+          <a:p>
+            <a:pPr algn="r" indent="0" marL="0">
+              <a:buNone/>
+            </a:pPr>
+            <a:r>
+              <a:rPr lang="en-US" sz="900" dirty="0">
+                <a:solidFill>
+                  <a:srgbClr val="64748B"/>
+                </a:solidFill>
+                <a:latin typeface="Calibri" pitchFamily="34" charset="0"/>
+                <a:ea typeface="Calibri" pitchFamily="34" charset="-122"/>
+                <a:cs typeface="Calibri" pitchFamily="34" charset="-120"/>
+              </a:rPr>
+              <a:t>FLISOL 2026</a:t>
+            </a:r>
+            <a:endParaRPr lang="en-US" sz="900" dirty="0"/>
+          </a:p>
+        </p:txBody>
+      </p:sp>
+    </p:spTree>
+  </p:cSld>
+  <p:clrMapOvr>
+    <a:masterClrMapping/>
+  </p:clrMapOvr>
+</p:sld>
+</file>
+
+<file path=ppt/slides/slide24.xml><?xml version="1.0" encoding="utf-8"?>
+<p:sld xmlns:a="http://schemas.openxmlformats.org/drawingml/2006/main" xmlns:r="http://schemas.openxmlformats.org/officeDocument/2006/relationships" xmlns:p="http://schemas.openxmlformats.org/presentationml/2006/main">
+  <p:cSld name="Slide 24">
+    <p:bg>
+      <p:bgPr>
+        <a:solidFill>
+          <a:srgbClr val="FFFFFF"/>
+        </a:solidFill>
+      </p:bgPr>
+    </p:bg>
+    <p:spTree>
+      <p:nvGrpSpPr>
+        <p:cNvPr id="1" name=""/>
+        <p:cNvGrpSpPr/>
+        <p:nvPr/>
+      </p:nvGrpSpPr>
+      <p:grpSpPr>
+        <a:xfrm>
+          <a:off x="0" y="0"/>
+          <a:ext cx="0" cy="0"/>
+          <a:chOff x="0" y="0"/>
+          <a:chExt cx="0" cy="0"/>
+        </a:xfrm>
+      </p:grpSpPr>
+      <p:sp>
+        <p:nvSpPr>
+          <p:cNvPr id="2" name="Text 0"/>
+          <p:cNvSpPr/>
+          <p:nvPr/>
+        </p:nvSpPr>
+        <p:spPr>
+          <a:xfrm>
+            <a:off x="640080" y="502920"/>
+            <a:ext cx="10058400" cy="320040"/>
+          </a:xfrm>
+          <a:prstGeom prst="rect">
+            <a:avLst/>
+          </a:prstGeom>
+          <a:noFill/>
+          <a:ln/>
+        </p:spPr>
+        <p:txBody>
+          <a:bodyPr wrap="square" lIns="0" tIns="0" rIns="0" bIns="0" rtlCol="0" anchor="ctr"/>
+          <a:lstStyle/>
+          <a:p>
+            <a:pPr indent="0" marL="0">
+              <a:buNone/>
+            </a:pPr>
+            <a:r>
+              <a:rPr lang="en-US" sz="1300" b="1" spc="300" kern="0" dirty="0">
+                <a:solidFill>
+                  <a:srgbClr val="3A6EA5"/>
+                </a:solidFill>
+                <a:latin typeface="Calibri" pitchFamily="34" charset="0"/>
+                <a:ea typeface="Calibri" pitchFamily="34" charset="-122"/>
+                <a:cs typeface="Calibri" pitchFamily="34" charset="-120"/>
+              </a:rPr>
+              <a:t>CRITERIO DE INGENIERÍA</a:t>
+            </a:r>
+            <a:endParaRPr lang="en-US" sz="1300" dirty="0"/>
+          </a:p>
+        </p:txBody>
+      </p:sp>
+      <p:sp>
+        <p:nvSpPr>
+          <p:cNvPr id="3" name="Text 1"/>
+          <p:cNvSpPr/>
+          <p:nvPr/>
+        </p:nvSpPr>
+        <p:spPr>
+          <a:xfrm>
+            <a:off x="640080" y="841248"/>
+            <a:ext cx="10972800" cy="868680"/>
+          </a:xfrm>
+          <a:prstGeom prst="rect">
+            <a:avLst/>
+          </a:prstGeom>
+          <a:noFill/>
+          <a:ln/>
+        </p:spPr>
+        <p:txBody>
+          <a:bodyPr wrap="square" lIns="0" tIns="0" rIns="0" bIns="0" rtlCol="0" anchor="ctr"/>
+          <a:lstStyle/>
+          <a:p>
+            <a:pPr indent="0" marL="0">
+              <a:buNone/>
+            </a:pPr>
+            <a:r>
+              <a:rPr lang="en-US" sz="3000" b="1" dirty="0">
+                <a:solidFill>
+                  <a:srgbClr val="1E293B"/>
+                </a:solidFill>
+                <a:latin typeface="Georgia" pitchFamily="34" charset="0"/>
+                <a:ea typeface="Georgia" pitchFamily="34" charset="-122"/>
+                <a:cs typeface="Georgia" pitchFamily="34" charset="-120"/>
+              </a:rPr>
+              <a:t>Cuándo usar SAHI (y cuándo no)</a:t>
+            </a:r>
+            <a:endParaRPr lang="en-US" sz="3000" dirty="0"/>
+          </a:p>
+        </p:txBody>
+      </p:sp>
+      <p:sp>
+        <p:nvSpPr>
+          <p:cNvPr id="4" name="Shape 2"/>
+          <p:cNvSpPr/>
+          <p:nvPr/>
+        </p:nvSpPr>
+        <p:spPr>
+          <a:xfrm>
+            <a:off x="640080" y="1965960"/>
+            <a:ext cx="5394960" cy="3657600"/>
+          </a:xfrm>
+          <a:prstGeom prst="roundRect">
+            <a:avLst>
+              <a:gd name="adj" fmla="val 2000"/>
+            </a:avLst>
+          </a:prstGeom>
+          <a:solidFill>
+            <a:srgbClr val="F4F7FA"/>
+          </a:solidFill>
+          <a:ln w="19050">
+            <a:solidFill>
+              <a:srgbClr val="2E8B57"/>
+            </a:solidFill>
+            <a:prstDash val="solid"/>
+          </a:ln>
+          <a:effectLst>
+            <a:outerShdw sx="100000" sy="100000" kx="0" ky="0" algn="bl" rotWithShape="0" blurRad="114300" dist="38100" dir="5400000">
+              <a:srgbClr val="000000">
+                <a:alpha val="18000"/>
+              </a:srgbClr>
+            </a:outerShdw>
+          </a:effectLst>
+        </p:spPr>
+      </p:sp>
+      <p:sp>
+        <p:nvSpPr>
+          <p:cNvPr id="5" name="Text 3"/>
+          <p:cNvSpPr/>
+          <p:nvPr/>
+        </p:nvSpPr>
+        <p:spPr>
+          <a:xfrm>
+            <a:off x="868680" y="2148840"/>
+            <a:ext cx="4937760" cy="457200"/>
+          </a:xfrm>
+          <a:prstGeom prst="rect">
+            <a:avLst/>
+          </a:prstGeom>
+          <a:noFill/>
+          <a:ln/>
+        </p:spPr>
+        <p:txBody>
+          <a:bodyPr wrap="square" lIns="0" tIns="0" rIns="0" bIns="0" rtlCol="0" anchor="ctr"/>
+          <a:lstStyle/>
+          <a:p>
+            <a:pPr indent="0" marL="0">
+              <a:buNone/>
+            </a:pPr>
+            <a:r>
+              <a:rPr lang="en-US" sz="2000" b="1" dirty="0">
+                <a:solidFill>
+                  <a:srgbClr val="2E8B57"/>
+                </a:solidFill>
+                <a:latin typeface="Georgia" pitchFamily="34" charset="0"/>
+                <a:ea typeface="Georgia" pitchFamily="34" charset="-122"/>
+                <a:cs typeface="Georgia" pitchFamily="34" charset="-120"/>
+              </a:rPr>
+              <a:t>SÍ conviene</a:t>
+            </a:r>
+            <a:endParaRPr lang="en-US" sz="2000" dirty="0"/>
+          </a:p>
+        </p:txBody>
+      </p:sp>
+      <p:sp>
+        <p:nvSpPr>
+          <p:cNvPr id="6" name="Text 4"/>
+          <p:cNvSpPr/>
+          <p:nvPr/>
+        </p:nvSpPr>
+        <p:spPr>
+          <a:xfrm>
+            <a:off x="868680" y="2743200"/>
+            <a:ext cx="4937760" cy="2743200"/>
+          </a:xfrm>
+          <a:prstGeom prst="rect">
+            <a:avLst/>
+          </a:prstGeom>
+          <a:noFill/>
+          <a:ln/>
+        </p:spPr>
+        <p:txBody>
+          <a:bodyPr wrap="square" lIns="0" tIns="0" rIns="0" bIns="0" rtlCol="0" anchor="ctr"/>
+          <a:lstStyle/>
+          <a:p>
+            <a:pPr marL="342900" indent="-342900">
+              <a:spcAft>
+                <a:spcPts val="1200"/>
+              </a:spcAft>
+              <a:buSzPct val="100000"/>
+              <a:buChar char="•"/>
+            </a:pPr>
+            <a:r>
+              <a:rPr lang="en-US" sz="1400" dirty="0">
+                <a:solidFill>
+                  <a:srgbClr val="1E293B"/>
+                </a:solidFill>
+                <a:latin typeface="Calibri" pitchFamily="34" charset="0"/>
+                <a:ea typeface="Calibri" pitchFamily="34" charset="-122"/>
+                <a:cs typeface="Calibri" pitchFamily="34" charset="-120"/>
+              </a:rPr>
+              <a:t>Objetos pequeños / lejanos (dron, satélite, CCTV).</a:t>
+            </a:r>
+            <a:endParaRPr lang="en-US" sz="1400" dirty="0"/>
+          </a:p>
+          <a:p>
+            <a:pPr marL="342900" indent="-342900">
+              <a:spcAft>
+                <a:spcPts val="1200"/>
+              </a:spcAft>
+              <a:buSzPct val="100000"/>
+              <a:buChar char="•"/>
+            </a:pPr>
+            <a:r>
+              <a:rPr lang="en-US" sz="1400" dirty="0">
+                <a:solidFill>
+                  <a:srgbClr val="1E293B"/>
+                </a:solidFill>
+                <a:latin typeface="Calibri" pitchFamily="34" charset="0"/>
+                <a:ea typeface="Calibri" pitchFamily="34" charset="-122"/>
+                <a:cs typeface="Calibri" pitchFamily="34" charset="-120"/>
+              </a:rPr>
+              <a:t>Imágenes de alta resolución.</a:t>
+            </a:r>
+            <a:endParaRPr lang="en-US" sz="1400" dirty="0"/>
+          </a:p>
+          <a:p>
+            <a:pPr marL="342900" indent="-342900">
+              <a:spcAft>
+                <a:spcPts val="1200"/>
+              </a:spcAft>
+              <a:buSzPct val="100000"/>
+              <a:buChar char="•"/>
+            </a:pPr>
+            <a:r>
+              <a:rPr lang="en-US" sz="1400" dirty="0">
+                <a:solidFill>
+                  <a:srgbClr val="1E293B"/>
+                </a:solidFill>
+                <a:latin typeface="Calibri" pitchFamily="34" charset="0"/>
+                <a:ea typeface="Calibri" pitchFamily="34" charset="-122"/>
+                <a:cs typeface="Calibri" pitchFamily="34" charset="-120"/>
+              </a:rPr>
+              <a:t>Escenas densas con muchos objetos.</a:t>
+            </a:r>
+            <a:endParaRPr lang="en-US" sz="1400" dirty="0"/>
+          </a:p>
+          <a:p>
+            <a:pPr marL="342900" indent="-342900">
+              <a:spcAft>
+                <a:spcPts val="1200"/>
+              </a:spcAft>
+              <a:buSzPct val="100000"/>
+              <a:buChar char="•"/>
+            </a:pPr>
+            <a:r>
+              <a:rPr lang="en-US" sz="1400" dirty="0">
+                <a:solidFill>
+                  <a:srgbClr val="1E293B"/>
+                </a:solidFill>
+                <a:latin typeface="Calibri" pitchFamily="34" charset="0"/>
+                <a:ea typeface="Calibri" pitchFamily="34" charset="-122"/>
+                <a:cs typeface="Calibri" pitchFamily="34" charset="-120"/>
+              </a:rPr>
+              <a:t>La precisión importa más que el tiempo real.</a:t>
+            </a:r>
+            <a:endParaRPr lang="en-US" sz="1400" dirty="0"/>
+          </a:p>
+        </p:txBody>
+      </p:sp>
+      <p:sp>
+        <p:nvSpPr>
+          <p:cNvPr id="7" name="Shape 5"/>
+          <p:cNvSpPr/>
+          <p:nvPr/>
+        </p:nvSpPr>
+        <p:spPr>
+          <a:xfrm>
+            <a:off x="6309360" y="1965960"/>
+            <a:ext cx="5257800" cy="3657600"/>
+          </a:xfrm>
+          <a:prstGeom prst="roundRect">
+            <a:avLst>
+              <a:gd name="adj" fmla="val 2000"/>
+            </a:avLst>
+          </a:prstGeom>
+          <a:solidFill>
+            <a:srgbClr val="F4F7FA"/>
+          </a:solidFill>
+          <a:ln w="19050">
+            <a:solidFill>
+              <a:srgbClr val="E4572E"/>
+            </a:solidFill>
+            <a:prstDash val="solid"/>
+          </a:ln>
+          <a:effectLst>
+            <a:outerShdw sx="100000" sy="100000" kx="0" ky="0" algn="bl" rotWithShape="0" blurRad="114300" dist="38100" dir="5400000">
+              <a:srgbClr val="000000">
+                <a:alpha val="18000"/>
+              </a:srgbClr>
+            </a:outerShdw>
+          </a:effectLst>
+        </p:spPr>
+      </p:sp>
+      <p:sp>
+        <p:nvSpPr>
+          <p:cNvPr id="8" name="Text 6"/>
+          <p:cNvSpPr/>
+          <p:nvPr/>
+        </p:nvSpPr>
+        <p:spPr>
+          <a:xfrm>
+            <a:off x="6537960" y="2148840"/>
+            <a:ext cx="4846320" cy="457200"/>
+          </a:xfrm>
+          <a:prstGeom prst="rect">
+            <a:avLst/>
+          </a:prstGeom>
+          <a:noFill/>
+          <a:ln/>
+        </p:spPr>
+        <p:txBody>
+          <a:bodyPr wrap="square" lIns="0" tIns="0" rIns="0" bIns="0" rtlCol="0" anchor="ctr"/>
+          <a:lstStyle/>
+          <a:p>
+            <a:pPr indent="0" marL="0">
+              <a:buNone/>
+            </a:pPr>
+            <a:r>
+              <a:rPr lang="en-US" sz="2000" b="1" dirty="0">
+                <a:solidFill>
+                  <a:srgbClr val="E4572E"/>
+                </a:solidFill>
+                <a:latin typeface="Georgia" pitchFamily="34" charset="0"/>
+                <a:ea typeface="Georgia" pitchFamily="34" charset="-122"/>
+                <a:cs typeface="Georgia" pitchFamily="34" charset="-120"/>
+              </a:rPr>
+              <a:t>NO hace falta</a:t>
+            </a:r>
+            <a:endParaRPr lang="en-US" sz="2000" dirty="0"/>
+          </a:p>
+        </p:txBody>
+      </p:sp>
+      <p:sp>
+        <p:nvSpPr>
+          <p:cNvPr id="9" name="Text 7"/>
+          <p:cNvSpPr/>
+          <p:nvPr/>
+        </p:nvSpPr>
+        <p:spPr>
+          <a:xfrm>
+            <a:off x="6537960" y="2743200"/>
+            <a:ext cx="4846320" cy="2743200"/>
+          </a:xfrm>
+          <a:prstGeom prst="rect">
+            <a:avLst/>
+          </a:prstGeom>
+          <a:noFill/>
+          <a:ln/>
+        </p:spPr>
+        <p:txBody>
+          <a:bodyPr wrap="square" lIns="0" tIns="0" rIns="0" bIns="0" rtlCol="0" anchor="ctr"/>
+          <a:lstStyle/>
+          <a:p>
+            <a:pPr marL="342900" indent="-342900">
+              <a:spcAft>
+                <a:spcPts val="1200"/>
+              </a:spcAft>
+              <a:buSzPct val="100000"/>
+              <a:buChar char="•"/>
+            </a:pPr>
+            <a:r>
+              <a:rPr lang="en-US" sz="1400" dirty="0">
+                <a:solidFill>
+                  <a:srgbClr val="1E293B"/>
+                </a:solidFill>
+                <a:latin typeface="Calibri" pitchFamily="34" charset="0"/>
+                <a:ea typeface="Calibri" pitchFamily="34" charset="-122"/>
+                <a:cs typeface="Calibri" pitchFamily="34" charset="-120"/>
+              </a:rPr>
+              <a:t>Objetos grandes que llenan el frame.</a:t>
+            </a:r>
+            <a:endParaRPr lang="en-US" sz="1400" dirty="0"/>
+          </a:p>
+          <a:p>
+            <a:pPr marL="342900" indent="-342900">
+              <a:spcAft>
+                <a:spcPts val="1200"/>
+              </a:spcAft>
+              <a:buSzPct val="100000"/>
+              <a:buChar char="•"/>
+            </a:pPr>
+            <a:r>
+              <a:rPr lang="en-US" sz="1400" dirty="0">
+                <a:solidFill>
+                  <a:srgbClr val="1E293B"/>
+                </a:solidFill>
+                <a:latin typeface="Calibri" pitchFamily="34" charset="0"/>
+                <a:ea typeface="Calibri" pitchFamily="34" charset="-122"/>
+                <a:cs typeface="Calibri" pitchFamily="34" charset="-120"/>
+              </a:rPr>
+              <a:t>Tiempo real estricto sin GPU.</a:t>
+            </a:r>
+            <a:endParaRPr lang="en-US" sz="1400" dirty="0"/>
+          </a:p>
+          <a:p>
+            <a:pPr marL="342900" indent="-342900">
+              <a:spcAft>
+                <a:spcPts val="1200"/>
+              </a:spcAft>
+              <a:buSzPct val="100000"/>
+              <a:buChar char="•"/>
+            </a:pPr>
+            <a:r>
+              <a:rPr lang="en-US" sz="1400" dirty="0">
+                <a:solidFill>
+                  <a:srgbClr val="1E293B"/>
+                </a:solidFill>
+                <a:latin typeface="Calibri" pitchFamily="34" charset="0"/>
+                <a:ea typeface="Calibri" pitchFamily="34" charset="-122"/>
+                <a:cs typeface="Calibri" pitchFamily="34" charset="-120"/>
+              </a:rPr>
+              <a:t>Costo ≈ proporcional al nº de slices.</a:t>
+            </a:r>
+            <a:endParaRPr lang="en-US" sz="1400" dirty="0"/>
+          </a:p>
+          <a:p>
+            <a:pPr marL="342900" indent="-342900">
+              <a:spcAft>
+                <a:spcPts val="1200"/>
+              </a:spcAft>
+              <a:buSzPct val="100000"/>
+              <a:buChar char="•"/>
+            </a:pPr>
+            <a:r>
+              <a:rPr lang="en-US" sz="1400" b="1" dirty="0">
+                <a:solidFill>
+                  <a:srgbClr val="1E293B"/>
+                </a:solidFill>
+                <a:latin typeface="Calibri" pitchFamily="34" charset="0"/>
+                <a:ea typeface="Calibri" pitchFamily="34" charset="-122"/>
+                <a:cs typeface="Calibri" pitchFamily="34" charset="-120"/>
+              </a:rPr>
+              <a:t>Regla: bisturí para lo pequeño, no martillo para todo.</a:t>
+            </a:r>
+            <a:endParaRPr lang="en-US" sz="1400" dirty="0"/>
+          </a:p>
+        </p:txBody>
+      </p:sp>
+      <p:sp>
+        <p:nvSpPr>
+          <p:cNvPr id="10" name="Text 8"/>
+          <p:cNvSpPr/>
+          <p:nvPr/>
+        </p:nvSpPr>
+        <p:spPr>
+          <a:xfrm>
+            <a:off x="457200" y="6446520"/>
+            <a:ext cx="7315200" cy="274320"/>
+          </a:xfrm>
+          <a:prstGeom prst="rect">
+            <a:avLst/>
+          </a:prstGeom>
+          <a:noFill/>
+          <a:ln/>
+        </p:spPr>
+        <p:txBody>
+          <a:bodyPr wrap="square" rtlCol="0" anchor="ctr"/>
+          <a:lstStyle/>
+          <a:p>
+            <a:pPr algn="l" indent="0" marL="0">
+              <a:buNone/>
+            </a:pPr>
+            <a:r>
+              <a:rPr lang="en-US" sz="900" dirty="0">
+                <a:solidFill>
+                  <a:srgbClr val="64748B"/>
+                </a:solidFill>
+                <a:latin typeface="Calibri" pitchFamily="34" charset="0"/>
+                <a:ea typeface="Calibri" pitchFamily="34" charset="-122"/>
+                <a:cs typeface="Calibri" pitchFamily="34" charset="-120"/>
+              </a:rPr>
+              <a:t>Computer Vision Open Source · YOLO + SAHI</a:t>
+            </a:r>
+            <a:endParaRPr lang="en-US" sz="900" dirty="0"/>
+          </a:p>
+        </p:txBody>
+      </p:sp>
+      <p:sp>
+        <p:nvSpPr>
+          <p:cNvPr id="11" name="Text 9"/>
+          <p:cNvSpPr/>
+          <p:nvPr/>
+        </p:nvSpPr>
+        <p:spPr>
+          <a:xfrm>
+            <a:off x="9905695" y="6446520"/>
+            <a:ext cx="1828800" cy="274320"/>
+          </a:xfrm>
+          <a:prstGeom prst="rect">
+            <a:avLst/>
+          </a:prstGeom>
+          <a:noFill/>
+          <a:ln/>
+        </p:spPr>
+        <p:txBody>
+          <a:bodyPr wrap="square" rtlCol="0" anchor="ctr"/>
+          <a:lstStyle/>
+          <a:p>
+            <a:pPr algn="r" indent="0" marL="0">
+              <a:buNone/>
+            </a:pPr>
+            <a:r>
+              <a:rPr lang="en-US" sz="900" dirty="0">
+                <a:solidFill>
+                  <a:srgbClr val="64748B"/>
+                </a:solidFill>
+                <a:latin typeface="Calibri" pitchFamily="34" charset="0"/>
+                <a:ea typeface="Calibri" pitchFamily="34" charset="-122"/>
+                <a:cs typeface="Calibri" pitchFamily="34" charset="-120"/>
+              </a:rPr>
+              <a:t>FLISOL 2026</a:t>
+            </a:r>
+            <a:endParaRPr lang="en-US" sz="900" dirty="0"/>
+          </a:p>
+        </p:txBody>
+      </p:sp>
+    </p:spTree>
+  </p:cSld>
+  <p:clrMapOvr>
+    <a:masterClrMapping/>
+  </p:clrMapOvr>
+</p:sld>
+</file>
+
+<file path=ppt/slides/slide25.xml><?xml version="1.0" encoding="utf-8"?>
+<p:sld xmlns:a="http://schemas.openxmlformats.org/drawingml/2006/main" xmlns:r="http://schemas.openxmlformats.org/officeDocument/2006/relationships" xmlns:p="http://schemas.openxmlformats.org/presentationml/2006/main">
+  <p:cSld name="Slide 25">
+    <p:bg>
+      <p:bgPr>
+        <a:solidFill>
+          <a:srgbClr val="FFFFFF"/>
+        </a:solidFill>
+      </p:bgPr>
+    </p:bg>
+    <p:spTree>
+      <p:nvGrpSpPr>
+        <p:cNvPr id="1" name=""/>
+        <p:cNvGrpSpPr/>
+        <p:nvPr/>
+      </p:nvGrpSpPr>
+      <p:grpSpPr>
+        <a:xfrm>
+          <a:off x="0" y="0"/>
+          <a:ext cx="0" cy="0"/>
+          <a:chOff x="0" y="0"/>
+          <a:chExt cx="0" cy="0"/>
+        </a:xfrm>
+      </p:grpSpPr>
+      <p:sp>
+        <p:nvSpPr>
+          <p:cNvPr id="2" name="Text 0"/>
+          <p:cNvSpPr/>
+          <p:nvPr/>
+        </p:nvSpPr>
+        <p:spPr>
+          <a:xfrm>
+            <a:off x="640080" y="502920"/>
+            <a:ext cx="10058400" cy="320040"/>
+          </a:xfrm>
+          <a:prstGeom prst="rect">
+            <a:avLst/>
+          </a:prstGeom>
+          <a:noFill/>
+          <a:ln/>
+        </p:spPr>
+        <p:txBody>
+          <a:bodyPr wrap="square" lIns="0" tIns="0" rIns="0" bIns="0" rtlCol="0" anchor="ctr"/>
+          <a:lstStyle/>
+          <a:p>
+            <a:pPr indent="0" marL="0">
+              <a:buNone/>
+            </a:pPr>
+            <a:r>
+              <a:rPr lang="en-US" sz="1300" b="1" spc="300" kern="0" dirty="0">
+                <a:solidFill>
                   <a:srgbClr val="3A6EA5"/>
                 </a:solidFill>
                 <a:latin typeface="Calibri" pitchFamily="34" charset="0"/>
@@ -13088,7 +15821,7 @@
                 <a:ea typeface="Calibri" pitchFamily="34" charset="-122"/>
                 <a:cs typeface="Calibri" pitchFamily="34" charset="-120"/>
               </a:rPr>
-              <a:t>Ultralytics YOLO11   </a:t>
+              <a:t>Ultralytics YOLO11</a:t>
             </a:r>
             <a:pPr indent="0" marL="0">
               <a:buNone/>
@@ -13102,11 +15835,8 @@
                 <a:ea typeface="Calibri" pitchFamily="34" charset="-122"/>
                 <a:cs typeface="Calibri" pitchFamily="34" charset="-120"/>
               </a:rPr>
-              <a:t>AGPL-3.0</a:t>
-            </a:r>
-            <a:pPr indent="0" marL="0">
-              <a:buNone/>
-            </a:pPr>
+              <a:t>   AGPL-3.0</a:t>
+            </a:r>
             <a:endParaRPr lang="en-US" sz="1600" dirty="0"/>
           </a:p>
           <a:p>
@@ -13259,7 +15989,7 @@
                 <a:ea typeface="Calibri" pitchFamily="34" charset="-122"/>
                 <a:cs typeface="Calibri" pitchFamily="34" charset="-120"/>
               </a:rPr>
-              <a:t>SAHI   </a:t>
+              <a:t>SAHI</a:t>
             </a:r>
             <a:pPr indent="0" marL="0">
               <a:buNone/>
@@ -13273,11 +16003,8 @@
                 <a:ea typeface="Calibri" pitchFamily="34" charset="-122"/>
                 <a:cs typeface="Calibri" pitchFamily="34" charset="-120"/>
               </a:rPr>
-              <a:t>MIT</a:t>
-            </a:r>
-            <a:pPr indent="0" marL="0">
-              <a:buNone/>
-            </a:pPr>
+              <a:t>   MIT</a:t>
+            </a:r>
             <a:endParaRPr lang="en-US" sz="1600" dirty="0"/>
           </a:p>
           <a:p>
@@ -13430,7 +16157,7 @@
                 <a:ea typeface="Calibri" pitchFamily="34" charset="-122"/>
                 <a:cs typeface="Calibri" pitchFamily="34" charset="-120"/>
               </a:rPr>
-              <a:t>pycocotools   </a:t>
+              <a:t>pycocotools</a:t>
             </a:r>
             <a:pPr indent="0" marL="0">
               <a:buNone/>
@@ -13444,11 +16171,8 @@
                 <a:ea typeface="Calibri" pitchFamily="34" charset="-122"/>
                 <a:cs typeface="Calibri" pitchFamily="34" charset="-120"/>
               </a:rPr>
-              <a:t>FreeBSD</a:t>
-            </a:r>
-            <a:pPr indent="0" marL="0">
-              <a:buNone/>
-            </a:pPr>
+              <a:t>   FreeBSD</a:t>
+            </a:r>
             <a:endParaRPr lang="en-US" sz="1600" dirty="0"/>
           </a:p>
           <a:p>
@@ -13601,7 +16325,7 @@
                 <a:ea typeface="Calibri" pitchFamily="34" charset="-122"/>
                 <a:cs typeface="Calibri" pitchFamily="34" charset="-120"/>
               </a:rPr>
-              <a:t>Supervision   </a:t>
+              <a:t>Supervision</a:t>
             </a:r>
             <a:pPr indent="0" marL="0">
               <a:buNone/>
@@ -13615,11 +16339,8 @@
                 <a:ea typeface="Calibri" pitchFamily="34" charset="-122"/>
                 <a:cs typeface="Calibri" pitchFamily="34" charset="-120"/>
               </a:rPr>
-              <a:t>MIT</a:t>
-            </a:r>
-            <a:pPr indent="0" marL="0">
-              <a:buNone/>
-            </a:pPr>
+              <a:t>   MIT</a:t>
+            </a:r>
             <a:endParaRPr lang="en-US" sz="1600" dirty="0"/>
           </a:p>
           <a:p>
@@ -13727,9 +16448,9 @@
 </p:sld>
 </file>
 
-<file path=ppt/slides/slide24.xml><?xml version="1.0" encoding="utf-8"?>
+<file path=ppt/slides/slide26.xml><?xml version="1.0" encoding="utf-8"?>
 <p:sld xmlns:a="http://schemas.openxmlformats.org/drawingml/2006/main" xmlns:r="http://schemas.openxmlformats.org/officeDocument/2006/relationships" xmlns:p="http://schemas.openxmlformats.org/presentationml/2006/main">
-  <p:cSld name="Slide 24">
+  <p:cSld name="Slide 26">
     <p:bg>
       <p:bgPr>
         <a:solidFill>
@@ -14383,9 +17104,9 @@
 </p:sld>
 </file>
 
-<file path=ppt/slides/slide25.xml><?xml version="1.0" encoding="utf-8"?>
+<file path=ppt/slides/slide27.xml><?xml version="1.0" encoding="utf-8"?>
 <p:sld xmlns:a="http://schemas.openxmlformats.org/drawingml/2006/main" xmlns:r="http://schemas.openxmlformats.org/officeDocument/2006/relationships" xmlns:p="http://schemas.openxmlformats.org/presentationml/2006/main">
-  <p:cSld name="Slide 25">
+  <p:cSld name="Slide 27">
     <p:bg>
       <p:bgPr>
         <a:solidFill>
@@ -14559,9 +17280,11 @@
                 <a:ea typeface="Calibri" pitchFamily="34" charset="-122"/>
                 <a:cs typeface="Calibri" pitchFamily="34" charset="-120"/>
               </a:rPr>
-              <a:t>github.com/TU-USUARIO/yolo-sahi-flisol2026
-</a:t>
-            </a:r>
+              <a:t>github.com/jossuema/yolo-sahi-flisol2026</a:t>
+            </a:r>
+            <a:endParaRPr lang="en-US" sz="1500" dirty="0"/>
+          </a:p>
+          <a:p>
             <a:pPr indent="0" marL="0">
               <a:buNone/>
             </a:pPr>

--- a/slides/YOLO_SAHI_FLISOL2026.pptx
+++ b/slides/YOLO_SAHI_FLISOL2026.pptx
@@ -32,9 +32,12 @@
     <p:sldId id="280" r:id="rId26"/>
     <p:sldId id="281" r:id="rId27"/>
     <p:sldId id="282" r:id="rId28"/>
+    <p:sldId id="283" r:id="rId29"/>
+    <p:sldId id="284" r:id="rId30"/>
+    <p:sldId id="285" r:id="rId31"/>
   </p:sldIdLst>
   <p:notesMasterIdLst>
-    <p:notesMasterId r:id="rId29"/>
+    <p:notesMasterId r:id="rId32"/>
   </p:notesMasterIdLst>
   <p:sldSz cx="12191695" cy="6858000"/>
   <p:notesSz cx="6858000" cy="12191695"/>
@@ -4205,6 +4208,182 @@
 </p:notes>
 </file>
 
+<file path=ppt/notesSlides/notesSlide28.xml><?xml version="1.0" encoding="utf-8"?>
+<p:notes xmlns:a="http://schemas.openxmlformats.org/drawingml/2006/main" xmlns:r="http://schemas.openxmlformats.org/officeDocument/2006/relationships" xmlns:p="http://schemas.openxmlformats.org/presentationml/2006/main">
+  <p:cSld>
+    <p:spTree>
+      <p:nvGrpSpPr>
+        <p:cNvPr id="1" name=""/>
+        <p:cNvGrpSpPr/>
+        <p:nvPr/>
+      </p:nvGrpSpPr>
+      <p:grpSpPr>
+        <a:xfrm>
+          <a:off x="0" y="0"/>
+          <a:ext cx="0" cy="0"/>
+          <a:chOff x="0" y="0"/>
+          <a:chExt cx="0" cy="0"/>
+        </a:xfrm>
+      </p:grpSpPr>
+      <p:sp>
+        <p:nvSpPr>
+          <p:cNvPr id="2" name="Slide Image Placeholder 1"/>
+          <p:cNvSpPr>
+            <a:spLocks noGrp="1" noRot="1" noChangeAspect="1"/>
+          </p:cNvSpPr>
+          <p:nvPr>
+            <p:ph type="sldImg"/>
+          </p:nvPr>
+        </p:nvSpPr>
+        <p:spPr/>
+      </p:sp>
+      <p:sp>
+        <p:nvSpPr>
+          <p:cNvPr id="3" name="Notes Placeholder 2"/>
+          <p:cNvSpPr>
+            <a:spLocks noGrp="1"/>
+          </p:cNvSpPr>
+          <p:nvPr>
+            <p:ph type="body" idx="1"/>
+          </p:nvPr>
+        </p:nvSpPr>
+        <p:spPr/>
+        <p:txBody>
+          <a:bodyPr/>
+          <a:lstStyle/>
+          <a:p>
+            <a:r>
+              <a:rPr lang="en-US" dirty="0"/>
+              <a:t/>
+            </a:r>
+            <a:endParaRPr lang="en-US" dirty="0"/>
+          </a:p>
+        </p:txBody>
+      </p:sp>
+      <p:sp>
+        <p:nvSpPr>
+          <p:cNvPr id="4" name="Slide Number Placeholder 3"/>
+          <p:cNvSpPr>
+            <a:spLocks noGrp="1"/>
+          </p:cNvSpPr>
+          <p:nvPr>
+            <p:ph type="sldNum" sz="quarter" idx="10"/>
+          </p:nvPr>
+        </p:nvSpPr>
+        <p:spPr/>
+        <p:txBody>
+          <a:bodyPr/>
+          <a:lstStyle/>
+          <a:p>
+            <a:fld id="{F7021451-1387-4CA6-816F-3879F97B5CBC}" type="slidenum">
+              <a:rPr lang="en-US"/>
+              <a:t>28</a:t>
+            </a:fld>
+            <a:endParaRPr lang="en-US"/>
+          </a:p>
+        </p:txBody>
+      </p:sp>
+    </p:spTree>
+    <p:extLst>
+      <p:ext uri="{BB962C8B-B14F-4D97-AF65-F5344CB8AC3E}">
+        <p14:creationId xmlns:p14="http://schemas.microsoft.com/office/powerpoint/2010/main" val="1024086991"/>
+      </p:ext>
+    </p:extLst>
+  </p:cSld>
+  <p:clrMapOvr>
+    <a:masterClrMapping/>
+  </p:clrMapOvr>
+</p:notes>
+</file>
+
+<file path=ppt/notesSlides/notesSlide29.xml><?xml version="1.0" encoding="utf-8"?>
+<p:notes xmlns:a="http://schemas.openxmlformats.org/drawingml/2006/main" xmlns:r="http://schemas.openxmlformats.org/officeDocument/2006/relationships" xmlns:p="http://schemas.openxmlformats.org/presentationml/2006/main">
+  <p:cSld>
+    <p:spTree>
+      <p:nvGrpSpPr>
+        <p:cNvPr id="1" name=""/>
+        <p:cNvGrpSpPr/>
+        <p:nvPr/>
+      </p:nvGrpSpPr>
+      <p:grpSpPr>
+        <a:xfrm>
+          <a:off x="0" y="0"/>
+          <a:ext cx="0" cy="0"/>
+          <a:chOff x="0" y="0"/>
+          <a:chExt cx="0" cy="0"/>
+        </a:xfrm>
+      </p:grpSpPr>
+      <p:sp>
+        <p:nvSpPr>
+          <p:cNvPr id="2" name="Slide Image Placeholder 1"/>
+          <p:cNvSpPr>
+            <a:spLocks noGrp="1" noRot="1" noChangeAspect="1"/>
+          </p:cNvSpPr>
+          <p:nvPr>
+            <p:ph type="sldImg"/>
+          </p:nvPr>
+        </p:nvSpPr>
+        <p:spPr/>
+      </p:sp>
+      <p:sp>
+        <p:nvSpPr>
+          <p:cNvPr id="3" name="Notes Placeholder 2"/>
+          <p:cNvSpPr>
+            <a:spLocks noGrp="1"/>
+          </p:cNvSpPr>
+          <p:nvPr>
+            <p:ph type="body" idx="1"/>
+          </p:nvPr>
+        </p:nvSpPr>
+        <p:spPr/>
+        <p:txBody>
+          <a:bodyPr/>
+          <a:lstStyle/>
+          <a:p>
+            <a:r>
+              <a:rPr lang="en-US" dirty="0"/>
+              <a:t/>
+            </a:r>
+            <a:endParaRPr lang="en-US" dirty="0"/>
+          </a:p>
+        </p:txBody>
+      </p:sp>
+      <p:sp>
+        <p:nvSpPr>
+          <p:cNvPr id="4" name="Slide Number Placeholder 3"/>
+          <p:cNvSpPr>
+            <a:spLocks noGrp="1"/>
+          </p:cNvSpPr>
+          <p:nvPr>
+            <p:ph type="sldNum" sz="quarter" idx="10"/>
+          </p:nvPr>
+        </p:nvSpPr>
+        <p:spPr/>
+        <p:txBody>
+          <a:bodyPr/>
+          <a:lstStyle/>
+          <a:p>
+            <a:fld id="{F7021451-1387-4CA6-816F-3879F97B5CBC}" type="slidenum">
+              <a:rPr lang="en-US"/>
+              <a:t>29</a:t>
+            </a:fld>
+            <a:endParaRPr lang="en-US"/>
+          </a:p>
+        </p:txBody>
+      </p:sp>
+    </p:spTree>
+    <p:extLst>
+      <p:ext uri="{BB962C8B-B14F-4D97-AF65-F5344CB8AC3E}">
+        <p14:creationId xmlns:p14="http://schemas.microsoft.com/office/powerpoint/2010/main" val="1024086991"/>
+      </p:ext>
+    </p:extLst>
+  </p:cSld>
+  <p:clrMapOvr>
+    <a:masterClrMapping/>
+  </p:clrMapOvr>
+</p:notes>
+</file>
+
 <file path=ppt/notesSlides/notesSlide3.xml><?xml version="1.0" encoding="utf-8"?>
 <p:notes xmlns:a="http://schemas.openxmlformats.org/drawingml/2006/main" xmlns:r="http://schemas.openxmlformats.org/officeDocument/2006/relationships" xmlns:p="http://schemas.openxmlformats.org/presentationml/2006/main">
   <p:cSld>
@@ -4275,6 +4454,94 @@
             <a:fld id="{F7021451-1387-4CA6-816F-3879F97B5CBC}" type="slidenum">
               <a:rPr lang="en-US"/>
               <a:t>3</a:t>
+            </a:fld>
+            <a:endParaRPr lang="en-US"/>
+          </a:p>
+        </p:txBody>
+      </p:sp>
+    </p:spTree>
+    <p:extLst>
+      <p:ext uri="{BB962C8B-B14F-4D97-AF65-F5344CB8AC3E}">
+        <p14:creationId xmlns:p14="http://schemas.microsoft.com/office/powerpoint/2010/main" val="1024086991"/>
+      </p:ext>
+    </p:extLst>
+  </p:cSld>
+  <p:clrMapOvr>
+    <a:masterClrMapping/>
+  </p:clrMapOvr>
+</p:notes>
+</file>
+
+<file path=ppt/notesSlides/notesSlide30.xml><?xml version="1.0" encoding="utf-8"?>
+<p:notes xmlns:a="http://schemas.openxmlformats.org/drawingml/2006/main" xmlns:r="http://schemas.openxmlformats.org/officeDocument/2006/relationships" xmlns:p="http://schemas.openxmlformats.org/presentationml/2006/main">
+  <p:cSld>
+    <p:spTree>
+      <p:nvGrpSpPr>
+        <p:cNvPr id="1" name=""/>
+        <p:cNvGrpSpPr/>
+        <p:nvPr/>
+      </p:nvGrpSpPr>
+      <p:grpSpPr>
+        <a:xfrm>
+          <a:off x="0" y="0"/>
+          <a:ext cx="0" cy="0"/>
+          <a:chOff x="0" y="0"/>
+          <a:chExt cx="0" cy="0"/>
+        </a:xfrm>
+      </p:grpSpPr>
+      <p:sp>
+        <p:nvSpPr>
+          <p:cNvPr id="2" name="Slide Image Placeholder 1"/>
+          <p:cNvSpPr>
+            <a:spLocks noGrp="1" noRot="1" noChangeAspect="1"/>
+          </p:cNvSpPr>
+          <p:nvPr>
+            <p:ph type="sldImg"/>
+          </p:nvPr>
+        </p:nvSpPr>
+        <p:spPr/>
+      </p:sp>
+      <p:sp>
+        <p:nvSpPr>
+          <p:cNvPr id="3" name="Notes Placeholder 2"/>
+          <p:cNvSpPr>
+            <a:spLocks noGrp="1"/>
+          </p:cNvSpPr>
+          <p:nvPr>
+            <p:ph type="body" idx="1"/>
+          </p:nvPr>
+        </p:nvSpPr>
+        <p:spPr/>
+        <p:txBody>
+          <a:bodyPr/>
+          <a:lstStyle/>
+          <a:p>
+            <a:r>
+              <a:rPr lang="en-US" dirty="0"/>
+              <a:t/>
+            </a:r>
+            <a:endParaRPr lang="en-US" dirty="0"/>
+          </a:p>
+        </p:txBody>
+      </p:sp>
+      <p:sp>
+        <p:nvSpPr>
+          <p:cNvPr id="4" name="Slide Number Placeholder 3"/>
+          <p:cNvSpPr>
+            <a:spLocks noGrp="1"/>
+          </p:cNvSpPr>
+          <p:nvPr>
+            <p:ph type="sldNum" sz="quarter" idx="10"/>
+          </p:nvPr>
+        </p:nvSpPr>
+        <p:spPr/>
+        <p:txBody>
+          <a:bodyPr/>
+          <a:lstStyle/>
+          <a:p>
+            <a:fld id="{F7021451-1387-4CA6-816F-3879F97B5CBC}" type="slidenum">
+              <a:rPr lang="en-US"/>
+              <a:t>30</a:t>
             </a:fld>
             <a:endParaRPr lang="en-US"/>
           </a:p>
@@ -11514,7 +11781,7 @@
                 <a:ea typeface="Calibri" pitchFamily="34" charset="-122"/>
                 <a:cs typeface="Calibri" pitchFamily="34" charset="-120"/>
               </a:rPr>
-              <a:t>NIVEL 5 · SEGMENTACIÓN</a:t>
+              <a:t>NIVEL 4 · MODO COMBINADO</a:t>
             </a:r>
             <a:endParaRPr lang="en-US" sz="1300" dirty="0"/>
           </a:p>
@@ -11578,7 +11845,7 @@
                 <a:ea typeface="Georgia" pitchFamily="34" charset="-122"/>
                 <a:cs typeface="Georgia" pitchFamily="34" charset="-120"/>
               </a:rPr>
-              <a:t>N5</a:t>
+              <a:t>N4</a:t>
             </a:r>
             <a:endParaRPr lang="en-US" sz="2200" dirty="0"/>
           </a:p>
@@ -11617,7 +11884,7 @@
                 <a:ea typeface="Georgia" pitchFamily="34" charset="-122"/>
                 <a:cs typeface="Georgia" pitchFamily="34" charset="-120"/>
               </a:rPr>
-              <a:t>SAHI también mejora las máscaras</a:t>
+              <a:t>Lo mejor de ambos: global + slices</a:t>
             </a:r>
             <a:endParaRPr lang="en-US" sz="3000" dirty="0"/>
           </a:p>
@@ -11625,26 +11892,65 @@
       </p:sp>
       <p:sp>
         <p:nvSpPr>
-          <p:cNvPr id="6" name="Shape 4"/>
-          <p:cNvSpPr/>
-          <p:nvPr/>
-        </p:nvSpPr>
-        <p:spPr>
-          <a:xfrm>
-            <a:off x="822960" y="1920240"/>
-            <a:ext cx="7589520" cy="3657600"/>
+          <p:cNvPr id="6" name="Text 4"/>
+          <p:cNvSpPr/>
+          <p:nvPr/>
+        </p:nvSpPr>
+        <p:spPr>
+          <a:xfrm>
+            <a:off x="640080" y="1755648"/>
+            <a:ext cx="10972800" cy="365760"/>
+          </a:xfrm>
+          <a:prstGeom prst="rect">
+            <a:avLst/>
+          </a:prstGeom>
+          <a:noFill/>
+          <a:ln/>
+        </p:spPr>
+        <p:txBody>
+          <a:bodyPr wrap="square" lIns="0" tIns="0" rIns="0" bIns="0" rtlCol="0" anchor="ctr"/>
+          <a:lstStyle/>
+          <a:p>
+            <a:pPr indent="0" marL="0">
+              <a:buNone/>
+            </a:pPr>
+            <a:r>
+              <a:rPr lang="en-US" sz="1400" dirty="0">
+                <a:solidFill>
+                  <a:srgbClr val="1E293B"/>
+                </a:solidFill>
+                <a:latin typeface="Calibri" pitchFamily="34" charset="0"/>
+                <a:ea typeface="Calibri" pitchFamily="34" charset="-122"/>
+                <a:cs typeface="Calibri" pitchFamily="34" charset="-120"/>
+              </a:rPr>
+              <a:t>El modo combinado corre la imagen COMPLETA y los SLICES, y fusiona todo en un único resultado.</a:t>
+            </a:r>
+            <a:endParaRPr lang="en-US" sz="1400" dirty="0"/>
+          </a:p>
+        </p:txBody>
+      </p:sp>
+      <p:sp>
+        <p:nvSpPr>
+          <p:cNvPr id="7" name="Shape 5"/>
+          <p:cNvSpPr/>
+          <p:nvPr/>
+        </p:nvSpPr>
+        <p:spPr>
+          <a:xfrm>
+            <a:off x="914400" y="2423160"/>
+            <a:ext cx="2103120" cy="777240"/>
           </a:xfrm>
           <a:prstGeom prst="roundRect">
             <a:avLst>
-              <a:gd name="adj" fmla="val 2000"/>
+              <a:gd name="adj" fmla="val 7059"/>
             </a:avLst>
           </a:prstGeom>
           <a:solidFill>
-            <a:srgbClr val="F4F7FA"/>
+            <a:srgbClr val="3A6EA5"/>
           </a:solidFill>
           <a:ln w="12700">
             <a:solidFill>
-              <a:srgbClr val="D8E0E8"/>
+              <a:srgbClr val="3A6EA5"/>
             </a:solidFill>
             <a:prstDash val="solid"/>
           </a:ln>
@@ -11652,14 +11958,14 @@
       </p:sp>
       <p:sp>
         <p:nvSpPr>
-          <p:cNvPr id="7" name="Text 5"/>
-          <p:cNvSpPr/>
-          <p:nvPr/>
-        </p:nvSpPr>
-        <p:spPr>
-          <a:xfrm>
-            <a:off x="822960" y="3566160"/>
-            <a:ext cx="7589520" cy="457200"/>
+          <p:cNvPr id="8" name="Text 6"/>
+          <p:cNvSpPr/>
+          <p:nvPr/>
+        </p:nvSpPr>
+        <p:spPr>
+          <a:xfrm>
+            <a:off x="1005840" y="2496312"/>
+            <a:ext cx="1920240" cy="640080"/>
           </a:xfrm>
           <a:prstGeom prst="rect">
             <a:avLst/>
@@ -11675,34 +11981,90 @@
               <a:buNone/>
             </a:pPr>
             <a:r>
-              <a:rPr lang="en-US" sz="1300" dirty="0">
+              <a:rPr lang="en-US" sz="1200" b="1" dirty="0">
+                <a:solidFill>
+                  <a:srgbClr val="FFFFFF"/>
+                </a:solidFill>
+                <a:latin typeface="Calibri" pitchFamily="34" charset="0"/>
+                <a:ea typeface="Calibri" pitchFamily="34" charset="-122"/>
+                <a:cs typeface="Calibri" pitchFamily="34" charset="-120"/>
+              </a:rPr>
+              <a:t>Pasada GLOBAL</a:t>
+            </a:r>
+            <a:endParaRPr lang="en-US" sz="1200" dirty="0"/>
+          </a:p>
+          <a:p>
+            <a:pPr algn="ctr" indent="0" marL="0">
+              <a:buNone/>
+            </a:pPr>
+            <a:r>
+              <a:rPr lang="en-US" sz="950" dirty="0">
+                <a:solidFill>
+                  <a:srgbClr val="DCE8F5"/>
+                </a:solidFill>
+                <a:latin typeface="Calibri" pitchFamily="34" charset="0"/>
+                <a:ea typeface="Calibri" pitchFamily="34" charset="-122"/>
+                <a:cs typeface="Calibri" pitchFamily="34" charset="-120"/>
+              </a:rPr>
+              <a:t>imagen completa → grandes</a:t>
+            </a:r>
+            <a:endParaRPr lang="en-US" sz="1200" dirty="0"/>
+          </a:p>
+        </p:txBody>
+      </p:sp>
+      <p:sp>
+        <p:nvSpPr>
+          <p:cNvPr id="9" name="Text 7"/>
+          <p:cNvSpPr/>
+          <p:nvPr/>
+        </p:nvSpPr>
+        <p:spPr>
+          <a:xfrm>
+            <a:off x="914400" y="3200400"/>
+            <a:ext cx="2103120" cy="365760"/>
+          </a:xfrm>
+          <a:prstGeom prst="rect">
+            <a:avLst/>
+          </a:prstGeom>
+          <a:noFill/>
+          <a:ln/>
+        </p:spPr>
+        <p:txBody>
+          <a:bodyPr wrap="square" lIns="0" tIns="0" rIns="0" bIns="0" rtlCol="0" anchor="ctr"/>
+          <a:lstStyle/>
+          <a:p>
+            <a:pPr algn="ctr" indent="0" marL="0">
+              <a:buNone/>
+            </a:pPr>
+            <a:r>
+              <a:rPr lang="en-US" sz="2000" b="1" dirty="0">
                 <a:solidFill>
                   <a:srgbClr val="64748B"/>
                 </a:solidFill>
-                <a:latin typeface="Calibri" pitchFamily="34" charset="0"/>
-                <a:ea typeface="Calibri" pitchFamily="34" charset="-122"/>
-                <a:cs typeface="Calibri" pitchFamily="34" charset="-120"/>
-              </a:rPr>
-              <a:t>(Genera con notebook 02 → outputs/segmentation/)</a:t>
-            </a:r>
-            <a:endParaRPr lang="en-US" sz="1300" dirty="0"/>
-          </a:p>
-        </p:txBody>
-      </p:sp>
-      <p:sp>
-        <p:nvSpPr>
-          <p:cNvPr id="8" name="Shape 6"/>
-          <p:cNvSpPr/>
-          <p:nvPr/>
-        </p:nvSpPr>
-        <p:spPr>
-          <a:xfrm>
-            <a:off x="8686800" y="1920240"/>
-            <a:ext cx="2880360" cy="3657600"/>
+                <a:latin typeface="Georgia" pitchFamily="34" charset="0"/>
+                <a:ea typeface="Georgia" pitchFamily="34" charset="-122"/>
+                <a:cs typeface="Georgia" pitchFamily="34" charset="-120"/>
+              </a:rPr>
+              <a:t>+</a:t>
+            </a:r>
+            <a:endParaRPr lang="en-US" sz="2000" dirty="0"/>
+          </a:p>
+        </p:txBody>
+      </p:sp>
+      <p:sp>
+        <p:nvSpPr>
+          <p:cNvPr id="10" name="Shape 8"/>
+          <p:cNvSpPr/>
+          <p:nvPr/>
+        </p:nvSpPr>
+        <p:spPr>
+          <a:xfrm>
+            <a:off x="914400" y="3611880"/>
+            <a:ext cx="2103120" cy="777240"/>
           </a:xfrm>
           <a:prstGeom prst="roundRect">
             <a:avLst>
-              <a:gd name="adj" fmla="val 2540"/>
+              <a:gd name="adj" fmla="val 7059"/>
             </a:avLst>
           </a:prstGeom>
           <a:solidFill>
@@ -11718,14 +12080,14 @@
       </p:sp>
       <p:sp>
         <p:nvSpPr>
-          <p:cNvPr id="9" name="Text 7"/>
-          <p:cNvSpPr/>
-          <p:nvPr/>
-        </p:nvSpPr>
-        <p:spPr>
-          <a:xfrm>
-            <a:off x="8915400" y="2148840"/>
-            <a:ext cx="2468880" cy="365760"/>
+          <p:cNvPr id="11" name="Text 9"/>
+          <p:cNvSpPr/>
+          <p:nvPr/>
+        </p:nvSpPr>
+        <p:spPr>
+          <a:xfrm>
+            <a:off x="1005840" y="3685032"/>
+            <a:ext cx="1920240" cy="640080"/>
           </a:xfrm>
           <a:prstGeom prst="rect">
             <a:avLst/>
@@ -11737,34 +12099,1377 @@
           <a:bodyPr wrap="square" lIns="0" tIns="0" rIns="0" bIns="0" rtlCol="0" anchor="ctr"/>
           <a:lstStyle/>
           <a:p>
+            <a:pPr algn="ctr" indent="0" marL="0">
+              <a:buNone/>
+            </a:pPr>
+            <a:r>
+              <a:rPr lang="en-US" sz="1200" b="1" dirty="0">
+                <a:solidFill>
+                  <a:srgbClr val="FFFFFF"/>
+                </a:solidFill>
+                <a:latin typeface="Calibri" pitchFamily="34" charset="0"/>
+                <a:ea typeface="Calibri" pitchFamily="34" charset="-122"/>
+                <a:cs typeface="Calibri" pitchFamily="34" charset="-120"/>
+              </a:rPr>
+              <a:t>Pasadas por SLICES</a:t>
+            </a:r>
+            <a:endParaRPr lang="en-US" sz="1200" dirty="0"/>
+          </a:p>
+          <a:p>
+            <a:pPr algn="ctr" indent="0" marL="0">
+              <a:buNone/>
+            </a:pPr>
+            <a:r>
+              <a:rPr lang="en-US" sz="950" dirty="0">
+                <a:solidFill>
+                  <a:srgbClr val="DCE8F5"/>
+                </a:solidFill>
+                <a:latin typeface="Calibri" pitchFamily="34" charset="0"/>
+                <a:ea typeface="Calibri" pitchFamily="34" charset="-122"/>
+                <a:cs typeface="Calibri" pitchFamily="34" charset="-120"/>
+              </a:rPr>
+              <a:t>mosaicos → pequeños</a:t>
+            </a:r>
+            <a:endParaRPr lang="en-US" sz="1200" dirty="0"/>
+          </a:p>
+        </p:txBody>
+      </p:sp>
+      <p:sp>
+        <p:nvSpPr>
+          <p:cNvPr id="12" name="Shape 10"/>
+          <p:cNvSpPr/>
+          <p:nvPr/>
+        </p:nvSpPr>
+        <p:spPr>
+          <a:xfrm>
+            <a:off x="3017520" y="2807208"/>
+            <a:ext cx="228600" cy="0"/>
+          </a:xfrm>
+          <a:prstGeom prst="line">
+            <a:avLst/>
+          </a:prstGeom>
+          <a:noFill/>
+          <a:ln w="19050">
+            <a:solidFill>
+              <a:srgbClr val="1E293B"/>
+            </a:solidFill>
+            <a:prstDash val="solid"/>
+          </a:ln>
+        </p:spPr>
+      </p:sp>
+      <p:sp>
+        <p:nvSpPr>
+          <p:cNvPr id="13" name="Shape 11"/>
+          <p:cNvSpPr/>
+          <p:nvPr/>
+        </p:nvSpPr>
+        <p:spPr>
+          <a:xfrm>
+            <a:off x="3017520" y="3995928"/>
+            <a:ext cx="228600" cy="0"/>
+          </a:xfrm>
+          <a:prstGeom prst="line">
+            <a:avLst/>
+          </a:prstGeom>
+          <a:noFill/>
+          <a:ln w="19050">
+            <a:solidFill>
+              <a:srgbClr val="1E293B"/>
+            </a:solidFill>
+            <a:prstDash val="solid"/>
+          </a:ln>
+        </p:spPr>
+      </p:sp>
+      <p:sp>
+        <p:nvSpPr>
+          <p:cNvPr id="14" name="Shape 12"/>
+          <p:cNvSpPr/>
+          <p:nvPr/>
+        </p:nvSpPr>
+        <p:spPr>
+          <a:xfrm>
+            <a:off x="3246120" y="2807208"/>
+            <a:ext cx="0" cy="1188720"/>
+          </a:xfrm>
+          <a:prstGeom prst="line">
+            <a:avLst/>
+          </a:prstGeom>
+          <a:noFill/>
+          <a:ln w="19050">
+            <a:solidFill>
+              <a:srgbClr val="1E293B"/>
+            </a:solidFill>
+            <a:prstDash val="solid"/>
+          </a:ln>
+        </p:spPr>
+      </p:sp>
+      <p:sp>
+        <p:nvSpPr>
+          <p:cNvPr id="15" name="Shape 13"/>
+          <p:cNvSpPr/>
+          <p:nvPr/>
+        </p:nvSpPr>
+        <p:spPr>
+          <a:xfrm>
+            <a:off x="3246120" y="3401568"/>
+            <a:ext cx="548640" cy="0"/>
+          </a:xfrm>
+          <a:prstGeom prst="line">
+            <a:avLst/>
+          </a:prstGeom>
+          <a:noFill/>
+          <a:ln w="25400">
+            <a:solidFill>
+              <a:srgbClr val="1E293B"/>
+            </a:solidFill>
+            <a:prstDash val="solid"/>
+            <a:tailEnd type="triangle"/>
+          </a:ln>
+        </p:spPr>
+      </p:sp>
+      <p:sp>
+        <p:nvSpPr>
+          <p:cNvPr id="16" name="Shape 14"/>
+          <p:cNvSpPr/>
+          <p:nvPr/>
+        </p:nvSpPr>
+        <p:spPr>
+          <a:xfrm>
+            <a:off x="3840480" y="2971800"/>
+            <a:ext cx="1828800" cy="868680"/>
+          </a:xfrm>
+          <a:prstGeom prst="roundRect">
+            <a:avLst>
+              <a:gd name="adj" fmla="val 6316"/>
+            </a:avLst>
+          </a:prstGeom>
+          <a:solidFill>
+            <a:srgbClr val="2E8B57"/>
+          </a:solidFill>
+          <a:ln w="12700">
+            <a:solidFill>
+              <a:srgbClr val="2E8B57"/>
+            </a:solidFill>
+            <a:prstDash val="solid"/>
+          </a:ln>
+          <a:effectLst>
+            <a:outerShdw sx="100000" sy="100000" kx="0" ky="0" algn="bl" rotWithShape="0" blurRad="114300" dist="38100" dir="5400000">
+              <a:srgbClr val="000000">
+                <a:alpha val="18000"/>
+              </a:srgbClr>
+            </a:outerShdw>
+          </a:effectLst>
+        </p:spPr>
+      </p:sp>
+      <p:sp>
+        <p:nvSpPr>
+          <p:cNvPr id="17" name="Text 15"/>
+          <p:cNvSpPr/>
+          <p:nvPr/>
+        </p:nvSpPr>
+        <p:spPr>
+          <a:xfrm>
+            <a:off x="3886200" y="3017520"/>
+            <a:ext cx="1737360" cy="731520"/>
+          </a:xfrm>
+          <a:prstGeom prst="rect">
+            <a:avLst/>
+          </a:prstGeom>
+          <a:noFill/>
+          <a:ln/>
+        </p:spPr>
+        <p:txBody>
+          <a:bodyPr wrap="square" lIns="0" tIns="0" rIns="0" bIns="0" rtlCol="0" anchor="ctr"/>
+          <a:lstStyle/>
+          <a:p>
+            <a:pPr algn="ctr" indent="0" marL="0">
+              <a:buNone/>
+            </a:pPr>
+            <a:r>
+              <a:rPr lang="en-US" sz="1200" b="1" dirty="0">
+                <a:solidFill>
+                  <a:srgbClr val="FFFFFF"/>
+                </a:solidFill>
+                <a:latin typeface="Calibri" pitchFamily="34" charset="0"/>
+                <a:ea typeface="Calibri" pitchFamily="34" charset="-122"/>
+                <a:cs typeface="Calibri" pitchFamily="34" charset="-120"/>
+              </a:rPr>
+              <a:t>Merge (NMM · IOS)</a:t>
+            </a:r>
+            <a:endParaRPr lang="en-US" sz="1200" dirty="0"/>
+          </a:p>
+          <a:p>
+            <a:pPr algn="ctr" indent="0" marL="0">
+              <a:buNone/>
+            </a:pPr>
+            <a:r>
+              <a:rPr lang="en-US" sz="1000" dirty="0">
+                <a:solidFill>
+                  <a:srgbClr val="DFF3E7"/>
+                </a:solidFill>
+                <a:latin typeface="Calibri" pitchFamily="34" charset="0"/>
+                <a:ea typeface="Calibri" pitchFamily="34" charset="-122"/>
+                <a:cs typeface="Calibri" pitchFamily="34" charset="-120"/>
+              </a:rPr>
+              <a:t>grandes + pequeños</a:t>
+            </a:r>
+            <a:endParaRPr lang="en-US" sz="1200" dirty="0"/>
+          </a:p>
+        </p:txBody>
+      </p:sp>
+      <p:graphicFrame>
+        <p:nvGraphicFramePr>
+          <p:cNvPr id="19" name="Table 0"/>
+          <p:cNvGraphicFramePr>
+            <a:graphicFrameLocks noGrp="1"/>
+          </p:cNvGraphicFramePr>
+          <p:nvPr>
+            <p:extLst>
+              <p:ext uri="{D42A27DB-BD31-4B8C-83A1-F6EECF244321}">
+                <p14:modId xmlns:p14="http://schemas.microsoft.com/office/powerpoint/2010/main" val="1579011935"/>
+              </p:ext>
+            </p:extLst>
+          </p:nvPr>
+        </p:nvGraphicFramePr>
+        <p:xfrm>
+          <a:off x="6126480" y="2423160"/>
+          <a:ext cx="5440680" cy="914400"/>
+        </p:xfrm>
+        <a:graphic>
+          <a:graphicData uri="http://schemas.openxmlformats.org/drawingml/2006/table">
+            <a:tbl>
+              <a:tblPr/>
+              <a:tblGrid>
+                <a:gridCol w="1737360"/>
+                <a:gridCol w="1371600"/>
+                <a:gridCol w="1188720"/>
+                <a:gridCol w="1143000"/>
+              </a:tblGrid>
+              <a:tr h="411480">
+                <a:tc>
+                  <a:txBody>
+                    <a:bodyPr/>
+                    <a:lstStyle/>
+                    <a:p>
+                      <a:pPr algn="ctr" indent="0" marL="0">
+                        <a:buNone/>
+                      </a:pPr>
+                      <a:r>
+                        <a:rPr lang="en-US" sz="1300" b="1" dirty="0">
+                          <a:solidFill>
+                            <a:srgbClr val="FFFFFF"/>
+                          </a:solidFill>
+                          <a:latin typeface="Calibri" pitchFamily="34" charset="0"/>
+                          <a:ea typeface="Calibri" pitchFamily="34" charset="-122"/>
+                          <a:cs typeface="Calibri" pitchFamily="34" charset="-120"/>
+                        </a:rPr>
+                        <a:t>Modo</a:t>
+                      </a:r>
+                      <a:endParaRPr lang="en-US" sz="1300" dirty="0">
+                        <a:latin typeface="Calibri" charset="0"/>
+                        <a:ea typeface="Calibri" charset="0"/>
+                        <a:cs typeface="Calibri" charset="0"/>
+                      </a:endParaRPr>
+                    </a:p>
+                  </a:txBody>
+                  <a:tcPr marL="91440" marR="91440" marT="45720" marB="45720" anchor="ctr">
+                    <a:lnL w="12700" cap="flat" cmpd="sng" algn="ctr">
+                      <a:solidFill>
+                        <a:srgbClr val="D8E0E8"/>
+                      </a:solidFill>
+                      <a:prstDash val="solid"/>
+                      <a:round/>
+                      <a:headEnd type="none" w="med" len="med"/>
+                      <a:tailEnd type="none" w="med" len="med"/>
+                    </a:lnL>
+                    <a:lnR w="12700" cap="flat" cmpd="sng" algn="ctr">
+                      <a:solidFill>
+                        <a:srgbClr val="D8E0E8"/>
+                      </a:solidFill>
+                      <a:prstDash val="solid"/>
+                      <a:round/>
+                      <a:headEnd type="none" w="med" len="med"/>
+                      <a:tailEnd type="none" w="med" len="med"/>
+                    </a:lnR>
+                    <a:lnT w="12700" cap="flat" cmpd="sng" algn="ctr">
+                      <a:solidFill>
+                        <a:srgbClr val="D8E0E8"/>
+                      </a:solidFill>
+                      <a:prstDash val="solid"/>
+                      <a:round/>
+                      <a:headEnd type="none" w="med" len="med"/>
+                      <a:tailEnd type="none" w="med" len="med"/>
+                    </a:lnT>
+                    <a:lnB w="12700" cap="flat" cmpd="sng" algn="ctr">
+                      <a:solidFill>
+                        <a:srgbClr val="D8E0E8"/>
+                      </a:solidFill>
+                      <a:prstDash val="solid"/>
+                      <a:round/>
+                      <a:headEnd type="none" w="med" len="med"/>
+                      <a:tailEnd type="none" w="med" len="med"/>
+                    </a:lnB>
+                    <a:solidFill>
+                      <a:srgbClr val="0F2A43"/>
+                    </a:solidFill>
+                  </a:tcPr>
+                </a:tc>
+                <a:tc>
+                  <a:txBody>
+                    <a:bodyPr/>
+                    <a:lstStyle/>
+                    <a:p>
+                      <a:pPr algn="ctr" indent="0" marL="0">
+                        <a:buNone/>
+                      </a:pPr>
+                      <a:r>
+                        <a:rPr lang="en-US" sz="1300" b="1" dirty="0">
+                          <a:solidFill>
+                            <a:srgbClr val="FFFFFF"/>
+                          </a:solidFill>
+                          <a:latin typeface="Calibri" pitchFamily="34" charset="0"/>
+                          <a:ea typeface="Calibri" pitchFamily="34" charset="-122"/>
+                          <a:cs typeface="Calibri" pitchFamily="34" charset="-120"/>
+                        </a:rPr>
+                        <a:t>Pequeños</a:t>
+                      </a:r>
+                      <a:endParaRPr lang="en-US" sz="1300" dirty="0">
+                        <a:latin typeface="Calibri" charset="0"/>
+                        <a:ea typeface="Calibri" charset="0"/>
+                        <a:cs typeface="Calibri" charset="0"/>
+                      </a:endParaRPr>
+                    </a:p>
+                  </a:txBody>
+                  <a:tcPr marL="91440" marR="91440" marT="45720" marB="45720" anchor="ctr">
+                    <a:lnL w="12700" cap="flat" cmpd="sng" algn="ctr">
+                      <a:solidFill>
+                        <a:srgbClr val="D8E0E8"/>
+                      </a:solidFill>
+                      <a:prstDash val="solid"/>
+                      <a:round/>
+                      <a:headEnd type="none" w="med" len="med"/>
+                      <a:tailEnd type="none" w="med" len="med"/>
+                    </a:lnL>
+                    <a:lnR w="12700" cap="flat" cmpd="sng" algn="ctr">
+                      <a:solidFill>
+                        <a:srgbClr val="D8E0E8"/>
+                      </a:solidFill>
+                      <a:prstDash val="solid"/>
+                      <a:round/>
+                      <a:headEnd type="none" w="med" len="med"/>
+                      <a:tailEnd type="none" w="med" len="med"/>
+                    </a:lnR>
+                    <a:lnT w="12700" cap="flat" cmpd="sng" algn="ctr">
+                      <a:solidFill>
+                        <a:srgbClr val="D8E0E8"/>
+                      </a:solidFill>
+                      <a:prstDash val="solid"/>
+                      <a:round/>
+                      <a:headEnd type="none" w="med" len="med"/>
+                      <a:tailEnd type="none" w="med" len="med"/>
+                    </a:lnT>
+                    <a:lnB w="12700" cap="flat" cmpd="sng" algn="ctr">
+                      <a:solidFill>
+                        <a:srgbClr val="D8E0E8"/>
+                      </a:solidFill>
+                      <a:prstDash val="solid"/>
+                      <a:round/>
+                      <a:headEnd type="none" w="med" len="med"/>
+                      <a:tailEnd type="none" w="med" len="med"/>
+                    </a:lnB>
+                    <a:solidFill>
+                      <a:srgbClr val="0F2A43"/>
+                    </a:solidFill>
+                  </a:tcPr>
+                </a:tc>
+                <a:tc>
+                  <a:txBody>
+                    <a:bodyPr/>
+                    <a:lstStyle/>
+                    <a:p>
+                      <a:pPr algn="ctr" indent="0" marL="0">
+                        <a:buNone/>
+                      </a:pPr>
+                      <a:r>
+                        <a:rPr lang="en-US" sz="1300" b="1" dirty="0">
+                          <a:solidFill>
+                            <a:srgbClr val="FFFFFF"/>
+                          </a:solidFill>
+                          <a:latin typeface="Calibri" pitchFamily="34" charset="0"/>
+                          <a:ea typeface="Calibri" pitchFamily="34" charset="-122"/>
+                          <a:cs typeface="Calibri" pitchFamily="34" charset="-120"/>
+                        </a:rPr>
+                        <a:t>Grandes</a:t>
+                      </a:r>
+                      <a:endParaRPr lang="en-US" sz="1300" dirty="0">
+                        <a:latin typeface="Calibri" charset="0"/>
+                        <a:ea typeface="Calibri" charset="0"/>
+                        <a:cs typeface="Calibri" charset="0"/>
+                      </a:endParaRPr>
+                    </a:p>
+                  </a:txBody>
+                  <a:tcPr marL="91440" marR="91440" marT="45720" marB="45720" anchor="ctr">
+                    <a:lnL w="12700" cap="flat" cmpd="sng" algn="ctr">
+                      <a:solidFill>
+                        <a:srgbClr val="D8E0E8"/>
+                      </a:solidFill>
+                      <a:prstDash val="solid"/>
+                      <a:round/>
+                      <a:headEnd type="none" w="med" len="med"/>
+                      <a:tailEnd type="none" w="med" len="med"/>
+                    </a:lnL>
+                    <a:lnR w="12700" cap="flat" cmpd="sng" algn="ctr">
+                      <a:solidFill>
+                        <a:srgbClr val="D8E0E8"/>
+                      </a:solidFill>
+                      <a:prstDash val="solid"/>
+                      <a:round/>
+                      <a:headEnd type="none" w="med" len="med"/>
+                      <a:tailEnd type="none" w="med" len="med"/>
+                    </a:lnR>
+                    <a:lnT w="12700" cap="flat" cmpd="sng" algn="ctr">
+                      <a:solidFill>
+                        <a:srgbClr val="D8E0E8"/>
+                      </a:solidFill>
+                      <a:prstDash val="solid"/>
+                      <a:round/>
+                      <a:headEnd type="none" w="med" len="med"/>
+                      <a:tailEnd type="none" w="med" len="med"/>
+                    </a:lnT>
+                    <a:lnB w="12700" cap="flat" cmpd="sng" algn="ctr">
+                      <a:solidFill>
+                        <a:srgbClr val="D8E0E8"/>
+                      </a:solidFill>
+                      <a:prstDash val="solid"/>
+                      <a:round/>
+                      <a:headEnd type="none" w="med" len="med"/>
+                      <a:tailEnd type="none" w="med" len="med"/>
+                    </a:lnB>
+                    <a:solidFill>
+                      <a:srgbClr val="0F2A43"/>
+                    </a:solidFill>
+                  </a:tcPr>
+                </a:tc>
+                <a:tc>
+                  <a:txBody>
+                    <a:bodyPr/>
+                    <a:lstStyle/>
+                    <a:p>
+                      <a:pPr algn="ctr" indent="0" marL="0">
+                        <a:buNone/>
+                      </a:pPr>
+                      <a:r>
+                        <a:rPr lang="en-US" sz="1300" b="1" dirty="0">
+                          <a:solidFill>
+                            <a:srgbClr val="FFFFFF"/>
+                          </a:solidFill>
+                          <a:latin typeface="Calibri" pitchFamily="34" charset="0"/>
+                          <a:ea typeface="Calibri" pitchFamily="34" charset="-122"/>
+                          <a:cs typeface="Calibri" pitchFamily="34" charset="-120"/>
+                        </a:rPr>
+                        <a:t>Velocidad</a:t>
+                      </a:r>
+                      <a:endParaRPr lang="en-US" sz="1300" dirty="0">
+                        <a:latin typeface="Calibri" charset="0"/>
+                        <a:ea typeface="Calibri" charset="0"/>
+                        <a:cs typeface="Calibri" charset="0"/>
+                      </a:endParaRPr>
+                    </a:p>
+                  </a:txBody>
+                  <a:tcPr marL="91440" marR="91440" marT="45720" marB="45720" anchor="ctr">
+                    <a:lnL w="12700" cap="flat" cmpd="sng" algn="ctr">
+                      <a:solidFill>
+                        <a:srgbClr val="D8E0E8"/>
+                      </a:solidFill>
+                      <a:prstDash val="solid"/>
+                      <a:round/>
+                      <a:headEnd type="none" w="med" len="med"/>
+                      <a:tailEnd type="none" w="med" len="med"/>
+                    </a:lnL>
+                    <a:lnR w="12700" cap="flat" cmpd="sng" algn="ctr">
+                      <a:solidFill>
+                        <a:srgbClr val="D8E0E8"/>
+                      </a:solidFill>
+                      <a:prstDash val="solid"/>
+                      <a:round/>
+                      <a:headEnd type="none" w="med" len="med"/>
+                      <a:tailEnd type="none" w="med" len="med"/>
+                    </a:lnR>
+                    <a:lnT w="12700" cap="flat" cmpd="sng" algn="ctr">
+                      <a:solidFill>
+                        <a:srgbClr val="D8E0E8"/>
+                      </a:solidFill>
+                      <a:prstDash val="solid"/>
+                      <a:round/>
+                      <a:headEnd type="none" w="med" len="med"/>
+                      <a:tailEnd type="none" w="med" len="med"/>
+                    </a:lnT>
+                    <a:lnB w="12700" cap="flat" cmpd="sng" algn="ctr">
+                      <a:solidFill>
+                        <a:srgbClr val="D8E0E8"/>
+                      </a:solidFill>
+                      <a:prstDash val="solid"/>
+                      <a:round/>
+                      <a:headEnd type="none" w="med" len="med"/>
+                      <a:tailEnd type="none" w="med" len="med"/>
+                    </a:lnB>
+                    <a:solidFill>
+                      <a:srgbClr val="0F2A43"/>
+                    </a:solidFill>
+                  </a:tcPr>
+                </a:tc>
+              </a:tr>
+              <a:tr h="502920">
+                <a:tc>
+                  <a:txBody>
+                    <a:bodyPr/>
+                    <a:lstStyle/>
+                    <a:p>
+                      <a:pPr algn="ctr" indent="0" marL="0">
+                        <a:buNone/>
+                      </a:pPr>
+                      <a:r>
+                        <a:rPr lang="en-US" sz="1300" dirty="0">
+                          <a:solidFill>
+                            <a:srgbClr val="1E293B"/>
+                          </a:solidFill>
+                          <a:latin typeface="Calibri" pitchFamily="34" charset="0"/>
+                          <a:ea typeface="Calibri" pitchFamily="34" charset="-122"/>
+                          <a:cs typeface="Calibri" pitchFamily="34" charset="-120"/>
+                        </a:rPr>
+                        <a:t>Sliced</a:t>
+                      </a:r>
+                      <a:endParaRPr lang="en-US" sz="1300" dirty="0">
+                        <a:latin typeface="Calibri" charset="0"/>
+                        <a:ea typeface="Calibri" charset="0"/>
+                        <a:cs typeface="Calibri" charset="0"/>
+                      </a:endParaRPr>
+                    </a:p>
+                  </a:txBody>
+                  <a:tcPr marL="91440" marR="91440" marT="45720" marB="45720" anchor="ctr">
+                    <a:lnL w="12700" cap="flat" cmpd="sng" algn="ctr">
+                      <a:solidFill>
+                        <a:srgbClr val="D8E0E8"/>
+                      </a:solidFill>
+                      <a:prstDash val="solid"/>
+                      <a:round/>
+                      <a:headEnd type="none" w="med" len="med"/>
+                      <a:tailEnd type="none" w="med" len="med"/>
+                    </a:lnL>
+                    <a:lnR w="12700" cap="flat" cmpd="sng" algn="ctr">
+                      <a:solidFill>
+                        <a:srgbClr val="D8E0E8"/>
+                      </a:solidFill>
+                      <a:prstDash val="solid"/>
+                      <a:round/>
+                      <a:headEnd type="none" w="med" len="med"/>
+                      <a:tailEnd type="none" w="med" len="med"/>
+                    </a:lnR>
+                    <a:lnT w="12700" cap="flat" cmpd="sng" algn="ctr">
+                      <a:solidFill>
+                        <a:srgbClr val="D8E0E8"/>
+                      </a:solidFill>
+                      <a:prstDash val="solid"/>
+                      <a:round/>
+                      <a:headEnd type="none" w="med" len="med"/>
+                      <a:tailEnd type="none" w="med" len="med"/>
+                    </a:lnT>
+                    <a:lnB w="12700" cap="flat" cmpd="sng" algn="ctr">
+                      <a:solidFill>
+                        <a:srgbClr val="D8E0E8"/>
+                      </a:solidFill>
+                      <a:prstDash val="solid"/>
+                      <a:round/>
+                      <a:headEnd type="none" w="med" len="med"/>
+                      <a:tailEnd type="none" w="med" len="med"/>
+                    </a:lnB>
+                  </a:tcPr>
+                </a:tc>
+                <a:tc>
+                  <a:txBody>
+                    <a:bodyPr/>
+                    <a:lstStyle/>
+                    <a:p>
+                      <a:pPr algn="ctr" indent="0" marL="0">
+                        <a:buNone/>
+                      </a:pPr>
+                      <a:r>
+                        <a:rPr lang="en-US" sz="1300" dirty="0">
+                          <a:solidFill>
+                            <a:srgbClr val="1E293B"/>
+                          </a:solidFill>
+                          <a:latin typeface="Calibri" pitchFamily="34" charset="0"/>
+                          <a:ea typeface="Calibri" pitchFamily="34" charset="-122"/>
+                          <a:cs typeface="Calibri" pitchFamily="34" charset="-120"/>
+                        </a:rPr>
+                        <a:t>✓ ✓</a:t>
+                      </a:r>
+                      <a:endParaRPr lang="en-US" sz="1300" dirty="0">
+                        <a:latin typeface="Calibri" charset="0"/>
+                        <a:ea typeface="Calibri" charset="0"/>
+                        <a:cs typeface="Calibri" charset="0"/>
+                      </a:endParaRPr>
+                    </a:p>
+                  </a:txBody>
+                  <a:tcPr marL="91440" marR="91440" marT="45720" marB="45720" anchor="ctr">
+                    <a:lnL w="12700" cap="flat" cmpd="sng" algn="ctr">
+                      <a:solidFill>
+                        <a:srgbClr val="D8E0E8"/>
+                      </a:solidFill>
+                      <a:prstDash val="solid"/>
+                      <a:round/>
+                      <a:headEnd type="none" w="med" len="med"/>
+                      <a:tailEnd type="none" w="med" len="med"/>
+                    </a:lnL>
+                    <a:lnR w="12700" cap="flat" cmpd="sng" algn="ctr">
+                      <a:solidFill>
+                        <a:srgbClr val="D8E0E8"/>
+                      </a:solidFill>
+                      <a:prstDash val="solid"/>
+                      <a:round/>
+                      <a:headEnd type="none" w="med" len="med"/>
+                      <a:tailEnd type="none" w="med" len="med"/>
+                    </a:lnR>
+                    <a:lnT w="12700" cap="flat" cmpd="sng" algn="ctr">
+                      <a:solidFill>
+                        <a:srgbClr val="D8E0E8"/>
+                      </a:solidFill>
+                      <a:prstDash val="solid"/>
+                      <a:round/>
+                      <a:headEnd type="none" w="med" len="med"/>
+                      <a:tailEnd type="none" w="med" len="med"/>
+                    </a:lnT>
+                    <a:lnB w="12700" cap="flat" cmpd="sng" algn="ctr">
+                      <a:solidFill>
+                        <a:srgbClr val="D8E0E8"/>
+                      </a:solidFill>
+                      <a:prstDash val="solid"/>
+                      <a:round/>
+                      <a:headEnd type="none" w="med" len="med"/>
+                      <a:tailEnd type="none" w="med" len="med"/>
+                    </a:lnB>
+                  </a:tcPr>
+                </a:tc>
+                <a:tc>
+                  <a:txBody>
+                    <a:bodyPr/>
+                    <a:lstStyle/>
+                    <a:p>
+                      <a:pPr algn="ctr" indent="0" marL="0">
+                        <a:buNone/>
+                      </a:pPr>
+                      <a:r>
+                        <a:rPr lang="en-US" sz="1300" dirty="0">
+                          <a:solidFill>
+                            <a:srgbClr val="1E293B"/>
+                          </a:solidFill>
+                          <a:latin typeface="Calibri" pitchFamily="34" charset="0"/>
+                          <a:ea typeface="Calibri" pitchFamily="34" charset="-122"/>
+                          <a:cs typeface="Calibri" pitchFamily="34" charset="-120"/>
+                        </a:rPr>
+                        <a:t>~</a:t>
+                      </a:r>
+                      <a:endParaRPr lang="en-US" sz="1300" dirty="0">
+                        <a:latin typeface="Calibri" charset="0"/>
+                        <a:ea typeface="Calibri" charset="0"/>
+                        <a:cs typeface="Calibri" charset="0"/>
+                      </a:endParaRPr>
+                    </a:p>
+                  </a:txBody>
+                  <a:tcPr marL="91440" marR="91440" marT="45720" marB="45720" anchor="ctr">
+                    <a:lnL w="12700" cap="flat" cmpd="sng" algn="ctr">
+                      <a:solidFill>
+                        <a:srgbClr val="D8E0E8"/>
+                      </a:solidFill>
+                      <a:prstDash val="solid"/>
+                      <a:round/>
+                      <a:headEnd type="none" w="med" len="med"/>
+                      <a:tailEnd type="none" w="med" len="med"/>
+                    </a:lnL>
+                    <a:lnR w="12700" cap="flat" cmpd="sng" algn="ctr">
+                      <a:solidFill>
+                        <a:srgbClr val="D8E0E8"/>
+                      </a:solidFill>
+                      <a:prstDash val="solid"/>
+                      <a:round/>
+                      <a:headEnd type="none" w="med" len="med"/>
+                      <a:tailEnd type="none" w="med" len="med"/>
+                    </a:lnR>
+                    <a:lnT w="12700" cap="flat" cmpd="sng" algn="ctr">
+                      <a:solidFill>
+                        <a:srgbClr val="D8E0E8"/>
+                      </a:solidFill>
+                      <a:prstDash val="solid"/>
+                      <a:round/>
+                      <a:headEnd type="none" w="med" len="med"/>
+                      <a:tailEnd type="none" w="med" len="med"/>
+                    </a:lnT>
+                    <a:lnB w="12700" cap="flat" cmpd="sng" algn="ctr">
+                      <a:solidFill>
+                        <a:srgbClr val="D8E0E8"/>
+                      </a:solidFill>
+                      <a:prstDash val="solid"/>
+                      <a:round/>
+                      <a:headEnd type="none" w="med" len="med"/>
+                      <a:tailEnd type="none" w="med" len="med"/>
+                    </a:lnB>
+                  </a:tcPr>
+                </a:tc>
+                <a:tc>
+                  <a:txBody>
+                    <a:bodyPr/>
+                    <a:lstStyle/>
+                    <a:p>
+                      <a:pPr algn="ctr" indent="0" marL="0">
+                        <a:buNone/>
+                      </a:pPr>
+                      <a:r>
+                        <a:rPr lang="en-US" sz="1300" dirty="0">
+                          <a:solidFill>
+                            <a:srgbClr val="1E293B"/>
+                          </a:solidFill>
+                          <a:latin typeface="Calibri" pitchFamily="34" charset="0"/>
+                          <a:ea typeface="Calibri" pitchFamily="34" charset="-122"/>
+                          <a:cs typeface="Calibri" pitchFamily="34" charset="-120"/>
+                        </a:rPr>
+                        <a:t>media</a:t>
+                      </a:r>
+                      <a:endParaRPr lang="en-US" sz="1300" dirty="0">
+                        <a:latin typeface="Calibri" charset="0"/>
+                        <a:ea typeface="Calibri" charset="0"/>
+                        <a:cs typeface="Calibri" charset="0"/>
+                      </a:endParaRPr>
+                    </a:p>
+                  </a:txBody>
+                  <a:tcPr marL="91440" marR="91440" marT="45720" marB="45720" anchor="ctr">
+                    <a:lnL w="12700" cap="flat" cmpd="sng" algn="ctr">
+                      <a:solidFill>
+                        <a:srgbClr val="D8E0E8"/>
+                      </a:solidFill>
+                      <a:prstDash val="solid"/>
+                      <a:round/>
+                      <a:headEnd type="none" w="med" len="med"/>
+                      <a:tailEnd type="none" w="med" len="med"/>
+                    </a:lnL>
+                    <a:lnR w="12700" cap="flat" cmpd="sng" algn="ctr">
+                      <a:solidFill>
+                        <a:srgbClr val="D8E0E8"/>
+                      </a:solidFill>
+                      <a:prstDash val="solid"/>
+                      <a:round/>
+                      <a:headEnd type="none" w="med" len="med"/>
+                      <a:tailEnd type="none" w="med" len="med"/>
+                    </a:lnR>
+                    <a:lnT w="12700" cap="flat" cmpd="sng" algn="ctr">
+                      <a:solidFill>
+                        <a:srgbClr val="D8E0E8"/>
+                      </a:solidFill>
+                      <a:prstDash val="solid"/>
+                      <a:round/>
+                      <a:headEnd type="none" w="med" len="med"/>
+                      <a:tailEnd type="none" w="med" len="med"/>
+                    </a:lnT>
+                    <a:lnB w="12700" cap="flat" cmpd="sng" algn="ctr">
+                      <a:solidFill>
+                        <a:srgbClr val="D8E0E8"/>
+                      </a:solidFill>
+                      <a:prstDash val="solid"/>
+                      <a:round/>
+                      <a:headEnd type="none" w="med" len="med"/>
+                      <a:tailEnd type="none" w="med" len="med"/>
+                    </a:lnB>
+                  </a:tcPr>
+                </a:tc>
+              </a:tr>
+              <a:tr h="502920">
+                <a:tc>
+                  <a:txBody>
+                    <a:bodyPr/>
+                    <a:lstStyle/>
+                    <a:p>
+                      <a:pPr algn="ctr" indent="0" marL="0">
+                        <a:buNone/>
+                      </a:pPr>
+                      <a:r>
+                        <a:rPr lang="en-US" sz="1300" dirty="0">
+                          <a:solidFill>
+                            <a:srgbClr val="1E293B"/>
+                          </a:solidFill>
+                          <a:latin typeface="Calibri" pitchFamily="34" charset="0"/>
+                          <a:ea typeface="Calibri" pitchFamily="34" charset="-122"/>
+                          <a:cs typeface="Calibri" pitchFamily="34" charset="-120"/>
+                        </a:rPr>
+                        <a:t>Standard</a:t>
+                      </a:r>
+                      <a:endParaRPr lang="en-US" sz="1300" dirty="0">
+                        <a:latin typeface="Calibri" charset="0"/>
+                        <a:ea typeface="Calibri" charset="0"/>
+                        <a:cs typeface="Calibri" charset="0"/>
+                      </a:endParaRPr>
+                    </a:p>
+                  </a:txBody>
+                  <a:tcPr marL="91440" marR="91440" marT="45720" marB="45720" anchor="ctr">
+                    <a:lnL w="12700" cap="flat" cmpd="sng" algn="ctr">
+                      <a:solidFill>
+                        <a:srgbClr val="D8E0E8"/>
+                      </a:solidFill>
+                      <a:prstDash val="solid"/>
+                      <a:round/>
+                      <a:headEnd type="none" w="med" len="med"/>
+                      <a:tailEnd type="none" w="med" len="med"/>
+                    </a:lnL>
+                    <a:lnR w="12700" cap="flat" cmpd="sng" algn="ctr">
+                      <a:solidFill>
+                        <a:srgbClr val="D8E0E8"/>
+                      </a:solidFill>
+                      <a:prstDash val="solid"/>
+                      <a:round/>
+                      <a:headEnd type="none" w="med" len="med"/>
+                      <a:tailEnd type="none" w="med" len="med"/>
+                    </a:lnR>
+                    <a:lnT w="12700" cap="flat" cmpd="sng" algn="ctr">
+                      <a:solidFill>
+                        <a:srgbClr val="D8E0E8"/>
+                      </a:solidFill>
+                      <a:prstDash val="solid"/>
+                      <a:round/>
+                      <a:headEnd type="none" w="med" len="med"/>
+                      <a:tailEnd type="none" w="med" len="med"/>
+                    </a:lnT>
+                    <a:lnB w="12700" cap="flat" cmpd="sng" algn="ctr">
+                      <a:solidFill>
+                        <a:srgbClr val="D8E0E8"/>
+                      </a:solidFill>
+                      <a:prstDash val="solid"/>
+                      <a:round/>
+                      <a:headEnd type="none" w="med" len="med"/>
+                      <a:tailEnd type="none" w="med" len="med"/>
+                    </a:lnB>
+                  </a:tcPr>
+                </a:tc>
+                <a:tc>
+                  <a:txBody>
+                    <a:bodyPr/>
+                    <a:lstStyle/>
+                    <a:p>
+                      <a:pPr algn="ctr" indent="0" marL="0">
+                        <a:buNone/>
+                      </a:pPr>
+                      <a:r>
+                        <a:rPr lang="en-US" sz="1300" dirty="0">
+                          <a:solidFill>
+                            <a:srgbClr val="1E293B"/>
+                          </a:solidFill>
+                          <a:latin typeface="Calibri" pitchFamily="34" charset="0"/>
+                          <a:ea typeface="Calibri" pitchFamily="34" charset="-122"/>
+                          <a:cs typeface="Calibri" pitchFamily="34" charset="-120"/>
+                        </a:rPr>
+                        <a:t>✗</a:t>
+                      </a:r>
+                      <a:endParaRPr lang="en-US" sz="1300" dirty="0">
+                        <a:latin typeface="Calibri" charset="0"/>
+                        <a:ea typeface="Calibri" charset="0"/>
+                        <a:cs typeface="Calibri" charset="0"/>
+                      </a:endParaRPr>
+                    </a:p>
+                  </a:txBody>
+                  <a:tcPr marL="91440" marR="91440" marT="45720" marB="45720" anchor="ctr">
+                    <a:lnL w="12700" cap="flat" cmpd="sng" algn="ctr">
+                      <a:solidFill>
+                        <a:srgbClr val="D8E0E8"/>
+                      </a:solidFill>
+                      <a:prstDash val="solid"/>
+                      <a:round/>
+                      <a:headEnd type="none" w="med" len="med"/>
+                      <a:tailEnd type="none" w="med" len="med"/>
+                    </a:lnL>
+                    <a:lnR w="12700" cap="flat" cmpd="sng" algn="ctr">
+                      <a:solidFill>
+                        <a:srgbClr val="D8E0E8"/>
+                      </a:solidFill>
+                      <a:prstDash val="solid"/>
+                      <a:round/>
+                      <a:headEnd type="none" w="med" len="med"/>
+                      <a:tailEnd type="none" w="med" len="med"/>
+                    </a:lnR>
+                    <a:lnT w="12700" cap="flat" cmpd="sng" algn="ctr">
+                      <a:solidFill>
+                        <a:srgbClr val="D8E0E8"/>
+                      </a:solidFill>
+                      <a:prstDash val="solid"/>
+                      <a:round/>
+                      <a:headEnd type="none" w="med" len="med"/>
+                      <a:tailEnd type="none" w="med" len="med"/>
+                    </a:lnT>
+                    <a:lnB w="12700" cap="flat" cmpd="sng" algn="ctr">
+                      <a:solidFill>
+                        <a:srgbClr val="D8E0E8"/>
+                      </a:solidFill>
+                      <a:prstDash val="solid"/>
+                      <a:round/>
+                      <a:headEnd type="none" w="med" len="med"/>
+                      <a:tailEnd type="none" w="med" len="med"/>
+                    </a:lnB>
+                  </a:tcPr>
+                </a:tc>
+                <a:tc>
+                  <a:txBody>
+                    <a:bodyPr/>
+                    <a:lstStyle/>
+                    <a:p>
+                      <a:pPr algn="ctr" indent="0" marL="0">
+                        <a:buNone/>
+                      </a:pPr>
+                      <a:r>
+                        <a:rPr lang="en-US" sz="1300" dirty="0">
+                          <a:solidFill>
+                            <a:srgbClr val="1E293B"/>
+                          </a:solidFill>
+                          <a:latin typeface="Calibri" pitchFamily="34" charset="0"/>
+                          <a:ea typeface="Calibri" pitchFamily="34" charset="-122"/>
+                          <a:cs typeface="Calibri" pitchFamily="34" charset="-120"/>
+                        </a:rPr>
+                        <a:t>✓ ✓</a:t>
+                      </a:r>
+                      <a:endParaRPr lang="en-US" sz="1300" dirty="0">
+                        <a:latin typeface="Calibri" charset="0"/>
+                        <a:ea typeface="Calibri" charset="0"/>
+                        <a:cs typeface="Calibri" charset="0"/>
+                      </a:endParaRPr>
+                    </a:p>
+                  </a:txBody>
+                  <a:tcPr marL="91440" marR="91440" marT="45720" marB="45720" anchor="ctr">
+                    <a:lnL w="12700" cap="flat" cmpd="sng" algn="ctr">
+                      <a:solidFill>
+                        <a:srgbClr val="D8E0E8"/>
+                      </a:solidFill>
+                      <a:prstDash val="solid"/>
+                      <a:round/>
+                      <a:headEnd type="none" w="med" len="med"/>
+                      <a:tailEnd type="none" w="med" len="med"/>
+                    </a:lnL>
+                    <a:lnR w="12700" cap="flat" cmpd="sng" algn="ctr">
+                      <a:solidFill>
+                        <a:srgbClr val="D8E0E8"/>
+                      </a:solidFill>
+                      <a:prstDash val="solid"/>
+                      <a:round/>
+                      <a:headEnd type="none" w="med" len="med"/>
+                      <a:tailEnd type="none" w="med" len="med"/>
+                    </a:lnR>
+                    <a:lnT w="12700" cap="flat" cmpd="sng" algn="ctr">
+                      <a:solidFill>
+                        <a:srgbClr val="D8E0E8"/>
+                      </a:solidFill>
+                      <a:prstDash val="solid"/>
+                      <a:round/>
+                      <a:headEnd type="none" w="med" len="med"/>
+                      <a:tailEnd type="none" w="med" len="med"/>
+                    </a:lnT>
+                    <a:lnB w="12700" cap="flat" cmpd="sng" algn="ctr">
+                      <a:solidFill>
+                        <a:srgbClr val="D8E0E8"/>
+                      </a:solidFill>
+                      <a:prstDash val="solid"/>
+                      <a:round/>
+                      <a:headEnd type="none" w="med" len="med"/>
+                      <a:tailEnd type="none" w="med" len="med"/>
+                    </a:lnB>
+                  </a:tcPr>
+                </a:tc>
+                <a:tc>
+                  <a:txBody>
+                    <a:bodyPr/>
+                    <a:lstStyle/>
+                    <a:p>
+                      <a:pPr algn="ctr" indent="0" marL="0">
+                        <a:buNone/>
+                      </a:pPr>
+                      <a:r>
+                        <a:rPr lang="en-US" sz="1300" dirty="0">
+                          <a:solidFill>
+                            <a:srgbClr val="1E293B"/>
+                          </a:solidFill>
+                          <a:latin typeface="Calibri" pitchFamily="34" charset="0"/>
+                          <a:ea typeface="Calibri" pitchFamily="34" charset="-122"/>
+                          <a:cs typeface="Calibri" pitchFamily="34" charset="-120"/>
+                        </a:rPr>
+                        <a:t>rápida</a:t>
+                      </a:r>
+                      <a:endParaRPr lang="en-US" sz="1300" dirty="0">
+                        <a:latin typeface="Calibri" charset="0"/>
+                        <a:ea typeface="Calibri" charset="0"/>
+                        <a:cs typeface="Calibri" charset="0"/>
+                      </a:endParaRPr>
+                    </a:p>
+                  </a:txBody>
+                  <a:tcPr marL="91440" marR="91440" marT="45720" marB="45720" anchor="ctr">
+                    <a:lnL w="12700" cap="flat" cmpd="sng" algn="ctr">
+                      <a:solidFill>
+                        <a:srgbClr val="D8E0E8"/>
+                      </a:solidFill>
+                      <a:prstDash val="solid"/>
+                      <a:round/>
+                      <a:headEnd type="none" w="med" len="med"/>
+                      <a:tailEnd type="none" w="med" len="med"/>
+                    </a:lnL>
+                    <a:lnR w="12700" cap="flat" cmpd="sng" algn="ctr">
+                      <a:solidFill>
+                        <a:srgbClr val="D8E0E8"/>
+                      </a:solidFill>
+                      <a:prstDash val="solid"/>
+                      <a:round/>
+                      <a:headEnd type="none" w="med" len="med"/>
+                      <a:tailEnd type="none" w="med" len="med"/>
+                    </a:lnR>
+                    <a:lnT w="12700" cap="flat" cmpd="sng" algn="ctr">
+                      <a:solidFill>
+                        <a:srgbClr val="D8E0E8"/>
+                      </a:solidFill>
+                      <a:prstDash val="solid"/>
+                      <a:round/>
+                      <a:headEnd type="none" w="med" len="med"/>
+                      <a:tailEnd type="none" w="med" len="med"/>
+                    </a:lnT>
+                    <a:lnB w="12700" cap="flat" cmpd="sng" algn="ctr">
+                      <a:solidFill>
+                        <a:srgbClr val="D8E0E8"/>
+                      </a:solidFill>
+                      <a:prstDash val="solid"/>
+                      <a:round/>
+                      <a:headEnd type="none" w="med" len="med"/>
+                      <a:tailEnd type="none" w="med" len="med"/>
+                    </a:lnB>
+                  </a:tcPr>
+                </a:tc>
+              </a:tr>
+              <a:tr h="502920">
+                <a:tc>
+                  <a:txBody>
+                    <a:bodyPr/>
+                    <a:lstStyle/>
+                    <a:p>
+                      <a:pPr algn="ctr" indent="0" marL="0">
+                        <a:buNone/>
+                      </a:pPr>
+                      <a:r>
+                        <a:rPr lang="en-US" sz="1300" b="1" dirty="0">
+                          <a:solidFill>
+                            <a:srgbClr val="1E293B"/>
+                          </a:solidFill>
+                          <a:latin typeface="Calibri" pitchFamily="34" charset="0"/>
+                          <a:ea typeface="Calibri" pitchFamily="34" charset="-122"/>
+                          <a:cs typeface="Calibri" pitchFamily="34" charset="-120"/>
+                        </a:rPr>
+                        <a:t>Combinado</a:t>
+                      </a:r>
+                      <a:endParaRPr lang="en-US" sz="1300" dirty="0">
+                        <a:latin typeface="Calibri" charset="0"/>
+                        <a:ea typeface="Calibri" charset="0"/>
+                        <a:cs typeface="Calibri" charset="0"/>
+                      </a:endParaRPr>
+                    </a:p>
+                  </a:txBody>
+                  <a:tcPr marL="91440" marR="91440" marT="45720" marB="45720" anchor="ctr">
+                    <a:lnL w="12700" cap="flat" cmpd="sng" algn="ctr">
+                      <a:solidFill>
+                        <a:srgbClr val="D8E0E8"/>
+                      </a:solidFill>
+                      <a:prstDash val="solid"/>
+                      <a:round/>
+                      <a:headEnd type="none" w="med" len="med"/>
+                      <a:tailEnd type="none" w="med" len="med"/>
+                    </a:lnL>
+                    <a:lnR w="12700" cap="flat" cmpd="sng" algn="ctr">
+                      <a:solidFill>
+                        <a:srgbClr val="D8E0E8"/>
+                      </a:solidFill>
+                      <a:prstDash val="solid"/>
+                      <a:round/>
+                      <a:headEnd type="none" w="med" len="med"/>
+                      <a:tailEnd type="none" w="med" len="med"/>
+                    </a:lnR>
+                    <a:lnT w="12700" cap="flat" cmpd="sng" algn="ctr">
+                      <a:solidFill>
+                        <a:srgbClr val="D8E0E8"/>
+                      </a:solidFill>
+                      <a:prstDash val="solid"/>
+                      <a:round/>
+                      <a:headEnd type="none" w="med" len="med"/>
+                      <a:tailEnd type="none" w="med" len="med"/>
+                    </a:lnT>
+                    <a:lnB w="12700" cap="flat" cmpd="sng" algn="ctr">
+                      <a:solidFill>
+                        <a:srgbClr val="D8E0E8"/>
+                      </a:solidFill>
+                      <a:prstDash val="solid"/>
+                      <a:round/>
+                      <a:headEnd type="none" w="med" len="med"/>
+                      <a:tailEnd type="none" w="med" len="med"/>
+                    </a:lnB>
+                    <a:solidFill>
+                      <a:srgbClr val="E3F2EA"/>
+                    </a:solidFill>
+                  </a:tcPr>
+                </a:tc>
+                <a:tc>
+                  <a:txBody>
+                    <a:bodyPr/>
+                    <a:lstStyle/>
+                    <a:p>
+                      <a:pPr algn="ctr" indent="0" marL="0">
+                        <a:buNone/>
+                      </a:pPr>
+                      <a:r>
+                        <a:rPr lang="en-US" sz="1300" dirty="0">
+                          <a:solidFill>
+                            <a:srgbClr val="1E293B"/>
+                          </a:solidFill>
+                          <a:latin typeface="Calibri" pitchFamily="34" charset="0"/>
+                          <a:ea typeface="Calibri" pitchFamily="34" charset="-122"/>
+                          <a:cs typeface="Calibri" pitchFamily="34" charset="-120"/>
+                        </a:rPr>
+                        <a:t>✓ ✓</a:t>
+                      </a:r>
+                      <a:endParaRPr lang="en-US" sz="1300" dirty="0">
+                        <a:latin typeface="Calibri" charset="0"/>
+                        <a:ea typeface="Calibri" charset="0"/>
+                        <a:cs typeface="Calibri" charset="0"/>
+                      </a:endParaRPr>
+                    </a:p>
+                  </a:txBody>
+                  <a:tcPr marL="91440" marR="91440" marT="45720" marB="45720" anchor="ctr">
+                    <a:lnL w="12700" cap="flat" cmpd="sng" algn="ctr">
+                      <a:solidFill>
+                        <a:srgbClr val="D8E0E8"/>
+                      </a:solidFill>
+                      <a:prstDash val="solid"/>
+                      <a:round/>
+                      <a:headEnd type="none" w="med" len="med"/>
+                      <a:tailEnd type="none" w="med" len="med"/>
+                    </a:lnL>
+                    <a:lnR w="12700" cap="flat" cmpd="sng" algn="ctr">
+                      <a:solidFill>
+                        <a:srgbClr val="D8E0E8"/>
+                      </a:solidFill>
+                      <a:prstDash val="solid"/>
+                      <a:round/>
+                      <a:headEnd type="none" w="med" len="med"/>
+                      <a:tailEnd type="none" w="med" len="med"/>
+                    </a:lnR>
+                    <a:lnT w="12700" cap="flat" cmpd="sng" algn="ctr">
+                      <a:solidFill>
+                        <a:srgbClr val="D8E0E8"/>
+                      </a:solidFill>
+                      <a:prstDash val="solid"/>
+                      <a:round/>
+                      <a:headEnd type="none" w="med" len="med"/>
+                      <a:tailEnd type="none" w="med" len="med"/>
+                    </a:lnT>
+                    <a:lnB w="12700" cap="flat" cmpd="sng" algn="ctr">
+                      <a:solidFill>
+                        <a:srgbClr val="D8E0E8"/>
+                      </a:solidFill>
+                      <a:prstDash val="solid"/>
+                      <a:round/>
+                      <a:headEnd type="none" w="med" len="med"/>
+                      <a:tailEnd type="none" w="med" len="med"/>
+                    </a:lnB>
+                    <a:solidFill>
+                      <a:srgbClr val="E3F2EA"/>
+                    </a:solidFill>
+                  </a:tcPr>
+                </a:tc>
+                <a:tc>
+                  <a:txBody>
+                    <a:bodyPr/>
+                    <a:lstStyle/>
+                    <a:p>
+                      <a:pPr algn="ctr" indent="0" marL="0">
+                        <a:buNone/>
+                      </a:pPr>
+                      <a:r>
+                        <a:rPr lang="en-US" sz="1300" dirty="0">
+                          <a:solidFill>
+                            <a:srgbClr val="1E293B"/>
+                          </a:solidFill>
+                          <a:latin typeface="Calibri" pitchFamily="34" charset="0"/>
+                          <a:ea typeface="Calibri" pitchFamily="34" charset="-122"/>
+                          <a:cs typeface="Calibri" pitchFamily="34" charset="-120"/>
+                        </a:rPr>
+                        <a:t>✓ ✓</a:t>
+                      </a:r>
+                      <a:endParaRPr lang="en-US" sz="1300" dirty="0">
+                        <a:latin typeface="Calibri" charset="0"/>
+                        <a:ea typeface="Calibri" charset="0"/>
+                        <a:cs typeface="Calibri" charset="0"/>
+                      </a:endParaRPr>
+                    </a:p>
+                  </a:txBody>
+                  <a:tcPr marL="91440" marR="91440" marT="45720" marB="45720" anchor="ctr">
+                    <a:lnL w="12700" cap="flat" cmpd="sng" algn="ctr">
+                      <a:solidFill>
+                        <a:srgbClr val="D8E0E8"/>
+                      </a:solidFill>
+                      <a:prstDash val="solid"/>
+                      <a:round/>
+                      <a:headEnd type="none" w="med" len="med"/>
+                      <a:tailEnd type="none" w="med" len="med"/>
+                    </a:lnL>
+                    <a:lnR w="12700" cap="flat" cmpd="sng" algn="ctr">
+                      <a:solidFill>
+                        <a:srgbClr val="D8E0E8"/>
+                      </a:solidFill>
+                      <a:prstDash val="solid"/>
+                      <a:round/>
+                      <a:headEnd type="none" w="med" len="med"/>
+                      <a:tailEnd type="none" w="med" len="med"/>
+                    </a:lnR>
+                    <a:lnT w="12700" cap="flat" cmpd="sng" algn="ctr">
+                      <a:solidFill>
+                        <a:srgbClr val="D8E0E8"/>
+                      </a:solidFill>
+                      <a:prstDash val="solid"/>
+                      <a:round/>
+                      <a:headEnd type="none" w="med" len="med"/>
+                      <a:tailEnd type="none" w="med" len="med"/>
+                    </a:lnT>
+                    <a:lnB w="12700" cap="flat" cmpd="sng" algn="ctr">
+                      <a:solidFill>
+                        <a:srgbClr val="D8E0E8"/>
+                      </a:solidFill>
+                      <a:prstDash val="solid"/>
+                      <a:round/>
+                      <a:headEnd type="none" w="med" len="med"/>
+                      <a:tailEnd type="none" w="med" len="med"/>
+                    </a:lnB>
+                    <a:solidFill>
+                      <a:srgbClr val="E3F2EA"/>
+                    </a:solidFill>
+                  </a:tcPr>
+                </a:tc>
+                <a:tc>
+                  <a:txBody>
+                    <a:bodyPr/>
+                    <a:lstStyle/>
+                    <a:p>
+                      <a:pPr algn="ctr" indent="0" marL="0">
+                        <a:buNone/>
+                      </a:pPr>
+                      <a:r>
+                        <a:rPr lang="en-US" sz="1300" dirty="0">
+                          <a:solidFill>
+                            <a:srgbClr val="1E293B"/>
+                          </a:solidFill>
+                          <a:latin typeface="Calibri" pitchFamily="34" charset="0"/>
+                          <a:ea typeface="Calibri" pitchFamily="34" charset="-122"/>
+                          <a:cs typeface="Calibri" pitchFamily="34" charset="-120"/>
+                        </a:rPr>
+                        <a:t>lenta</a:t>
+                      </a:r>
+                      <a:endParaRPr lang="en-US" sz="1300" dirty="0">
+                        <a:latin typeface="Calibri" charset="0"/>
+                        <a:ea typeface="Calibri" charset="0"/>
+                        <a:cs typeface="Calibri" charset="0"/>
+                      </a:endParaRPr>
+                    </a:p>
+                  </a:txBody>
+                  <a:tcPr marL="91440" marR="91440" marT="45720" marB="45720" anchor="ctr">
+                    <a:lnL w="12700" cap="flat" cmpd="sng" algn="ctr">
+                      <a:solidFill>
+                        <a:srgbClr val="D8E0E8"/>
+                      </a:solidFill>
+                      <a:prstDash val="solid"/>
+                      <a:round/>
+                      <a:headEnd type="none" w="med" len="med"/>
+                      <a:tailEnd type="none" w="med" len="med"/>
+                    </a:lnL>
+                    <a:lnR w="12700" cap="flat" cmpd="sng" algn="ctr">
+                      <a:solidFill>
+                        <a:srgbClr val="D8E0E8"/>
+                      </a:solidFill>
+                      <a:prstDash val="solid"/>
+                      <a:round/>
+                      <a:headEnd type="none" w="med" len="med"/>
+                      <a:tailEnd type="none" w="med" len="med"/>
+                    </a:lnR>
+                    <a:lnT w="12700" cap="flat" cmpd="sng" algn="ctr">
+                      <a:solidFill>
+                        <a:srgbClr val="D8E0E8"/>
+                      </a:solidFill>
+                      <a:prstDash val="solid"/>
+                      <a:round/>
+                      <a:headEnd type="none" w="med" len="med"/>
+                      <a:tailEnd type="none" w="med" len="med"/>
+                    </a:lnT>
+                    <a:lnB w="12700" cap="flat" cmpd="sng" algn="ctr">
+                      <a:solidFill>
+                        <a:srgbClr val="D8E0E8"/>
+                      </a:solidFill>
+                      <a:prstDash val="solid"/>
+                      <a:round/>
+                      <a:headEnd type="none" w="med" len="med"/>
+                      <a:tailEnd type="none" w="med" len="med"/>
+                    </a:lnB>
+                    <a:solidFill>
+                      <a:srgbClr val="E3F2EA"/>
+                    </a:solidFill>
+                  </a:tcPr>
+                </a:tc>
+              </a:tr>
+            </a:tbl>
+          </a:graphicData>
+        </a:graphic>
+      </p:graphicFrame>
+      <p:sp>
+        <p:nvSpPr>
+          <p:cNvPr id="19" name="Text 16"/>
+          <p:cNvSpPr/>
+          <p:nvPr/>
+        </p:nvSpPr>
+        <p:spPr>
+          <a:xfrm>
+            <a:off x="6126480" y="4709160"/>
+            <a:ext cx="5440680" cy="640080"/>
+          </a:xfrm>
+          <a:prstGeom prst="rect">
+            <a:avLst/>
+          </a:prstGeom>
+          <a:noFill/>
+          <a:ln/>
+        </p:spPr>
+        <p:txBody>
+          <a:bodyPr wrap="square" lIns="0" tIns="0" rIns="0" bIns="0" rtlCol="0" anchor="ctr"/>
+          <a:lstStyle/>
+          <a:p>
             <a:pPr indent="0" marL="0">
               <a:buNone/>
             </a:pPr>
             <a:r>
-              <a:rPr lang="en-US" sz="1600" b="1" dirty="0">
-                <a:solidFill>
-                  <a:srgbClr val="FFFFFF"/>
-                </a:solidFill>
-                <a:latin typeface="Georgia" pitchFamily="34" charset="0"/>
-                <a:ea typeface="Georgia" pitchFamily="34" charset="-122"/>
-                <a:cs typeface="Georgia" pitchFamily="34" charset="-120"/>
-              </a:rPr>
-              <a:t>YOLO-seg + SAHI</a:t>
-            </a:r>
-            <a:endParaRPr lang="en-US" sz="1600" dirty="0"/>
-          </a:p>
-        </p:txBody>
-      </p:sp>
-      <p:sp>
-        <p:nvSpPr>
-          <p:cNvPr id="10" name="Text 8"/>
-          <p:cNvSpPr/>
-          <p:nvPr/>
-        </p:nvSpPr>
-        <p:spPr>
-          <a:xfrm>
-            <a:off x="8915400" y="2651760"/>
-            <a:ext cx="2468880" cy="2743200"/>
+              <a:rPr lang="en-US" sz="1250" i="1" dirty="0">
+                <a:solidFill>
+                  <a:srgbClr val="64748B"/>
+                </a:solidFill>
+                <a:latin typeface="Calibri" pitchFamily="34" charset="0"/>
+                <a:ea typeface="Calibri" pitchFamily="34" charset="-122"/>
+                <a:cs typeface="Calibri" pitchFamily="34" charset="-120"/>
+              </a:rPr>
+              <a:t>Combinado = cobertura total (cualquier tamaño), a cambio de la pasada global + N slices.</a:t>
+            </a:r>
+            <a:endParaRPr lang="en-US" sz="1250" dirty="0"/>
+          </a:p>
+        </p:txBody>
+      </p:sp>
+      <p:sp>
+        <p:nvSpPr>
+          <p:cNvPr id="20" name="Text 17"/>
+          <p:cNvSpPr/>
+          <p:nvPr/>
+        </p:nvSpPr>
+        <p:spPr>
+          <a:xfrm>
+            <a:off x="640080" y="5074920"/>
+            <a:ext cx="5486400" cy="365760"/>
           </a:xfrm>
           <a:prstGeom prst="rect">
             <a:avLst/>
@@ -11776,94 +13481,41 @@
           <a:bodyPr wrap="square" lIns="0" tIns="0" rIns="0" bIns="0" rtlCol="0" anchor="ctr"/>
           <a:lstStyle/>
           <a:p>
-            <a:pPr marL="342900" indent="-342900">
-              <a:spcAft>
-                <a:spcPts val="900"/>
-              </a:spcAft>
-              <a:buSzPct val="100000"/>
-              <a:buChar char="•"/>
-            </a:pPr>
-            <a:r>
-              <a:rPr lang="en-US" sz="1250" dirty="0">
-                <a:solidFill>
-                  <a:srgbClr val="CADCFC"/>
-                </a:solidFill>
-                <a:latin typeface="Calibri" pitchFamily="34" charset="0"/>
-                <a:ea typeface="Calibri" pitchFamily="34" charset="-122"/>
-                <a:cs typeface="Calibri" pitchFamily="34" charset="-120"/>
-              </a:rPr>
-              <a:t>Mismo pipeline, modelo -seg.</a:t>
-            </a:r>
-            <a:endParaRPr lang="en-US" sz="1250" dirty="0"/>
-          </a:p>
-          <a:p>
-            <a:pPr marL="342900" indent="-342900">
-              <a:spcAft>
-                <a:spcPts val="900"/>
-              </a:spcAft>
-              <a:buSzPct val="100000"/>
-              <a:buChar char="•"/>
-            </a:pPr>
-            <a:r>
-              <a:rPr lang="en-US" sz="1250" dirty="0">
-                <a:solidFill>
-                  <a:srgbClr val="CADCFC"/>
-                </a:solidFill>
-                <a:latin typeface="Calibri" pitchFamily="34" charset="0"/>
-                <a:ea typeface="Calibri" pitchFamily="34" charset="-122"/>
-                <a:cs typeface="Calibri" pitchFamily="34" charset="-120"/>
-              </a:rPr>
-              <a:t>Máscaras a resolución nativa por slice.</a:t>
-            </a:r>
-            <a:endParaRPr lang="en-US" sz="1250" dirty="0"/>
-          </a:p>
-          <a:p>
-            <a:pPr marL="342900" indent="-342900">
-              <a:spcAft>
-                <a:spcPts val="900"/>
-              </a:spcAft>
-              <a:buSzPct val="100000"/>
-              <a:buChar char="•"/>
-            </a:pPr>
-            <a:r>
-              <a:rPr lang="en-US" sz="1250" dirty="0">
-                <a:solidFill>
-                  <a:srgbClr val="CADCFC"/>
-                </a:solidFill>
-                <a:latin typeface="Calibri" pitchFamily="34" charset="0"/>
-                <a:ea typeface="Calibri" pitchFamily="34" charset="-122"/>
-                <a:cs typeface="Calibri" pitchFamily="34" charset="-120"/>
-              </a:rPr>
-              <a:t>Instancias pequeñas que antes no se segmentaban.</a:t>
-            </a:r>
-            <a:endParaRPr lang="en-US" sz="1250" dirty="0"/>
-          </a:p>
-          <a:p>
-            <a:pPr marL="342900" indent="-342900">
-              <a:spcAft>
-                <a:spcPts val="900"/>
-              </a:spcAft>
-              <a:buSzPct val="100000"/>
-              <a:buChar char="•"/>
-            </a:pPr>
-            <a:r>
-              <a:rPr lang="en-US" sz="1250" i="1" dirty="0">
-                <a:solidFill>
-                  <a:srgbClr val="9FB3C8"/>
-                </a:solidFill>
-                <a:latin typeface="Calibri" pitchFamily="34" charset="0"/>
-                <a:ea typeface="Calibri" pitchFamily="34" charset="-122"/>
-                <a:cs typeface="Calibri" pitchFamily="34" charset="-120"/>
-              </a:rPr>
-              <a:t>Cualitativo: VisDrone no trae máscaras GT.</a:t>
-            </a:r>
-            <a:endParaRPr lang="en-US" sz="1250" dirty="0"/>
-          </a:p>
-        </p:txBody>
-      </p:sp>
-      <p:sp>
-        <p:nvSpPr>
-          <p:cNvPr id="11" name="Text 9"/>
+            <a:pPr indent="0" marL="0">
+              <a:buNone/>
+            </a:pPr>
+            <a:r>
+              <a:rPr lang="en-US" sz="1300" dirty="0">
+                <a:solidFill>
+                  <a:srgbClr val="1E293B"/>
+                </a:solidFill>
+                <a:latin typeface="Calibri" pitchFamily="34" charset="0"/>
+                <a:ea typeface="Calibri" pitchFamily="34" charset="-122"/>
+                <a:cs typeface="Calibri" pitchFamily="34" charset="-120"/>
+              </a:rPr>
+              <a:t>Se activa con  </a:t>
+            </a:r>
+            <a:pPr indent="0" marL="0">
+              <a:buNone/>
+            </a:pPr>
+            <a:r>
+              <a:rPr lang="en-US" sz="1300" b="1" dirty="0">
+                <a:solidFill>
+                  <a:srgbClr val="0F2A43"/>
+                </a:solidFill>
+                <a:latin typeface="Consolas" pitchFamily="34" charset="0"/>
+                <a:ea typeface="Consolas" pitchFamily="34" charset="-122"/>
+                <a:cs typeface="Consolas" pitchFamily="34" charset="-120"/>
+              </a:rPr>
+              <a:t>perform_standard_pred=True</a:t>
+            </a:r>
+            <a:endParaRPr lang="en-US" sz="1300" dirty="0"/>
+          </a:p>
+        </p:txBody>
+      </p:sp>
+      <p:sp>
+        <p:nvSpPr>
+          <p:cNvPr id="21" name="Text 18"/>
           <p:cNvSpPr/>
           <p:nvPr/>
         </p:nvSpPr>
@@ -11902,7 +13554,7 @@
       </p:sp>
       <p:sp>
         <p:nvSpPr>
-          <p:cNvPr id="12" name="Text 10"/>
+          <p:cNvPr id="22" name="Text 19"/>
           <p:cNvSpPr/>
           <p:nvPr/>
         </p:nvSpPr>
@@ -12004,7 +13656,7 @@
                 <a:ea typeface="Calibri" pitchFamily="34" charset="-122"/>
                 <a:cs typeface="Calibri" pitchFamily="34" charset="-120"/>
               </a:rPr>
-              <a:t>NIVEL 6 · ENTRENAR EN EL DOMINIO</a:t>
+              <a:t>NIVEL 5 · SEGMENTACIÓN</a:t>
             </a:r>
             <a:endParaRPr lang="en-US" sz="1300" dirty="0"/>
           </a:p>
@@ -12068,7 +13720,7 @@
                 <a:ea typeface="Georgia" pitchFamily="34" charset="-122"/>
                 <a:cs typeface="Georgia" pitchFamily="34" charset="-120"/>
               </a:rPr>
-              <a:t>N6</a:t>
+              <a:t>N5</a:t>
             </a:r>
             <a:endParaRPr lang="en-US" sz="2200" dirty="0"/>
           </a:p>
@@ -12107,7 +13759,7 @@
                 <a:ea typeface="Georgia" pitchFamily="34" charset="-122"/>
                 <a:cs typeface="Georgia" pitchFamily="34" charset="-120"/>
               </a:rPr>
-              <a:t>El paso que desbloquea el mAP real</a:t>
+              <a:t>SAHI también mejora las máscaras</a:t>
             </a:r>
             <a:endParaRPr lang="en-US" sz="3000" dirty="0"/>
           </a:p>
@@ -12115,114 +13767,18 @@
       </p:sp>
       <p:sp>
         <p:nvSpPr>
-          <p:cNvPr id="6" name="Text 4"/>
-          <p:cNvSpPr/>
-          <p:nvPr/>
-        </p:nvSpPr>
-        <p:spPr>
-          <a:xfrm>
-            <a:off x="640080" y="1920240"/>
-            <a:ext cx="5760720" cy="2743200"/>
-          </a:xfrm>
-          <a:prstGeom prst="rect">
-            <a:avLst/>
-          </a:prstGeom>
-          <a:noFill/>
-          <a:ln/>
-        </p:spPr>
-        <p:txBody>
-          <a:bodyPr wrap="square" lIns="0" tIns="0" rIns="0" bIns="0" rtlCol="0" anchor="ctr"/>
-          <a:lstStyle/>
-          <a:p>
-            <a:pPr indent="0" marL="0">
-              <a:buNone/>
-            </a:pPr>
-            <a:r>
-              <a:rPr lang="en-US" sz="1600" b="1" dirty="0">
-                <a:solidFill>
-                  <a:srgbClr val="E4572E"/>
-                </a:solidFill>
-                <a:latin typeface="Calibri" pitchFamily="34" charset="0"/>
-                <a:ea typeface="Calibri" pitchFamily="34" charset="-122"/>
-                <a:cs typeface="Calibri" pitchFamily="34" charset="-120"/>
-              </a:rPr>
-              <a:t>Un modelo COCO evaluado en VisDrone da mAP ≈ 0</a:t>
-            </a:r>
-            <a:endParaRPr lang="en-US" sz="1600" dirty="0"/>
-          </a:p>
-          <a:p>
-            <a:pPr indent="0" marL="0">
-              <a:buNone/>
-            </a:pPr>
-            <a:r>
-              <a:rPr lang="en-US" sz="1300" dirty="0">
-                <a:solidFill>
-                  <a:srgbClr val="64748B"/>
-                </a:solidFill>
-                <a:latin typeface="Calibri" pitchFamily="34" charset="0"/>
-                <a:ea typeface="Calibri" pitchFamily="34" charset="-122"/>
-                <a:cs typeface="Calibri" pitchFamily="34" charset="-120"/>
-              </a:rPr>
-              <a:t>Las 80 clases de COCO no coinciden con las 10 de VisDrone (zero-shot).</a:t>
-            </a:r>
-            <a:endParaRPr lang="en-US" sz="1600" dirty="0"/>
-          </a:p>
-          <a:p>
-            <a:pPr indent="0" marL="0">
-              <a:buNone/>
-            </a:pPr>
-            <a:endParaRPr lang="en-US" sz="1600" dirty="0"/>
-          </a:p>
-          <a:p>
-            <a:pPr indent="0" marL="0">
-              <a:buNone/>
-            </a:pPr>
-            <a:r>
-              <a:rPr lang="en-US" sz="1600" b="1" dirty="0">
-                <a:solidFill>
-                  <a:srgbClr val="2E8B57"/>
-                </a:solidFill>
-                <a:latin typeface="Calibri" pitchFamily="34" charset="0"/>
-                <a:ea typeface="Calibri" pitchFamily="34" charset="-122"/>
-                <a:cs typeface="Calibri" pitchFamily="34" charset="-120"/>
-              </a:rPr>
-              <a:t>Fine-tune en VisDrone alinea las clases</a:t>
-            </a:r>
-            <a:endParaRPr lang="en-US" sz="1600" dirty="0"/>
-          </a:p>
-          <a:p>
-            <a:pPr indent="0" marL="0">
-              <a:buNone/>
-            </a:pPr>
-            <a:r>
-              <a:rPr lang="en-US" sz="1300" dirty="0">
-                <a:solidFill>
-                  <a:srgbClr val="64748B"/>
-                </a:solidFill>
-                <a:latin typeface="Calibri" pitchFamily="34" charset="0"/>
-                <a:ea typeface="Calibri" pitchFamily="34" charset="-122"/>
-                <a:cs typeface="Calibri" pitchFamily="34" charset="-120"/>
-              </a:rPr>
-              <a:t>Una línea: yolo train data=VisDrone.yaml. Luego SAHI exprime el AP_small.</a:t>
-            </a:r>
-            <a:endParaRPr lang="en-US" sz="1600" dirty="0"/>
-          </a:p>
-        </p:txBody>
-      </p:sp>
-      <p:sp>
-        <p:nvSpPr>
-          <p:cNvPr id="7" name="Shape 5"/>
-          <p:cNvSpPr/>
-          <p:nvPr/>
-        </p:nvSpPr>
-        <p:spPr>
-          <a:xfrm>
-            <a:off x="6766560" y="2103120"/>
-            <a:ext cx="2286000" cy="1417320"/>
+          <p:cNvPr id="6" name="Shape 4"/>
+          <p:cNvSpPr/>
+          <p:nvPr/>
+        </p:nvSpPr>
+        <p:spPr>
+          <a:xfrm>
+            <a:off x="822960" y="1920240"/>
+            <a:ext cx="7589520" cy="3657600"/>
           </a:xfrm>
           <a:prstGeom prst="roundRect">
             <a:avLst>
-              <a:gd name="adj" fmla="val 5161"/>
+              <a:gd name="adj" fmla="val 2000"/>
             </a:avLst>
           </a:prstGeom>
           <a:solidFill>
@@ -12234,25 +13790,18 @@
             </a:solidFill>
             <a:prstDash val="solid"/>
           </a:ln>
-          <a:effectLst>
-            <a:outerShdw sx="100000" sy="100000" kx="0" ky="0" algn="bl" rotWithShape="0" blurRad="114300" dist="38100" dir="5400000">
-              <a:srgbClr val="000000">
-                <a:alpha val="18000"/>
-              </a:srgbClr>
-            </a:outerShdw>
-          </a:effectLst>
-        </p:spPr>
-      </p:sp>
-      <p:sp>
-        <p:nvSpPr>
-          <p:cNvPr id="8" name="Text 6"/>
-          <p:cNvSpPr/>
-          <p:nvPr/>
-        </p:nvSpPr>
-        <p:spPr>
-          <a:xfrm>
-            <a:off x="6766560" y="2212848"/>
-            <a:ext cx="2286000" cy="777240"/>
+        </p:spPr>
+      </p:sp>
+      <p:sp>
+        <p:nvSpPr>
+          <p:cNvPr id="7" name="Text 5"/>
+          <p:cNvSpPr/>
+          <p:nvPr/>
+        </p:nvSpPr>
+        <p:spPr>
+          <a:xfrm>
+            <a:off x="822960" y="3566160"/>
+            <a:ext cx="7589520" cy="457200"/>
           </a:xfrm>
           <a:prstGeom prst="rect">
             <a:avLst/>
@@ -12268,127 +13817,96 @@
               <a:buNone/>
             </a:pPr>
             <a:r>
-              <a:rPr lang="en-US" sz="4000" b="1" dirty="0">
-                <a:solidFill>
-                  <a:srgbClr val="E4572E"/>
+              <a:rPr lang="en-US" sz="1300" dirty="0">
+                <a:solidFill>
+                  <a:srgbClr val="64748B"/>
+                </a:solidFill>
+                <a:latin typeface="Calibri" pitchFamily="34" charset="0"/>
+                <a:ea typeface="Calibri" pitchFamily="34" charset="-122"/>
+                <a:cs typeface="Calibri" pitchFamily="34" charset="-120"/>
+              </a:rPr>
+              <a:t>(Genera con notebook 02 → outputs/segmentation/)</a:t>
+            </a:r>
+            <a:endParaRPr lang="en-US" sz="1300" dirty="0"/>
+          </a:p>
+        </p:txBody>
+      </p:sp>
+      <p:sp>
+        <p:nvSpPr>
+          <p:cNvPr id="8" name="Shape 6"/>
+          <p:cNvSpPr/>
+          <p:nvPr/>
+        </p:nvSpPr>
+        <p:spPr>
+          <a:xfrm>
+            <a:off x="8686800" y="1920240"/>
+            <a:ext cx="2880360" cy="3657600"/>
+          </a:xfrm>
+          <a:prstGeom prst="roundRect">
+            <a:avLst>
+              <a:gd name="adj" fmla="val 2540"/>
+            </a:avLst>
+          </a:prstGeom>
+          <a:solidFill>
+            <a:srgbClr val="0F2A43"/>
+          </a:solidFill>
+          <a:ln w="12700">
+            <a:solidFill>
+              <a:srgbClr val="0F2A43"/>
+            </a:solidFill>
+            <a:prstDash val="solid"/>
+          </a:ln>
+        </p:spPr>
+      </p:sp>
+      <p:sp>
+        <p:nvSpPr>
+          <p:cNvPr id="9" name="Text 7"/>
+          <p:cNvSpPr/>
+          <p:nvPr/>
+        </p:nvSpPr>
+        <p:spPr>
+          <a:xfrm>
+            <a:off x="8915400" y="2148840"/>
+            <a:ext cx="2468880" cy="365760"/>
+          </a:xfrm>
+          <a:prstGeom prst="rect">
+            <a:avLst/>
+          </a:prstGeom>
+          <a:noFill/>
+          <a:ln/>
+        </p:spPr>
+        <p:txBody>
+          <a:bodyPr wrap="square" lIns="0" tIns="0" rIns="0" bIns="0" rtlCol="0" anchor="ctr"/>
+          <a:lstStyle/>
+          <a:p>
+            <a:pPr indent="0" marL="0">
+              <a:buNone/>
+            </a:pPr>
+            <a:r>
+              <a:rPr lang="en-US" sz="1600" b="1" dirty="0">
+                <a:solidFill>
+                  <a:srgbClr val="FFFFFF"/>
                 </a:solidFill>
                 <a:latin typeface="Georgia" pitchFamily="34" charset="0"/>
                 <a:ea typeface="Georgia" pitchFamily="34" charset="-122"/>
                 <a:cs typeface="Georgia" pitchFamily="34" charset="-120"/>
               </a:rPr>
-              <a:t>≈ 0.00</a:t>
-            </a:r>
-            <a:endParaRPr lang="en-US" sz="4000" dirty="0"/>
-          </a:p>
-        </p:txBody>
-      </p:sp>
-      <p:sp>
-        <p:nvSpPr>
-          <p:cNvPr id="9" name="Text 7"/>
-          <p:cNvSpPr/>
-          <p:nvPr/>
-        </p:nvSpPr>
-        <p:spPr>
-          <a:xfrm>
-            <a:off x="6903720" y="2999232"/>
-            <a:ext cx="2011680" cy="457200"/>
-          </a:xfrm>
-          <a:prstGeom prst="rect">
-            <a:avLst/>
-          </a:prstGeom>
-          <a:noFill/>
-          <a:ln/>
-        </p:spPr>
-        <p:txBody>
-          <a:bodyPr wrap="square" lIns="0" tIns="0" rIns="0" bIns="0" rtlCol="0" anchor="t"/>
-          <a:lstStyle/>
-          <a:p>
-            <a:pPr algn="ctr" indent="0" marL="0">
-              <a:buNone/>
-            </a:pPr>
-            <a:r>
-              <a:rPr lang="en-US" sz="1200" dirty="0">
-                <a:solidFill>
-                  <a:srgbClr val="64748B"/>
-                </a:solidFill>
-                <a:latin typeface="Calibri" pitchFamily="34" charset="0"/>
-                <a:ea typeface="Calibri" pitchFamily="34" charset="-122"/>
-                <a:cs typeface="Calibri" pitchFamily="34" charset="-120"/>
-              </a:rPr>
-              <a:t>mAP zero-shot (COCO)</a:t>
-            </a:r>
-            <a:endParaRPr lang="en-US" sz="1200" dirty="0"/>
-          </a:p>
-        </p:txBody>
-      </p:sp>
-      <p:sp>
-        <p:nvSpPr>
-          <p:cNvPr id="10" name="Shape 8"/>
-          <p:cNvSpPr/>
-          <p:nvPr/>
-        </p:nvSpPr>
-        <p:spPr>
-          <a:xfrm>
-            <a:off x="9189720" y="2788920"/>
-            <a:ext cx="502920" cy="0"/>
-          </a:xfrm>
-          <a:prstGeom prst="line">
-            <a:avLst/>
-          </a:prstGeom>
-          <a:noFill/>
-          <a:ln w="25400">
-            <a:solidFill>
-              <a:srgbClr val="1E293B"/>
-            </a:solidFill>
-            <a:prstDash val="solid"/>
-            <a:tailEnd type="triangle"/>
-          </a:ln>
-        </p:spPr>
-      </p:sp>
-      <p:sp>
-        <p:nvSpPr>
-          <p:cNvPr id="11" name="Shape 9"/>
-          <p:cNvSpPr/>
-          <p:nvPr/>
-        </p:nvSpPr>
-        <p:spPr>
-          <a:xfrm>
-            <a:off x="9326880" y="2103120"/>
-            <a:ext cx="2286000" cy="1417320"/>
-          </a:xfrm>
-          <a:prstGeom prst="roundRect">
-            <a:avLst>
-              <a:gd name="adj" fmla="val 5161"/>
-            </a:avLst>
-          </a:prstGeom>
-          <a:solidFill>
-            <a:srgbClr val="F4F7FA"/>
-          </a:solidFill>
-          <a:ln w="12700">
-            <a:solidFill>
-              <a:srgbClr val="D8E0E8"/>
-            </a:solidFill>
-            <a:prstDash val="solid"/>
-          </a:ln>
-          <a:effectLst>
-            <a:outerShdw sx="100000" sy="100000" kx="0" ky="0" algn="bl" rotWithShape="0" blurRad="114300" dist="38100" dir="5400000">
-              <a:srgbClr val="000000">
-                <a:alpha val="18000"/>
-              </a:srgbClr>
-            </a:outerShdw>
-          </a:effectLst>
-        </p:spPr>
-      </p:sp>
-      <p:sp>
-        <p:nvSpPr>
-          <p:cNvPr id="12" name="Text 10"/>
-          <p:cNvSpPr/>
-          <p:nvPr/>
-        </p:nvSpPr>
-        <p:spPr>
-          <a:xfrm>
-            <a:off x="9326880" y="2212848"/>
-            <a:ext cx="2286000" cy="777240"/>
+              <a:t>YOLO-seg + SAHI</a:t>
+            </a:r>
+            <a:endParaRPr lang="en-US" sz="1600" dirty="0"/>
+          </a:p>
+        </p:txBody>
+      </p:sp>
+      <p:sp>
+        <p:nvSpPr>
+          <p:cNvPr id="10" name="Text 8"/>
+          <p:cNvSpPr/>
+          <p:nvPr/>
+        </p:nvSpPr>
+        <p:spPr>
+          <a:xfrm>
+            <a:off x="8915400" y="2651760"/>
+            <a:ext cx="2468880" cy="2743200"/>
           </a:xfrm>
           <a:prstGeom prst="rect">
             <a:avLst/>
@@ -12400,158 +13918,94 @@
           <a:bodyPr wrap="square" lIns="0" tIns="0" rIns="0" bIns="0" rtlCol="0" anchor="ctr"/>
           <a:lstStyle/>
           <a:p>
-            <a:pPr algn="ctr" indent="0" marL="0">
-              <a:buNone/>
-            </a:pPr>
-            <a:r>
-              <a:rPr lang="en-US" sz="4000" b="1" dirty="0">
-                <a:solidFill>
-                  <a:srgbClr val="2E8B57"/>
-                </a:solidFill>
-                <a:latin typeface="Georgia" pitchFamily="34" charset="0"/>
-                <a:ea typeface="Georgia" pitchFamily="34" charset="-122"/>
-                <a:cs typeface="Georgia" pitchFamily="34" charset="-120"/>
-              </a:rPr>
-              <a:t>0.22+</a:t>
-            </a:r>
-            <a:endParaRPr lang="en-US" sz="4000" dirty="0"/>
-          </a:p>
-        </p:txBody>
-      </p:sp>
-      <p:sp>
-        <p:nvSpPr>
-          <p:cNvPr id="13" name="Text 11"/>
-          <p:cNvSpPr/>
-          <p:nvPr/>
-        </p:nvSpPr>
-        <p:spPr>
-          <a:xfrm>
-            <a:off x="9464040" y="2999232"/>
-            <a:ext cx="2011680" cy="457200"/>
-          </a:xfrm>
-          <a:prstGeom prst="rect">
-            <a:avLst/>
-          </a:prstGeom>
-          <a:noFill/>
-          <a:ln/>
-        </p:spPr>
-        <p:txBody>
-          <a:bodyPr wrap="square" lIns="0" tIns="0" rIns="0" bIns="0" rtlCol="0" anchor="t"/>
-          <a:lstStyle/>
-          <a:p>
-            <a:pPr algn="ctr" indent="0" marL="0">
-              <a:buNone/>
-            </a:pPr>
-            <a:r>
-              <a:rPr lang="en-US" sz="1200" dirty="0">
-                <a:solidFill>
-                  <a:srgbClr val="64748B"/>
-                </a:solidFill>
-                <a:latin typeface="Calibri" pitchFamily="34" charset="0"/>
-                <a:ea typeface="Calibri" pitchFamily="34" charset="-122"/>
-                <a:cs typeface="Calibri" pitchFamily="34" charset="-120"/>
-              </a:rPr>
-              <a:t>mAP fine-tuned</a:t>
-            </a:r>
-            <a:endParaRPr lang="en-US" sz="1200" dirty="0"/>
-          </a:p>
-        </p:txBody>
-      </p:sp>
-      <p:sp>
-        <p:nvSpPr>
-          <p:cNvPr id="14" name="Text 12"/>
-          <p:cNvSpPr/>
-          <p:nvPr/>
-        </p:nvSpPr>
-        <p:spPr>
-          <a:xfrm>
-            <a:off x="6766560" y="3840480"/>
-            <a:ext cx="4846320" cy="457200"/>
-          </a:xfrm>
-          <a:prstGeom prst="rect">
-            <a:avLst/>
-          </a:prstGeom>
-          <a:noFill/>
-          <a:ln/>
-        </p:spPr>
-        <p:txBody>
-          <a:bodyPr wrap="square" lIns="0" tIns="0" rIns="0" bIns="0" rtlCol="0" anchor="ctr"/>
-          <a:lstStyle/>
-          <a:p>
-            <a:pPr algn="ctr" indent="0" marL="0">
-              <a:buNone/>
-            </a:pPr>
-            <a:r>
-              <a:rPr lang="en-US" sz="1300" i="1" dirty="0">
-                <a:solidFill>
-                  <a:srgbClr val="64748B"/>
-                </a:solidFill>
-                <a:latin typeface="Calibri" pitchFamily="34" charset="0"/>
-                <a:ea typeface="Calibri" pitchFamily="34" charset="-122"/>
-                <a:cs typeface="Calibri" pitchFamily="34" charset="-120"/>
-              </a:rPr>
-              <a:t>Por eso el notebook 00 entrena ANTES de medir.</a:t>
-            </a:r>
-            <a:endParaRPr lang="en-US" sz="1300" dirty="0"/>
-          </a:p>
-        </p:txBody>
-      </p:sp>
-      <p:sp>
-        <p:nvSpPr>
-          <p:cNvPr id="15" name="Text 13"/>
-          <p:cNvSpPr/>
-          <p:nvPr/>
-        </p:nvSpPr>
-        <p:spPr>
-          <a:xfrm>
-            <a:off x="640080" y="5212080"/>
-            <a:ext cx="10972800" cy="457200"/>
-          </a:xfrm>
-          <a:prstGeom prst="rect">
-            <a:avLst/>
-          </a:prstGeom>
-          <a:noFill/>
-          <a:ln/>
-        </p:spPr>
-        <p:txBody>
-          <a:bodyPr wrap="square" lIns="0" tIns="0" rIns="0" bIns="0" rtlCol="0" anchor="ctr"/>
-          <a:lstStyle/>
-          <a:p>
-            <a:pPr indent="0" marL="0">
-              <a:buNone/>
-            </a:pPr>
-            <a:r>
-              <a:rPr lang="en-US" sz="1300" b="1" dirty="0">
-                <a:solidFill>
-                  <a:srgbClr val="1E293B"/>
-                </a:solidFill>
-                <a:latin typeface="Calibri" pitchFamily="34" charset="0"/>
-                <a:ea typeface="Calibri" pitchFamily="34" charset="-122"/>
-                <a:cs typeface="Calibri" pitchFamily="34" charset="-120"/>
-              </a:rPr>
-              <a:t>Tip objetos pequeños: </a:t>
-            </a:r>
-            <a:pPr indent="0" marL="0">
-              <a:buNone/>
-            </a:pPr>
-            <a:r>
-              <a:rPr lang="en-US" sz="1300" dirty="0">
-                <a:solidFill>
-                  <a:srgbClr val="64748B"/>
-                </a:solidFill>
-                <a:latin typeface="Calibri" pitchFamily="34" charset="0"/>
-                <a:ea typeface="Calibri" pitchFamily="34" charset="-122"/>
-                <a:cs typeface="Calibri" pitchFamily="34" charset="-120"/>
-              </a:rPr>
-              <a:t>entrena con imgsz mayor (960/1024) para afinar aún más lo diminuto.</a:t>
-            </a:r>
-            <a:endParaRPr lang="en-US" sz="1300" dirty="0"/>
-          </a:p>
-        </p:txBody>
-      </p:sp>
-      <p:sp>
-        <p:nvSpPr>
-          <p:cNvPr id="16" name="Text 14"/>
+            <a:pPr marL="342900" indent="-342900">
+              <a:spcAft>
+                <a:spcPts val="900"/>
+              </a:spcAft>
+              <a:buSzPct val="100000"/>
+              <a:buChar char="•"/>
+            </a:pPr>
+            <a:r>
+              <a:rPr lang="en-US" sz="1250" dirty="0">
+                <a:solidFill>
+                  <a:srgbClr val="CADCFC"/>
+                </a:solidFill>
+                <a:latin typeface="Calibri" pitchFamily="34" charset="0"/>
+                <a:ea typeface="Calibri" pitchFamily="34" charset="-122"/>
+                <a:cs typeface="Calibri" pitchFamily="34" charset="-120"/>
+              </a:rPr>
+              <a:t>Mismo pipeline, modelo -seg.</a:t>
+            </a:r>
+            <a:endParaRPr lang="en-US" sz="1250" dirty="0"/>
+          </a:p>
+          <a:p>
+            <a:pPr marL="342900" indent="-342900">
+              <a:spcAft>
+                <a:spcPts val="900"/>
+              </a:spcAft>
+              <a:buSzPct val="100000"/>
+              <a:buChar char="•"/>
+            </a:pPr>
+            <a:r>
+              <a:rPr lang="en-US" sz="1250" dirty="0">
+                <a:solidFill>
+                  <a:srgbClr val="CADCFC"/>
+                </a:solidFill>
+                <a:latin typeface="Calibri" pitchFamily="34" charset="0"/>
+                <a:ea typeface="Calibri" pitchFamily="34" charset="-122"/>
+                <a:cs typeface="Calibri" pitchFamily="34" charset="-120"/>
+              </a:rPr>
+              <a:t>Máscaras a resolución nativa por slice.</a:t>
+            </a:r>
+            <a:endParaRPr lang="en-US" sz="1250" dirty="0"/>
+          </a:p>
+          <a:p>
+            <a:pPr marL="342900" indent="-342900">
+              <a:spcAft>
+                <a:spcPts val="900"/>
+              </a:spcAft>
+              <a:buSzPct val="100000"/>
+              <a:buChar char="•"/>
+            </a:pPr>
+            <a:r>
+              <a:rPr lang="en-US" sz="1250" dirty="0">
+                <a:solidFill>
+                  <a:srgbClr val="CADCFC"/>
+                </a:solidFill>
+                <a:latin typeface="Calibri" pitchFamily="34" charset="0"/>
+                <a:ea typeface="Calibri" pitchFamily="34" charset="-122"/>
+                <a:cs typeface="Calibri" pitchFamily="34" charset="-120"/>
+              </a:rPr>
+              <a:t>Instancias pequeñas que antes no se segmentaban.</a:t>
+            </a:r>
+            <a:endParaRPr lang="en-US" sz="1250" dirty="0"/>
+          </a:p>
+          <a:p>
+            <a:pPr marL="342900" indent="-342900">
+              <a:spcAft>
+                <a:spcPts val="900"/>
+              </a:spcAft>
+              <a:buSzPct val="100000"/>
+              <a:buChar char="•"/>
+            </a:pPr>
+            <a:r>
+              <a:rPr lang="en-US" sz="1250" i="1" dirty="0">
+                <a:solidFill>
+                  <a:srgbClr val="9FB3C8"/>
+                </a:solidFill>
+                <a:latin typeface="Calibri" pitchFamily="34" charset="0"/>
+                <a:ea typeface="Calibri" pitchFamily="34" charset="-122"/>
+                <a:cs typeface="Calibri" pitchFamily="34" charset="-120"/>
+              </a:rPr>
+              <a:t>Cualitativo: VisDrone no trae máscaras GT.</a:t>
+            </a:r>
+            <a:endParaRPr lang="en-US" sz="1250" dirty="0"/>
+          </a:p>
+        </p:txBody>
+      </p:sp>
+      <p:sp>
+        <p:nvSpPr>
+          <p:cNvPr id="11" name="Text 9"/>
           <p:cNvSpPr/>
           <p:nvPr/>
         </p:nvSpPr>
@@ -12590,7 +14044,7 @@
       </p:sp>
       <p:sp>
         <p:nvSpPr>
-          <p:cNvPr id="17" name="Text 15"/>
+          <p:cNvPr id="12" name="Text 10"/>
           <p:cNvSpPr/>
           <p:nvPr/>
         </p:nvSpPr>
@@ -13414,7 +14868,7 @@
     <p:bg>
       <p:bgPr>
         <a:solidFill>
-          <a:srgbClr val="0F2A43"/>
+          <a:srgbClr val="FFFFFF"/>
         </a:solidFill>
       </p:bgPr>
     </p:bg>
@@ -13434,24 +14888,63 @@
       </p:grpSpPr>
       <p:sp>
         <p:nvSpPr>
-          <p:cNvPr id="2" name="Shape 0"/>
-          <p:cNvSpPr/>
-          <p:nvPr/>
-        </p:nvSpPr>
-        <p:spPr>
-          <a:xfrm>
-            <a:off x="822960" y="2331720"/>
-            <a:ext cx="1371600" cy="1371600"/>
+          <p:cNvPr id="2" name="Text 0"/>
+          <p:cNvSpPr/>
+          <p:nvPr/>
+        </p:nvSpPr>
+        <p:spPr>
+          <a:xfrm>
+            <a:off x="640080" y="502920"/>
+            <a:ext cx="10058400" cy="320040"/>
+          </a:xfrm>
+          <a:prstGeom prst="rect">
+            <a:avLst/>
+          </a:prstGeom>
+          <a:noFill/>
+          <a:ln/>
+        </p:spPr>
+        <p:txBody>
+          <a:bodyPr wrap="square" lIns="0" tIns="0" rIns="0" bIns="0" rtlCol="0" anchor="ctr"/>
+          <a:lstStyle/>
+          <a:p>
+            <a:pPr indent="0" marL="0">
+              <a:buNone/>
+            </a:pPr>
+            <a:r>
+              <a:rPr lang="en-US" sz="1300" b="1" spc="300" kern="0" dirty="0">
+                <a:solidFill>
+                  <a:srgbClr val="E8A93B"/>
+                </a:solidFill>
+                <a:latin typeface="Calibri" pitchFamily="34" charset="0"/>
+                <a:ea typeface="Calibri" pitchFamily="34" charset="-122"/>
+                <a:cs typeface="Calibri" pitchFamily="34" charset="-120"/>
+              </a:rPr>
+              <a:t>NIVEL 6 · ENTRENAR EN EL DOMINIO</a:t>
+            </a:r>
+            <a:endParaRPr lang="en-US" sz="1300" dirty="0"/>
+          </a:p>
+        </p:txBody>
+      </p:sp>
+      <p:sp>
+        <p:nvSpPr>
+          <p:cNvPr id="3" name="Shape 1"/>
+          <p:cNvSpPr/>
+          <p:nvPr/>
+        </p:nvSpPr>
+        <p:spPr>
+          <a:xfrm>
+            <a:off x="10698480" y="502920"/>
+            <a:ext cx="914400" cy="914400"/>
           </a:xfrm>
           <a:prstGeom prst="ellipse">
             <a:avLst/>
           </a:prstGeom>
           <a:solidFill>
-            <a:srgbClr val="2E8B57"/>
+            <a:srgbClr val="0F2A43"/>
           </a:solidFill>
           <a:ln w="12700">
             <a:solidFill>
-              <a:srgbClr val="2E8B57"/>
+              <a:srgbClr val="0F2A43"/>
             </a:solidFill>
             <a:prstDash val="solid"/>
           </a:ln>
@@ -13459,14 +14952,14 @@
       </p:sp>
       <p:sp>
         <p:nvSpPr>
-          <p:cNvPr id="3" name="Text 1"/>
-          <p:cNvSpPr/>
-          <p:nvPr/>
-        </p:nvSpPr>
-        <p:spPr>
-          <a:xfrm>
-            <a:off x="822960" y="2331720"/>
-            <a:ext cx="1371600" cy="1371600"/>
+          <p:cNvPr id="4" name="Text 2"/>
+          <p:cNvSpPr/>
+          <p:nvPr/>
+        </p:nvSpPr>
+        <p:spPr>
+          <a:xfrm>
+            <a:off x="10698480" y="502920"/>
+            <a:ext cx="914400" cy="914400"/>
           </a:xfrm>
           <a:prstGeom prst="rect">
             <a:avLst/>
@@ -13482,30 +14975,30 @@
               <a:buNone/>
             </a:pPr>
             <a:r>
-              <a:rPr lang="en-US" sz="4400" b="1" dirty="0">
-                <a:solidFill>
-                  <a:srgbClr val="FFFFFF"/>
+              <a:rPr lang="en-US" sz="2200" b="1" dirty="0">
+                <a:solidFill>
+                  <a:srgbClr val="E8A93B"/>
                 </a:solidFill>
                 <a:latin typeface="Georgia" pitchFamily="34" charset="0"/>
                 <a:ea typeface="Georgia" pitchFamily="34" charset="-122"/>
                 <a:cs typeface="Georgia" pitchFamily="34" charset="-120"/>
               </a:rPr>
-              <a:t>05</a:t>
-            </a:r>
-            <a:endParaRPr lang="en-US" sz="4400" dirty="0"/>
-          </a:p>
-        </p:txBody>
-      </p:sp>
-      <p:sp>
-        <p:nvSpPr>
-          <p:cNvPr id="4" name="Text 2"/>
-          <p:cNvSpPr/>
-          <p:nvPr/>
-        </p:nvSpPr>
-        <p:spPr>
-          <a:xfrm>
-            <a:off x="2560320" y="2514600"/>
-            <a:ext cx="8686800" cy="914400"/>
+              <a:t>N6</a:t>
+            </a:r>
+            <a:endParaRPr lang="en-US" sz="2200" dirty="0"/>
+          </a:p>
+        </p:txBody>
+      </p:sp>
+      <p:sp>
+        <p:nvSpPr>
+          <p:cNvPr id="5" name="Text 3"/>
+          <p:cNvSpPr/>
+          <p:nvPr/>
+        </p:nvSpPr>
+        <p:spPr>
+          <a:xfrm>
+            <a:off x="640080" y="841248"/>
+            <a:ext cx="10972800" cy="868680"/>
           </a:xfrm>
           <a:prstGeom prst="rect">
             <a:avLst/>
@@ -13521,30 +15014,30 @@
               <a:buNone/>
             </a:pPr>
             <a:r>
-              <a:rPr lang="en-US" sz="4000" b="1" dirty="0">
-                <a:solidFill>
-                  <a:srgbClr val="FFFFFF"/>
+              <a:rPr lang="en-US" sz="3000" b="1" dirty="0">
+                <a:solidFill>
+                  <a:srgbClr val="1E293B"/>
                 </a:solidFill>
                 <a:latin typeface="Georgia" pitchFamily="34" charset="0"/>
                 <a:ea typeface="Georgia" pitchFamily="34" charset="-122"/>
                 <a:cs typeface="Georgia" pitchFamily="34" charset="-120"/>
               </a:rPr>
-              <a:t>Resultados</a:t>
-            </a:r>
-            <a:endParaRPr lang="en-US" sz="4000" dirty="0"/>
-          </a:p>
-        </p:txBody>
-      </p:sp>
-      <p:sp>
-        <p:nvSpPr>
-          <p:cNvPr id="5" name="Text 3"/>
-          <p:cNvSpPr/>
-          <p:nvPr/>
-        </p:nvSpPr>
-        <p:spPr>
-          <a:xfrm>
-            <a:off x="2606040" y="3429000"/>
-            <a:ext cx="8503920" cy="548640"/>
+              <a:t>El paso que desbloquea el mAP real</a:t>
+            </a:r>
+            <a:endParaRPr lang="en-US" sz="3000" dirty="0"/>
+          </a:p>
+        </p:txBody>
+      </p:sp>
+      <p:sp>
+        <p:nvSpPr>
+          <p:cNvPr id="6" name="Text 4"/>
+          <p:cNvSpPr/>
+          <p:nvPr/>
+        </p:nvSpPr>
+        <p:spPr>
+          <a:xfrm>
+            <a:off x="640080" y="1920240"/>
+            <a:ext cx="5760720" cy="2743200"/>
           </a:xfrm>
           <a:prstGeom prst="rect">
             <a:avLst/>
@@ -13560,223 +15053,420 @@
               <a:buNone/>
             </a:pPr>
             <a:r>
-              <a:rPr lang="en-US" sz="1600" dirty="0">
-                <a:solidFill>
-                  <a:srgbClr val="9FB3C8"/>
-                </a:solidFill>
-                <a:latin typeface="Calibri" pitchFamily="34" charset="0"/>
-                <a:ea typeface="Calibri" pitchFamily="34" charset="-122"/>
-                <a:cs typeface="Calibri" pitchFamily="34" charset="-120"/>
-              </a:rPr>
-              <a:t>Lo que ganamos, medido contra el ground truth</a:t>
+              <a:rPr lang="en-US" sz="1600" b="1" dirty="0">
+                <a:solidFill>
+                  <a:srgbClr val="E4572E"/>
+                </a:solidFill>
+                <a:latin typeface="Calibri" pitchFamily="34" charset="0"/>
+                <a:ea typeface="Calibri" pitchFamily="34" charset="-122"/>
+                <a:cs typeface="Calibri" pitchFamily="34" charset="-120"/>
+              </a:rPr>
+              <a:t>Un modelo COCO evaluado en VisDrone da mAP ≈ 0</a:t>
             </a:r>
             <a:endParaRPr lang="en-US" sz="1600" dirty="0"/>
           </a:p>
-        </p:txBody>
-      </p:sp>
-      <p:sp>
-        <p:nvSpPr>
-          <p:cNvPr id="6" name="Shape 4"/>
-          <p:cNvSpPr/>
-          <p:nvPr/>
-        </p:nvSpPr>
-        <p:spPr>
-          <a:xfrm>
-            <a:off x="2606040" y="4206240"/>
-            <a:ext cx="310896" cy="310896"/>
-          </a:xfrm>
-          <a:prstGeom prst="rect">
-            <a:avLst/>
+          <a:p>
+            <a:pPr indent="0" marL="0">
+              <a:buNone/>
+            </a:pPr>
+            <a:r>
+              <a:rPr lang="en-US" sz="1300" dirty="0">
+                <a:solidFill>
+                  <a:srgbClr val="64748B"/>
+                </a:solidFill>
+                <a:latin typeface="Calibri" pitchFamily="34" charset="0"/>
+                <a:ea typeface="Calibri" pitchFamily="34" charset="-122"/>
+                <a:cs typeface="Calibri" pitchFamily="34" charset="-120"/>
+              </a:rPr>
+              <a:t>Las 80 clases de COCO no coinciden con las 10 de VisDrone (zero-shot).</a:t>
+            </a:r>
+            <a:endParaRPr lang="en-US" sz="1600" dirty="0"/>
+          </a:p>
+          <a:p>
+            <a:pPr indent="0" marL="0">
+              <a:buNone/>
+            </a:pPr>
+            <a:endParaRPr lang="en-US" sz="1600" dirty="0"/>
+          </a:p>
+          <a:p>
+            <a:pPr indent="0" marL="0">
+              <a:buNone/>
+            </a:pPr>
+            <a:r>
+              <a:rPr lang="en-US" sz="1600" b="1" dirty="0">
+                <a:solidFill>
+                  <a:srgbClr val="2E8B57"/>
+                </a:solidFill>
+                <a:latin typeface="Calibri" pitchFamily="34" charset="0"/>
+                <a:ea typeface="Calibri" pitchFamily="34" charset="-122"/>
+                <a:cs typeface="Calibri" pitchFamily="34" charset="-120"/>
+              </a:rPr>
+              <a:t>Fine-tune en VisDrone alinea las clases</a:t>
+            </a:r>
+            <a:endParaRPr lang="en-US" sz="1600" dirty="0"/>
+          </a:p>
+          <a:p>
+            <a:pPr indent="0" marL="0">
+              <a:buNone/>
+            </a:pPr>
+            <a:r>
+              <a:rPr lang="en-US" sz="1300" dirty="0">
+                <a:solidFill>
+                  <a:srgbClr val="64748B"/>
+                </a:solidFill>
+                <a:latin typeface="Calibri" pitchFamily="34" charset="0"/>
+                <a:ea typeface="Calibri" pitchFamily="34" charset="-122"/>
+                <a:cs typeface="Calibri" pitchFamily="34" charset="-120"/>
+              </a:rPr>
+              <a:t>Una línea: yolo train data=VisDrone.yaml. Luego SAHI exprime el AP_small.</a:t>
+            </a:r>
+            <a:endParaRPr lang="en-US" sz="1600" dirty="0"/>
+          </a:p>
+        </p:txBody>
+      </p:sp>
+      <p:sp>
+        <p:nvSpPr>
+          <p:cNvPr id="7" name="Shape 5"/>
+          <p:cNvSpPr/>
+          <p:nvPr/>
+        </p:nvSpPr>
+        <p:spPr>
+          <a:xfrm>
+            <a:off x="6766560" y="2103120"/>
+            <a:ext cx="2286000" cy="1417320"/>
+          </a:xfrm>
+          <a:prstGeom prst="roundRect">
+            <a:avLst>
+              <a:gd name="adj" fmla="val 5161"/>
+            </a:avLst>
           </a:prstGeom>
           <a:solidFill>
-            <a:srgbClr val="1C4A73"/>
+            <a:srgbClr val="F4F7FA"/>
           </a:solidFill>
-          <a:ln w="6350">
+          <a:ln w="12700">
             <a:solidFill>
-              <a:srgbClr val="1C4A73"/>
+              <a:srgbClr val="D8E0E8"/>
             </a:solidFill>
             <a:prstDash val="solid"/>
           </a:ln>
-        </p:spPr>
-      </p:sp>
-      <p:sp>
-        <p:nvSpPr>
-          <p:cNvPr id="7" name="Shape 5"/>
-          <p:cNvSpPr/>
-          <p:nvPr/>
-        </p:nvSpPr>
-        <p:spPr>
-          <a:xfrm>
-            <a:off x="2990088" y="4206240"/>
-            <a:ext cx="310896" cy="310896"/>
-          </a:xfrm>
-          <a:prstGeom prst="rect">
-            <a:avLst/>
+          <a:effectLst>
+            <a:outerShdw sx="100000" sy="100000" kx="0" ky="0" algn="bl" rotWithShape="0" blurRad="114300" dist="38100" dir="5400000">
+              <a:srgbClr val="000000">
+                <a:alpha val="18000"/>
+              </a:srgbClr>
+            </a:outerShdw>
+          </a:effectLst>
+        </p:spPr>
+      </p:sp>
+      <p:sp>
+        <p:nvSpPr>
+          <p:cNvPr id="8" name="Text 6"/>
+          <p:cNvSpPr/>
+          <p:nvPr/>
+        </p:nvSpPr>
+        <p:spPr>
+          <a:xfrm>
+            <a:off x="6766560" y="2212848"/>
+            <a:ext cx="2286000" cy="777240"/>
+          </a:xfrm>
+          <a:prstGeom prst="rect">
+            <a:avLst/>
+          </a:prstGeom>
+          <a:noFill/>
+          <a:ln/>
+        </p:spPr>
+        <p:txBody>
+          <a:bodyPr wrap="square" lIns="0" tIns="0" rIns="0" bIns="0" rtlCol="0" anchor="ctr"/>
+          <a:lstStyle/>
+          <a:p>
+            <a:pPr algn="ctr" indent="0" marL="0">
+              <a:buNone/>
+            </a:pPr>
+            <a:r>
+              <a:rPr lang="en-US" sz="4000" b="1" dirty="0">
+                <a:solidFill>
+                  <a:srgbClr val="E4572E"/>
+                </a:solidFill>
+                <a:latin typeface="Georgia" pitchFamily="34" charset="0"/>
+                <a:ea typeface="Georgia" pitchFamily="34" charset="-122"/>
+                <a:cs typeface="Georgia" pitchFamily="34" charset="-120"/>
+              </a:rPr>
+              <a:t>≈ 0.00</a:t>
+            </a:r>
+            <a:endParaRPr lang="en-US" sz="4000" dirty="0"/>
+          </a:p>
+        </p:txBody>
+      </p:sp>
+      <p:sp>
+        <p:nvSpPr>
+          <p:cNvPr id="9" name="Text 7"/>
+          <p:cNvSpPr/>
+          <p:nvPr/>
+        </p:nvSpPr>
+        <p:spPr>
+          <a:xfrm>
+            <a:off x="6903720" y="2999232"/>
+            <a:ext cx="2011680" cy="457200"/>
+          </a:xfrm>
+          <a:prstGeom prst="rect">
+            <a:avLst/>
+          </a:prstGeom>
+          <a:noFill/>
+          <a:ln/>
+        </p:spPr>
+        <p:txBody>
+          <a:bodyPr wrap="square" lIns="0" tIns="0" rIns="0" bIns="0" rtlCol="0" anchor="t"/>
+          <a:lstStyle/>
+          <a:p>
+            <a:pPr algn="ctr" indent="0" marL="0">
+              <a:buNone/>
+            </a:pPr>
+            <a:r>
+              <a:rPr lang="en-US" sz="1200" dirty="0">
+                <a:solidFill>
+                  <a:srgbClr val="64748B"/>
+                </a:solidFill>
+                <a:latin typeface="Calibri" pitchFamily="34" charset="0"/>
+                <a:ea typeface="Calibri" pitchFamily="34" charset="-122"/>
+                <a:cs typeface="Calibri" pitchFamily="34" charset="-120"/>
+              </a:rPr>
+              <a:t>mAP zero-shot (COCO)</a:t>
+            </a:r>
+            <a:endParaRPr lang="en-US" sz="1200" dirty="0"/>
+          </a:p>
+        </p:txBody>
+      </p:sp>
+      <p:sp>
+        <p:nvSpPr>
+          <p:cNvPr id="10" name="Shape 8"/>
+          <p:cNvSpPr/>
+          <p:nvPr/>
+        </p:nvSpPr>
+        <p:spPr>
+          <a:xfrm>
+            <a:off x="9189720" y="2788920"/>
+            <a:ext cx="502920" cy="0"/>
+          </a:xfrm>
+          <a:prstGeom prst="line">
+            <a:avLst/>
+          </a:prstGeom>
+          <a:noFill/>
+          <a:ln w="25400">
+            <a:solidFill>
+              <a:srgbClr val="1E293B"/>
+            </a:solidFill>
+            <a:prstDash val="solid"/>
+            <a:tailEnd type="triangle"/>
+          </a:ln>
+        </p:spPr>
+      </p:sp>
+      <p:sp>
+        <p:nvSpPr>
+          <p:cNvPr id="11" name="Shape 9"/>
+          <p:cNvSpPr/>
+          <p:nvPr/>
+        </p:nvSpPr>
+        <p:spPr>
+          <a:xfrm>
+            <a:off x="9326880" y="2103120"/>
+            <a:ext cx="2286000" cy="1417320"/>
+          </a:xfrm>
+          <a:prstGeom prst="roundRect">
+            <a:avLst>
+              <a:gd name="adj" fmla="val 5161"/>
+            </a:avLst>
           </a:prstGeom>
           <a:solidFill>
-            <a:srgbClr val="2E8B57"/>
+            <a:srgbClr val="F4F7FA"/>
           </a:solidFill>
-          <a:ln w="6350">
+          <a:ln w="12700">
             <a:solidFill>
-              <a:srgbClr val="1C4A73"/>
+              <a:srgbClr val="D8E0E8"/>
             </a:solidFill>
             <a:prstDash val="solid"/>
           </a:ln>
-        </p:spPr>
-      </p:sp>
-      <p:sp>
-        <p:nvSpPr>
-          <p:cNvPr id="8" name="Shape 6"/>
-          <p:cNvSpPr/>
-          <p:nvPr/>
-        </p:nvSpPr>
-        <p:spPr>
-          <a:xfrm>
-            <a:off x="3374136" y="4206240"/>
-            <a:ext cx="310896" cy="310896"/>
-          </a:xfrm>
-          <a:prstGeom prst="rect">
-            <a:avLst/>
-          </a:prstGeom>
-          <a:solidFill>
-            <a:srgbClr val="1C4A73"/>
-          </a:solidFill>
-          <a:ln w="6350">
-            <a:solidFill>
-              <a:srgbClr val="1C4A73"/>
-            </a:solidFill>
-            <a:prstDash val="solid"/>
-          </a:ln>
-        </p:spPr>
-      </p:sp>
-      <p:sp>
-        <p:nvSpPr>
-          <p:cNvPr id="9" name="Shape 7"/>
-          <p:cNvSpPr/>
-          <p:nvPr/>
-        </p:nvSpPr>
-        <p:spPr>
-          <a:xfrm>
-            <a:off x="3758184" y="4206240"/>
-            <a:ext cx="310896" cy="310896"/>
-          </a:xfrm>
-          <a:prstGeom prst="rect">
-            <a:avLst/>
-          </a:prstGeom>
-          <a:solidFill>
-            <a:srgbClr val="2E8B57"/>
-          </a:solidFill>
-          <a:ln w="6350">
-            <a:solidFill>
-              <a:srgbClr val="1C4A73"/>
-            </a:solidFill>
-            <a:prstDash val="solid"/>
-          </a:ln>
-        </p:spPr>
-      </p:sp>
-      <p:sp>
-        <p:nvSpPr>
-          <p:cNvPr id="10" name="Shape 8"/>
-          <p:cNvSpPr/>
-          <p:nvPr/>
-        </p:nvSpPr>
-        <p:spPr>
-          <a:xfrm>
-            <a:off x="4142232" y="4206240"/>
-            <a:ext cx="310896" cy="310896"/>
-          </a:xfrm>
-          <a:prstGeom prst="rect">
-            <a:avLst/>
-          </a:prstGeom>
-          <a:solidFill>
-            <a:srgbClr val="1C4A73"/>
-          </a:solidFill>
-          <a:ln w="6350">
-            <a:solidFill>
-              <a:srgbClr val="1C4A73"/>
-            </a:solidFill>
-            <a:prstDash val="solid"/>
-          </a:ln>
-        </p:spPr>
-      </p:sp>
-      <p:sp>
-        <p:nvSpPr>
-          <p:cNvPr id="11" name="Shape 9"/>
-          <p:cNvSpPr/>
-          <p:nvPr/>
-        </p:nvSpPr>
-        <p:spPr>
-          <a:xfrm>
-            <a:off x="4526280" y="4206240"/>
-            <a:ext cx="310896" cy="310896"/>
-          </a:xfrm>
-          <a:prstGeom prst="rect">
-            <a:avLst/>
-          </a:prstGeom>
-          <a:solidFill>
-            <a:srgbClr val="2E8B57"/>
-          </a:solidFill>
-          <a:ln w="6350">
-            <a:solidFill>
-              <a:srgbClr val="1C4A73"/>
-            </a:solidFill>
-            <a:prstDash val="solid"/>
-          </a:ln>
-        </p:spPr>
-      </p:sp>
-      <p:sp>
-        <p:nvSpPr>
-          <p:cNvPr id="12" name="Shape 10"/>
-          <p:cNvSpPr/>
-          <p:nvPr/>
-        </p:nvSpPr>
-        <p:spPr>
-          <a:xfrm>
-            <a:off x="4910328" y="4206240"/>
-            <a:ext cx="310896" cy="310896"/>
-          </a:xfrm>
-          <a:prstGeom prst="rect">
-            <a:avLst/>
-          </a:prstGeom>
-          <a:solidFill>
-            <a:srgbClr val="1C4A73"/>
-          </a:solidFill>
-          <a:ln w="6350">
-            <a:solidFill>
-              <a:srgbClr val="1C4A73"/>
-            </a:solidFill>
-            <a:prstDash val="solid"/>
-          </a:ln>
-        </p:spPr>
-      </p:sp>
-      <p:sp>
-        <p:nvSpPr>
-          <p:cNvPr id="13" name="Shape 11"/>
-          <p:cNvSpPr/>
-          <p:nvPr/>
-        </p:nvSpPr>
-        <p:spPr>
-          <a:xfrm>
-            <a:off x="5294376" y="4206240"/>
-            <a:ext cx="310896" cy="310896"/>
-          </a:xfrm>
-          <a:prstGeom prst="rect">
-            <a:avLst/>
-          </a:prstGeom>
-          <a:solidFill>
-            <a:srgbClr val="2E8B57"/>
-          </a:solidFill>
-          <a:ln w="6350">
-            <a:solidFill>
-              <a:srgbClr val="1C4A73"/>
-            </a:solidFill>
-            <a:prstDash val="solid"/>
-          </a:ln>
-        </p:spPr>
+          <a:effectLst>
+            <a:outerShdw sx="100000" sy="100000" kx="0" ky="0" algn="bl" rotWithShape="0" blurRad="114300" dist="38100" dir="5400000">
+              <a:srgbClr val="000000">
+                <a:alpha val="18000"/>
+              </a:srgbClr>
+            </a:outerShdw>
+          </a:effectLst>
+        </p:spPr>
+      </p:sp>
+      <p:sp>
+        <p:nvSpPr>
+          <p:cNvPr id="12" name="Text 10"/>
+          <p:cNvSpPr/>
+          <p:nvPr/>
+        </p:nvSpPr>
+        <p:spPr>
+          <a:xfrm>
+            <a:off x="9326880" y="2212848"/>
+            <a:ext cx="2286000" cy="777240"/>
+          </a:xfrm>
+          <a:prstGeom prst="rect">
+            <a:avLst/>
+          </a:prstGeom>
+          <a:noFill/>
+          <a:ln/>
+        </p:spPr>
+        <p:txBody>
+          <a:bodyPr wrap="square" lIns="0" tIns="0" rIns="0" bIns="0" rtlCol="0" anchor="ctr"/>
+          <a:lstStyle/>
+          <a:p>
+            <a:pPr algn="ctr" indent="0" marL="0">
+              <a:buNone/>
+            </a:pPr>
+            <a:r>
+              <a:rPr lang="en-US" sz="4000" b="1" dirty="0">
+                <a:solidFill>
+                  <a:srgbClr val="2E8B57"/>
+                </a:solidFill>
+                <a:latin typeface="Georgia" pitchFamily="34" charset="0"/>
+                <a:ea typeface="Georgia" pitchFamily="34" charset="-122"/>
+                <a:cs typeface="Georgia" pitchFamily="34" charset="-120"/>
+              </a:rPr>
+              <a:t>0.22+</a:t>
+            </a:r>
+            <a:endParaRPr lang="en-US" sz="4000" dirty="0"/>
+          </a:p>
+        </p:txBody>
+      </p:sp>
+      <p:sp>
+        <p:nvSpPr>
+          <p:cNvPr id="13" name="Text 11"/>
+          <p:cNvSpPr/>
+          <p:nvPr/>
+        </p:nvSpPr>
+        <p:spPr>
+          <a:xfrm>
+            <a:off x="9464040" y="2999232"/>
+            <a:ext cx="2011680" cy="457200"/>
+          </a:xfrm>
+          <a:prstGeom prst="rect">
+            <a:avLst/>
+          </a:prstGeom>
+          <a:noFill/>
+          <a:ln/>
+        </p:spPr>
+        <p:txBody>
+          <a:bodyPr wrap="square" lIns="0" tIns="0" rIns="0" bIns="0" rtlCol="0" anchor="t"/>
+          <a:lstStyle/>
+          <a:p>
+            <a:pPr algn="ctr" indent="0" marL="0">
+              <a:buNone/>
+            </a:pPr>
+            <a:r>
+              <a:rPr lang="en-US" sz="1200" dirty="0">
+                <a:solidFill>
+                  <a:srgbClr val="64748B"/>
+                </a:solidFill>
+                <a:latin typeface="Calibri" pitchFamily="34" charset="0"/>
+                <a:ea typeface="Calibri" pitchFamily="34" charset="-122"/>
+                <a:cs typeface="Calibri" pitchFamily="34" charset="-120"/>
+              </a:rPr>
+              <a:t>mAP fine-tuned</a:t>
+            </a:r>
+            <a:endParaRPr lang="en-US" sz="1200" dirty="0"/>
+          </a:p>
+        </p:txBody>
       </p:sp>
       <p:sp>
         <p:nvSpPr>
           <p:cNvPr id="14" name="Text 12"/>
+          <p:cNvSpPr/>
+          <p:nvPr/>
+        </p:nvSpPr>
+        <p:spPr>
+          <a:xfrm>
+            <a:off x="6766560" y="3840480"/>
+            <a:ext cx="4846320" cy="457200"/>
+          </a:xfrm>
+          <a:prstGeom prst="rect">
+            <a:avLst/>
+          </a:prstGeom>
+          <a:noFill/>
+          <a:ln/>
+        </p:spPr>
+        <p:txBody>
+          <a:bodyPr wrap="square" lIns="0" tIns="0" rIns="0" bIns="0" rtlCol="0" anchor="ctr"/>
+          <a:lstStyle/>
+          <a:p>
+            <a:pPr algn="ctr" indent="0" marL="0">
+              <a:buNone/>
+            </a:pPr>
+            <a:r>
+              <a:rPr lang="en-US" sz="1300" i="1" dirty="0">
+                <a:solidFill>
+                  <a:srgbClr val="64748B"/>
+                </a:solidFill>
+                <a:latin typeface="Calibri" pitchFamily="34" charset="0"/>
+                <a:ea typeface="Calibri" pitchFamily="34" charset="-122"/>
+                <a:cs typeface="Calibri" pitchFamily="34" charset="-120"/>
+              </a:rPr>
+              <a:t>Por eso el notebook 00 entrena ANTES de medir.</a:t>
+            </a:r>
+            <a:endParaRPr lang="en-US" sz="1300" dirty="0"/>
+          </a:p>
+        </p:txBody>
+      </p:sp>
+      <p:sp>
+        <p:nvSpPr>
+          <p:cNvPr id="15" name="Text 13"/>
+          <p:cNvSpPr/>
+          <p:nvPr/>
+        </p:nvSpPr>
+        <p:spPr>
+          <a:xfrm>
+            <a:off x="640080" y="5212080"/>
+            <a:ext cx="10972800" cy="457200"/>
+          </a:xfrm>
+          <a:prstGeom prst="rect">
+            <a:avLst/>
+          </a:prstGeom>
+          <a:noFill/>
+          <a:ln/>
+        </p:spPr>
+        <p:txBody>
+          <a:bodyPr wrap="square" lIns="0" tIns="0" rIns="0" bIns="0" rtlCol="0" anchor="ctr"/>
+          <a:lstStyle/>
+          <a:p>
+            <a:pPr indent="0" marL="0">
+              <a:buNone/>
+            </a:pPr>
+            <a:r>
+              <a:rPr lang="en-US" sz="1300" b="1" dirty="0">
+                <a:solidFill>
+                  <a:srgbClr val="1E293B"/>
+                </a:solidFill>
+                <a:latin typeface="Calibri" pitchFamily="34" charset="0"/>
+                <a:ea typeface="Calibri" pitchFamily="34" charset="-122"/>
+                <a:cs typeface="Calibri" pitchFamily="34" charset="-120"/>
+              </a:rPr>
+              <a:t>Tip objetos pequeños: </a:t>
+            </a:r>
+            <a:pPr indent="0" marL="0">
+              <a:buNone/>
+            </a:pPr>
+            <a:r>
+              <a:rPr lang="en-US" sz="1300" dirty="0">
+                <a:solidFill>
+                  <a:srgbClr val="64748B"/>
+                </a:solidFill>
+                <a:latin typeface="Calibri" pitchFamily="34" charset="0"/>
+                <a:ea typeface="Calibri" pitchFamily="34" charset="-122"/>
+                <a:cs typeface="Calibri" pitchFamily="34" charset="-120"/>
+              </a:rPr>
+              <a:t>entrena con imgsz mayor (960/1024) para afinar aún más lo diminuto.</a:t>
+            </a:r>
+            <a:endParaRPr lang="en-US" sz="1300" dirty="0"/>
+          </a:p>
+        </p:txBody>
+      </p:sp>
+      <p:sp>
+        <p:nvSpPr>
+          <p:cNvPr id="16" name="Text 14"/>
           <p:cNvSpPr/>
           <p:nvPr/>
         </p:nvSpPr>
@@ -13801,7 +15491,7 @@
             <a:r>
               <a:rPr lang="en-US" sz="900" dirty="0">
                 <a:solidFill>
-                  <a:srgbClr val="9FB3C8"/>
+                  <a:srgbClr val="64748B"/>
                 </a:solidFill>
                 <a:latin typeface="Calibri" pitchFamily="34" charset="0"/>
                 <a:ea typeface="Calibri" pitchFamily="34" charset="-122"/>
@@ -13815,7 +15505,7 @@
       </p:sp>
       <p:sp>
         <p:nvSpPr>
-          <p:cNvPr id="15" name="Text 13"/>
+          <p:cNvPr id="17" name="Text 15"/>
           <p:cNvSpPr/>
           <p:nvPr/>
         </p:nvSpPr>
@@ -13840,7 +15530,7 @@
             <a:r>
               <a:rPr lang="en-US" sz="900" dirty="0">
                 <a:solidFill>
-                  <a:srgbClr val="9FB3C8"/>
+                  <a:srgbClr val="64748B"/>
                 </a:solidFill>
                 <a:latin typeface="Calibri" pitchFamily="34" charset="0"/>
                 <a:ea typeface="Calibri" pitchFamily="34" charset="-122"/>
@@ -13911,13 +15601,13 @@
             <a:r>
               <a:rPr lang="en-US" sz="1300" b="1" spc="300" kern="0" dirty="0">
                 <a:solidFill>
-                  <a:srgbClr val="2E8B57"/>
-                </a:solidFill>
-                <a:latin typeface="Calibri" pitchFamily="34" charset="0"/>
-                <a:ea typeface="Calibri" pitchFamily="34" charset="-122"/>
-                <a:cs typeface="Calibri" pitchFamily="34" charset="-120"/>
-              </a:rPr>
-              <a:t>BENCHMARK</a:t>
+                  <a:srgbClr val="E8A93B"/>
+                </a:solidFill>
+                <a:latin typeface="Calibri" pitchFamily="34" charset="0"/>
+                <a:ea typeface="Calibri" pitchFamily="34" charset="-122"/>
+                <a:cs typeface="Calibri" pitchFamily="34" charset="-120"/>
+              </a:rPr>
+              <a:t>NIVEL 6 · ENTRENAR PARA SAHI</a:t>
             </a:r>
             <a:endParaRPr lang="en-US" sz="1300" dirty="0"/>
           </a:p>
@@ -13925,14 +15615,39 @@
       </p:sp>
       <p:sp>
         <p:nvSpPr>
-          <p:cNvPr id="3" name="Text 1"/>
-          <p:cNvSpPr/>
-          <p:nvPr/>
-        </p:nvSpPr>
-        <p:spPr>
-          <a:xfrm>
-            <a:off x="640080" y="841248"/>
-            <a:ext cx="10972800" cy="868680"/>
+          <p:cNvPr id="3" name="Shape 1"/>
+          <p:cNvSpPr/>
+          <p:nvPr/>
+        </p:nvSpPr>
+        <p:spPr>
+          <a:xfrm>
+            <a:off x="10698480" y="502920"/>
+            <a:ext cx="914400" cy="914400"/>
+          </a:xfrm>
+          <a:prstGeom prst="ellipse">
+            <a:avLst/>
+          </a:prstGeom>
+          <a:solidFill>
+            <a:srgbClr val="0F2A43"/>
+          </a:solidFill>
+          <a:ln w="12700">
+            <a:solidFill>
+              <a:srgbClr val="0F2A43"/>
+            </a:solidFill>
+            <a:prstDash val="solid"/>
+          </a:ln>
+        </p:spPr>
+      </p:sp>
+      <p:sp>
+        <p:nvSpPr>
+          <p:cNvPr id="4" name="Text 2"/>
+          <p:cNvSpPr/>
+          <p:nvPr/>
+        </p:nvSpPr>
+        <p:spPr>
+          <a:xfrm>
+            <a:off x="10698480" y="502920"/>
+            <a:ext cx="914400" cy="914400"/>
           </a:xfrm>
           <a:prstGeom prst="rect">
             <a:avLst/>
@@ -13944,62 +15659,259 @@
           <a:bodyPr wrap="square" lIns="0" tIns="0" rIns="0" bIns="0" rtlCol="0" anchor="ctr"/>
           <a:lstStyle/>
           <a:p>
-            <a:pPr indent="0" marL="0">
-              <a:buNone/>
-            </a:pPr>
-            <a:r>
-              <a:rPr lang="en-US" sz="3000" b="1" dirty="0">
-                <a:solidFill>
-                  <a:srgbClr val="1E293B"/>
+            <a:pPr algn="ctr" indent="0" marL="0">
+              <a:buNone/>
+            </a:pPr>
+            <a:r>
+              <a:rPr lang="en-US" sz="2200" b="1" dirty="0">
+                <a:solidFill>
+                  <a:srgbClr val="E8A93B"/>
                 </a:solidFill>
                 <a:latin typeface="Georgia" pitchFamily="34" charset="0"/>
                 <a:ea typeface="Georgia" pitchFamily="34" charset="-122"/>
                 <a:cs typeface="Georgia" pitchFamily="34" charset="-120"/>
               </a:rPr>
-              <a:t>YOLO vs YOLO + SAHI (mAP COCO)</a:t>
+              <a:t>N6</a:t>
+            </a:r>
+            <a:endParaRPr lang="en-US" sz="2200" dirty="0"/>
+          </a:p>
+        </p:txBody>
+      </p:sp>
+      <p:sp>
+        <p:nvSpPr>
+          <p:cNvPr id="5" name="Text 3"/>
+          <p:cNvSpPr/>
+          <p:nvPr/>
+        </p:nvSpPr>
+        <p:spPr>
+          <a:xfrm>
+            <a:off x="640080" y="841248"/>
+            <a:ext cx="10972800" cy="868680"/>
+          </a:xfrm>
+          <a:prstGeom prst="rect">
+            <a:avLst/>
+          </a:prstGeom>
+          <a:noFill/>
+          <a:ln/>
+        </p:spPr>
+        <p:txBody>
+          <a:bodyPr wrap="square" lIns="0" tIns="0" rIns="0" bIns="0" rtlCol="0" anchor="ctr"/>
+          <a:lstStyle/>
+          <a:p>
+            <a:pPr indent="0" marL="0">
+              <a:buNone/>
+            </a:pPr>
+            <a:r>
+              <a:rPr lang="en-US" sz="3000" b="1" dirty="0">
+                <a:solidFill>
+                  <a:srgbClr val="1E293B"/>
+                </a:solidFill>
+                <a:latin typeface="Georgia" pitchFamily="34" charset="0"/>
+                <a:ea typeface="Georgia" pitchFamily="34" charset="-122"/>
+                <a:cs typeface="Georgia" pitchFamily="34" charset="-120"/>
+              </a:rPr>
+              <a:t>Entrenar para SAHI es distinto</a:t>
             </a:r>
             <a:endParaRPr lang="en-US" sz="3000" dirty="0"/>
           </a:p>
         </p:txBody>
       </p:sp>
-      <p:graphicFrame>
-        <p:nvGraphicFramePr>
-          <p:cNvPr id="4" name="Chart 0" descr=""/>
-          <p:cNvGraphicFramePr/>
-          <p:nvPr/>
-        </p:nvGraphicFramePr>
-        <p:xfrm>
-          <a:off x="640080" y="1920240"/>
-          <a:ext cx="7315200" cy="3840480"/>
-        </p:xfrm>
-        <a:graphic xmlns:a="http://schemas.openxmlformats.org/drawingml/2006/main">
-          <a:graphicData uri="http://schemas.openxmlformats.org/drawingml/2006/chart">
-            <c:chart xmlns:c="http://schemas.openxmlformats.org/drawingml/2006/chart" r:id="rId1"/>
-          </a:graphicData>
-        </a:graphic>
-      </p:graphicFrame>
-      <p:sp>
-        <p:nvSpPr>
-          <p:cNvPr id="5" name="Shape 2"/>
-          <p:cNvSpPr/>
-          <p:nvPr/>
-        </p:nvSpPr>
-        <p:spPr>
-          <a:xfrm>
-            <a:off x="8321040" y="2103120"/>
-            <a:ext cx="3246120" cy="3383280"/>
+      <p:sp>
+        <p:nvSpPr>
+          <p:cNvPr id="6" name="Text 4"/>
+          <p:cNvSpPr/>
+          <p:nvPr/>
+        </p:nvSpPr>
+        <p:spPr>
+          <a:xfrm>
+            <a:off x="640080" y="1755648"/>
+            <a:ext cx="10972800" cy="411480"/>
+          </a:xfrm>
+          <a:prstGeom prst="rect">
+            <a:avLst/>
+          </a:prstGeom>
+          <a:noFill/>
+          <a:ln/>
+        </p:spPr>
+        <p:txBody>
+          <a:bodyPr wrap="square" lIns="0" tIns="0" rIns="0" bIns="0" rtlCol="0" anchor="ctr"/>
+          <a:lstStyle/>
+          <a:p>
+            <a:pPr indent="0" marL="0">
+              <a:buNone/>
+            </a:pPr>
+            <a:r>
+              <a:rPr lang="en-US" sz="1400" dirty="0">
+                <a:solidFill>
+                  <a:srgbClr val="1E293B"/>
+                </a:solidFill>
+                <a:latin typeface="Calibri" pitchFamily="34" charset="0"/>
+                <a:ea typeface="Calibri" pitchFamily="34" charset="-122"/>
+                <a:cs typeface="Calibri" pitchFamily="34" charset="-120"/>
+              </a:rPr>
+              <a:t>En inferencia el modelo NO ve la imagen completa: ve SLICES a resolución nativa. El entrenamiento debería verlos también.</a:t>
+            </a:r>
+            <a:endParaRPr lang="en-US" sz="1400" dirty="0"/>
+          </a:p>
+        </p:txBody>
+      </p:sp>
+      <p:sp>
+        <p:nvSpPr>
+          <p:cNvPr id="7" name="Shape 5"/>
+          <p:cNvSpPr/>
+          <p:nvPr/>
+        </p:nvSpPr>
+        <p:spPr>
+          <a:xfrm>
+            <a:off x="640080" y="2377440"/>
+            <a:ext cx="5349240" cy="3154680"/>
           </a:xfrm>
           <a:prstGeom prst="roundRect">
             <a:avLst>
-              <a:gd name="adj" fmla="val 2254"/>
+              <a:gd name="adj" fmla="val 2319"/>
             </a:avLst>
+          </a:prstGeom>
+          <a:solidFill>
+            <a:srgbClr val="FFFFFF"/>
+          </a:solidFill>
+          <a:ln w="19050">
+            <a:solidFill>
+              <a:srgbClr val="E4572E"/>
+            </a:solidFill>
+            <a:prstDash val="solid"/>
+          </a:ln>
+          <a:effectLst>
+            <a:outerShdw sx="100000" sy="100000" kx="0" ky="0" algn="bl" rotWithShape="0" blurRad="114300" dist="38100" dir="5400000">
+              <a:srgbClr val="000000">
+                <a:alpha val="18000"/>
+              </a:srgbClr>
+            </a:outerShdw>
+          </a:effectLst>
+        </p:spPr>
+      </p:sp>
+      <p:sp>
+        <p:nvSpPr>
+          <p:cNvPr id="8" name="Shape 6"/>
+          <p:cNvSpPr/>
+          <p:nvPr/>
+        </p:nvSpPr>
+        <p:spPr>
+          <a:xfrm>
+            <a:off x="640080" y="2377440"/>
+            <a:ext cx="5349240" cy="640080"/>
+          </a:xfrm>
+          <a:prstGeom prst="rect">
+            <a:avLst/>
+          </a:prstGeom>
+          <a:solidFill>
+            <a:srgbClr val="E4572E"/>
+          </a:solidFill>
+          <a:ln w="12700">
+            <a:solidFill>
+              <a:srgbClr val="E4572E"/>
+            </a:solidFill>
+            <a:prstDash val="solid"/>
+          </a:ln>
+        </p:spPr>
+      </p:sp>
+      <p:sp>
+        <p:nvSpPr>
+          <p:cNvPr id="9" name="Text 7"/>
+          <p:cNvSpPr/>
+          <p:nvPr/>
+        </p:nvSpPr>
+        <p:spPr>
+          <a:xfrm>
+            <a:off x="868680" y="2377440"/>
+            <a:ext cx="4892040" cy="640080"/>
+          </a:xfrm>
+          <a:prstGeom prst="rect">
+            <a:avLst/>
+          </a:prstGeom>
+          <a:noFill/>
+          <a:ln/>
+        </p:spPr>
+        <p:txBody>
+          <a:bodyPr wrap="square" lIns="0" tIns="0" rIns="0" bIns="0" rtlCol="0" anchor="ctr"/>
+          <a:lstStyle/>
+          <a:p>
+            <a:pPr indent="0" marL="0">
+              <a:buNone/>
+            </a:pPr>
+            <a:r>
+              <a:rPr lang="en-US" sz="1700" b="1" dirty="0">
+                <a:solidFill>
+                  <a:srgbClr val="FFFFFF"/>
+                </a:solidFill>
+                <a:latin typeface="Georgia" pitchFamily="34" charset="0"/>
+                <a:ea typeface="Georgia" pitchFamily="34" charset="-122"/>
+                <a:cs typeface="Georgia" pitchFamily="34" charset="-120"/>
+              </a:rPr>
+              <a:t>YOLO normal</a:t>
+            </a:r>
+            <a:endParaRPr lang="en-US" sz="1700" dirty="0"/>
+          </a:p>
+        </p:txBody>
+      </p:sp>
+      <p:sp>
+        <p:nvSpPr>
+          <p:cNvPr id="10" name="Text 8"/>
+          <p:cNvSpPr/>
+          <p:nvPr/>
+        </p:nvSpPr>
+        <p:spPr>
+          <a:xfrm>
+            <a:off x="914400" y="3154680"/>
+            <a:ext cx="4800600" cy="731520"/>
+          </a:xfrm>
+          <a:prstGeom prst="rect">
+            <a:avLst/>
+          </a:prstGeom>
+          <a:noFill/>
+          <a:ln/>
+        </p:spPr>
+        <p:txBody>
+          <a:bodyPr wrap="square" lIns="0" tIns="0" rIns="0" bIns="0" rtlCol="0" anchor="ctr"/>
+          <a:lstStyle/>
+          <a:p>
+            <a:pPr indent="0" marL="0">
+              <a:buNone/>
+            </a:pPr>
+            <a:r>
+              <a:rPr lang="en-US" sz="1350" dirty="0">
+                <a:solidFill>
+                  <a:srgbClr val="1E293B"/>
+                </a:solidFill>
+                <a:latin typeface="Calibri" pitchFamily="34" charset="0"/>
+                <a:ea typeface="Calibri" pitchFamily="34" charset="-122"/>
+                <a:cs typeface="Calibri" pitchFamily="34" charset="-120"/>
+              </a:rPr>
+              <a:t>Entrenas con imágenes completas reescaladas a 640.</a:t>
+            </a:r>
+            <a:endParaRPr lang="en-US" sz="1350" dirty="0"/>
+          </a:p>
+        </p:txBody>
+      </p:sp>
+      <p:sp>
+        <p:nvSpPr>
+          <p:cNvPr id="11" name="Shape 9"/>
+          <p:cNvSpPr/>
+          <p:nvPr/>
+        </p:nvSpPr>
+        <p:spPr>
+          <a:xfrm>
+            <a:off x="1143000" y="4160520"/>
+            <a:ext cx="1371600" cy="868680"/>
+          </a:xfrm>
+          <a:prstGeom prst="rect">
+            <a:avLst/>
           </a:prstGeom>
           <a:solidFill>
             <a:srgbClr val="F4F7FA"/>
           </a:solidFill>
           <a:ln w="12700">
             <a:solidFill>
-              <a:srgbClr val="D8E0E8"/>
+              <a:srgbClr val="64748B"/>
             </a:solidFill>
             <a:prstDash val="solid"/>
           </a:ln>
@@ -14007,14 +15919,14 @@
       </p:sp>
       <p:sp>
         <p:nvSpPr>
-          <p:cNvPr id="6" name="Text 3"/>
-          <p:cNvSpPr/>
-          <p:nvPr/>
-        </p:nvSpPr>
-        <p:spPr>
-          <a:xfrm>
-            <a:off x="8549640" y="2286000"/>
-            <a:ext cx="2834640" cy="365760"/>
+          <p:cNvPr id="12" name="Text 10"/>
+          <p:cNvSpPr/>
+          <p:nvPr/>
+        </p:nvSpPr>
+        <p:spPr>
+          <a:xfrm>
+            <a:off x="1143000" y="4462272"/>
+            <a:ext cx="1371600" cy="274320"/>
           </a:xfrm>
           <a:prstGeom prst="rect">
             <a:avLst/>
@@ -14026,34 +15938,259 @@
           <a:bodyPr wrap="square" lIns="0" tIns="0" rIns="0" bIns="0" rtlCol="0" anchor="ctr"/>
           <a:lstStyle/>
           <a:p>
+            <a:pPr algn="ctr" indent="0" marL="0">
+              <a:buNone/>
+            </a:pPr>
+            <a:r>
+              <a:rPr lang="en-US" sz="1000" dirty="0">
+                <a:solidFill>
+                  <a:srgbClr val="1E293B"/>
+                </a:solidFill>
+                <a:latin typeface="Calibri" pitchFamily="34" charset="0"/>
+                <a:ea typeface="Calibri" pitchFamily="34" charset="-122"/>
+                <a:cs typeface="Calibri" pitchFamily="34" charset="-120"/>
+              </a:rPr>
+              <a:t>imagen completa</a:t>
+            </a:r>
+            <a:endParaRPr lang="en-US" sz="1000" dirty="0"/>
+          </a:p>
+        </p:txBody>
+      </p:sp>
+      <p:sp>
+        <p:nvSpPr>
+          <p:cNvPr id="13" name="Shape 11"/>
+          <p:cNvSpPr/>
+          <p:nvPr/>
+        </p:nvSpPr>
+        <p:spPr>
+          <a:xfrm>
+            <a:off x="2606040" y="4594860"/>
+            <a:ext cx="457200" cy="0"/>
+          </a:xfrm>
+          <a:prstGeom prst="line">
+            <a:avLst/>
+          </a:prstGeom>
+          <a:noFill/>
+          <a:ln w="25400">
+            <a:solidFill>
+              <a:srgbClr val="1E293B"/>
+            </a:solidFill>
+            <a:prstDash val="solid"/>
+            <a:tailEnd type="triangle"/>
+          </a:ln>
+        </p:spPr>
+      </p:sp>
+      <p:sp>
+        <p:nvSpPr>
+          <p:cNvPr id="14" name="Shape 12"/>
+          <p:cNvSpPr/>
+          <p:nvPr/>
+        </p:nvSpPr>
+        <p:spPr>
+          <a:xfrm>
+            <a:off x="3154680" y="4343400"/>
+            <a:ext cx="685800" cy="502920"/>
+          </a:xfrm>
+          <a:prstGeom prst="rect">
+            <a:avLst/>
+          </a:prstGeom>
+          <a:solidFill>
+            <a:srgbClr val="F4F7FA"/>
+          </a:solidFill>
+          <a:ln w="19050">
+            <a:solidFill>
+              <a:srgbClr val="E4572E"/>
+            </a:solidFill>
+            <a:prstDash val="solid"/>
+          </a:ln>
+        </p:spPr>
+      </p:sp>
+      <p:sp>
+        <p:nvSpPr>
+          <p:cNvPr id="15" name="Text 13"/>
+          <p:cNvSpPr/>
+          <p:nvPr/>
+        </p:nvSpPr>
+        <p:spPr>
+          <a:xfrm>
+            <a:off x="3154680" y="4462272"/>
+            <a:ext cx="685800" cy="274320"/>
+          </a:xfrm>
+          <a:prstGeom prst="rect">
+            <a:avLst/>
+          </a:prstGeom>
+          <a:noFill/>
+          <a:ln/>
+        </p:spPr>
+        <p:txBody>
+          <a:bodyPr wrap="square" lIns="0" tIns="0" rIns="0" bIns="0" rtlCol="0" anchor="ctr"/>
+          <a:lstStyle/>
+          <a:p>
+            <a:pPr algn="ctr" indent="0" marL="0">
+              <a:buNone/>
+            </a:pPr>
+            <a:r>
+              <a:rPr lang="en-US" sz="900" dirty="0">
+                <a:solidFill>
+                  <a:srgbClr val="64748B"/>
+                </a:solidFill>
+                <a:latin typeface="Calibri" pitchFamily="34" charset="0"/>
+                <a:ea typeface="Calibri" pitchFamily="34" charset="-122"/>
+                <a:cs typeface="Calibri" pitchFamily="34" charset="-120"/>
+              </a:rPr>
+              <a:t>640</a:t>
+            </a:r>
+            <a:endParaRPr lang="en-US" sz="900" dirty="0"/>
+          </a:p>
+        </p:txBody>
+      </p:sp>
+      <p:sp>
+        <p:nvSpPr>
+          <p:cNvPr id="16" name="Text 14"/>
+          <p:cNvSpPr/>
+          <p:nvPr/>
+        </p:nvSpPr>
+        <p:spPr>
+          <a:xfrm>
+            <a:off x="4023360" y="4251960"/>
+            <a:ext cx="1783080" cy="777240"/>
+          </a:xfrm>
+          <a:prstGeom prst="rect">
+            <a:avLst/>
+          </a:prstGeom>
+          <a:noFill/>
+          <a:ln/>
+        </p:spPr>
+        <p:txBody>
+          <a:bodyPr wrap="square" lIns="0" tIns="0" rIns="0" bIns="0" rtlCol="0" anchor="ctr"/>
+          <a:lstStyle/>
+          <a:p>
             <a:pPr indent="0" marL="0">
               <a:buNone/>
             </a:pPr>
             <a:r>
-              <a:rPr lang="en-US" sz="1600" b="1" dirty="0">
-                <a:solidFill>
-                  <a:srgbClr val="1E293B"/>
+              <a:rPr lang="en-US" sz="1150" b="1" i="1" dirty="0">
+                <a:solidFill>
+                  <a:srgbClr val="E4572E"/>
+                </a:solidFill>
+                <a:latin typeface="Calibri" pitchFamily="34" charset="0"/>
+                <a:ea typeface="Calibri" pitchFamily="34" charset="-122"/>
+                <a:cs typeface="Calibri" pitchFamily="34" charset="-120"/>
+              </a:rPr>
+              <a:t>objeto diminuto → se pierde</a:t>
+            </a:r>
+            <a:endParaRPr lang="en-US" sz="1150" dirty="0"/>
+          </a:p>
+        </p:txBody>
+      </p:sp>
+      <p:sp>
+        <p:nvSpPr>
+          <p:cNvPr id="17" name="Shape 15"/>
+          <p:cNvSpPr/>
+          <p:nvPr/>
+        </p:nvSpPr>
+        <p:spPr>
+          <a:xfrm>
+            <a:off x="6217920" y="2377440"/>
+            <a:ext cx="5349240" cy="3154680"/>
+          </a:xfrm>
+          <a:prstGeom prst="roundRect">
+            <a:avLst>
+              <a:gd name="adj" fmla="val 2319"/>
+            </a:avLst>
+          </a:prstGeom>
+          <a:solidFill>
+            <a:srgbClr val="FFFFFF"/>
+          </a:solidFill>
+          <a:ln w="19050">
+            <a:solidFill>
+              <a:srgbClr val="2E8B57"/>
+            </a:solidFill>
+            <a:prstDash val="solid"/>
+          </a:ln>
+          <a:effectLst>
+            <a:outerShdw sx="100000" sy="100000" kx="0" ky="0" algn="bl" rotWithShape="0" blurRad="114300" dist="38100" dir="5400000">
+              <a:srgbClr val="000000">
+                <a:alpha val="18000"/>
+              </a:srgbClr>
+            </a:outerShdw>
+          </a:effectLst>
+        </p:spPr>
+      </p:sp>
+      <p:sp>
+        <p:nvSpPr>
+          <p:cNvPr id="18" name="Shape 16"/>
+          <p:cNvSpPr/>
+          <p:nvPr/>
+        </p:nvSpPr>
+        <p:spPr>
+          <a:xfrm>
+            <a:off x="6217920" y="2377440"/>
+            <a:ext cx="5349240" cy="640080"/>
+          </a:xfrm>
+          <a:prstGeom prst="rect">
+            <a:avLst/>
+          </a:prstGeom>
+          <a:solidFill>
+            <a:srgbClr val="2E8B57"/>
+          </a:solidFill>
+          <a:ln w="12700">
+            <a:solidFill>
+              <a:srgbClr val="2E8B57"/>
+            </a:solidFill>
+            <a:prstDash val="solid"/>
+          </a:ln>
+        </p:spPr>
+      </p:sp>
+      <p:sp>
+        <p:nvSpPr>
+          <p:cNvPr id="19" name="Text 17"/>
+          <p:cNvSpPr/>
+          <p:nvPr/>
+        </p:nvSpPr>
+        <p:spPr>
+          <a:xfrm>
+            <a:off x="6446520" y="2377440"/>
+            <a:ext cx="4892040" cy="640080"/>
+          </a:xfrm>
+          <a:prstGeom prst="rect">
+            <a:avLst/>
+          </a:prstGeom>
+          <a:noFill/>
+          <a:ln/>
+        </p:spPr>
+        <p:txBody>
+          <a:bodyPr wrap="square" lIns="0" tIns="0" rIns="0" bIns="0" rtlCol="0" anchor="ctr"/>
+          <a:lstStyle/>
+          <a:p>
+            <a:pPr indent="0" marL="0">
+              <a:buNone/>
+            </a:pPr>
+            <a:r>
+              <a:rPr lang="en-US" sz="1700" b="1" dirty="0">
+                <a:solidFill>
+                  <a:srgbClr val="FFFFFF"/>
                 </a:solidFill>
                 <a:latin typeface="Georgia" pitchFamily="34" charset="0"/>
                 <a:ea typeface="Georgia" pitchFamily="34" charset="-122"/>
                 <a:cs typeface="Georgia" pitchFamily="34" charset="-120"/>
               </a:rPr>
-              <a:t>Lectura rápida</a:t>
-            </a:r>
-            <a:endParaRPr lang="en-US" sz="1600" dirty="0"/>
-          </a:p>
-        </p:txBody>
-      </p:sp>
-      <p:sp>
-        <p:nvSpPr>
-          <p:cNvPr id="7" name="Text 4"/>
-          <p:cNvSpPr/>
-          <p:nvPr/>
-        </p:nvSpPr>
-        <p:spPr>
-          <a:xfrm>
-            <a:off x="8549640" y="2788920"/>
-            <a:ext cx="2834640" cy="2468880"/>
+              <a:t>YOLO + SAHI (bien)</a:t>
+            </a:r>
+            <a:endParaRPr lang="en-US" sz="1700" dirty="0"/>
+          </a:p>
+        </p:txBody>
+      </p:sp>
+      <p:sp>
+        <p:nvSpPr>
+          <p:cNvPr id="20" name="Text 18"/>
+          <p:cNvSpPr/>
+          <p:nvPr/>
+        </p:nvSpPr>
+        <p:spPr>
+          <a:xfrm>
+            <a:off x="6492240" y="3154680"/>
+            <a:ext cx="4800600" cy="731520"/>
           </a:xfrm>
           <a:prstGeom prst="rect">
             <a:avLst/>
@@ -14065,15 +16202,11 @@
           <a:bodyPr wrap="square" lIns="0" tIns="0" rIns="0" bIns="0" rtlCol="0" anchor="ctr"/>
           <a:lstStyle/>
           <a:p>
-            <a:pPr marL="342900" indent="-342900">
-              <a:spcAft>
-                <a:spcPts val="1000"/>
-              </a:spcAft>
-              <a:buSzPct val="100000"/>
-              <a:buChar char="•"/>
-            </a:pPr>
-            <a:r>
-              <a:rPr lang="en-US" sz="1300" dirty="0">
+            <a:pPr indent="0" marL="0">
+              <a:buNone/>
+            </a:pPr>
+            <a:r>
+              <a:rPr lang="en-US" sz="1350" dirty="0">
                 <a:solidFill>
                   <a:srgbClr val="1E293B"/>
                 </a:solidFill>
@@ -14081,96 +16214,245 @@
                 <a:ea typeface="Calibri" pitchFamily="34" charset="-122"/>
                 <a:cs typeface="Calibri" pitchFamily="34" charset="-120"/>
               </a:rPr>
-              <a:t>Mejora en todas las métricas.</a:t>
+              <a:t>Entrenas con SLICES: el objeto llega grande al modelo.</a:t>
+            </a:r>
+            <a:endParaRPr lang="en-US" sz="1350" dirty="0"/>
+          </a:p>
+        </p:txBody>
+      </p:sp>
+      <p:sp>
+        <p:nvSpPr>
+          <p:cNvPr id="21" name="Shape 19"/>
+          <p:cNvSpPr/>
+          <p:nvPr/>
+        </p:nvSpPr>
+        <p:spPr>
+          <a:xfrm>
+            <a:off x="6720840" y="4160520"/>
+            <a:ext cx="1371600" cy="868680"/>
+          </a:xfrm>
+          <a:prstGeom prst="rect">
+            <a:avLst/>
+          </a:prstGeom>
+          <a:solidFill>
+            <a:srgbClr val="F4F7FA"/>
+          </a:solidFill>
+          <a:ln w="12700">
+            <a:solidFill>
+              <a:srgbClr val="64748B"/>
+            </a:solidFill>
+            <a:prstDash val="solid"/>
+          </a:ln>
+        </p:spPr>
+      </p:sp>
+      <p:sp>
+        <p:nvSpPr>
+          <p:cNvPr id="22" name="Text 20"/>
+          <p:cNvSpPr/>
+          <p:nvPr/>
+        </p:nvSpPr>
+        <p:spPr>
+          <a:xfrm>
+            <a:off x="6720840" y="4462272"/>
+            <a:ext cx="1371600" cy="274320"/>
+          </a:xfrm>
+          <a:prstGeom prst="rect">
+            <a:avLst/>
+          </a:prstGeom>
+          <a:noFill/>
+          <a:ln/>
+        </p:spPr>
+        <p:txBody>
+          <a:bodyPr wrap="square" lIns="0" tIns="0" rIns="0" bIns="0" rtlCol="0" anchor="ctr"/>
+          <a:lstStyle/>
+          <a:p>
+            <a:pPr algn="ctr" indent="0" marL="0">
+              <a:buNone/>
+            </a:pPr>
+            <a:r>
+              <a:rPr lang="en-US" sz="1000" dirty="0">
+                <a:solidFill>
+                  <a:srgbClr val="1E293B"/>
+                </a:solidFill>
+                <a:latin typeface="Calibri" pitchFamily="34" charset="0"/>
+                <a:ea typeface="Calibri" pitchFamily="34" charset="-122"/>
+                <a:cs typeface="Calibri" pitchFamily="34" charset="-120"/>
+              </a:rPr>
+              <a:t>slice nativo</a:t>
+            </a:r>
+            <a:endParaRPr lang="en-US" sz="1000" dirty="0"/>
+          </a:p>
+        </p:txBody>
+      </p:sp>
+      <p:sp>
+        <p:nvSpPr>
+          <p:cNvPr id="23" name="Shape 21"/>
+          <p:cNvSpPr/>
+          <p:nvPr/>
+        </p:nvSpPr>
+        <p:spPr>
+          <a:xfrm>
+            <a:off x="8183880" y="4594860"/>
+            <a:ext cx="457200" cy="0"/>
+          </a:xfrm>
+          <a:prstGeom prst="line">
+            <a:avLst/>
+          </a:prstGeom>
+          <a:noFill/>
+          <a:ln w="25400">
+            <a:solidFill>
+              <a:srgbClr val="1E293B"/>
+            </a:solidFill>
+            <a:prstDash val="solid"/>
+            <a:tailEnd type="triangle"/>
+          </a:ln>
+        </p:spPr>
+      </p:sp>
+      <p:sp>
+        <p:nvSpPr>
+          <p:cNvPr id="24" name="Shape 22"/>
+          <p:cNvSpPr/>
+          <p:nvPr/>
+        </p:nvSpPr>
+        <p:spPr>
+          <a:xfrm>
+            <a:off x="8732520" y="4343400"/>
+            <a:ext cx="685800" cy="502920"/>
+          </a:xfrm>
+          <a:prstGeom prst="rect">
+            <a:avLst/>
+          </a:prstGeom>
+          <a:solidFill>
+            <a:srgbClr val="F4F7FA"/>
+          </a:solidFill>
+          <a:ln w="19050">
+            <a:solidFill>
+              <a:srgbClr val="2E8B57"/>
+            </a:solidFill>
+            <a:prstDash val="solid"/>
+          </a:ln>
+        </p:spPr>
+      </p:sp>
+      <p:sp>
+        <p:nvSpPr>
+          <p:cNvPr id="25" name="Text 23"/>
+          <p:cNvSpPr/>
+          <p:nvPr/>
+        </p:nvSpPr>
+        <p:spPr>
+          <a:xfrm>
+            <a:off x="8732520" y="4462272"/>
+            <a:ext cx="685800" cy="274320"/>
+          </a:xfrm>
+          <a:prstGeom prst="rect">
+            <a:avLst/>
+          </a:prstGeom>
+          <a:noFill/>
+          <a:ln/>
+        </p:spPr>
+        <p:txBody>
+          <a:bodyPr wrap="square" lIns="0" tIns="0" rIns="0" bIns="0" rtlCol="0" anchor="ctr"/>
+          <a:lstStyle/>
+          <a:p>
+            <a:pPr algn="ctr" indent="0" marL="0">
+              <a:buNone/>
+            </a:pPr>
+            <a:r>
+              <a:rPr lang="en-US" sz="900" dirty="0">
+                <a:solidFill>
+                  <a:srgbClr val="64748B"/>
+                </a:solidFill>
+                <a:latin typeface="Calibri" pitchFamily="34" charset="0"/>
+                <a:ea typeface="Calibri" pitchFamily="34" charset="-122"/>
+                <a:cs typeface="Calibri" pitchFamily="34" charset="-120"/>
+              </a:rPr>
+              <a:t>640</a:t>
+            </a:r>
+            <a:endParaRPr lang="en-US" sz="900" dirty="0"/>
+          </a:p>
+        </p:txBody>
+      </p:sp>
+      <p:sp>
+        <p:nvSpPr>
+          <p:cNvPr id="26" name="Text 24"/>
+          <p:cNvSpPr/>
+          <p:nvPr/>
+        </p:nvSpPr>
+        <p:spPr>
+          <a:xfrm>
+            <a:off x="9601200" y="4251960"/>
+            <a:ext cx="1783080" cy="777240"/>
+          </a:xfrm>
+          <a:prstGeom prst="rect">
+            <a:avLst/>
+          </a:prstGeom>
+          <a:noFill/>
+          <a:ln/>
+        </p:spPr>
+        <p:txBody>
+          <a:bodyPr wrap="square" lIns="0" tIns="0" rIns="0" bIns="0" rtlCol="0" anchor="ctr"/>
+          <a:lstStyle/>
+          <a:p>
+            <a:pPr indent="0" marL="0">
+              <a:buNone/>
+            </a:pPr>
+            <a:r>
+              <a:rPr lang="en-US" sz="1150" b="1" i="1" dirty="0">
+                <a:solidFill>
+                  <a:srgbClr val="2E8B57"/>
+                </a:solidFill>
+                <a:latin typeface="Calibri" pitchFamily="34" charset="0"/>
+                <a:ea typeface="Calibri" pitchFamily="34" charset="-122"/>
+                <a:cs typeface="Calibri" pitchFamily="34" charset="-120"/>
+              </a:rPr>
+              <a:t>objeto grande → se detecta</a:t>
+            </a:r>
+            <a:endParaRPr lang="en-US" sz="1150" dirty="0"/>
+          </a:p>
+        </p:txBody>
+      </p:sp>
+      <p:sp>
+        <p:nvSpPr>
+          <p:cNvPr id="27" name="Text 25"/>
+          <p:cNvSpPr/>
+          <p:nvPr/>
+        </p:nvSpPr>
+        <p:spPr>
+          <a:xfrm>
+            <a:off x="640080" y="5669280"/>
+            <a:ext cx="10972800" cy="457200"/>
+          </a:xfrm>
+          <a:prstGeom prst="rect">
+            <a:avLst/>
+          </a:prstGeom>
+          <a:noFill/>
+          <a:ln/>
+        </p:spPr>
+        <p:txBody>
+          <a:bodyPr wrap="square" lIns="0" tIns="0" rIns="0" bIns="0" rtlCol="0" anchor="ctr"/>
+          <a:lstStyle/>
+          <a:p>
+            <a:pPr algn="ctr" indent="0" marL="0">
+              <a:buNone/>
+            </a:pPr>
+            <a:r>
+              <a:rPr lang="en-US" sz="1300" b="1" dirty="0">
+                <a:solidFill>
+                  <a:srgbClr val="0F2A43"/>
+                </a:solidFill>
+                <a:latin typeface="Calibri" pitchFamily="34" charset="0"/>
+                <a:ea typeface="Calibri" pitchFamily="34" charset="-122"/>
+                <a:cs typeface="Calibri" pitchFamily="34" charset="-120"/>
+              </a:rPr>
+              <a:t>Entrenar con imágenes completas pero inferir con slices = desajuste de escala (train ≠ test). El sliced fine-tuning lo cierra.</a:t>
             </a:r>
             <a:endParaRPr lang="en-US" sz="1300" dirty="0"/>
           </a:p>
-          <a:p>
-            <a:pPr marL="342900" indent="-342900">
-              <a:spcAft>
-                <a:spcPts val="1000"/>
-              </a:spcAft>
-              <a:buSzPct val="100000"/>
-              <a:buChar char="•"/>
-            </a:pPr>
-            <a:r>
-              <a:rPr lang="en-US" sz="1300" dirty="0">
-                <a:solidFill>
-                  <a:srgbClr val="1E293B"/>
-                </a:solidFill>
-                <a:latin typeface="Calibri" pitchFamily="34" charset="0"/>
-                <a:ea typeface="Calibri" pitchFamily="34" charset="-122"/>
-                <a:cs typeface="Calibri" pitchFamily="34" charset="-120"/>
-              </a:rPr>
-              <a:t>El salto más grande está en el umbral estricto (.75).</a:t>
-            </a:r>
-            <a:endParaRPr lang="en-US" sz="1300" dirty="0"/>
-          </a:p>
-          <a:p>
-            <a:pPr marL="342900" indent="-342900">
-              <a:spcAft>
-                <a:spcPts val="1000"/>
-              </a:spcAft>
-              <a:buSzPct val="100000"/>
-              <a:buChar char="•"/>
-            </a:pPr>
-            <a:r>
-              <a:rPr lang="en-US" sz="1300" b="1" dirty="0">
-                <a:solidFill>
-                  <a:srgbClr val="2E8B57"/>
-                </a:solidFill>
-                <a:latin typeface="Calibri" pitchFamily="34" charset="0"/>
-                <a:ea typeface="Calibri" pitchFamily="34" charset="-122"/>
-                <a:cs typeface="Calibri" pitchFamily="34" charset="-120"/>
-              </a:rPr>
-              <a:t>SAHI = más recall sin perder precisión.</a:t>
-            </a:r>
-            <a:endParaRPr lang="en-US" sz="1300" dirty="0"/>
-          </a:p>
-        </p:txBody>
-      </p:sp>
-      <p:sp>
-        <p:nvSpPr>
-          <p:cNvPr id="8" name="Text 5"/>
-          <p:cNvSpPr/>
-          <p:nvPr/>
-        </p:nvSpPr>
-        <p:spPr>
-          <a:xfrm>
-            <a:off x="640080" y="6144768"/>
-            <a:ext cx="10972800" cy="274320"/>
-          </a:xfrm>
-          <a:prstGeom prst="rect">
-            <a:avLst/>
-          </a:prstGeom>
-          <a:noFill/>
-          <a:ln/>
-        </p:spPr>
-        <p:txBody>
-          <a:bodyPr wrap="square" lIns="0" tIns="0" rIns="0" bIns="0" rtlCol="0" anchor="ctr"/>
-          <a:lstStyle/>
-          <a:p>
-            <a:pPr indent="0" marL="0">
-              <a:buNone/>
-            </a:pPr>
-            <a:r>
-              <a:rPr lang="en-US" sz="900" i="1" dirty="0">
-                <a:solidFill>
-                  <a:srgbClr val="64748B"/>
-                </a:solidFill>
-                <a:latin typeface="Calibri" pitchFamily="34" charset="0"/>
-                <a:ea typeface="Calibri" pitchFamily="34" charset="-122"/>
-                <a:cs typeface="Calibri" pitchFamily="34" charset="-120"/>
-              </a:rPr>
-              <a:t>◆ Valores de referencia (yolo11s fine-tuned en VisDrone); reemplaza con tu corrida (notebook 02).</a:t>
-            </a:r>
-            <a:endParaRPr lang="en-US" sz="900" dirty="0"/>
-          </a:p>
-        </p:txBody>
-      </p:sp>
-      <p:sp>
-        <p:nvSpPr>
-          <p:cNvPr id="9" name="Text 6"/>
+        </p:txBody>
+      </p:sp>
+      <p:sp>
+        <p:nvSpPr>
+          <p:cNvPr id="28" name="Text 26"/>
           <p:cNvSpPr/>
           <p:nvPr/>
         </p:nvSpPr>
@@ -14209,7 +16491,7 @@
       </p:sp>
       <p:sp>
         <p:nvSpPr>
-          <p:cNvPr id="10" name="Text 7"/>
+          <p:cNvPr id="29" name="Text 27"/>
           <p:cNvSpPr/>
           <p:nvPr/>
         </p:nvSpPr>
@@ -14305,13 +16587,13 @@
             <a:r>
               <a:rPr lang="en-US" sz="1300" b="1" spc="300" kern="0" dirty="0">
                 <a:solidFill>
-                  <a:srgbClr val="2E8B57"/>
-                </a:solidFill>
-                <a:latin typeface="Calibri" pitchFamily="34" charset="0"/>
-                <a:ea typeface="Calibri" pitchFamily="34" charset="-122"/>
-                <a:cs typeface="Calibri" pitchFamily="34" charset="-120"/>
-              </a:rPr>
-              <a:t>EL RESULTADO ESTRELLA</a:t>
+                  <a:srgbClr val="E8A93B"/>
+                </a:solidFill>
+                <a:latin typeface="Calibri" pitchFamily="34" charset="0"/>
+                <a:ea typeface="Calibri" pitchFamily="34" charset="-122"/>
+                <a:cs typeface="Calibri" pitchFamily="34" charset="-120"/>
+              </a:rPr>
+              <a:t>NIVEL 6 · RECETA</a:t>
             </a:r>
             <a:endParaRPr lang="en-US" sz="1300" dirty="0"/>
           </a:p>
@@ -14319,14 +16601,39 @@
       </p:sp>
       <p:sp>
         <p:nvSpPr>
-          <p:cNvPr id="3" name="Text 1"/>
-          <p:cNvSpPr/>
-          <p:nvPr/>
-        </p:nvSpPr>
-        <p:spPr>
-          <a:xfrm>
-            <a:off x="640080" y="841248"/>
-            <a:ext cx="10972800" cy="868680"/>
+          <p:cNvPr id="3" name="Shape 1"/>
+          <p:cNvSpPr/>
+          <p:nvPr/>
+        </p:nvSpPr>
+        <p:spPr>
+          <a:xfrm>
+            <a:off x="10698480" y="502920"/>
+            <a:ext cx="914400" cy="914400"/>
+          </a:xfrm>
+          <a:prstGeom prst="ellipse">
+            <a:avLst/>
+          </a:prstGeom>
+          <a:solidFill>
+            <a:srgbClr val="0F2A43"/>
+          </a:solidFill>
+          <a:ln w="12700">
+            <a:solidFill>
+              <a:srgbClr val="0F2A43"/>
+            </a:solidFill>
+            <a:prstDash val="solid"/>
+          </a:ln>
+        </p:spPr>
+      </p:sp>
+      <p:sp>
+        <p:nvSpPr>
+          <p:cNvPr id="4" name="Text 2"/>
+          <p:cNvSpPr/>
+          <p:nvPr/>
+        </p:nvSpPr>
+        <p:spPr>
+          <a:xfrm>
+            <a:off x="10698480" y="502920"/>
+            <a:ext cx="914400" cy="914400"/>
           </a:xfrm>
           <a:prstGeom prst="rect">
             <a:avLst/>
@@ -14338,84 +16645,98 @@
           <a:bodyPr wrap="square" lIns="0" tIns="0" rIns="0" bIns="0" rtlCol="0" anchor="ctr"/>
           <a:lstStyle/>
           <a:p>
-            <a:pPr indent="0" marL="0">
-              <a:buNone/>
-            </a:pPr>
-            <a:r>
-              <a:rPr lang="en-US" sz="3000" b="1" dirty="0">
-                <a:solidFill>
-                  <a:srgbClr val="1E293B"/>
+            <a:pPr algn="ctr" indent="0" marL="0">
+              <a:buNone/>
+            </a:pPr>
+            <a:r>
+              <a:rPr lang="en-US" sz="2200" b="1" dirty="0">
+                <a:solidFill>
+                  <a:srgbClr val="E8A93B"/>
                 </a:solidFill>
                 <a:latin typeface="Georgia" pitchFamily="34" charset="0"/>
                 <a:ea typeface="Georgia" pitchFamily="34" charset="-122"/>
                 <a:cs typeface="Georgia" pitchFamily="34" charset="-120"/>
               </a:rPr>
-              <a:t>Donde SAHI brilla: objetos pequeños</a:t>
+              <a:t>N6</a:t>
+            </a:r>
+            <a:endParaRPr lang="en-US" sz="2200" dirty="0"/>
+          </a:p>
+        </p:txBody>
+      </p:sp>
+      <p:sp>
+        <p:nvSpPr>
+          <p:cNvPr id="5" name="Text 3"/>
+          <p:cNvSpPr/>
+          <p:nvPr/>
+        </p:nvSpPr>
+        <p:spPr>
+          <a:xfrm>
+            <a:off x="640080" y="841248"/>
+            <a:ext cx="10972800" cy="868680"/>
+          </a:xfrm>
+          <a:prstGeom prst="rect">
+            <a:avLst/>
+          </a:prstGeom>
+          <a:noFill/>
+          <a:ln/>
+        </p:spPr>
+        <p:txBody>
+          <a:bodyPr wrap="square" lIns="0" tIns="0" rIns="0" bIns="0" rtlCol="0" anchor="ctr"/>
+          <a:lstStyle/>
+          <a:p>
+            <a:pPr indent="0" marL="0">
+              <a:buNone/>
+            </a:pPr>
+            <a:r>
+              <a:rPr lang="en-US" sz="3000" b="1" dirty="0">
+                <a:solidFill>
+                  <a:srgbClr val="1E293B"/>
+                </a:solidFill>
+                <a:latin typeface="Georgia" pitchFamily="34" charset="0"/>
+                <a:ea typeface="Georgia" pitchFamily="34" charset="-122"/>
+                <a:cs typeface="Georgia" pitchFamily="34" charset="-120"/>
+              </a:rPr>
+              <a:t>Receta: sliced fine-tuning</a:t>
             </a:r>
             <a:endParaRPr lang="en-US" sz="3000" dirty="0"/>
           </a:p>
         </p:txBody>
       </p:sp>
-      <p:graphicFrame>
-        <p:nvGraphicFramePr>
-          <p:cNvPr id="4" name="Chart 0" descr=""/>
-          <p:cNvGraphicFramePr/>
-          <p:nvPr/>
-        </p:nvGraphicFramePr>
-        <p:xfrm>
-          <a:off x="640080" y="1920240"/>
-          <a:ext cx="7498080" cy="3840480"/>
-        </p:xfrm>
-        <a:graphic xmlns:a="http://schemas.openxmlformats.org/drawingml/2006/main">
-          <a:graphicData uri="http://schemas.openxmlformats.org/drawingml/2006/chart">
-            <c:chart xmlns:c="http://schemas.openxmlformats.org/drawingml/2006/chart" r:id="rId1"/>
-          </a:graphicData>
-        </a:graphic>
-      </p:graphicFrame>
-      <p:sp>
-        <p:nvSpPr>
-          <p:cNvPr id="5" name="Shape 2"/>
-          <p:cNvSpPr/>
-          <p:nvPr/>
-        </p:nvSpPr>
-        <p:spPr>
-          <a:xfrm>
-            <a:off x="8503920" y="2377440"/>
-            <a:ext cx="3017520" cy="1417320"/>
-          </a:xfrm>
-          <a:prstGeom prst="roundRect">
-            <a:avLst>
-              <a:gd name="adj" fmla="val 5161"/>
-            </a:avLst>
+      <p:sp>
+        <p:nvSpPr>
+          <p:cNvPr id="6" name="Shape 4"/>
+          <p:cNvSpPr/>
+          <p:nvPr/>
+        </p:nvSpPr>
+        <p:spPr>
+          <a:xfrm>
+            <a:off x="640080" y="2057400"/>
+            <a:ext cx="621792" cy="621792"/>
+          </a:xfrm>
+          <a:prstGeom prst="ellipse">
+            <a:avLst/>
           </a:prstGeom>
           <a:solidFill>
-            <a:srgbClr val="F4F7FA"/>
+            <a:srgbClr val="2E8B57"/>
           </a:solidFill>
           <a:ln w="12700">
             <a:solidFill>
-              <a:srgbClr val="D8E0E8"/>
+              <a:srgbClr val="2E8B57"/>
             </a:solidFill>
             <a:prstDash val="solid"/>
           </a:ln>
-          <a:effectLst>
-            <a:outerShdw sx="100000" sy="100000" kx="0" ky="0" algn="bl" rotWithShape="0" blurRad="114300" dist="38100" dir="5400000">
-              <a:srgbClr val="000000">
-                <a:alpha val="18000"/>
-              </a:srgbClr>
-            </a:outerShdw>
-          </a:effectLst>
-        </p:spPr>
-      </p:sp>
-      <p:sp>
-        <p:nvSpPr>
-          <p:cNvPr id="6" name="Text 3"/>
-          <p:cNvSpPr/>
-          <p:nvPr/>
-        </p:nvSpPr>
-        <p:spPr>
-          <a:xfrm>
-            <a:off x="8503920" y="2487168"/>
-            <a:ext cx="3017520" cy="777240"/>
+        </p:spPr>
+      </p:sp>
+      <p:sp>
+        <p:nvSpPr>
+          <p:cNvPr id="7" name="Text 5"/>
+          <p:cNvSpPr/>
+          <p:nvPr/>
+        </p:nvSpPr>
+        <p:spPr>
+          <a:xfrm>
+            <a:off x="640080" y="2057400"/>
+            <a:ext cx="621792" cy="621792"/>
           </a:xfrm>
           <a:prstGeom prst="rect">
             <a:avLst/>
@@ -14431,30 +16752,473 @@
               <a:buNone/>
             </a:pPr>
             <a:r>
-              <a:rPr lang="en-US" sz="4000" b="1" dirty="0">
-                <a:solidFill>
-                  <a:srgbClr val="2E8B57"/>
+              <a:rPr lang="en-US" sz="1900" b="1" dirty="0">
+                <a:solidFill>
+                  <a:srgbClr val="FFFFFF"/>
                 </a:solidFill>
                 <a:latin typeface="Georgia" pitchFamily="34" charset="0"/>
                 <a:ea typeface="Georgia" pitchFamily="34" charset="-122"/>
                 <a:cs typeface="Georgia" pitchFamily="34" charset="-120"/>
               </a:rPr>
-              <a:t>+100%</a:t>
-            </a:r>
-            <a:endParaRPr lang="en-US" sz="4000" dirty="0"/>
-          </a:p>
-        </p:txBody>
-      </p:sp>
-      <p:sp>
-        <p:nvSpPr>
-          <p:cNvPr id="7" name="Text 4"/>
-          <p:cNvSpPr/>
-          <p:nvPr/>
-        </p:nvSpPr>
-        <p:spPr>
-          <a:xfrm>
-            <a:off x="8641080" y="3273552"/>
-            <a:ext cx="2743200" cy="457200"/>
+              <a:t>1</a:t>
+            </a:r>
+            <a:endParaRPr lang="en-US" sz="1900" dirty="0"/>
+          </a:p>
+        </p:txBody>
+      </p:sp>
+      <p:sp>
+        <p:nvSpPr>
+          <p:cNvPr id="8" name="Text 6"/>
+          <p:cNvSpPr/>
+          <p:nvPr/>
+        </p:nvSpPr>
+        <p:spPr>
+          <a:xfrm>
+            <a:off x="1417320" y="2039112"/>
+            <a:ext cx="6126480" cy="685800"/>
+          </a:xfrm>
+          <a:prstGeom prst="rect">
+            <a:avLst/>
+          </a:prstGeom>
+          <a:noFill/>
+          <a:ln/>
+        </p:spPr>
+        <p:txBody>
+          <a:bodyPr wrap="square" lIns="0" tIns="0" rIns="0" bIns="0" rtlCol="0" anchor="ctr"/>
+          <a:lstStyle/>
+          <a:p>
+            <a:pPr indent="0" marL="0">
+              <a:buNone/>
+            </a:pPr>
+            <a:r>
+              <a:rPr lang="en-US" sz="1500" b="1" dirty="0">
+                <a:solidFill>
+                  <a:srgbClr val="1E293B"/>
+                </a:solidFill>
+                <a:latin typeface="Calibri" pitchFamily="34" charset="0"/>
+                <a:ea typeface="Calibri" pitchFamily="34" charset="-122"/>
+                <a:cs typeface="Calibri" pitchFamily="34" charset="-120"/>
+              </a:rPr>
+              <a:t>Corta el dataset en slices</a:t>
+            </a:r>
+            <a:endParaRPr lang="en-US" sz="1500" dirty="0"/>
+          </a:p>
+          <a:p>
+            <a:pPr indent="0" marL="0">
+              <a:buNone/>
+            </a:pPr>
+            <a:r>
+              <a:rPr lang="en-US" sz="1200" dirty="0">
+                <a:solidFill>
+                  <a:srgbClr val="64748B"/>
+                </a:solidFill>
+                <a:latin typeface="Calibri" pitchFamily="34" charset="0"/>
+                <a:ea typeface="Calibri" pitchFamily="34" charset="-122"/>
+                <a:cs typeface="Calibri" pitchFamily="34" charset="-120"/>
+              </a:rPr>
+              <a:t>con el MISMO slice_size y overlap que usarás al inferir.</a:t>
+            </a:r>
+            <a:endParaRPr lang="en-US" sz="1500" dirty="0"/>
+          </a:p>
+        </p:txBody>
+      </p:sp>
+      <p:sp>
+        <p:nvSpPr>
+          <p:cNvPr id="9" name="Shape 7"/>
+          <p:cNvSpPr/>
+          <p:nvPr/>
+        </p:nvSpPr>
+        <p:spPr>
+          <a:xfrm>
+            <a:off x="640080" y="2880360"/>
+            <a:ext cx="621792" cy="621792"/>
+          </a:xfrm>
+          <a:prstGeom prst="ellipse">
+            <a:avLst/>
+          </a:prstGeom>
+          <a:solidFill>
+            <a:srgbClr val="2E8B57"/>
+          </a:solidFill>
+          <a:ln w="12700">
+            <a:solidFill>
+              <a:srgbClr val="2E8B57"/>
+            </a:solidFill>
+            <a:prstDash val="solid"/>
+          </a:ln>
+        </p:spPr>
+      </p:sp>
+      <p:sp>
+        <p:nvSpPr>
+          <p:cNvPr id="10" name="Text 8"/>
+          <p:cNvSpPr/>
+          <p:nvPr/>
+        </p:nvSpPr>
+        <p:spPr>
+          <a:xfrm>
+            <a:off x="640080" y="2880360"/>
+            <a:ext cx="621792" cy="621792"/>
+          </a:xfrm>
+          <a:prstGeom prst="rect">
+            <a:avLst/>
+          </a:prstGeom>
+          <a:noFill/>
+          <a:ln/>
+        </p:spPr>
+        <p:txBody>
+          <a:bodyPr wrap="square" lIns="0" tIns="0" rIns="0" bIns="0" rtlCol="0" anchor="ctr"/>
+          <a:lstStyle/>
+          <a:p>
+            <a:pPr algn="ctr" indent="0" marL="0">
+              <a:buNone/>
+            </a:pPr>
+            <a:r>
+              <a:rPr lang="en-US" sz="1900" b="1" dirty="0">
+                <a:solidFill>
+                  <a:srgbClr val="FFFFFF"/>
+                </a:solidFill>
+                <a:latin typeface="Georgia" pitchFamily="34" charset="0"/>
+                <a:ea typeface="Georgia" pitchFamily="34" charset="-122"/>
+                <a:cs typeface="Georgia" pitchFamily="34" charset="-120"/>
+              </a:rPr>
+              <a:t>2</a:t>
+            </a:r>
+            <a:endParaRPr lang="en-US" sz="1900" dirty="0"/>
+          </a:p>
+        </p:txBody>
+      </p:sp>
+      <p:sp>
+        <p:nvSpPr>
+          <p:cNvPr id="11" name="Text 9"/>
+          <p:cNvSpPr/>
+          <p:nvPr/>
+        </p:nvSpPr>
+        <p:spPr>
+          <a:xfrm>
+            <a:off x="1417320" y="2862072"/>
+            <a:ext cx="6126480" cy="685800"/>
+          </a:xfrm>
+          <a:prstGeom prst="rect">
+            <a:avLst/>
+          </a:prstGeom>
+          <a:noFill/>
+          <a:ln/>
+        </p:spPr>
+        <p:txBody>
+          <a:bodyPr wrap="square" lIns="0" tIns="0" rIns="0" bIns="0" rtlCol="0" anchor="ctr"/>
+          <a:lstStyle/>
+          <a:p>
+            <a:pPr indent="0" marL="0">
+              <a:buNone/>
+            </a:pPr>
+            <a:r>
+              <a:rPr lang="en-US" sz="1500" b="1" dirty="0">
+                <a:solidFill>
+                  <a:srgbClr val="1E293B"/>
+                </a:solidFill>
+                <a:latin typeface="Calibri" pitchFamily="34" charset="0"/>
+                <a:ea typeface="Calibri" pitchFamily="34" charset="-122"/>
+                <a:cs typeface="Calibri" pitchFamily="34" charset="-120"/>
+              </a:rPr>
+              <a:t>Entrena con imgsz = tamaño de slice</a:t>
+            </a:r>
+            <a:endParaRPr lang="en-US" sz="1500" dirty="0"/>
+          </a:p>
+          <a:p>
+            <a:pPr indent="0" marL="0">
+              <a:buNone/>
+            </a:pPr>
+            <a:r>
+              <a:rPr lang="en-US" sz="1200" dirty="0">
+                <a:solidFill>
+                  <a:srgbClr val="64748B"/>
+                </a:solidFill>
+                <a:latin typeface="Calibri" pitchFamily="34" charset="0"/>
+                <a:ea typeface="Calibri" pitchFamily="34" charset="-122"/>
+                <a:cs typeface="Calibri" pitchFamily="34" charset="-120"/>
+              </a:rPr>
+              <a:t>slices de 640 → entrena a imgsz 640.</a:t>
+            </a:r>
+            <a:endParaRPr lang="en-US" sz="1500" dirty="0"/>
+          </a:p>
+        </p:txBody>
+      </p:sp>
+      <p:sp>
+        <p:nvSpPr>
+          <p:cNvPr id="12" name="Shape 10"/>
+          <p:cNvSpPr/>
+          <p:nvPr/>
+        </p:nvSpPr>
+        <p:spPr>
+          <a:xfrm>
+            <a:off x="640080" y="3703320"/>
+            <a:ext cx="621792" cy="621792"/>
+          </a:xfrm>
+          <a:prstGeom prst="ellipse">
+            <a:avLst/>
+          </a:prstGeom>
+          <a:solidFill>
+            <a:srgbClr val="2E8B57"/>
+          </a:solidFill>
+          <a:ln w="12700">
+            <a:solidFill>
+              <a:srgbClr val="2E8B57"/>
+            </a:solidFill>
+            <a:prstDash val="solid"/>
+          </a:ln>
+        </p:spPr>
+      </p:sp>
+      <p:sp>
+        <p:nvSpPr>
+          <p:cNvPr id="13" name="Text 11"/>
+          <p:cNvSpPr/>
+          <p:nvPr/>
+        </p:nvSpPr>
+        <p:spPr>
+          <a:xfrm>
+            <a:off x="640080" y="3703320"/>
+            <a:ext cx="621792" cy="621792"/>
+          </a:xfrm>
+          <a:prstGeom prst="rect">
+            <a:avLst/>
+          </a:prstGeom>
+          <a:noFill/>
+          <a:ln/>
+        </p:spPr>
+        <p:txBody>
+          <a:bodyPr wrap="square" lIns="0" tIns="0" rIns="0" bIns="0" rtlCol="0" anchor="ctr"/>
+          <a:lstStyle/>
+          <a:p>
+            <a:pPr algn="ctr" indent="0" marL="0">
+              <a:buNone/>
+            </a:pPr>
+            <a:r>
+              <a:rPr lang="en-US" sz="1900" b="1" dirty="0">
+                <a:solidFill>
+                  <a:srgbClr val="FFFFFF"/>
+                </a:solidFill>
+                <a:latin typeface="Georgia" pitchFamily="34" charset="0"/>
+                <a:ea typeface="Georgia" pitchFamily="34" charset="-122"/>
+                <a:cs typeface="Georgia" pitchFamily="34" charset="-120"/>
+              </a:rPr>
+              <a:t>3</a:t>
+            </a:r>
+            <a:endParaRPr lang="en-US" sz="1900" dirty="0"/>
+          </a:p>
+        </p:txBody>
+      </p:sp>
+      <p:sp>
+        <p:nvSpPr>
+          <p:cNvPr id="14" name="Text 12"/>
+          <p:cNvSpPr/>
+          <p:nvPr/>
+        </p:nvSpPr>
+        <p:spPr>
+          <a:xfrm>
+            <a:off x="1417320" y="3685032"/>
+            <a:ext cx="6126480" cy="685800"/>
+          </a:xfrm>
+          <a:prstGeom prst="rect">
+            <a:avLst/>
+          </a:prstGeom>
+          <a:noFill/>
+          <a:ln/>
+        </p:spPr>
+        <p:txBody>
+          <a:bodyPr wrap="square" lIns="0" tIns="0" rIns="0" bIns="0" rtlCol="0" anchor="ctr"/>
+          <a:lstStyle/>
+          <a:p>
+            <a:pPr indent="0" marL="0">
+              <a:buNone/>
+            </a:pPr>
+            <a:r>
+              <a:rPr lang="en-US" sz="1500" b="1" dirty="0">
+                <a:solidFill>
+                  <a:srgbClr val="1E293B"/>
+                </a:solidFill>
+                <a:latin typeface="Calibri" pitchFamily="34" charset="0"/>
+                <a:ea typeface="Calibri" pitchFamily="34" charset="-122"/>
+                <a:cs typeface="Calibri" pitchFamily="34" charset="-120"/>
+              </a:rPr>
+              <a:t>Mezcla slices + imágenes completas</a:t>
+            </a:r>
+            <a:endParaRPr lang="en-US" sz="1500" dirty="0"/>
+          </a:p>
+          <a:p>
+            <a:pPr indent="0" marL="0">
+              <a:buNone/>
+            </a:pPr>
+            <a:r>
+              <a:rPr lang="en-US" sz="1200" dirty="0">
+                <a:solidFill>
+                  <a:srgbClr val="64748B"/>
+                </a:solidFill>
+                <a:latin typeface="Calibri" pitchFamily="34" charset="0"/>
+                <a:ea typeface="Calibri" pitchFamily="34" charset="-122"/>
+                <a:cs typeface="Calibri" pitchFamily="34" charset="-120"/>
+              </a:rPr>
+              <a:t>para que rinda también en la pasada global (combinado).</a:t>
+            </a:r>
+            <a:endParaRPr lang="en-US" sz="1500" dirty="0"/>
+          </a:p>
+        </p:txBody>
+      </p:sp>
+      <p:sp>
+        <p:nvSpPr>
+          <p:cNvPr id="15" name="Shape 13"/>
+          <p:cNvSpPr/>
+          <p:nvPr/>
+        </p:nvSpPr>
+        <p:spPr>
+          <a:xfrm>
+            <a:off x="640080" y="4526280"/>
+            <a:ext cx="621792" cy="621792"/>
+          </a:xfrm>
+          <a:prstGeom prst="ellipse">
+            <a:avLst/>
+          </a:prstGeom>
+          <a:solidFill>
+            <a:srgbClr val="2E8B57"/>
+          </a:solidFill>
+          <a:ln w="12700">
+            <a:solidFill>
+              <a:srgbClr val="2E8B57"/>
+            </a:solidFill>
+            <a:prstDash val="solid"/>
+          </a:ln>
+        </p:spPr>
+      </p:sp>
+      <p:sp>
+        <p:nvSpPr>
+          <p:cNvPr id="16" name="Text 14"/>
+          <p:cNvSpPr/>
+          <p:nvPr/>
+        </p:nvSpPr>
+        <p:spPr>
+          <a:xfrm>
+            <a:off x="640080" y="4526280"/>
+            <a:ext cx="621792" cy="621792"/>
+          </a:xfrm>
+          <a:prstGeom prst="rect">
+            <a:avLst/>
+          </a:prstGeom>
+          <a:noFill/>
+          <a:ln/>
+        </p:spPr>
+        <p:txBody>
+          <a:bodyPr wrap="square" lIns="0" tIns="0" rIns="0" bIns="0" rtlCol="0" anchor="ctr"/>
+          <a:lstStyle/>
+          <a:p>
+            <a:pPr algn="ctr" indent="0" marL="0">
+              <a:buNone/>
+            </a:pPr>
+            <a:r>
+              <a:rPr lang="en-US" sz="1900" b="1" dirty="0">
+                <a:solidFill>
+                  <a:srgbClr val="FFFFFF"/>
+                </a:solidFill>
+                <a:latin typeface="Georgia" pitchFamily="34" charset="0"/>
+                <a:ea typeface="Georgia" pitchFamily="34" charset="-122"/>
+                <a:cs typeface="Georgia" pitchFamily="34" charset="-120"/>
+              </a:rPr>
+              <a:t>4</a:t>
+            </a:r>
+            <a:endParaRPr lang="en-US" sz="1900" dirty="0"/>
+          </a:p>
+        </p:txBody>
+      </p:sp>
+      <p:sp>
+        <p:nvSpPr>
+          <p:cNvPr id="17" name="Text 15"/>
+          <p:cNvSpPr/>
+          <p:nvPr/>
+        </p:nvSpPr>
+        <p:spPr>
+          <a:xfrm>
+            <a:off x="1417320" y="4507992"/>
+            <a:ext cx="6126480" cy="685800"/>
+          </a:xfrm>
+          <a:prstGeom prst="rect">
+            <a:avLst/>
+          </a:prstGeom>
+          <a:noFill/>
+          <a:ln/>
+        </p:spPr>
+        <p:txBody>
+          <a:bodyPr wrap="square" lIns="0" tIns="0" rIns="0" bIns="0" rtlCol="0" anchor="ctr"/>
+          <a:lstStyle/>
+          <a:p>
+            <a:pPr indent="0" marL="0">
+              <a:buNone/>
+            </a:pPr>
+            <a:r>
+              <a:rPr lang="en-US" sz="1500" b="1" dirty="0">
+                <a:solidFill>
+                  <a:srgbClr val="1E293B"/>
+                </a:solidFill>
+                <a:latin typeface="Calibri" pitchFamily="34" charset="0"/>
+                <a:ea typeface="Calibri" pitchFamily="34" charset="-122"/>
+                <a:cs typeface="Calibri" pitchFamily="34" charset="-120"/>
+              </a:rPr>
+              <a:t>Infiere con la MISMA config</a:t>
+            </a:r>
+            <a:endParaRPr lang="en-US" sz="1500" dirty="0"/>
+          </a:p>
+          <a:p>
+            <a:pPr indent="0" marL="0">
+              <a:buNone/>
+            </a:pPr>
+            <a:r>
+              <a:rPr lang="en-US" sz="1200" dirty="0">
+                <a:solidFill>
+                  <a:srgbClr val="64748B"/>
+                </a:solidFill>
+                <a:latin typeface="Calibri" pitchFamily="34" charset="0"/>
+                <a:ea typeface="Calibri" pitchFamily="34" charset="-122"/>
+                <a:cs typeface="Calibri" pitchFamily="34" charset="-120"/>
+              </a:rPr>
+              <a:t>mismo slice / overlap / postproceso.</a:t>
+            </a:r>
+            <a:endParaRPr lang="en-US" sz="1500" dirty="0"/>
+          </a:p>
+        </p:txBody>
+      </p:sp>
+      <p:sp>
+        <p:nvSpPr>
+          <p:cNvPr id="18" name="Shape 16"/>
+          <p:cNvSpPr/>
+          <p:nvPr/>
+        </p:nvSpPr>
+        <p:spPr>
+          <a:xfrm>
+            <a:off x="7772400" y="2057400"/>
+            <a:ext cx="3794760" cy="2240280"/>
+          </a:xfrm>
+          <a:prstGeom prst="roundRect">
+            <a:avLst>
+              <a:gd name="adj" fmla="val 2449"/>
+            </a:avLst>
+          </a:prstGeom>
+          <a:solidFill>
+            <a:srgbClr val="0F2A43"/>
+          </a:solidFill>
+          <a:ln w="12700">
+            <a:solidFill>
+              <a:srgbClr val="0F2A43"/>
+            </a:solidFill>
+            <a:prstDash val="solid"/>
+          </a:ln>
+        </p:spPr>
+      </p:sp>
+      <p:sp>
+        <p:nvSpPr>
+          <p:cNvPr id="19" name="Text 17"/>
+          <p:cNvSpPr/>
+          <p:nvPr/>
+        </p:nvSpPr>
+        <p:spPr>
+          <a:xfrm>
+            <a:off x="7955280" y="2194560"/>
+            <a:ext cx="3474720" cy="1965960"/>
           </a:xfrm>
           <a:prstGeom prst="rect">
             <a:avLst/>
@@ -14466,19 +17230,315 @@
           <a:bodyPr wrap="square" lIns="0" tIns="0" rIns="0" bIns="0" rtlCol="0" anchor="t"/>
           <a:lstStyle/>
           <a:p>
-            <a:pPr algn="ctr" indent="0" marL="0">
+            <a:pPr indent="0" marL="0">
+              <a:buNone/>
+            </a:pPr>
+            <a:r>
+              <a:rPr lang="en-US" sz="1000" dirty="0">
+                <a:solidFill>
+                  <a:srgbClr val="9FE6C0"/>
+                </a:solidFill>
+                <a:latin typeface="Consolas" pitchFamily="34" charset="0"/>
+                <a:ea typeface="Consolas" pitchFamily="34" charset="-122"/>
+                <a:cs typeface="Consolas" pitchFamily="34" charset="-120"/>
+              </a:rPr>
+              <a:t>from sahi.slicing import slice_coco</a:t>
+            </a:r>
+            <a:endParaRPr lang="en-US" sz="1000" dirty="0"/>
+          </a:p>
+          <a:p>
+            <a:pPr indent="0" marL="0">
+              <a:buNone/>
+            </a:pPr>
+            <a:r>
+              <a:rPr lang="en-US" sz="1000" dirty="0">
+                <a:solidFill>
+                  <a:srgbClr val="FFFFFF"/>
+                </a:solidFill>
+                <a:latin typeface="Consolas" pitchFamily="34" charset="0"/>
+                <a:ea typeface="Consolas" pitchFamily="34" charset="-122"/>
+                <a:cs typeface="Consolas" pitchFamily="34" charset="-120"/>
+              </a:rPr>
+              <a:t>slice_coco(</a:t>
+            </a:r>
+            <a:endParaRPr lang="en-US" sz="1000" dirty="0"/>
+          </a:p>
+          <a:p>
+            <a:pPr indent="0" marL="0">
+              <a:buNone/>
+            </a:pPr>
+            <a:r>
+              <a:rPr lang="en-US" sz="1000" dirty="0">
+                <a:solidFill>
+                  <a:srgbClr val="CADCFC"/>
+                </a:solidFill>
+                <a:latin typeface="Consolas" pitchFamily="34" charset="0"/>
+                <a:ea typeface="Consolas" pitchFamily="34" charset="-122"/>
+                <a:cs typeface="Consolas" pitchFamily="34" charset="-120"/>
+              </a:rPr>
+              <a:t>  coco_annotation_file_path=...,</a:t>
+            </a:r>
+            <a:endParaRPr lang="en-US" sz="1000" dirty="0"/>
+          </a:p>
+          <a:p>
+            <a:pPr indent="0" marL="0">
+              <a:buNone/>
+            </a:pPr>
+            <a:r>
+              <a:rPr lang="en-US" sz="1000" dirty="0">
+                <a:solidFill>
+                  <a:srgbClr val="CADCFC"/>
+                </a:solidFill>
+                <a:latin typeface="Consolas" pitchFamily="34" charset="0"/>
+                <a:ea typeface="Consolas" pitchFamily="34" charset="-122"/>
+                <a:cs typeface="Consolas" pitchFamily="34" charset="-120"/>
+              </a:rPr>
+              <a:t>  image_dir=..., output_dir=...,</a:t>
+            </a:r>
+            <a:endParaRPr lang="en-US" sz="1000" dirty="0"/>
+          </a:p>
+          <a:p>
+            <a:pPr indent="0" marL="0">
+              <a:buNone/>
+            </a:pPr>
+            <a:r>
+              <a:rPr lang="en-US" sz="1000" dirty="0">
+                <a:solidFill>
+                  <a:srgbClr val="CADCFC"/>
+                </a:solidFill>
+                <a:latin typeface="Consolas" pitchFamily="34" charset="0"/>
+                <a:ea typeface="Consolas" pitchFamily="34" charset="-122"/>
+                <a:cs typeface="Consolas" pitchFamily="34" charset="-120"/>
+              </a:rPr>
+              <a:t>  slice_height=640, slice_width=640,</a:t>
+            </a:r>
+            <a:endParaRPr lang="en-US" sz="1000" dirty="0"/>
+          </a:p>
+          <a:p>
+            <a:pPr indent="0" marL="0">
+              <a:buNone/>
+            </a:pPr>
+            <a:r>
+              <a:rPr lang="en-US" sz="1000" dirty="0">
+                <a:solidFill>
+                  <a:srgbClr val="CADCFC"/>
+                </a:solidFill>
+                <a:latin typeface="Consolas" pitchFamily="34" charset="0"/>
+                <a:ea typeface="Consolas" pitchFamily="34" charset="-122"/>
+                <a:cs typeface="Consolas" pitchFamily="34" charset="-120"/>
+              </a:rPr>
+              <a:t>  overlap_height_ratio=0.2,</a:t>
+            </a:r>
+            <a:endParaRPr lang="en-US" sz="1000" dirty="0"/>
+          </a:p>
+          <a:p>
+            <a:pPr indent="0" marL="0">
+              <a:buNone/>
+            </a:pPr>
+            <a:r>
+              <a:rPr lang="en-US" sz="1000" dirty="0">
+                <a:solidFill>
+                  <a:srgbClr val="CADCFC"/>
+                </a:solidFill>
+                <a:latin typeface="Consolas" pitchFamily="34" charset="0"/>
+                <a:ea typeface="Consolas" pitchFamily="34" charset="-122"/>
+                <a:cs typeface="Consolas" pitchFamily="34" charset="-120"/>
+              </a:rPr>
+              <a:t>  overlap_width_ratio=0.2)</a:t>
+            </a:r>
+            <a:endParaRPr lang="en-US" sz="1000" dirty="0"/>
+          </a:p>
+          <a:p>
+            <a:pPr indent="0" marL="0">
+              <a:buNone/>
+            </a:pPr>
+            <a:r>
+              <a:rPr lang="en-US" sz="1000" dirty="0">
+                <a:solidFill>
+                  <a:srgbClr val="9FB3C8"/>
+                </a:solidFill>
+                <a:latin typeface="Consolas" pitchFamily="34" charset="0"/>
+                <a:ea typeface="Consolas" pitchFamily="34" charset="-122"/>
+                <a:cs typeface="Consolas" pitchFamily="34" charset="-120"/>
+              </a:rPr>
+              <a:t># luego: yolo train data=sliced.yaml</a:t>
+            </a:r>
+            <a:endParaRPr lang="en-US" sz="1000" dirty="0"/>
+          </a:p>
+        </p:txBody>
+      </p:sp>
+      <p:sp>
+        <p:nvSpPr>
+          <p:cNvPr id="20" name="Text 18"/>
+          <p:cNvSpPr/>
+          <p:nvPr/>
+        </p:nvSpPr>
+        <p:spPr>
+          <a:xfrm>
+            <a:off x="7772400" y="4480560"/>
+            <a:ext cx="3794760" cy="320040"/>
+          </a:xfrm>
+          <a:prstGeom prst="rect">
+            <a:avLst/>
+          </a:prstGeom>
+          <a:noFill/>
+          <a:ln/>
+        </p:spPr>
+        <p:txBody>
+          <a:bodyPr wrap="square" lIns="0" tIns="0" rIns="0" bIns="0" rtlCol="0" anchor="ctr"/>
+          <a:lstStyle/>
+          <a:p>
+            <a:pPr indent="0" marL="0">
+              <a:buNone/>
+            </a:pPr>
+            <a:r>
+              <a:rPr lang="en-US" sz="1500" b="1" dirty="0">
+                <a:solidFill>
+                  <a:srgbClr val="1E293B"/>
+                </a:solidFill>
+                <a:latin typeface="Georgia" pitchFamily="34" charset="0"/>
+                <a:ea typeface="Georgia" pitchFamily="34" charset="-122"/>
+                <a:cs typeface="Georgia" pitchFamily="34" charset="-120"/>
+              </a:rPr>
+              <a:t>Tips</a:t>
+            </a:r>
+            <a:endParaRPr lang="en-US" sz="1500" dirty="0"/>
+          </a:p>
+        </p:txBody>
+      </p:sp>
+      <p:sp>
+        <p:nvSpPr>
+          <p:cNvPr id="21" name="Text 19"/>
+          <p:cNvSpPr/>
+          <p:nvPr/>
+        </p:nvSpPr>
+        <p:spPr>
+          <a:xfrm>
+            <a:off x="7772400" y="4800600"/>
+            <a:ext cx="3794760" cy="1280160"/>
+          </a:xfrm>
+          <a:prstGeom prst="rect">
+            <a:avLst/>
+          </a:prstGeom>
+          <a:noFill/>
+          <a:ln/>
+        </p:spPr>
+        <p:txBody>
+          <a:bodyPr wrap="square" lIns="0" tIns="0" rIns="0" bIns="0" rtlCol="0" anchor="ctr"/>
+          <a:lstStyle/>
+          <a:p>
+            <a:pPr marL="342900" indent="-342900">
+              <a:spcAft>
+                <a:spcPts val="500"/>
+              </a:spcAft>
+              <a:buSzPct val="100000"/>
+              <a:buChar char="•"/>
+            </a:pPr>
+            <a:r>
+              <a:rPr lang="en-US" sz="1100" dirty="0">
+                <a:solidFill>
+                  <a:srgbClr val="1E293B"/>
+                </a:solidFill>
+                <a:latin typeface="Calibri" pitchFamily="34" charset="0"/>
+                <a:ea typeface="Calibri" pitchFamily="34" charset="-122"/>
+                <a:cs typeface="Calibri" pitchFamily="34" charset="-120"/>
+              </a:rPr>
+              <a:t>Conserva algunos slices sin objetos (negativos) → menos falsos positivos.</a:t>
+            </a:r>
+            <a:endParaRPr lang="en-US" sz="1100" dirty="0"/>
+          </a:p>
+          <a:p>
+            <a:pPr marL="342900" indent="-342900">
+              <a:spcAft>
+                <a:spcPts val="500"/>
+              </a:spcAft>
+              <a:buSzPct val="100000"/>
+              <a:buChar char="•"/>
+            </a:pPr>
+            <a:r>
+              <a:rPr lang="en-US" sz="1100" dirty="0">
+                <a:solidFill>
+                  <a:srgbClr val="1E293B"/>
+                </a:solidFill>
+                <a:latin typeface="Calibri" pitchFamily="34" charset="0"/>
+                <a:ea typeface="Calibri" pitchFamily="34" charset="-122"/>
+                <a:cs typeface="Calibri" pitchFamily="34" charset="-120"/>
+              </a:rPr>
+              <a:t>Usa overlap al cortar para no perder objetos en bordes.</a:t>
+            </a:r>
+            <a:endParaRPr lang="en-US" sz="1100" dirty="0"/>
+          </a:p>
+          <a:p>
+            <a:pPr marL="342900" indent="-342900">
+              <a:spcAft>
+                <a:spcPts val="500"/>
+              </a:spcAft>
+              <a:buSzPct val="100000"/>
+              <a:buChar char="•"/>
+            </a:pPr>
+            <a:r>
+              <a:rPr lang="en-US" sz="1100" dirty="0">
+                <a:solidFill>
+                  <a:srgbClr val="1E293B"/>
+                </a:solidFill>
+                <a:latin typeface="Calibri" pitchFamily="34" charset="0"/>
+                <a:ea typeface="Calibri" pitchFamily="34" charset="-122"/>
+                <a:cs typeface="Calibri" pitchFamily="34" charset="-120"/>
+              </a:rPr>
+              <a:t>Evalúa con la misma config de slicing.</a:t>
+            </a:r>
+            <a:endParaRPr lang="en-US" sz="1100" dirty="0"/>
+          </a:p>
+        </p:txBody>
+      </p:sp>
+      <p:sp>
+        <p:nvSpPr>
+          <p:cNvPr id="22" name="Text 20"/>
+          <p:cNvSpPr/>
+          <p:nvPr/>
+        </p:nvSpPr>
+        <p:spPr>
+          <a:xfrm>
+            <a:off x="640080" y="5440680"/>
+            <a:ext cx="6858000" cy="365760"/>
+          </a:xfrm>
+          <a:prstGeom prst="rect">
+            <a:avLst/>
+          </a:prstGeom>
+          <a:noFill/>
+          <a:ln/>
+        </p:spPr>
+        <p:txBody>
+          <a:bodyPr wrap="square" lIns="0" tIns="0" rIns="0" bIns="0" rtlCol="0" anchor="ctr"/>
+          <a:lstStyle/>
+          <a:p>
+            <a:pPr indent="0" marL="0">
+              <a:buNone/>
+            </a:pPr>
+            <a:r>
+              <a:rPr lang="en-US" sz="1200" b="1" dirty="0">
+                <a:solidFill>
+                  <a:srgbClr val="1E293B"/>
+                </a:solidFill>
+                <a:latin typeface="Calibri" pitchFamily="34" charset="0"/>
+                <a:ea typeface="Calibri" pitchFamily="34" charset="-122"/>
+                <a:cs typeface="Calibri" pitchFamily="34" charset="-120"/>
+              </a:rPr>
+              <a:t>Atajo CLI:  </a:t>
+            </a:r>
+            <a:pPr indent="0" marL="0">
               <a:buNone/>
             </a:pPr>
             <a:r>
               <a:rPr lang="en-US" sz="1200" dirty="0">
                 <a:solidFill>
-                  <a:srgbClr val="64748B"/>
-                </a:solidFill>
-                <a:latin typeface="Calibri" pitchFamily="34" charset="0"/>
-                <a:ea typeface="Calibri" pitchFamily="34" charset="-122"/>
-                <a:cs typeface="Calibri" pitchFamily="34" charset="-120"/>
-              </a:rPr>
-              <a:t>AP en objetos pequeños</a:t>
+                  <a:srgbClr val="0F2A43"/>
+                </a:solidFill>
+                <a:latin typeface="Consolas" pitchFamily="34" charset="0"/>
+                <a:ea typeface="Consolas" pitchFamily="34" charset="-122"/>
+                <a:cs typeface="Consolas" pitchFamily="34" charset="-120"/>
+              </a:rPr>
+              <a:t>sahi coco slice --slice_size 640 ...</a:t>
             </a:r>
             <a:endParaRPr lang="en-US" sz="1200" dirty="0"/>
           </a:p>
@@ -14486,46 +17546,7 @@
       </p:sp>
       <p:sp>
         <p:nvSpPr>
-          <p:cNvPr id="8" name="Text 5"/>
-          <p:cNvSpPr/>
-          <p:nvPr/>
-        </p:nvSpPr>
-        <p:spPr>
-          <a:xfrm>
-            <a:off x="8503920" y="3977640"/>
-            <a:ext cx="3063240" cy="1645920"/>
-          </a:xfrm>
-          <a:prstGeom prst="rect">
-            <a:avLst/>
-          </a:prstGeom>
-          <a:noFill/>
-          <a:ln/>
-        </p:spPr>
-        <p:txBody>
-          <a:bodyPr wrap="square" lIns="0" tIns="0" rIns="0" bIns="0" rtlCol="0" anchor="ctr"/>
-          <a:lstStyle/>
-          <a:p>
-            <a:pPr indent="0" marL="0">
-              <a:buNone/>
-            </a:pPr>
-            <a:r>
-              <a:rPr lang="en-US" sz="1300" dirty="0">
-                <a:solidFill>
-                  <a:srgbClr val="1E293B"/>
-                </a:solidFill>
-                <a:latin typeface="Calibri" pitchFamily="34" charset="0"/>
-                <a:ea typeface="Calibri" pitchFamily="34" charset="-122"/>
-                <a:cs typeface="Calibri" pitchFamily="34" charset="-120"/>
-              </a:rPr>
-              <a:t>El AP_small casi se duplica. En objetos grandes, SAHI no aporta (y puede bajar un poco): por eso existe el modo combinado.</a:t>
-            </a:r>
-            <a:endParaRPr lang="en-US" sz="1300" dirty="0"/>
-          </a:p>
-        </p:txBody>
-      </p:sp>
-      <p:sp>
-        <p:nvSpPr>
-          <p:cNvPr id="9" name="Text 6"/>
+          <p:cNvPr id="23" name="Text 21"/>
           <p:cNvSpPr/>
           <p:nvPr/>
         </p:nvSpPr>
@@ -14556,7 +17577,7 @@
                 <a:ea typeface="Calibri" pitchFamily="34" charset="-122"/>
                 <a:cs typeface="Calibri" pitchFamily="34" charset="-120"/>
               </a:rPr>
-              <a:t>◆ Valores de referencia; reemplaza con tu corrida (notebook 02).</a:t>
+              <a:t>◆ El fine-tuning estándar ya funciona; el sliced fine-tuning exprime el AP_small al máximo.</a:t>
             </a:r>
             <a:endParaRPr lang="en-US" sz="900" dirty="0"/>
           </a:p>
@@ -14564,7 +17585,7 @@
       </p:sp>
       <p:sp>
         <p:nvSpPr>
-          <p:cNvPr id="10" name="Text 7"/>
+          <p:cNvPr id="24" name="Text 22"/>
           <p:cNvSpPr/>
           <p:nvPr/>
         </p:nvSpPr>
@@ -14603,7 +17624,7 @@
       </p:sp>
       <p:sp>
         <p:nvSpPr>
-          <p:cNvPr id="11" name="Text 8"/>
+          <p:cNvPr id="25" name="Text 23"/>
           <p:cNvSpPr/>
           <p:nvPr/>
         </p:nvSpPr>
@@ -14654,7 +17675,7 @@
     <p:bg>
       <p:bgPr>
         <a:solidFill>
-          <a:srgbClr val="FFFFFF"/>
+          <a:srgbClr val="0F2A43"/>
         </a:solidFill>
       </p:bgPr>
     </p:bg>
@@ -14674,14 +17695,39 @@
       </p:grpSpPr>
       <p:sp>
         <p:nvSpPr>
-          <p:cNvPr id="2" name="Text 0"/>
-          <p:cNvSpPr/>
-          <p:nvPr/>
-        </p:nvSpPr>
-        <p:spPr>
-          <a:xfrm>
-            <a:off x="640080" y="502920"/>
-            <a:ext cx="10058400" cy="320040"/>
+          <p:cNvPr id="2" name="Shape 0"/>
+          <p:cNvSpPr/>
+          <p:nvPr/>
+        </p:nvSpPr>
+        <p:spPr>
+          <a:xfrm>
+            <a:off x="822960" y="2331720"/>
+            <a:ext cx="1371600" cy="1371600"/>
+          </a:xfrm>
+          <a:prstGeom prst="ellipse">
+            <a:avLst/>
+          </a:prstGeom>
+          <a:solidFill>
+            <a:srgbClr val="2E8B57"/>
+          </a:solidFill>
+          <a:ln w="12700">
+            <a:solidFill>
+              <a:srgbClr val="2E8B57"/>
+            </a:solidFill>
+            <a:prstDash val="solid"/>
+          </a:ln>
+        </p:spPr>
+      </p:sp>
+      <p:sp>
+        <p:nvSpPr>
+          <p:cNvPr id="3" name="Text 1"/>
+          <p:cNvSpPr/>
+          <p:nvPr/>
+        </p:nvSpPr>
+        <p:spPr>
+          <a:xfrm>
+            <a:off x="822960" y="2331720"/>
+            <a:ext cx="1371600" cy="1371600"/>
           </a:xfrm>
           <a:prstGeom prst="rect">
             <a:avLst/>
@@ -14693,101 +17739,122 @@
           <a:bodyPr wrap="square" lIns="0" tIns="0" rIns="0" bIns="0" rtlCol="0" anchor="ctr"/>
           <a:lstStyle/>
           <a:p>
-            <a:pPr indent="0" marL="0">
-              <a:buNone/>
-            </a:pPr>
-            <a:r>
-              <a:rPr lang="en-US" sz="1300" b="1" spc="300" kern="0" dirty="0">
-                <a:solidFill>
-                  <a:srgbClr val="2E8B57"/>
-                </a:solidFill>
-                <a:latin typeface="Calibri" pitchFamily="34" charset="0"/>
-                <a:ea typeface="Calibri" pitchFamily="34" charset="-122"/>
-                <a:cs typeface="Calibri" pitchFamily="34" charset="-120"/>
-              </a:rPr>
-              <a:t>CASO DE USO · SEGURIDAD CIUDADANA</a:t>
-            </a:r>
-            <a:endParaRPr lang="en-US" sz="1300" dirty="0"/>
-          </a:p>
-        </p:txBody>
-      </p:sp>
-      <p:sp>
-        <p:nvSpPr>
-          <p:cNvPr id="3" name="Text 1"/>
-          <p:cNvSpPr/>
-          <p:nvPr/>
-        </p:nvSpPr>
-        <p:spPr>
-          <a:xfrm>
-            <a:off x="640080" y="841248"/>
-            <a:ext cx="10972800" cy="868680"/>
-          </a:xfrm>
-          <a:prstGeom prst="rect">
-            <a:avLst/>
-          </a:prstGeom>
-          <a:noFill/>
-          <a:ln/>
-        </p:spPr>
-        <p:txBody>
-          <a:bodyPr wrap="square" lIns="0" tIns="0" rIns="0" bIns="0" rtlCol="0" anchor="ctr"/>
-          <a:lstStyle/>
-          <a:p>
-            <a:pPr indent="0" marL="0">
-              <a:buNone/>
-            </a:pPr>
-            <a:r>
-              <a:rPr lang="en-US" sz="3000" b="1" dirty="0">
-                <a:solidFill>
-                  <a:srgbClr val="1E293B"/>
+            <a:pPr algn="ctr" indent="0" marL="0">
+              <a:buNone/>
+            </a:pPr>
+            <a:r>
+              <a:rPr lang="en-US" sz="4400" b="1" dirty="0">
+                <a:solidFill>
+                  <a:srgbClr val="FFFFFF"/>
                 </a:solidFill>
                 <a:latin typeface="Georgia" pitchFamily="34" charset="0"/>
                 <a:ea typeface="Georgia" pitchFamily="34" charset="-122"/>
                 <a:cs typeface="Georgia" pitchFamily="34" charset="-120"/>
               </a:rPr>
-              <a:t>Más personas y motos detectadas</a:t>
-            </a:r>
-            <a:endParaRPr lang="en-US" sz="3000" dirty="0"/>
-          </a:p>
-        </p:txBody>
-      </p:sp>
-      <p:graphicFrame>
-        <p:nvGraphicFramePr>
-          <p:cNvPr id="4" name="Chart 0" descr=""/>
-          <p:cNvGraphicFramePr/>
-          <p:nvPr/>
-        </p:nvGraphicFramePr>
-        <p:xfrm>
-          <a:off x="640080" y="1920240"/>
-          <a:ext cx="7498080" cy="3840480"/>
-        </p:xfrm>
-        <a:graphic xmlns:a="http://schemas.openxmlformats.org/drawingml/2006/main">
-          <a:graphicData uri="http://schemas.openxmlformats.org/drawingml/2006/chart">
-            <c:chart xmlns:c="http://schemas.openxmlformats.org/drawingml/2006/chart" r:id="rId1"/>
-          </a:graphicData>
-        </a:graphic>
-      </p:graphicFrame>
-      <p:sp>
-        <p:nvSpPr>
-          <p:cNvPr id="5" name="Shape 2"/>
-          <p:cNvSpPr/>
-          <p:nvPr/>
-        </p:nvSpPr>
-        <p:spPr>
-          <a:xfrm>
-            <a:off x="8503920" y="2103120"/>
-            <a:ext cx="3063240" cy="3474720"/>
-          </a:xfrm>
-          <a:prstGeom prst="roundRect">
-            <a:avLst>
-              <a:gd name="adj" fmla="val 2388"/>
-            </a:avLst>
+              <a:t>05</a:t>
+            </a:r>
+            <a:endParaRPr lang="en-US" sz="4400" dirty="0"/>
+          </a:p>
+        </p:txBody>
+      </p:sp>
+      <p:sp>
+        <p:nvSpPr>
+          <p:cNvPr id="4" name="Text 2"/>
+          <p:cNvSpPr/>
+          <p:nvPr/>
+        </p:nvSpPr>
+        <p:spPr>
+          <a:xfrm>
+            <a:off x="2560320" y="2514600"/>
+            <a:ext cx="8686800" cy="914400"/>
+          </a:xfrm>
+          <a:prstGeom prst="rect">
+            <a:avLst/>
+          </a:prstGeom>
+          <a:noFill/>
+          <a:ln/>
+        </p:spPr>
+        <p:txBody>
+          <a:bodyPr wrap="square" lIns="0" tIns="0" rIns="0" bIns="0" rtlCol="0" anchor="ctr"/>
+          <a:lstStyle/>
+          <a:p>
+            <a:pPr indent="0" marL="0">
+              <a:buNone/>
+            </a:pPr>
+            <a:r>
+              <a:rPr lang="en-US" sz="4000" b="1" dirty="0">
+                <a:solidFill>
+                  <a:srgbClr val="FFFFFF"/>
+                </a:solidFill>
+                <a:latin typeface="Georgia" pitchFamily="34" charset="0"/>
+                <a:ea typeface="Georgia" pitchFamily="34" charset="-122"/>
+                <a:cs typeface="Georgia" pitchFamily="34" charset="-120"/>
+              </a:rPr>
+              <a:t>Resultados</a:t>
+            </a:r>
+            <a:endParaRPr lang="en-US" sz="4000" dirty="0"/>
+          </a:p>
+        </p:txBody>
+      </p:sp>
+      <p:sp>
+        <p:nvSpPr>
+          <p:cNvPr id="5" name="Text 3"/>
+          <p:cNvSpPr/>
+          <p:nvPr/>
+        </p:nvSpPr>
+        <p:spPr>
+          <a:xfrm>
+            <a:off x="2606040" y="3429000"/>
+            <a:ext cx="8503920" cy="548640"/>
+          </a:xfrm>
+          <a:prstGeom prst="rect">
+            <a:avLst/>
+          </a:prstGeom>
+          <a:noFill/>
+          <a:ln/>
+        </p:spPr>
+        <p:txBody>
+          <a:bodyPr wrap="square" lIns="0" tIns="0" rIns="0" bIns="0" rtlCol="0" anchor="ctr"/>
+          <a:lstStyle/>
+          <a:p>
+            <a:pPr indent="0" marL="0">
+              <a:buNone/>
+            </a:pPr>
+            <a:r>
+              <a:rPr lang="en-US" sz="1600" dirty="0">
+                <a:solidFill>
+                  <a:srgbClr val="9FB3C8"/>
+                </a:solidFill>
+                <a:latin typeface="Calibri" pitchFamily="34" charset="0"/>
+                <a:ea typeface="Calibri" pitchFamily="34" charset="-122"/>
+                <a:cs typeface="Calibri" pitchFamily="34" charset="-120"/>
+              </a:rPr>
+              <a:t>Lo que ganamos, medido contra el ground truth</a:t>
+            </a:r>
+            <a:endParaRPr lang="en-US" sz="1600" dirty="0"/>
+          </a:p>
+        </p:txBody>
+      </p:sp>
+      <p:sp>
+        <p:nvSpPr>
+          <p:cNvPr id="6" name="Shape 4"/>
+          <p:cNvSpPr/>
+          <p:nvPr/>
+        </p:nvSpPr>
+        <p:spPr>
+          <a:xfrm>
+            <a:off x="2606040" y="4206240"/>
+            <a:ext cx="310896" cy="310896"/>
+          </a:xfrm>
+          <a:prstGeom prst="rect">
+            <a:avLst/>
           </a:prstGeom>
           <a:solidFill>
-            <a:srgbClr val="0F2A43"/>
+            <a:srgbClr val="1C4A73"/>
           </a:solidFill>
-          <a:ln w="12700">
+          <a:ln w="6350">
             <a:solidFill>
-              <a:srgbClr val="0F2A43"/>
+              <a:srgbClr val="1C4A73"/>
             </a:solidFill>
             <a:prstDash val="solid"/>
           </a:ln>
@@ -14795,170 +17862,182 @@
       </p:sp>
       <p:sp>
         <p:nvSpPr>
-          <p:cNvPr id="6" name="Text 3"/>
-          <p:cNvSpPr/>
-          <p:nvPr/>
-        </p:nvSpPr>
-        <p:spPr>
-          <a:xfrm>
-            <a:off x="8732520" y="2331720"/>
-            <a:ext cx="2651760" cy="365760"/>
-          </a:xfrm>
-          <a:prstGeom prst="rect">
-            <a:avLst/>
-          </a:prstGeom>
-          <a:noFill/>
-          <a:ln/>
-        </p:spPr>
-        <p:txBody>
-          <a:bodyPr wrap="square" lIns="0" tIns="0" rIns="0" bIns="0" rtlCol="0" anchor="ctr"/>
-          <a:lstStyle/>
-          <a:p>
-            <a:pPr indent="0" marL="0">
-              <a:buNone/>
-            </a:pPr>
-            <a:r>
-              <a:rPr lang="en-US" sz="1600" b="1" dirty="0">
-                <a:solidFill>
-                  <a:srgbClr val="FFFFFF"/>
-                </a:solidFill>
-                <a:latin typeface="Georgia" pitchFamily="34" charset="0"/>
-                <a:ea typeface="Georgia" pitchFamily="34" charset="-122"/>
-                <a:cs typeface="Georgia" pitchFamily="34" charset="-120"/>
-              </a:rPr>
-              <a:t>Lo que importa</a:t>
-            </a:r>
-            <a:endParaRPr lang="en-US" sz="1600" dirty="0"/>
-          </a:p>
-        </p:txBody>
-      </p:sp>
-      <p:sp>
-        <p:nvSpPr>
-          <p:cNvPr id="7" name="Text 4"/>
-          <p:cNvSpPr/>
-          <p:nvPr/>
-        </p:nvSpPr>
-        <p:spPr>
-          <a:xfrm>
-            <a:off x="8732520" y="2834640"/>
-            <a:ext cx="2651760" cy="2743200"/>
-          </a:xfrm>
-          <a:prstGeom prst="rect">
-            <a:avLst/>
-          </a:prstGeom>
-          <a:noFill/>
-          <a:ln/>
-        </p:spPr>
-        <p:txBody>
-          <a:bodyPr wrap="square" lIns="0" tIns="0" rIns="0" bIns="0" rtlCol="0" anchor="ctr"/>
-          <a:lstStyle/>
-          <a:p>
-            <a:pPr marL="342900" indent="-342900">
-              <a:spcAft>
-                <a:spcPts val="1000"/>
-              </a:spcAft>
-              <a:buSzPct val="100000"/>
-              <a:buChar char="•"/>
-            </a:pPr>
-            <a:r>
-              <a:rPr lang="en-US" sz="1300" dirty="0">
-                <a:solidFill>
-                  <a:srgbClr val="CADCFC"/>
-                </a:solidFill>
-                <a:latin typeface="Calibri" pitchFamily="34" charset="0"/>
-                <a:ea typeface="Calibri" pitchFamily="34" charset="-122"/>
-                <a:cs typeface="Calibri" pitchFamily="34" charset="-120"/>
-              </a:rPr>
-              <a:t>El mayor salto está en peatones, personas y motos.</a:t>
-            </a:r>
-            <a:endParaRPr lang="en-US" sz="1300" dirty="0"/>
-          </a:p>
-          <a:p>
-            <a:pPr marL="342900" indent="-342900">
-              <a:spcAft>
-                <a:spcPts val="1000"/>
-              </a:spcAft>
-              <a:buSzPct val="100000"/>
-              <a:buChar char="•"/>
-            </a:pPr>
-            <a:r>
-              <a:rPr lang="en-US" sz="1300" dirty="0">
-                <a:solidFill>
-                  <a:srgbClr val="CADCFC"/>
-                </a:solidFill>
-                <a:latin typeface="Calibri" pitchFamily="34" charset="0"/>
-                <a:ea typeface="Calibri" pitchFamily="34" charset="-122"/>
-                <a:cs typeface="Calibri" pitchFamily="34" charset="-120"/>
-              </a:rPr>
-              <a:t>Justo las clases críticas para cámaras urbanas.</a:t>
-            </a:r>
-            <a:endParaRPr lang="en-US" sz="1300" dirty="0"/>
-          </a:p>
-          <a:p>
-            <a:pPr marL="342900" indent="-342900">
-              <a:spcAft>
-                <a:spcPts val="1000"/>
-              </a:spcAft>
-              <a:buSzPct val="100000"/>
-              <a:buChar char="•"/>
-            </a:pPr>
-            <a:r>
-              <a:rPr lang="en-US" sz="1300" b="1" dirty="0">
-                <a:solidFill>
-                  <a:srgbClr val="9FE6C0"/>
-                </a:solidFill>
-                <a:latin typeface="Calibri" pitchFamily="34" charset="0"/>
-                <a:ea typeface="Calibri" pitchFamily="34" charset="-122"/>
-                <a:cs typeface="Calibri" pitchFamily="34" charset="-120"/>
-              </a:rPr>
-              <a:t>Más cobertura = menos puntos ciegos.</a:t>
-            </a:r>
-            <a:endParaRPr lang="en-US" sz="1300" dirty="0"/>
-          </a:p>
-        </p:txBody>
-      </p:sp>
-      <p:sp>
-        <p:nvSpPr>
-          <p:cNvPr id="8" name="Text 5"/>
-          <p:cNvSpPr/>
-          <p:nvPr/>
-        </p:nvSpPr>
-        <p:spPr>
-          <a:xfrm>
-            <a:off x="640080" y="6144768"/>
-            <a:ext cx="10972800" cy="274320"/>
-          </a:xfrm>
-          <a:prstGeom prst="rect">
-            <a:avLst/>
-          </a:prstGeom>
-          <a:noFill/>
-          <a:ln/>
-        </p:spPr>
-        <p:txBody>
-          <a:bodyPr wrap="square" lIns="0" tIns="0" rIns="0" bIns="0" rtlCol="0" anchor="ctr"/>
-          <a:lstStyle/>
-          <a:p>
-            <a:pPr indent="0" marL="0">
-              <a:buNone/>
-            </a:pPr>
-            <a:r>
-              <a:rPr lang="en-US" sz="900" i="1" dirty="0">
-                <a:solidFill>
-                  <a:srgbClr val="64748B"/>
-                </a:solidFill>
-                <a:latin typeface="Calibri" pitchFamily="34" charset="0"/>
-                <a:ea typeface="Calibri" pitchFamily="34" charset="-122"/>
-                <a:cs typeface="Calibri" pitchFamily="34" charset="-120"/>
-              </a:rPr>
-              <a:t>◆ Detecciones por clase; valores de referencia (notebook 02 · analyze_classes).</a:t>
-            </a:r>
-            <a:endParaRPr lang="en-US" sz="900" dirty="0"/>
-          </a:p>
-        </p:txBody>
-      </p:sp>
-      <p:sp>
-        <p:nvSpPr>
-          <p:cNvPr id="9" name="Text 6"/>
+          <p:cNvPr id="7" name="Shape 5"/>
+          <p:cNvSpPr/>
+          <p:nvPr/>
+        </p:nvSpPr>
+        <p:spPr>
+          <a:xfrm>
+            <a:off x="2990088" y="4206240"/>
+            <a:ext cx="310896" cy="310896"/>
+          </a:xfrm>
+          <a:prstGeom prst="rect">
+            <a:avLst/>
+          </a:prstGeom>
+          <a:solidFill>
+            <a:srgbClr val="2E8B57"/>
+          </a:solidFill>
+          <a:ln w="6350">
+            <a:solidFill>
+              <a:srgbClr val="1C4A73"/>
+            </a:solidFill>
+            <a:prstDash val="solid"/>
+          </a:ln>
+        </p:spPr>
+      </p:sp>
+      <p:sp>
+        <p:nvSpPr>
+          <p:cNvPr id="8" name="Shape 6"/>
+          <p:cNvSpPr/>
+          <p:nvPr/>
+        </p:nvSpPr>
+        <p:spPr>
+          <a:xfrm>
+            <a:off x="3374136" y="4206240"/>
+            <a:ext cx="310896" cy="310896"/>
+          </a:xfrm>
+          <a:prstGeom prst="rect">
+            <a:avLst/>
+          </a:prstGeom>
+          <a:solidFill>
+            <a:srgbClr val="1C4A73"/>
+          </a:solidFill>
+          <a:ln w="6350">
+            <a:solidFill>
+              <a:srgbClr val="1C4A73"/>
+            </a:solidFill>
+            <a:prstDash val="solid"/>
+          </a:ln>
+        </p:spPr>
+      </p:sp>
+      <p:sp>
+        <p:nvSpPr>
+          <p:cNvPr id="9" name="Shape 7"/>
+          <p:cNvSpPr/>
+          <p:nvPr/>
+        </p:nvSpPr>
+        <p:spPr>
+          <a:xfrm>
+            <a:off x="3758184" y="4206240"/>
+            <a:ext cx="310896" cy="310896"/>
+          </a:xfrm>
+          <a:prstGeom prst="rect">
+            <a:avLst/>
+          </a:prstGeom>
+          <a:solidFill>
+            <a:srgbClr val="2E8B57"/>
+          </a:solidFill>
+          <a:ln w="6350">
+            <a:solidFill>
+              <a:srgbClr val="1C4A73"/>
+            </a:solidFill>
+            <a:prstDash val="solid"/>
+          </a:ln>
+        </p:spPr>
+      </p:sp>
+      <p:sp>
+        <p:nvSpPr>
+          <p:cNvPr id="10" name="Shape 8"/>
+          <p:cNvSpPr/>
+          <p:nvPr/>
+        </p:nvSpPr>
+        <p:spPr>
+          <a:xfrm>
+            <a:off x="4142232" y="4206240"/>
+            <a:ext cx="310896" cy="310896"/>
+          </a:xfrm>
+          <a:prstGeom prst="rect">
+            <a:avLst/>
+          </a:prstGeom>
+          <a:solidFill>
+            <a:srgbClr val="1C4A73"/>
+          </a:solidFill>
+          <a:ln w="6350">
+            <a:solidFill>
+              <a:srgbClr val="1C4A73"/>
+            </a:solidFill>
+            <a:prstDash val="solid"/>
+          </a:ln>
+        </p:spPr>
+      </p:sp>
+      <p:sp>
+        <p:nvSpPr>
+          <p:cNvPr id="11" name="Shape 9"/>
+          <p:cNvSpPr/>
+          <p:nvPr/>
+        </p:nvSpPr>
+        <p:spPr>
+          <a:xfrm>
+            <a:off x="4526280" y="4206240"/>
+            <a:ext cx="310896" cy="310896"/>
+          </a:xfrm>
+          <a:prstGeom prst="rect">
+            <a:avLst/>
+          </a:prstGeom>
+          <a:solidFill>
+            <a:srgbClr val="2E8B57"/>
+          </a:solidFill>
+          <a:ln w="6350">
+            <a:solidFill>
+              <a:srgbClr val="1C4A73"/>
+            </a:solidFill>
+            <a:prstDash val="solid"/>
+          </a:ln>
+        </p:spPr>
+      </p:sp>
+      <p:sp>
+        <p:nvSpPr>
+          <p:cNvPr id="12" name="Shape 10"/>
+          <p:cNvSpPr/>
+          <p:nvPr/>
+        </p:nvSpPr>
+        <p:spPr>
+          <a:xfrm>
+            <a:off x="4910328" y="4206240"/>
+            <a:ext cx="310896" cy="310896"/>
+          </a:xfrm>
+          <a:prstGeom prst="rect">
+            <a:avLst/>
+          </a:prstGeom>
+          <a:solidFill>
+            <a:srgbClr val="1C4A73"/>
+          </a:solidFill>
+          <a:ln w="6350">
+            <a:solidFill>
+              <a:srgbClr val="1C4A73"/>
+            </a:solidFill>
+            <a:prstDash val="solid"/>
+          </a:ln>
+        </p:spPr>
+      </p:sp>
+      <p:sp>
+        <p:nvSpPr>
+          <p:cNvPr id="13" name="Shape 11"/>
+          <p:cNvSpPr/>
+          <p:nvPr/>
+        </p:nvSpPr>
+        <p:spPr>
+          <a:xfrm>
+            <a:off x="5294376" y="4206240"/>
+            <a:ext cx="310896" cy="310896"/>
+          </a:xfrm>
+          <a:prstGeom prst="rect">
+            <a:avLst/>
+          </a:prstGeom>
+          <a:solidFill>
+            <a:srgbClr val="2E8B57"/>
+          </a:solidFill>
+          <a:ln w="6350">
+            <a:solidFill>
+              <a:srgbClr val="1C4A73"/>
+            </a:solidFill>
+            <a:prstDash val="solid"/>
+          </a:ln>
+        </p:spPr>
+      </p:sp>
+      <p:sp>
+        <p:nvSpPr>
+          <p:cNvPr id="14" name="Text 12"/>
           <p:cNvSpPr/>
           <p:nvPr/>
         </p:nvSpPr>
@@ -14983,7 +18062,7 @@
             <a:r>
               <a:rPr lang="en-US" sz="900" dirty="0">
                 <a:solidFill>
-                  <a:srgbClr val="64748B"/>
+                  <a:srgbClr val="9FB3C8"/>
                 </a:solidFill>
                 <a:latin typeface="Calibri" pitchFamily="34" charset="0"/>
                 <a:ea typeface="Calibri" pitchFamily="34" charset="-122"/>
@@ -14997,7 +18076,7 @@
       </p:sp>
       <p:sp>
         <p:nvSpPr>
-          <p:cNvPr id="10" name="Text 7"/>
+          <p:cNvPr id="15" name="Text 13"/>
           <p:cNvSpPr/>
           <p:nvPr/>
         </p:nvSpPr>
@@ -15022,7 +18101,7 @@
             <a:r>
               <a:rPr lang="en-US" sz="900" dirty="0">
                 <a:solidFill>
-                  <a:srgbClr val="64748B"/>
+                  <a:srgbClr val="9FB3C8"/>
                 </a:solidFill>
                 <a:latin typeface="Calibri" pitchFamily="34" charset="0"/>
                 <a:ea typeface="Calibri" pitchFamily="34" charset="-122"/>
@@ -15093,13 +18172,13 @@
             <a:r>
               <a:rPr lang="en-US" sz="1300" b="1" spc="300" kern="0" dirty="0">
                 <a:solidFill>
-                  <a:srgbClr val="3A6EA5"/>
-                </a:solidFill>
-                <a:latin typeface="Calibri" pitchFamily="34" charset="0"/>
-                <a:ea typeface="Calibri" pitchFamily="34" charset="-122"/>
-                <a:cs typeface="Calibri" pitchFamily="34" charset="-120"/>
-              </a:rPr>
-              <a:t>CRITERIO DE INGENIERÍA</a:t>
+                  <a:srgbClr val="2E8B57"/>
+                </a:solidFill>
+                <a:latin typeface="Calibri" pitchFamily="34" charset="0"/>
+                <a:ea typeface="Calibri" pitchFamily="34" charset="-122"/>
+                <a:cs typeface="Calibri" pitchFamily="34" charset="-120"/>
+              </a:rPr>
+              <a:t>BENCHMARK</a:t>
             </a:r>
             <a:endParaRPr lang="en-US" sz="1300" dirty="0"/>
           </a:p>
@@ -15138,56 +18217,65 @@
                 <a:ea typeface="Georgia" pitchFamily="34" charset="-122"/>
                 <a:cs typeface="Georgia" pitchFamily="34" charset="-120"/>
               </a:rPr>
-              <a:t>Cuándo usar SAHI (y cuándo no)</a:t>
+              <a:t>YOLO vs YOLO + SAHI (mAP COCO)</a:t>
             </a:r>
             <a:endParaRPr lang="en-US" sz="3000" dirty="0"/>
           </a:p>
         </p:txBody>
       </p:sp>
-      <p:sp>
-        <p:nvSpPr>
-          <p:cNvPr id="4" name="Shape 2"/>
-          <p:cNvSpPr/>
-          <p:nvPr/>
-        </p:nvSpPr>
-        <p:spPr>
-          <a:xfrm>
-            <a:off x="640080" y="1965960"/>
-            <a:ext cx="5394960" cy="3657600"/>
+      <p:graphicFrame>
+        <p:nvGraphicFramePr>
+          <p:cNvPr id="4" name="Chart 0" descr=""/>
+          <p:cNvGraphicFramePr/>
+          <p:nvPr/>
+        </p:nvGraphicFramePr>
+        <p:xfrm>
+          <a:off x="640080" y="1920240"/>
+          <a:ext cx="7315200" cy="3840480"/>
+        </p:xfrm>
+        <a:graphic xmlns:a="http://schemas.openxmlformats.org/drawingml/2006/main">
+          <a:graphicData uri="http://schemas.openxmlformats.org/drawingml/2006/chart">
+            <c:chart xmlns:c="http://schemas.openxmlformats.org/drawingml/2006/chart" r:id="rId1"/>
+          </a:graphicData>
+        </a:graphic>
+      </p:graphicFrame>
+      <p:sp>
+        <p:nvSpPr>
+          <p:cNvPr id="5" name="Shape 2"/>
+          <p:cNvSpPr/>
+          <p:nvPr/>
+        </p:nvSpPr>
+        <p:spPr>
+          <a:xfrm>
+            <a:off x="8321040" y="2103120"/>
+            <a:ext cx="3246120" cy="3383280"/>
           </a:xfrm>
           <a:prstGeom prst="roundRect">
             <a:avLst>
-              <a:gd name="adj" fmla="val 2000"/>
+              <a:gd name="adj" fmla="val 2254"/>
             </a:avLst>
           </a:prstGeom>
           <a:solidFill>
             <a:srgbClr val="F4F7FA"/>
           </a:solidFill>
-          <a:ln w="19050">
+          <a:ln w="12700">
             <a:solidFill>
-              <a:srgbClr val="2E8B57"/>
+              <a:srgbClr val="D8E0E8"/>
             </a:solidFill>
             <a:prstDash val="solid"/>
           </a:ln>
-          <a:effectLst>
-            <a:outerShdw sx="100000" sy="100000" kx="0" ky="0" algn="bl" rotWithShape="0" blurRad="114300" dist="38100" dir="5400000">
-              <a:srgbClr val="000000">
-                <a:alpha val="18000"/>
-              </a:srgbClr>
-            </a:outerShdw>
-          </a:effectLst>
-        </p:spPr>
-      </p:sp>
-      <p:sp>
-        <p:nvSpPr>
-          <p:cNvPr id="5" name="Text 3"/>
-          <p:cNvSpPr/>
-          <p:nvPr/>
-        </p:nvSpPr>
-        <p:spPr>
-          <a:xfrm>
-            <a:off x="868680" y="2148840"/>
-            <a:ext cx="4937760" cy="457200"/>
+        </p:spPr>
+      </p:sp>
+      <p:sp>
+        <p:nvSpPr>
+          <p:cNvPr id="6" name="Text 3"/>
+          <p:cNvSpPr/>
+          <p:nvPr/>
+        </p:nvSpPr>
+        <p:spPr>
+          <a:xfrm>
+            <a:off x="8549640" y="2286000"/>
+            <a:ext cx="2834640" cy="365760"/>
           </a:xfrm>
           <a:prstGeom prst="rect">
             <a:avLst/>
@@ -15203,30 +18291,30 @@
               <a:buNone/>
             </a:pPr>
             <a:r>
-              <a:rPr lang="en-US" sz="2000" b="1" dirty="0">
-                <a:solidFill>
-                  <a:srgbClr val="2E8B57"/>
+              <a:rPr lang="en-US" sz="1600" b="1" dirty="0">
+                <a:solidFill>
+                  <a:srgbClr val="1E293B"/>
                 </a:solidFill>
                 <a:latin typeface="Georgia" pitchFamily="34" charset="0"/>
                 <a:ea typeface="Georgia" pitchFamily="34" charset="-122"/>
                 <a:cs typeface="Georgia" pitchFamily="34" charset="-120"/>
               </a:rPr>
-              <a:t>SÍ conviene</a:t>
-            </a:r>
-            <a:endParaRPr lang="en-US" sz="2000" dirty="0"/>
-          </a:p>
-        </p:txBody>
-      </p:sp>
-      <p:sp>
-        <p:nvSpPr>
-          <p:cNvPr id="6" name="Text 4"/>
-          <p:cNvSpPr/>
-          <p:nvPr/>
-        </p:nvSpPr>
-        <p:spPr>
-          <a:xfrm>
-            <a:off x="868680" y="2743200"/>
-            <a:ext cx="4937760" cy="2743200"/>
+              <a:t>Lectura rápida</a:t>
+            </a:r>
+            <a:endParaRPr lang="en-US" sz="1600" dirty="0"/>
+          </a:p>
+        </p:txBody>
+      </p:sp>
+      <p:sp>
+        <p:nvSpPr>
+          <p:cNvPr id="7" name="Text 4"/>
+          <p:cNvSpPr/>
+          <p:nvPr/>
+        </p:nvSpPr>
+        <p:spPr>
+          <a:xfrm>
+            <a:off x="8549640" y="2788920"/>
+            <a:ext cx="2834640" cy="2468880"/>
           </a:xfrm>
           <a:prstGeom prst="rect">
             <a:avLst/>
@@ -15240,13 +18328,13 @@
           <a:p>
             <a:pPr marL="342900" indent="-342900">
               <a:spcAft>
-                <a:spcPts val="1200"/>
+                <a:spcPts val="1000"/>
               </a:spcAft>
               <a:buSzPct val="100000"/>
               <a:buChar char="•"/>
             </a:pPr>
             <a:r>
-              <a:rPr lang="en-US" sz="1400" dirty="0">
+              <a:rPr lang="en-US" sz="1300" dirty="0">
                 <a:solidFill>
                   <a:srgbClr val="1E293B"/>
                 </a:solidFill>
@@ -15254,20 +18342,20 @@
                 <a:ea typeface="Calibri" pitchFamily="34" charset="-122"/>
                 <a:cs typeface="Calibri" pitchFamily="34" charset="-120"/>
               </a:rPr>
-              <a:t>Objetos pequeños / lejanos (dron, satélite, CCTV).</a:t>
-            </a:r>
-            <a:endParaRPr lang="en-US" sz="1400" dirty="0"/>
+              <a:t>Mejora en todas las métricas.</a:t>
+            </a:r>
+            <a:endParaRPr lang="en-US" sz="1300" dirty="0"/>
           </a:p>
           <a:p>
             <a:pPr marL="342900" indent="-342900">
               <a:spcAft>
-                <a:spcPts val="1200"/>
+                <a:spcPts val="1000"/>
               </a:spcAft>
               <a:buSzPct val="100000"/>
               <a:buChar char="•"/>
             </a:pPr>
             <a:r>
-              <a:rPr lang="en-US" sz="1400" dirty="0">
+              <a:rPr lang="en-US" sz="1300" dirty="0">
                 <a:solidFill>
                   <a:srgbClr val="1E293B"/>
                 </a:solidFill>
@@ -15275,98 +18363,43 @@
                 <a:ea typeface="Calibri" pitchFamily="34" charset="-122"/>
                 <a:cs typeface="Calibri" pitchFamily="34" charset="-120"/>
               </a:rPr>
-              <a:t>Imágenes de alta resolución.</a:t>
-            </a:r>
-            <a:endParaRPr lang="en-US" sz="1400" dirty="0"/>
+              <a:t>El salto más grande está en el umbral estricto (.75).</a:t>
+            </a:r>
+            <a:endParaRPr lang="en-US" sz="1300" dirty="0"/>
           </a:p>
           <a:p>
             <a:pPr marL="342900" indent="-342900">
               <a:spcAft>
-                <a:spcPts val="1200"/>
+                <a:spcPts val="1000"/>
               </a:spcAft>
               <a:buSzPct val="100000"/>
               <a:buChar char="•"/>
             </a:pPr>
             <a:r>
-              <a:rPr lang="en-US" sz="1400" dirty="0">
-                <a:solidFill>
-                  <a:srgbClr val="1E293B"/>
-                </a:solidFill>
-                <a:latin typeface="Calibri" pitchFamily="34" charset="0"/>
-                <a:ea typeface="Calibri" pitchFamily="34" charset="-122"/>
-                <a:cs typeface="Calibri" pitchFamily="34" charset="-120"/>
-              </a:rPr>
-              <a:t>Escenas densas con muchos objetos.</a:t>
-            </a:r>
-            <a:endParaRPr lang="en-US" sz="1400" dirty="0"/>
-          </a:p>
-          <a:p>
-            <a:pPr marL="342900" indent="-342900">
-              <a:spcAft>
-                <a:spcPts val="1200"/>
-              </a:spcAft>
-              <a:buSzPct val="100000"/>
-              <a:buChar char="•"/>
-            </a:pPr>
-            <a:r>
-              <a:rPr lang="en-US" sz="1400" dirty="0">
-                <a:solidFill>
-                  <a:srgbClr val="1E293B"/>
-                </a:solidFill>
-                <a:latin typeface="Calibri" pitchFamily="34" charset="0"/>
-                <a:ea typeface="Calibri" pitchFamily="34" charset="-122"/>
-                <a:cs typeface="Calibri" pitchFamily="34" charset="-120"/>
-              </a:rPr>
-              <a:t>La precisión importa más que el tiempo real.</a:t>
-            </a:r>
-            <a:endParaRPr lang="en-US" sz="1400" dirty="0"/>
-          </a:p>
-        </p:txBody>
-      </p:sp>
-      <p:sp>
-        <p:nvSpPr>
-          <p:cNvPr id="7" name="Shape 5"/>
-          <p:cNvSpPr/>
-          <p:nvPr/>
-        </p:nvSpPr>
-        <p:spPr>
-          <a:xfrm>
-            <a:off x="6309360" y="1965960"/>
-            <a:ext cx="5257800" cy="3657600"/>
-          </a:xfrm>
-          <a:prstGeom prst="roundRect">
-            <a:avLst>
-              <a:gd name="adj" fmla="val 2000"/>
-            </a:avLst>
-          </a:prstGeom>
-          <a:solidFill>
-            <a:srgbClr val="F4F7FA"/>
-          </a:solidFill>
-          <a:ln w="19050">
-            <a:solidFill>
-              <a:srgbClr val="E4572E"/>
-            </a:solidFill>
-            <a:prstDash val="solid"/>
-          </a:ln>
-          <a:effectLst>
-            <a:outerShdw sx="100000" sy="100000" kx="0" ky="0" algn="bl" rotWithShape="0" blurRad="114300" dist="38100" dir="5400000">
-              <a:srgbClr val="000000">
-                <a:alpha val="18000"/>
-              </a:srgbClr>
-            </a:outerShdw>
-          </a:effectLst>
-        </p:spPr>
-      </p:sp>
-      <p:sp>
-        <p:nvSpPr>
-          <p:cNvPr id="8" name="Text 6"/>
-          <p:cNvSpPr/>
-          <p:nvPr/>
-        </p:nvSpPr>
-        <p:spPr>
-          <a:xfrm>
-            <a:off x="6537960" y="2148840"/>
-            <a:ext cx="4846320" cy="457200"/>
+              <a:rPr lang="en-US" sz="1300" b="1" dirty="0">
+                <a:solidFill>
+                  <a:srgbClr val="2E8B57"/>
+                </a:solidFill>
+                <a:latin typeface="Calibri" pitchFamily="34" charset="0"/>
+                <a:ea typeface="Calibri" pitchFamily="34" charset="-122"/>
+                <a:cs typeface="Calibri" pitchFamily="34" charset="-120"/>
+              </a:rPr>
+              <a:t>SAHI = más recall sin perder precisión.</a:t>
+            </a:r>
+            <a:endParaRPr lang="en-US" sz="1300" dirty="0"/>
+          </a:p>
+        </p:txBody>
+      </p:sp>
+      <p:sp>
+        <p:nvSpPr>
+          <p:cNvPr id="8" name="Text 5"/>
+          <p:cNvSpPr/>
+          <p:nvPr/>
+        </p:nvSpPr>
+        <p:spPr>
+          <a:xfrm>
+            <a:off x="640080" y="6144768"/>
+            <a:ext cx="10972800" cy="274320"/>
           </a:xfrm>
           <a:prstGeom prst="rect">
             <a:avLst/>
@@ -15382,129 +18415,23 @@
               <a:buNone/>
             </a:pPr>
             <a:r>
-              <a:rPr lang="en-US" sz="2000" b="1" dirty="0">
-                <a:solidFill>
-                  <a:srgbClr val="E4572E"/>
-                </a:solidFill>
-                <a:latin typeface="Georgia" pitchFamily="34" charset="0"/>
-                <a:ea typeface="Georgia" pitchFamily="34" charset="-122"/>
-                <a:cs typeface="Georgia" pitchFamily="34" charset="-120"/>
-              </a:rPr>
-              <a:t>NO hace falta</a:t>
-            </a:r>
-            <a:endParaRPr lang="en-US" sz="2000" dirty="0"/>
-          </a:p>
-        </p:txBody>
-      </p:sp>
-      <p:sp>
-        <p:nvSpPr>
-          <p:cNvPr id="9" name="Text 7"/>
-          <p:cNvSpPr/>
-          <p:nvPr/>
-        </p:nvSpPr>
-        <p:spPr>
-          <a:xfrm>
-            <a:off x="6537960" y="2743200"/>
-            <a:ext cx="4846320" cy="2743200"/>
-          </a:xfrm>
-          <a:prstGeom prst="rect">
-            <a:avLst/>
-          </a:prstGeom>
-          <a:noFill/>
-          <a:ln/>
-        </p:spPr>
-        <p:txBody>
-          <a:bodyPr wrap="square" lIns="0" tIns="0" rIns="0" bIns="0" rtlCol="0" anchor="ctr"/>
-          <a:lstStyle/>
-          <a:p>
-            <a:pPr marL="342900" indent="-342900">
-              <a:spcAft>
-                <a:spcPts val="1200"/>
-              </a:spcAft>
-              <a:buSzPct val="100000"/>
-              <a:buChar char="•"/>
-            </a:pPr>
-            <a:r>
-              <a:rPr lang="en-US" sz="1400" dirty="0">
-                <a:solidFill>
-                  <a:srgbClr val="1E293B"/>
-                </a:solidFill>
-                <a:latin typeface="Calibri" pitchFamily="34" charset="0"/>
-                <a:ea typeface="Calibri" pitchFamily="34" charset="-122"/>
-                <a:cs typeface="Calibri" pitchFamily="34" charset="-120"/>
-              </a:rPr>
-              <a:t>Objetos grandes que llenan el frame.</a:t>
-            </a:r>
-            <a:endParaRPr lang="en-US" sz="1400" dirty="0"/>
-          </a:p>
-          <a:p>
-            <a:pPr marL="342900" indent="-342900">
-              <a:spcAft>
-                <a:spcPts val="1200"/>
-              </a:spcAft>
-              <a:buSzPct val="100000"/>
-              <a:buChar char="•"/>
-            </a:pPr>
-            <a:r>
-              <a:rPr lang="en-US" sz="1400" dirty="0">
-                <a:solidFill>
-                  <a:srgbClr val="1E293B"/>
-                </a:solidFill>
-                <a:latin typeface="Calibri" pitchFamily="34" charset="0"/>
-                <a:ea typeface="Calibri" pitchFamily="34" charset="-122"/>
-                <a:cs typeface="Calibri" pitchFamily="34" charset="-120"/>
-              </a:rPr>
-              <a:t>Tiempo real estricto sin GPU.</a:t>
-            </a:r>
-            <a:endParaRPr lang="en-US" sz="1400" dirty="0"/>
-          </a:p>
-          <a:p>
-            <a:pPr marL="342900" indent="-342900">
-              <a:spcAft>
-                <a:spcPts val="1200"/>
-              </a:spcAft>
-              <a:buSzPct val="100000"/>
-              <a:buChar char="•"/>
-            </a:pPr>
-            <a:r>
-              <a:rPr lang="en-US" sz="1400" dirty="0">
-                <a:solidFill>
-                  <a:srgbClr val="1E293B"/>
-                </a:solidFill>
-                <a:latin typeface="Calibri" pitchFamily="34" charset="0"/>
-                <a:ea typeface="Calibri" pitchFamily="34" charset="-122"/>
-                <a:cs typeface="Calibri" pitchFamily="34" charset="-120"/>
-              </a:rPr>
-              <a:t>Costo ≈ proporcional al nº de slices.</a:t>
-            </a:r>
-            <a:endParaRPr lang="en-US" sz="1400" dirty="0"/>
-          </a:p>
-          <a:p>
-            <a:pPr marL="342900" indent="-342900">
-              <a:spcAft>
-                <a:spcPts val="1200"/>
-              </a:spcAft>
-              <a:buSzPct val="100000"/>
-              <a:buChar char="•"/>
-            </a:pPr>
-            <a:r>
-              <a:rPr lang="en-US" sz="1400" b="1" dirty="0">
-                <a:solidFill>
-                  <a:srgbClr val="1E293B"/>
-                </a:solidFill>
-                <a:latin typeface="Calibri" pitchFamily="34" charset="0"/>
-                <a:ea typeface="Calibri" pitchFamily="34" charset="-122"/>
-                <a:cs typeface="Calibri" pitchFamily="34" charset="-120"/>
-              </a:rPr>
-              <a:t>Regla: bisturí para lo pequeño, no martillo para todo.</a:t>
-            </a:r>
-            <a:endParaRPr lang="en-US" sz="1400" dirty="0"/>
-          </a:p>
-        </p:txBody>
-      </p:sp>
-      <p:sp>
-        <p:nvSpPr>
-          <p:cNvPr id="10" name="Text 8"/>
+              <a:rPr lang="en-US" sz="900" i="1" dirty="0">
+                <a:solidFill>
+                  <a:srgbClr val="64748B"/>
+                </a:solidFill>
+                <a:latin typeface="Calibri" pitchFamily="34" charset="0"/>
+                <a:ea typeface="Calibri" pitchFamily="34" charset="-122"/>
+                <a:cs typeface="Calibri" pitchFamily="34" charset="-120"/>
+              </a:rPr>
+              <a:t>◆ Valores de referencia (yolo11s fine-tuned en VisDrone); reemplaza con tu corrida (notebook 02).</a:t>
+            </a:r>
+            <a:endParaRPr lang="en-US" sz="900" dirty="0"/>
+          </a:p>
+        </p:txBody>
+      </p:sp>
+      <p:sp>
+        <p:nvSpPr>
+          <p:cNvPr id="9" name="Text 6"/>
           <p:cNvSpPr/>
           <p:nvPr/>
         </p:nvSpPr>
@@ -15543,7 +18470,7 @@
       </p:sp>
       <p:sp>
         <p:nvSpPr>
-          <p:cNvPr id="11" name="Text 9"/>
+          <p:cNvPr id="10" name="Text 7"/>
           <p:cNvSpPr/>
           <p:nvPr/>
         </p:nvSpPr>
@@ -15639,6 +18566,1340 @@
             <a:r>
               <a:rPr lang="en-US" sz="1300" b="1" spc="300" kern="0" dirty="0">
                 <a:solidFill>
+                  <a:srgbClr val="2E8B57"/>
+                </a:solidFill>
+                <a:latin typeface="Calibri" pitchFamily="34" charset="0"/>
+                <a:ea typeface="Calibri" pitchFamily="34" charset="-122"/>
+                <a:cs typeface="Calibri" pitchFamily="34" charset="-120"/>
+              </a:rPr>
+              <a:t>EL RESULTADO ESTRELLA</a:t>
+            </a:r>
+            <a:endParaRPr lang="en-US" sz="1300" dirty="0"/>
+          </a:p>
+        </p:txBody>
+      </p:sp>
+      <p:sp>
+        <p:nvSpPr>
+          <p:cNvPr id="3" name="Text 1"/>
+          <p:cNvSpPr/>
+          <p:nvPr/>
+        </p:nvSpPr>
+        <p:spPr>
+          <a:xfrm>
+            <a:off x="640080" y="841248"/>
+            <a:ext cx="10972800" cy="868680"/>
+          </a:xfrm>
+          <a:prstGeom prst="rect">
+            <a:avLst/>
+          </a:prstGeom>
+          <a:noFill/>
+          <a:ln/>
+        </p:spPr>
+        <p:txBody>
+          <a:bodyPr wrap="square" lIns="0" tIns="0" rIns="0" bIns="0" rtlCol="0" anchor="ctr"/>
+          <a:lstStyle/>
+          <a:p>
+            <a:pPr indent="0" marL="0">
+              <a:buNone/>
+            </a:pPr>
+            <a:r>
+              <a:rPr lang="en-US" sz="3000" b="1" dirty="0">
+                <a:solidFill>
+                  <a:srgbClr val="1E293B"/>
+                </a:solidFill>
+                <a:latin typeface="Georgia" pitchFamily="34" charset="0"/>
+                <a:ea typeface="Georgia" pitchFamily="34" charset="-122"/>
+                <a:cs typeface="Georgia" pitchFamily="34" charset="-120"/>
+              </a:rPr>
+              <a:t>Donde SAHI brilla: objetos pequeños</a:t>
+            </a:r>
+            <a:endParaRPr lang="en-US" sz="3000" dirty="0"/>
+          </a:p>
+        </p:txBody>
+      </p:sp>
+      <p:graphicFrame>
+        <p:nvGraphicFramePr>
+          <p:cNvPr id="4" name="Chart 0" descr=""/>
+          <p:cNvGraphicFramePr/>
+          <p:nvPr/>
+        </p:nvGraphicFramePr>
+        <p:xfrm>
+          <a:off x="640080" y="1920240"/>
+          <a:ext cx="7498080" cy="3840480"/>
+        </p:xfrm>
+        <a:graphic xmlns:a="http://schemas.openxmlformats.org/drawingml/2006/main">
+          <a:graphicData uri="http://schemas.openxmlformats.org/drawingml/2006/chart">
+            <c:chart xmlns:c="http://schemas.openxmlformats.org/drawingml/2006/chart" r:id="rId1"/>
+          </a:graphicData>
+        </a:graphic>
+      </p:graphicFrame>
+      <p:sp>
+        <p:nvSpPr>
+          <p:cNvPr id="5" name="Shape 2"/>
+          <p:cNvSpPr/>
+          <p:nvPr/>
+        </p:nvSpPr>
+        <p:spPr>
+          <a:xfrm>
+            <a:off x="8503920" y="2377440"/>
+            <a:ext cx="3017520" cy="1417320"/>
+          </a:xfrm>
+          <a:prstGeom prst="roundRect">
+            <a:avLst>
+              <a:gd name="adj" fmla="val 5161"/>
+            </a:avLst>
+          </a:prstGeom>
+          <a:solidFill>
+            <a:srgbClr val="F4F7FA"/>
+          </a:solidFill>
+          <a:ln w="12700">
+            <a:solidFill>
+              <a:srgbClr val="D8E0E8"/>
+            </a:solidFill>
+            <a:prstDash val="solid"/>
+          </a:ln>
+          <a:effectLst>
+            <a:outerShdw sx="100000" sy="100000" kx="0" ky="0" algn="bl" rotWithShape="0" blurRad="114300" dist="38100" dir="5400000">
+              <a:srgbClr val="000000">
+                <a:alpha val="18000"/>
+              </a:srgbClr>
+            </a:outerShdw>
+          </a:effectLst>
+        </p:spPr>
+      </p:sp>
+      <p:sp>
+        <p:nvSpPr>
+          <p:cNvPr id="6" name="Text 3"/>
+          <p:cNvSpPr/>
+          <p:nvPr/>
+        </p:nvSpPr>
+        <p:spPr>
+          <a:xfrm>
+            <a:off x="8503920" y="2487168"/>
+            <a:ext cx="3017520" cy="777240"/>
+          </a:xfrm>
+          <a:prstGeom prst="rect">
+            <a:avLst/>
+          </a:prstGeom>
+          <a:noFill/>
+          <a:ln/>
+        </p:spPr>
+        <p:txBody>
+          <a:bodyPr wrap="square" lIns="0" tIns="0" rIns="0" bIns="0" rtlCol="0" anchor="ctr"/>
+          <a:lstStyle/>
+          <a:p>
+            <a:pPr algn="ctr" indent="0" marL="0">
+              <a:buNone/>
+            </a:pPr>
+            <a:r>
+              <a:rPr lang="en-US" sz="4000" b="1" dirty="0">
+                <a:solidFill>
+                  <a:srgbClr val="2E8B57"/>
+                </a:solidFill>
+                <a:latin typeface="Georgia" pitchFamily="34" charset="0"/>
+                <a:ea typeface="Georgia" pitchFamily="34" charset="-122"/>
+                <a:cs typeface="Georgia" pitchFamily="34" charset="-120"/>
+              </a:rPr>
+              <a:t>+100%</a:t>
+            </a:r>
+            <a:endParaRPr lang="en-US" sz="4000" dirty="0"/>
+          </a:p>
+        </p:txBody>
+      </p:sp>
+      <p:sp>
+        <p:nvSpPr>
+          <p:cNvPr id="7" name="Text 4"/>
+          <p:cNvSpPr/>
+          <p:nvPr/>
+        </p:nvSpPr>
+        <p:spPr>
+          <a:xfrm>
+            <a:off x="8641080" y="3273552"/>
+            <a:ext cx="2743200" cy="457200"/>
+          </a:xfrm>
+          <a:prstGeom prst="rect">
+            <a:avLst/>
+          </a:prstGeom>
+          <a:noFill/>
+          <a:ln/>
+        </p:spPr>
+        <p:txBody>
+          <a:bodyPr wrap="square" lIns="0" tIns="0" rIns="0" bIns="0" rtlCol="0" anchor="t"/>
+          <a:lstStyle/>
+          <a:p>
+            <a:pPr algn="ctr" indent="0" marL="0">
+              <a:buNone/>
+            </a:pPr>
+            <a:r>
+              <a:rPr lang="en-US" sz="1200" dirty="0">
+                <a:solidFill>
+                  <a:srgbClr val="64748B"/>
+                </a:solidFill>
+                <a:latin typeface="Calibri" pitchFamily="34" charset="0"/>
+                <a:ea typeface="Calibri" pitchFamily="34" charset="-122"/>
+                <a:cs typeface="Calibri" pitchFamily="34" charset="-120"/>
+              </a:rPr>
+              <a:t>AP en objetos pequeños</a:t>
+            </a:r>
+            <a:endParaRPr lang="en-US" sz="1200" dirty="0"/>
+          </a:p>
+        </p:txBody>
+      </p:sp>
+      <p:sp>
+        <p:nvSpPr>
+          <p:cNvPr id="8" name="Text 5"/>
+          <p:cNvSpPr/>
+          <p:nvPr/>
+        </p:nvSpPr>
+        <p:spPr>
+          <a:xfrm>
+            <a:off x="8503920" y="3977640"/>
+            <a:ext cx="3063240" cy="1645920"/>
+          </a:xfrm>
+          <a:prstGeom prst="rect">
+            <a:avLst/>
+          </a:prstGeom>
+          <a:noFill/>
+          <a:ln/>
+        </p:spPr>
+        <p:txBody>
+          <a:bodyPr wrap="square" lIns="0" tIns="0" rIns="0" bIns="0" rtlCol="0" anchor="ctr"/>
+          <a:lstStyle/>
+          <a:p>
+            <a:pPr indent="0" marL="0">
+              <a:buNone/>
+            </a:pPr>
+            <a:r>
+              <a:rPr lang="en-US" sz="1300" dirty="0">
+                <a:solidFill>
+                  <a:srgbClr val="1E293B"/>
+                </a:solidFill>
+                <a:latin typeface="Calibri" pitchFamily="34" charset="0"/>
+                <a:ea typeface="Calibri" pitchFamily="34" charset="-122"/>
+                <a:cs typeface="Calibri" pitchFamily="34" charset="-120"/>
+              </a:rPr>
+              <a:t>El AP_small casi se duplica. En objetos grandes, SAHI no aporta (y puede bajar un poco): por eso existe el modo combinado.</a:t>
+            </a:r>
+            <a:endParaRPr lang="en-US" sz="1300" dirty="0"/>
+          </a:p>
+        </p:txBody>
+      </p:sp>
+      <p:sp>
+        <p:nvSpPr>
+          <p:cNvPr id="9" name="Text 6"/>
+          <p:cNvSpPr/>
+          <p:nvPr/>
+        </p:nvSpPr>
+        <p:spPr>
+          <a:xfrm>
+            <a:off x="640080" y="6144768"/>
+            <a:ext cx="10972800" cy="274320"/>
+          </a:xfrm>
+          <a:prstGeom prst="rect">
+            <a:avLst/>
+          </a:prstGeom>
+          <a:noFill/>
+          <a:ln/>
+        </p:spPr>
+        <p:txBody>
+          <a:bodyPr wrap="square" lIns="0" tIns="0" rIns="0" bIns="0" rtlCol="0" anchor="ctr"/>
+          <a:lstStyle/>
+          <a:p>
+            <a:pPr indent="0" marL="0">
+              <a:buNone/>
+            </a:pPr>
+            <a:r>
+              <a:rPr lang="en-US" sz="900" i="1" dirty="0">
+                <a:solidFill>
+                  <a:srgbClr val="64748B"/>
+                </a:solidFill>
+                <a:latin typeface="Calibri" pitchFamily="34" charset="0"/>
+                <a:ea typeface="Calibri" pitchFamily="34" charset="-122"/>
+                <a:cs typeface="Calibri" pitchFamily="34" charset="-120"/>
+              </a:rPr>
+              <a:t>◆ Valores de referencia; reemplaza con tu corrida (notebook 02).</a:t>
+            </a:r>
+            <a:endParaRPr lang="en-US" sz="900" dirty="0"/>
+          </a:p>
+        </p:txBody>
+      </p:sp>
+      <p:sp>
+        <p:nvSpPr>
+          <p:cNvPr id="10" name="Text 7"/>
+          <p:cNvSpPr/>
+          <p:nvPr/>
+        </p:nvSpPr>
+        <p:spPr>
+          <a:xfrm>
+            <a:off x="457200" y="6446520"/>
+            <a:ext cx="7315200" cy="274320"/>
+          </a:xfrm>
+          <a:prstGeom prst="rect">
+            <a:avLst/>
+          </a:prstGeom>
+          <a:noFill/>
+          <a:ln/>
+        </p:spPr>
+        <p:txBody>
+          <a:bodyPr wrap="square" rtlCol="0" anchor="ctr"/>
+          <a:lstStyle/>
+          <a:p>
+            <a:pPr algn="l" indent="0" marL="0">
+              <a:buNone/>
+            </a:pPr>
+            <a:r>
+              <a:rPr lang="en-US" sz="900" dirty="0">
+                <a:solidFill>
+                  <a:srgbClr val="64748B"/>
+                </a:solidFill>
+                <a:latin typeface="Calibri" pitchFamily="34" charset="0"/>
+                <a:ea typeface="Calibri" pitchFamily="34" charset="-122"/>
+                <a:cs typeface="Calibri" pitchFamily="34" charset="-120"/>
+              </a:rPr>
+              <a:t>Computer Vision Open Source · YOLO + SAHI</a:t>
+            </a:r>
+            <a:endParaRPr lang="en-US" sz="900" dirty="0"/>
+          </a:p>
+        </p:txBody>
+      </p:sp>
+      <p:sp>
+        <p:nvSpPr>
+          <p:cNvPr id="11" name="Text 8"/>
+          <p:cNvSpPr/>
+          <p:nvPr/>
+        </p:nvSpPr>
+        <p:spPr>
+          <a:xfrm>
+            <a:off x="9905695" y="6446520"/>
+            <a:ext cx="1828800" cy="274320"/>
+          </a:xfrm>
+          <a:prstGeom prst="rect">
+            <a:avLst/>
+          </a:prstGeom>
+          <a:noFill/>
+          <a:ln/>
+        </p:spPr>
+        <p:txBody>
+          <a:bodyPr wrap="square" rtlCol="0" anchor="ctr"/>
+          <a:lstStyle/>
+          <a:p>
+            <a:pPr algn="r" indent="0" marL="0">
+              <a:buNone/>
+            </a:pPr>
+            <a:r>
+              <a:rPr lang="en-US" sz="900" dirty="0">
+                <a:solidFill>
+                  <a:srgbClr val="64748B"/>
+                </a:solidFill>
+                <a:latin typeface="Calibri" pitchFamily="34" charset="0"/>
+                <a:ea typeface="Calibri" pitchFamily="34" charset="-122"/>
+                <a:cs typeface="Calibri" pitchFamily="34" charset="-120"/>
+              </a:rPr>
+              <a:t>FLISOL 2026</a:t>
+            </a:r>
+            <a:endParaRPr lang="en-US" sz="900" dirty="0"/>
+          </a:p>
+        </p:txBody>
+      </p:sp>
+    </p:spTree>
+  </p:cSld>
+  <p:clrMapOvr>
+    <a:masterClrMapping/>
+  </p:clrMapOvr>
+</p:sld>
+</file>
+
+<file path=ppt/slides/slide26.xml><?xml version="1.0" encoding="utf-8"?>
+<p:sld xmlns:a="http://schemas.openxmlformats.org/drawingml/2006/main" xmlns:r="http://schemas.openxmlformats.org/officeDocument/2006/relationships" xmlns:p="http://schemas.openxmlformats.org/presentationml/2006/main">
+  <p:cSld name="Slide 26">
+    <p:bg>
+      <p:bgPr>
+        <a:solidFill>
+          <a:srgbClr val="FFFFFF"/>
+        </a:solidFill>
+      </p:bgPr>
+    </p:bg>
+    <p:spTree>
+      <p:nvGrpSpPr>
+        <p:cNvPr id="1" name=""/>
+        <p:cNvGrpSpPr/>
+        <p:nvPr/>
+      </p:nvGrpSpPr>
+      <p:grpSpPr>
+        <a:xfrm>
+          <a:off x="0" y="0"/>
+          <a:ext cx="0" cy="0"/>
+          <a:chOff x="0" y="0"/>
+          <a:chExt cx="0" cy="0"/>
+        </a:xfrm>
+      </p:grpSpPr>
+      <p:sp>
+        <p:nvSpPr>
+          <p:cNvPr id="2" name="Text 0"/>
+          <p:cNvSpPr/>
+          <p:nvPr/>
+        </p:nvSpPr>
+        <p:spPr>
+          <a:xfrm>
+            <a:off x="640080" y="502920"/>
+            <a:ext cx="10058400" cy="320040"/>
+          </a:xfrm>
+          <a:prstGeom prst="rect">
+            <a:avLst/>
+          </a:prstGeom>
+          <a:noFill/>
+          <a:ln/>
+        </p:spPr>
+        <p:txBody>
+          <a:bodyPr wrap="square" lIns="0" tIns="0" rIns="0" bIns="0" rtlCol="0" anchor="ctr"/>
+          <a:lstStyle/>
+          <a:p>
+            <a:pPr indent="0" marL="0">
+              <a:buNone/>
+            </a:pPr>
+            <a:r>
+              <a:rPr lang="en-US" sz="1300" b="1" spc="300" kern="0" dirty="0">
+                <a:solidFill>
+                  <a:srgbClr val="2E8B57"/>
+                </a:solidFill>
+                <a:latin typeface="Calibri" pitchFamily="34" charset="0"/>
+                <a:ea typeface="Calibri" pitchFamily="34" charset="-122"/>
+                <a:cs typeface="Calibri" pitchFamily="34" charset="-120"/>
+              </a:rPr>
+              <a:t>CASO DE USO · SEGURIDAD CIUDADANA</a:t>
+            </a:r>
+            <a:endParaRPr lang="en-US" sz="1300" dirty="0"/>
+          </a:p>
+        </p:txBody>
+      </p:sp>
+      <p:sp>
+        <p:nvSpPr>
+          <p:cNvPr id="3" name="Text 1"/>
+          <p:cNvSpPr/>
+          <p:nvPr/>
+        </p:nvSpPr>
+        <p:spPr>
+          <a:xfrm>
+            <a:off x="640080" y="841248"/>
+            <a:ext cx="10972800" cy="868680"/>
+          </a:xfrm>
+          <a:prstGeom prst="rect">
+            <a:avLst/>
+          </a:prstGeom>
+          <a:noFill/>
+          <a:ln/>
+        </p:spPr>
+        <p:txBody>
+          <a:bodyPr wrap="square" lIns="0" tIns="0" rIns="0" bIns="0" rtlCol="0" anchor="ctr"/>
+          <a:lstStyle/>
+          <a:p>
+            <a:pPr indent="0" marL="0">
+              <a:buNone/>
+            </a:pPr>
+            <a:r>
+              <a:rPr lang="en-US" sz="3000" b="1" dirty="0">
+                <a:solidFill>
+                  <a:srgbClr val="1E293B"/>
+                </a:solidFill>
+                <a:latin typeface="Georgia" pitchFamily="34" charset="0"/>
+                <a:ea typeface="Georgia" pitchFamily="34" charset="-122"/>
+                <a:cs typeface="Georgia" pitchFamily="34" charset="-120"/>
+              </a:rPr>
+              <a:t>Más personas y motos detectadas</a:t>
+            </a:r>
+            <a:endParaRPr lang="en-US" sz="3000" dirty="0"/>
+          </a:p>
+        </p:txBody>
+      </p:sp>
+      <p:graphicFrame>
+        <p:nvGraphicFramePr>
+          <p:cNvPr id="4" name="Chart 0" descr=""/>
+          <p:cNvGraphicFramePr/>
+          <p:nvPr/>
+        </p:nvGraphicFramePr>
+        <p:xfrm>
+          <a:off x="640080" y="1920240"/>
+          <a:ext cx="7498080" cy="3840480"/>
+        </p:xfrm>
+        <a:graphic xmlns:a="http://schemas.openxmlformats.org/drawingml/2006/main">
+          <a:graphicData uri="http://schemas.openxmlformats.org/drawingml/2006/chart">
+            <c:chart xmlns:c="http://schemas.openxmlformats.org/drawingml/2006/chart" r:id="rId1"/>
+          </a:graphicData>
+        </a:graphic>
+      </p:graphicFrame>
+      <p:sp>
+        <p:nvSpPr>
+          <p:cNvPr id="5" name="Shape 2"/>
+          <p:cNvSpPr/>
+          <p:nvPr/>
+        </p:nvSpPr>
+        <p:spPr>
+          <a:xfrm>
+            <a:off x="8503920" y="2103120"/>
+            <a:ext cx="3063240" cy="3474720"/>
+          </a:xfrm>
+          <a:prstGeom prst="roundRect">
+            <a:avLst>
+              <a:gd name="adj" fmla="val 2388"/>
+            </a:avLst>
+          </a:prstGeom>
+          <a:solidFill>
+            <a:srgbClr val="0F2A43"/>
+          </a:solidFill>
+          <a:ln w="12700">
+            <a:solidFill>
+              <a:srgbClr val="0F2A43"/>
+            </a:solidFill>
+            <a:prstDash val="solid"/>
+          </a:ln>
+        </p:spPr>
+      </p:sp>
+      <p:sp>
+        <p:nvSpPr>
+          <p:cNvPr id="6" name="Text 3"/>
+          <p:cNvSpPr/>
+          <p:nvPr/>
+        </p:nvSpPr>
+        <p:spPr>
+          <a:xfrm>
+            <a:off x="8732520" y="2331720"/>
+            <a:ext cx="2651760" cy="365760"/>
+          </a:xfrm>
+          <a:prstGeom prst="rect">
+            <a:avLst/>
+          </a:prstGeom>
+          <a:noFill/>
+          <a:ln/>
+        </p:spPr>
+        <p:txBody>
+          <a:bodyPr wrap="square" lIns="0" tIns="0" rIns="0" bIns="0" rtlCol="0" anchor="ctr"/>
+          <a:lstStyle/>
+          <a:p>
+            <a:pPr indent="0" marL="0">
+              <a:buNone/>
+            </a:pPr>
+            <a:r>
+              <a:rPr lang="en-US" sz="1600" b="1" dirty="0">
+                <a:solidFill>
+                  <a:srgbClr val="FFFFFF"/>
+                </a:solidFill>
+                <a:latin typeface="Georgia" pitchFamily="34" charset="0"/>
+                <a:ea typeface="Georgia" pitchFamily="34" charset="-122"/>
+                <a:cs typeface="Georgia" pitchFamily="34" charset="-120"/>
+              </a:rPr>
+              <a:t>Lo que importa</a:t>
+            </a:r>
+            <a:endParaRPr lang="en-US" sz="1600" dirty="0"/>
+          </a:p>
+        </p:txBody>
+      </p:sp>
+      <p:sp>
+        <p:nvSpPr>
+          <p:cNvPr id="7" name="Text 4"/>
+          <p:cNvSpPr/>
+          <p:nvPr/>
+        </p:nvSpPr>
+        <p:spPr>
+          <a:xfrm>
+            <a:off x="8732520" y="2834640"/>
+            <a:ext cx="2651760" cy="2743200"/>
+          </a:xfrm>
+          <a:prstGeom prst="rect">
+            <a:avLst/>
+          </a:prstGeom>
+          <a:noFill/>
+          <a:ln/>
+        </p:spPr>
+        <p:txBody>
+          <a:bodyPr wrap="square" lIns="0" tIns="0" rIns="0" bIns="0" rtlCol="0" anchor="ctr"/>
+          <a:lstStyle/>
+          <a:p>
+            <a:pPr marL="342900" indent="-342900">
+              <a:spcAft>
+                <a:spcPts val="1000"/>
+              </a:spcAft>
+              <a:buSzPct val="100000"/>
+              <a:buChar char="•"/>
+            </a:pPr>
+            <a:r>
+              <a:rPr lang="en-US" sz="1300" dirty="0">
+                <a:solidFill>
+                  <a:srgbClr val="CADCFC"/>
+                </a:solidFill>
+                <a:latin typeface="Calibri" pitchFamily="34" charset="0"/>
+                <a:ea typeface="Calibri" pitchFamily="34" charset="-122"/>
+                <a:cs typeface="Calibri" pitchFamily="34" charset="-120"/>
+              </a:rPr>
+              <a:t>El mayor salto está en peatones, personas y motos.</a:t>
+            </a:r>
+            <a:endParaRPr lang="en-US" sz="1300" dirty="0"/>
+          </a:p>
+          <a:p>
+            <a:pPr marL="342900" indent="-342900">
+              <a:spcAft>
+                <a:spcPts val="1000"/>
+              </a:spcAft>
+              <a:buSzPct val="100000"/>
+              <a:buChar char="•"/>
+            </a:pPr>
+            <a:r>
+              <a:rPr lang="en-US" sz="1300" dirty="0">
+                <a:solidFill>
+                  <a:srgbClr val="CADCFC"/>
+                </a:solidFill>
+                <a:latin typeface="Calibri" pitchFamily="34" charset="0"/>
+                <a:ea typeface="Calibri" pitchFamily="34" charset="-122"/>
+                <a:cs typeface="Calibri" pitchFamily="34" charset="-120"/>
+              </a:rPr>
+              <a:t>Justo las clases críticas para cámaras urbanas.</a:t>
+            </a:r>
+            <a:endParaRPr lang="en-US" sz="1300" dirty="0"/>
+          </a:p>
+          <a:p>
+            <a:pPr marL="342900" indent="-342900">
+              <a:spcAft>
+                <a:spcPts val="1000"/>
+              </a:spcAft>
+              <a:buSzPct val="100000"/>
+              <a:buChar char="•"/>
+            </a:pPr>
+            <a:r>
+              <a:rPr lang="en-US" sz="1300" b="1" dirty="0">
+                <a:solidFill>
+                  <a:srgbClr val="9FE6C0"/>
+                </a:solidFill>
+                <a:latin typeface="Calibri" pitchFamily="34" charset="0"/>
+                <a:ea typeface="Calibri" pitchFamily="34" charset="-122"/>
+                <a:cs typeface="Calibri" pitchFamily="34" charset="-120"/>
+              </a:rPr>
+              <a:t>Más cobertura = menos puntos ciegos.</a:t>
+            </a:r>
+            <a:endParaRPr lang="en-US" sz="1300" dirty="0"/>
+          </a:p>
+        </p:txBody>
+      </p:sp>
+      <p:sp>
+        <p:nvSpPr>
+          <p:cNvPr id="8" name="Text 5"/>
+          <p:cNvSpPr/>
+          <p:nvPr/>
+        </p:nvSpPr>
+        <p:spPr>
+          <a:xfrm>
+            <a:off x="640080" y="6144768"/>
+            <a:ext cx="10972800" cy="274320"/>
+          </a:xfrm>
+          <a:prstGeom prst="rect">
+            <a:avLst/>
+          </a:prstGeom>
+          <a:noFill/>
+          <a:ln/>
+        </p:spPr>
+        <p:txBody>
+          <a:bodyPr wrap="square" lIns="0" tIns="0" rIns="0" bIns="0" rtlCol="0" anchor="ctr"/>
+          <a:lstStyle/>
+          <a:p>
+            <a:pPr indent="0" marL="0">
+              <a:buNone/>
+            </a:pPr>
+            <a:r>
+              <a:rPr lang="en-US" sz="900" i="1" dirty="0">
+                <a:solidFill>
+                  <a:srgbClr val="64748B"/>
+                </a:solidFill>
+                <a:latin typeface="Calibri" pitchFamily="34" charset="0"/>
+                <a:ea typeface="Calibri" pitchFamily="34" charset="-122"/>
+                <a:cs typeface="Calibri" pitchFamily="34" charset="-120"/>
+              </a:rPr>
+              <a:t>◆ Detecciones por clase; valores de referencia (notebook 02 · analyze_classes).</a:t>
+            </a:r>
+            <a:endParaRPr lang="en-US" sz="900" dirty="0"/>
+          </a:p>
+        </p:txBody>
+      </p:sp>
+      <p:sp>
+        <p:nvSpPr>
+          <p:cNvPr id="9" name="Text 6"/>
+          <p:cNvSpPr/>
+          <p:nvPr/>
+        </p:nvSpPr>
+        <p:spPr>
+          <a:xfrm>
+            <a:off x="457200" y="6446520"/>
+            <a:ext cx="7315200" cy="274320"/>
+          </a:xfrm>
+          <a:prstGeom prst="rect">
+            <a:avLst/>
+          </a:prstGeom>
+          <a:noFill/>
+          <a:ln/>
+        </p:spPr>
+        <p:txBody>
+          <a:bodyPr wrap="square" rtlCol="0" anchor="ctr"/>
+          <a:lstStyle/>
+          <a:p>
+            <a:pPr algn="l" indent="0" marL="0">
+              <a:buNone/>
+            </a:pPr>
+            <a:r>
+              <a:rPr lang="en-US" sz="900" dirty="0">
+                <a:solidFill>
+                  <a:srgbClr val="64748B"/>
+                </a:solidFill>
+                <a:latin typeface="Calibri" pitchFamily="34" charset="0"/>
+                <a:ea typeface="Calibri" pitchFamily="34" charset="-122"/>
+                <a:cs typeface="Calibri" pitchFamily="34" charset="-120"/>
+              </a:rPr>
+              <a:t>Computer Vision Open Source · YOLO + SAHI</a:t>
+            </a:r>
+            <a:endParaRPr lang="en-US" sz="900" dirty="0"/>
+          </a:p>
+        </p:txBody>
+      </p:sp>
+      <p:sp>
+        <p:nvSpPr>
+          <p:cNvPr id="10" name="Text 7"/>
+          <p:cNvSpPr/>
+          <p:nvPr/>
+        </p:nvSpPr>
+        <p:spPr>
+          <a:xfrm>
+            <a:off x="9905695" y="6446520"/>
+            <a:ext cx="1828800" cy="274320"/>
+          </a:xfrm>
+          <a:prstGeom prst="rect">
+            <a:avLst/>
+          </a:prstGeom>
+          <a:noFill/>
+          <a:ln/>
+        </p:spPr>
+        <p:txBody>
+          <a:bodyPr wrap="square" rtlCol="0" anchor="ctr"/>
+          <a:lstStyle/>
+          <a:p>
+            <a:pPr algn="r" indent="0" marL="0">
+              <a:buNone/>
+            </a:pPr>
+            <a:r>
+              <a:rPr lang="en-US" sz="900" dirty="0">
+                <a:solidFill>
+                  <a:srgbClr val="64748B"/>
+                </a:solidFill>
+                <a:latin typeface="Calibri" pitchFamily="34" charset="0"/>
+                <a:ea typeface="Calibri" pitchFamily="34" charset="-122"/>
+                <a:cs typeface="Calibri" pitchFamily="34" charset="-120"/>
+              </a:rPr>
+              <a:t>FLISOL 2026</a:t>
+            </a:r>
+            <a:endParaRPr lang="en-US" sz="900" dirty="0"/>
+          </a:p>
+        </p:txBody>
+      </p:sp>
+    </p:spTree>
+  </p:cSld>
+  <p:clrMapOvr>
+    <a:masterClrMapping/>
+  </p:clrMapOvr>
+</p:sld>
+</file>
+
+<file path=ppt/slides/slide27.xml><?xml version="1.0" encoding="utf-8"?>
+<p:sld xmlns:a="http://schemas.openxmlformats.org/drawingml/2006/main" xmlns:r="http://schemas.openxmlformats.org/officeDocument/2006/relationships" xmlns:p="http://schemas.openxmlformats.org/presentationml/2006/main">
+  <p:cSld name="Slide 27">
+    <p:bg>
+      <p:bgPr>
+        <a:solidFill>
+          <a:srgbClr val="FFFFFF"/>
+        </a:solidFill>
+      </p:bgPr>
+    </p:bg>
+    <p:spTree>
+      <p:nvGrpSpPr>
+        <p:cNvPr id="1" name=""/>
+        <p:cNvGrpSpPr/>
+        <p:nvPr/>
+      </p:nvGrpSpPr>
+      <p:grpSpPr>
+        <a:xfrm>
+          <a:off x="0" y="0"/>
+          <a:ext cx="0" cy="0"/>
+          <a:chOff x="0" y="0"/>
+          <a:chExt cx="0" cy="0"/>
+        </a:xfrm>
+      </p:grpSpPr>
+      <p:sp>
+        <p:nvSpPr>
+          <p:cNvPr id="2" name="Text 0"/>
+          <p:cNvSpPr/>
+          <p:nvPr/>
+        </p:nvSpPr>
+        <p:spPr>
+          <a:xfrm>
+            <a:off x="640080" y="502920"/>
+            <a:ext cx="10058400" cy="320040"/>
+          </a:xfrm>
+          <a:prstGeom prst="rect">
+            <a:avLst/>
+          </a:prstGeom>
+          <a:noFill/>
+          <a:ln/>
+        </p:spPr>
+        <p:txBody>
+          <a:bodyPr wrap="square" lIns="0" tIns="0" rIns="0" bIns="0" rtlCol="0" anchor="ctr"/>
+          <a:lstStyle/>
+          <a:p>
+            <a:pPr indent="0" marL="0">
+              <a:buNone/>
+            </a:pPr>
+            <a:r>
+              <a:rPr lang="en-US" sz="1300" b="1" spc="300" kern="0" dirty="0">
+                <a:solidFill>
+                  <a:srgbClr val="3A6EA5"/>
+                </a:solidFill>
+                <a:latin typeface="Calibri" pitchFamily="34" charset="0"/>
+                <a:ea typeface="Calibri" pitchFamily="34" charset="-122"/>
+                <a:cs typeface="Calibri" pitchFamily="34" charset="-120"/>
+              </a:rPr>
+              <a:t>CRITERIO DE INGENIERÍA</a:t>
+            </a:r>
+            <a:endParaRPr lang="en-US" sz="1300" dirty="0"/>
+          </a:p>
+        </p:txBody>
+      </p:sp>
+      <p:sp>
+        <p:nvSpPr>
+          <p:cNvPr id="3" name="Text 1"/>
+          <p:cNvSpPr/>
+          <p:nvPr/>
+        </p:nvSpPr>
+        <p:spPr>
+          <a:xfrm>
+            <a:off x="640080" y="841248"/>
+            <a:ext cx="10972800" cy="868680"/>
+          </a:xfrm>
+          <a:prstGeom prst="rect">
+            <a:avLst/>
+          </a:prstGeom>
+          <a:noFill/>
+          <a:ln/>
+        </p:spPr>
+        <p:txBody>
+          <a:bodyPr wrap="square" lIns="0" tIns="0" rIns="0" bIns="0" rtlCol="0" anchor="ctr"/>
+          <a:lstStyle/>
+          <a:p>
+            <a:pPr indent="0" marL="0">
+              <a:buNone/>
+            </a:pPr>
+            <a:r>
+              <a:rPr lang="en-US" sz="3000" b="1" dirty="0">
+                <a:solidFill>
+                  <a:srgbClr val="1E293B"/>
+                </a:solidFill>
+                <a:latin typeface="Georgia" pitchFamily="34" charset="0"/>
+                <a:ea typeface="Georgia" pitchFamily="34" charset="-122"/>
+                <a:cs typeface="Georgia" pitchFamily="34" charset="-120"/>
+              </a:rPr>
+              <a:t>Cuándo usar SAHI (y cuándo no)</a:t>
+            </a:r>
+            <a:endParaRPr lang="en-US" sz="3000" dirty="0"/>
+          </a:p>
+        </p:txBody>
+      </p:sp>
+      <p:sp>
+        <p:nvSpPr>
+          <p:cNvPr id="4" name="Shape 2"/>
+          <p:cNvSpPr/>
+          <p:nvPr/>
+        </p:nvSpPr>
+        <p:spPr>
+          <a:xfrm>
+            <a:off x="640080" y="1965960"/>
+            <a:ext cx="5394960" cy="3657600"/>
+          </a:xfrm>
+          <a:prstGeom prst="roundRect">
+            <a:avLst>
+              <a:gd name="adj" fmla="val 2000"/>
+            </a:avLst>
+          </a:prstGeom>
+          <a:solidFill>
+            <a:srgbClr val="F4F7FA"/>
+          </a:solidFill>
+          <a:ln w="19050">
+            <a:solidFill>
+              <a:srgbClr val="2E8B57"/>
+            </a:solidFill>
+            <a:prstDash val="solid"/>
+          </a:ln>
+          <a:effectLst>
+            <a:outerShdw sx="100000" sy="100000" kx="0" ky="0" algn="bl" rotWithShape="0" blurRad="114300" dist="38100" dir="5400000">
+              <a:srgbClr val="000000">
+                <a:alpha val="18000"/>
+              </a:srgbClr>
+            </a:outerShdw>
+          </a:effectLst>
+        </p:spPr>
+      </p:sp>
+      <p:sp>
+        <p:nvSpPr>
+          <p:cNvPr id="5" name="Text 3"/>
+          <p:cNvSpPr/>
+          <p:nvPr/>
+        </p:nvSpPr>
+        <p:spPr>
+          <a:xfrm>
+            <a:off x="868680" y="2148840"/>
+            <a:ext cx="4937760" cy="457200"/>
+          </a:xfrm>
+          <a:prstGeom prst="rect">
+            <a:avLst/>
+          </a:prstGeom>
+          <a:noFill/>
+          <a:ln/>
+        </p:spPr>
+        <p:txBody>
+          <a:bodyPr wrap="square" lIns="0" tIns="0" rIns="0" bIns="0" rtlCol="0" anchor="ctr"/>
+          <a:lstStyle/>
+          <a:p>
+            <a:pPr indent="0" marL="0">
+              <a:buNone/>
+            </a:pPr>
+            <a:r>
+              <a:rPr lang="en-US" sz="2000" b="1" dirty="0">
+                <a:solidFill>
+                  <a:srgbClr val="2E8B57"/>
+                </a:solidFill>
+                <a:latin typeface="Georgia" pitchFamily="34" charset="0"/>
+                <a:ea typeface="Georgia" pitchFamily="34" charset="-122"/>
+                <a:cs typeface="Georgia" pitchFamily="34" charset="-120"/>
+              </a:rPr>
+              <a:t>SÍ conviene</a:t>
+            </a:r>
+            <a:endParaRPr lang="en-US" sz="2000" dirty="0"/>
+          </a:p>
+        </p:txBody>
+      </p:sp>
+      <p:sp>
+        <p:nvSpPr>
+          <p:cNvPr id="6" name="Text 4"/>
+          <p:cNvSpPr/>
+          <p:nvPr/>
+        </p:nvSpPr>
+        <p:spPr>
+          <a:xfrm>
+            <a:off x="868680" y="2743200"/>
+            <a:ext cx="4937760" cy="2743200"/>
+          </a:xfrm>
+          <a:prstGeom prst="rect">
+            <a:avLst/>
+          </a:prstGeom>
+          <a:noFill/>
+          <a:ln/>
+        </p:spPr>
+        <p:txBody>
+          <a:bodyPr wrap="square" lIns="0" tIns="0" rIns="0" bIns="0" rtlCol="0" anchor="ctr"/>
+          <a:lstStyle/>
+          <a:p>
+            <a:pPr marL="342900" indent="-342900">
+              <a:spcAft>
+                <a:spcPts val="1200"/>
+              </a:spcAft>
+              <a:buSzPct val="100000"/>
+              <a:buChar char="•"/>
+            </a:pPr>
+            <a:r>
+              <a:rPr lang="en-US" sz="1400" dirty="0">
+                <a:solidFill>
+                  <a:srgbClr val="1E293B"/>
+                </a:solidFill>
+                <a:latin typeface="Calibri" pitchFamily="34" charset="0"/>
+                <a:ea typeface="Calibri" pitchFamily="34" charset="-122"/>
+                <a:cs typeface="Calibri" pitchFamily="34" charset="-120"/>
+              </a:rPr>
+              <a:t>Objetos pequeños / lejanos (dron, satélite, CCTV).</a:t>
+            </a:r>
+            <a:endParaRPr lang="en-US" sz="1400" dirty="0"/>
+          </a:p>
+          <a:p>
+            <a:pPr marL="342900" indent="-342900">
+              <a:spcAft>
+                <a:spcPts val="1200"/>
+              </a:spcAft>
+              <a:buSzPct val="100000"/>
+              <a:buChar char="•"/>
+            </a:pPr>
+            <a:r>
+              <a:rPr lang="en-US" sz="1400" dirty="0">
+                <a:solidFill>
+                  <a:srgbClr val="1E293B"/>
+                </a:solidFill>
+                <a:latin typeface="Calibri" pitchFamily="34" charset="0"/>
+                <a:ea typeface="Calibri" pitchFamily="34" charset="-122"/>
+                <a:cs typeface="Calibri" pitchFamily="34" charset="-120"/>
+              </a:rPr>
+              <a:t>Imágenes de alta resolución.</a:t>
+            </a:r>
+            <a:endParaRPr lang="en-US" sz="1400" dirty="0"/>
+          </a:p>
+          <a:p>
+            <a:pPr marL="342900" indent="-342900">
+              <a:spcAft>
+                <a:spcPts val="1200"/>
+              </a:spcAft>
+              <a:buSzPct val="100000"/>
+              <a:buChar char="•"/>
+            </a:pPr>
+            <a:r>
+              <a:rPr lang="en-US" sz="1400" dirty="0">
+                <a:solidFill>
+                  <a:srgbClr val="1E293B"/>
+                </a:solidFill>
+                <a:latin typeface="Calibri" pitchFamily="34" charset="0"/>
+                <a:ea typeface="Calibri" pitchFamily="34" charset="-122"/>
+                <a:cs typeface="Calibri" pitchFamily="34" charset="-120"/>
+              </a:rPr>
+              <a:t>Escenas densas con muchos objetos.</a:t>
+            </a:r>
+            <a:endParaRPr lang="en-US" sz="1400" dirty="0"/>
+          </a:p>
+          <a:p>
+            <a:pPr marL="342900" indent="-342900">
+              <a:spcAft>
+                <a:spcPts val="1200"/>
+              </a:spcAft>
+              <a:buSzPct val="100000"/>
+              <a:buChar char="•"/>
+            </a:pPr>
+            <a:r>
+              <a:rPr lang="en-US" sz="1400" dirty="0">
+                <a:solidFill>
+                  <a:srgbClr val="1E293B"/>
+                </a:solidFill>
+                <a:latin typeface="Calibri" pitchFamily="34" charset="0"/>
+                <a:ea typeface="Calibri" pitchFamily="34" charset="-122"/>
+                <a:cs typeface="Calibri" pitchFamily="34" charset="-120"/>
+              </a:rPr>
+              <a:t>La precisión importa más que el tiempo real.</a:t>
+            </a:r>
+            <a:endParaRPr lang="en-US" sz="1400" dirty="0"/>
+          </a:p>
+        </p:txBody>
+      </p:sp>
+      <p:sp>
+        <p:nvSpPr>
+          <p:cNvPr id="7" name="Shape 5"/>
+          <p:cNvSpPr/>
+          <p:nvPr/>
+        </p:nvSpPr>
+        <p:spPr>
+          <a:xfrm>
+            <a:off x="6309360" y="1965960"/>
+            <a:ext cx="5257800" cy="3657600"/>
+          </a:xfrm>
+          <a:prstGeom prst="roundRect">
+            <a:avLst>
+              <a:gd name="adj" fmla="val 2000"/>
+            </a:avLst>
+          </a:prstGeom>
+          <a:solidFill>
+            <a:srgbClr val="F4F7FA"/>
+          </a:solidFill>
+          <a:ln w="19050">
+            <a:solidFill>
+              <a:srgbClr val="E4572E"/>
+            </a:solidFill>
+            <a:prstDash val="solid"/>
+          </a:ln>
+          <a:effectLst>
+            <a:outerShdw sx="100000" sy="100000" kx="0" ky="0" algn="bl" rotWithShape="0" blurRad="114300" dist="38100" dir="5400000">
+              <a:srgbClr val="000000">
+                <a:alpha val="18000"/>
+              </a:srgbClr>
+            </a:outerShdw>
+          </a:effectLst>
+        </p:spPr>
+      </p:sp>
+      <p:sp>
+        <p:nvSpPr>
+          <p:cNvPr id="8" name="Text 6"/>
+          <p:cNvSpPr/>
+          <p:nvPr/>
+        </p:nvSpPr>
+        <p:spPr>
+          <a:xfrm>
+            <a:off x="6537960" y="2148840"/>
+            <a:ext cx="4846320" cy="457200"/>
+          </a:xfrm>
+          <a:prstGeom prst="rect">
+            <a:avLst/>
+          </a:prstGeom>
+          <a:noFill/>
+          <a:ln/>
+        </p:spPr>
+        <p:txBody>
+          <a:bodyPr wrap="square" lIns="0" tIns="0" rIns="0" bIns="0" rtlCol="0" anchor="ctr"/>
+          <a:lstStyle/>
+          <a:p>
+            <a:pPr indent="0" marL="0">
+              <a:buNone/>
+            </a:pPr>
+            <a:r>
+              <a:rPr lang="en-US" sz="2000" b="1" dirty="0">
+                <a:solidFill>
+                  <a:srgbClr val="E4572E"/>
+                </a:solidFill>
+                <a:latin typeface="Georgia" pitchFamily="34" charset="0"/>
+                <a:ea typeface="Georgia" pitchFamily="34" charset="-122"/>
+                <a:cs typeface="Georgia" pitchFamily="34" charset="-120"/>
+              </a:rPr>
+              <a:t>NO hace falta</a:t>
+            </a:r>
+            <a:endParaRPr lang="en-US" sz="2000" dirty="0"/>
+          </a:p>
+        </p:txBody>
+      </p:sp>
+      <p:sp>
+        <p:nvSpPr>
+          <p:cNvPr id="9" name="Text 7"/>
+          <p:cNvSpPr/>
+          <p:nvPr/>
+        </p:nvSpPr>
+        <p:spPr>
+          <a:xfrm>
+            <a:off x="6537960" y="2743200"/>
+            <a:ext cx="4846320" cy="2743200"/>
+          </a:xfrm>
+          <a:prstGeom prst="rect">
+            <a:avLst/>
+          </a:prstGeom>
+          <a:noFill/>
+          <a:ln/>
+        </p:spPr>
+        <p:txBody>
+          <a:bodyPr wrap="square" lIns="0" tIns="0" rIns="0" bIns="0" rtlCol="0" anchor="ctr"/>
+          <a:lstStyle/>
+          <a:p>
+            <a:pPr marL="342900" indent="-342900">
+              <a:spcAft>
+                <a:spcPts val="1200"/>
+              </a:spcAft>
+              <a:buSzPct val="100000"/>
+              <a:buChar char="•"/>
+            </a:pPr>
+            <a:r>
+              <a:rPr lang="en-US" sz="1400" dirty="0">
+                <a:solidFill>
+                  <a:srgbClr val="1E293B"/>
+                </a:solidFill>
+                <a:latin typeface="Calibri" pitchFamily="34" charset="0"/>
+                <a:ea typeface="Calibri" pitchFamily="34" charset="-122"/>
+                <a:cs typeface="Calibri" pitchFamily="34" charset="-120"/>
+              </a:rPr>
+              <a:t>Objetos grandes que llenan el frame.</a:t>
+            </a:r>
+            <a:endParaRPr lang="en-US" sz="1400" dirty="0"/>
+          </a:p>
+          <a:p>
+            <a:pPr marL="342900" indent="-342900">
+              <a:spcAft>
+                <a:spcPts val="1200"/>
+              </a:spcAft>
+              <a:buSzPct val="100000"/>
+              <a:buChar char="•"/>
+            </a:pPr>
+            <a:r>
+              <a:rPr lang="en-US" sz="1400" dirty="0">
+                <a:solidFill>
+                  <a:srgbClr val="1E293B"/>
+                </a:solidFill>
+                <a:latin typeface="Calibri" pitchFamily="34" charset="0"/>
+                <a:ea typeface="Calibri" pitchFamily="34" charset="-122"/>
+                <a:cs typeface="Calibri" pitchFamily="34" charset="-120"/>
+              </a:rPr>
+              <a:t>Tiempo real estricto sin GPU.</a:t>
+            </a:r>
+            <a:endParaRPr lang="en-US" sz="1400" dirty="0"/>
+          </a:p>
+          <a:p>
+            <a:pPr marL="342900" indent="-342900">
+              <a:spcAft>
+                <a:spcPts val="1200"/>
+              </a:spcAft>
+              <a:buSzPct val="100000"/>
+              <a:buChar char="•"/>
+            </a:pPr>
+            <a:r>
+              <a:rPr lang="en-US" sz="1400" dirty="0">
+                <a:solidFill>
+                  <a:srgbClr val="1E293B"/>
+                </a:solidFill>
+                <a:latin typeface="Calibri" pitchFamily="34" charset="0"/>
+                <a:ea typeface="Calibri" pitchFamily="34" charset="-122"/>
+                <a:cs typeface="Calibri" pitchFamily="34" charset="-120"/>
+              </a:rPr>
+              <a:t>Costo ≈ proporcional al nº de slices.</a:t>
+            </a:r>
+            <a:endParaRPr lang="en-US" sz="1400" dirty="0"/>
+          </a:p>
+          <a:p>
+            <a:pPr marL="342900" indent="-342900">
+              <a:spcAft>
+                <a:spcPts val="1200"/>
+              </a:spcAft>
+              <a:buSzPct val="100000"/>
+              <a:buChar char="•"/>
+            </a:pPr>
+            <a:r>
+              <a:rPr lang="en-US" sz="1400" b="1" dirty="0">
+                <a:solidFill>
+                  <a:srgbClr val="1E293B"/>
+                </a:solidFill>
+                <a:latin typeface="Calibri" pitchFamily="34" charset="0"/>
+                <a:ea typeface="Calibri" pitchFamily="34" charset="-122"/>
+                <a:cs typeface="Calibri" pitchFamily="34" charset="-120"/>
+              </a:rPr>
+              <a:t>Regla: bisturí para lo pequeño, no martillo para todo.</a:t>
+            </a:r>
+            <a:endParaRPr lang="en-US" sz="1400" dirty="0"/>
+          </a:p>
+        </p:txBody>
+      </p:sp>
+      <p:sp>
+        <p:nvSpPr>
+          <p:cNvPr id="10" name="Text 8"/>
+          <p:cNvSpPr/>
+          <p:nvPr/>
+        </p:nvSpPr>
+        <p:spPr>
+          <a:xfrm>
+            <a:off x="457200" y="6446520"/>
+            <a:ext cx="7315200" cy="274320"/>
+          </a:xfrm>
+          <a:prstGeom prst="rect">
+            <a:avLst/>
+          </a:prstGeom>
+          <a:noFill/>
+          <a:ln/>
+        </p:spPr>
+        <p:txBody>
+          <a:bodyPr wrap="square" rtlCol="0" anchor="ctr"/>
+          <a:lstStyle/>
+          <a:p>
+            <a:pPr algn="l" indent="0" marL="0">
+              <a:buNone/>
+            </a:pPr>
+            <a:r>
+              <a:rPr lang="en-US" sz="900" dirty="0">
+                <a:solidFill>
+                  <a:srgbClr val="64748B"/>
+                </a:solidFill>
+                <a:latin typeface="Calibri" pitchFamily="34" charset="0"/>
+                <a:ea typeface="Calibri" pitchFamily="34" charset="-122"/>
+                <a:cs typeface="Calibri" pitchFamily="34" charset="-120"/>
+              </a:rPr>
+              <a:t>Computer Vision Open Source · YOLO + SAHI</a:t>
+            </a:r>
+            <a:endParaRPr lang="en-US" sz="900" dirty="0"/>
+          </a:p>
+        </p:txBody>
+      </p:sp>
+      <p:sp>
+        <p:nvSpPr>
+          <p:cNvPr id="11" name="Text 9"/>
+          <p:cNvSpPr/>
+          <p:nvPr/>
+        </p:nvSpPr>
+        <p:spPr>
+          <a:xfrm>
+            <a:off x="9905695" y="6446520"/>
+            <a:ext cx="1828800" cy="274320"/>
+          </a:xfrm>
+          <a:prstGeom prst="rect">
+            <a:avLst/>
+          </a:prstGeom>
+          <a:noFill/>
+          <a:ln/>
+        </p:spPr>
+        <p:txBody>
+          <a:bodyPr wrap="square" rtlCol="0" anchor="ctr"/>
+          <a:lstStyle/>
+          <a:p>
+            <a:pPr algn="r" indent="0" marL="0">
+              <a:buNone/>
+            </a:pPr>
+            <a:r>
+              <a:rPr lang="en-US" sz="900" dirty="0">
+                <a:solidFill>
+                  <a:srgbClr val="64748B"/>
+                </a:solidFill>
+                <a:latin typeface="Calibri" pitchFamily="34" charset="0"/>
+                <a:ea typeface="Calibri" pitchFamily="34" charset="-122"/>
+                <a:cs typeface="Calibri" pitchFamily="34" charset="-120"/>
+              </a:rPr>
+              <a:t>FLISOL 2026</a:t>
+            </a:r>
+            <a:endParaRPr lang="en-US" sz="900" dirty="0"/>
+          </a:p>
+        </p:txBody>
+      </p:sp>
+    </p:spTree>
+  </p:cSld>
+  <p:clrMapOvr>
+    <a:masterClrMapping/>
+  </p:clrMapOvr>
+</p:sld>
+</file>
+
+<file path=ppt/slides/slide28.xml><?xml version="1.0" encoding="utf-8"?>
+<p:sld xmlns:a="http://schemas.openxmlformats.org/drawingml/2006/main" xmlns:r="http://schemas.openxmlformats.org/officeDocument/2006/relationships" xmlns:p="http://schemas.openxmlformats.org/presentationml/2006/main">
+  <p:cSld name="Slide 28">
+    <p:bg>
+      <p:bgPr>
+        <a:solidFill>
+          <a:srgbClr val="FFFFFF"/>
+        </a:solidFill>
+      </p:bgPr>
+    </p:bg>
+    <p:spTree>
+      <p:nvGrpSpPr>
+        <p:cNvPr id="1" name=""/>
+        <p:cNvGrpSpPr/>
+        <p:nvPr/>
+      </p:nvGrpSpPr>
+      <p:grpSpPr>
+        <a:xfrm>
+          <a:off x="0" y="0"/>
+          <a:ext cx="0" cy="0"/>
+          <a:chOff x="0" y="0"/>
+          <a:chExt cx="0" cy="0"/>
+        </a:xfrm>
+      </p:grpSpPr>
+      <p:sp>
+        <p:nvSpPr>
+          <p:cNvPr id="2" name="Text 0"/>
+          <p:cNvSpPr/>
+          <p:nvPr/>
+        </p:nvSpPr>
+        <p:spPr>
+          <a:xfrm>
+            <a:off x="640080" y="502920"/>
+            <a:ext cx="10058400" cy="320040"/>
+          </a:xfrm>
+          <a:prstGeom prst="rect">
+            <a:avLst/>
+          </a:prstGeom>
+          <a:noFill/>
+          <a:ln/>
+        </p:spPr>
+        <p:txBody>
+          <a:bodyPr wrap="square" lIns="0" tIns="0" rIns="0" bIns="0" rtlCol="0" anchor="ctr"/>
+          <a:lstStyle/>
+          <a:p>
+            <a:pPr indent="0" marL="0">
+              <a:buNone/>
+            </a:pPr>
+            <a:r>
+              <a:rPr lang="en-US" sz="1300" b="1" spc="300" kern="0" dirty="0">
+                <a:solidFill>
                   <a:srgbClr val="3A6EA5"/>
                 </a:solidFill>
                 <a:latin typeface="Calibri" pitchFamily="34" charset="0"/>
@@ -16448,9 +20709,9 @@
 </p:sld>
 </file>
 
-<file path=ppt/slides/slide26.xml><?xml version="1.0" encoding="utf-8"?>
+<file path=ppt/slides/slide29.xml><?xml version="1.0" encoding="utf-8"?>
 <p:sld xmlns:a="http://schemas.openxmlformats.org/drawingml/2006/main" xmlns:r="http://schemas.openxmlformats.org/officeDocument/2006/relationships" xmlns:p="http://schemas.openxmlformats.org/presentationml/2006/main">
-  <p:cSld name="Slide 26">
+  <p:cSld name="Slide 29">
     <p:bg>
       <p:bgPr>
         <a:solidFill>
@@ -17060,305 +21321,6 @@
       <p:sp>
         <p:nvSpPr>
           <p:cNvPr id="17" name="Text 15"/>
-          <p:cNvSpPr/>
-          <p:nvPr/>
-        </p:nvSpPr>
-        <p:spPr>
-          <a:xfrm>
-            <a:off x="9905695" y="6446520"/>
-            <a:ext cx="1828800" cy="274320"/>
-          </a:xfrm>
-          <a:prstGeom prst="rect">
-            <a:avLst/>
-          </a:prstGeom>
-          <a:noFill/>
-          <a:ln/>
-        </p:spPr>
-        <p:txBody>
-          <a:bodyPr wrap="square" rtlCol="0" anchor="ctr"/>
-          <a:lstStyle/>
-          <a:p>
-            <a:pPr algn="r" indent="0" marL="0">
-              <a:buNone/>
-            </a:pPr>
-            <a:r>
-              <a:rPr lang="en-US" sz="900" dirty="0">
-                <a:solidFill>
-                  <a:srgbClr val="9FB3C8"/>
-                </a:solidFill>
-                <a:latin typeface="Calibri" pitchFamily="34" charset="0"/>
-                <a:ea typeface="Calibri" pitchFamily="34" charset="-122"/>
-                <a:cs typeface="Calibri" pitchFamily="34" charset="-120"/>
-              </a:rPr>
-              <a:t>FLISOL 2026</a:t>
-            </a:r>
-            <a:endParaRPr lang="en-US" sz="900" dirty="0"/>
-          </a:p>
-        </p:txBody>
-      </p:sp>
-    </p:spTree>
-  </p:cSld>
-  <p:clrMapOvr>
-    <a:masterClrMapping/>
-  </p:clrMapOvr>
-</p:sld>
-</file>
-
-<file path=ppt/slides/slide27.xml><?xml version="1.0" encoding="utf-8"?>
-<p:sld xmlns:a="http://schemas.openxmlformats.org/drawingml/2006/main" xmlns:r="http://schemas.openxmlformats.org/officeDocument/2006/relationships" xmlns:p="http://schemas.openxmlformats.org/presentationml/2006/main">
-  <p:cSld name="Slide 27">
-    <p:bg>
-      <p:bgPr>
-        <a:solidFill>
-          <a:srgbClr val="0F2A43"/>
-        </a:solidFill>
-      </p:bgPr>
-    </p:bg>
-    <p:spTree>
-      <p:nvGrpSpPr>
-        <p:cNvPr id="1" name=""/>
-        <p:cNvGrpSpPr/>
-        <p:nvPr/>
-      </p:nvGrpSpPr>
-      <p:grpSpPr>
-        <a:xfrm>
-          <a:off x="0" y="0"/>
-          <a:ext cx="0" cy="0"/>
-          <a:chOff x="0" y="0"/>
-          <a:chExt cx="0" cy="0"/>
-        </a:xfrm>
-      </p:grpSpPr>
-      <p:sp>
-        <p:nvSpPr>
-          <p:cNvPr id="2" name="Text 0"/>
-          <p:cNvSpPr/>
-          <p:nvPr/>
-        </p:nvSpPr>
-        <p:spPr>
-          <a:xfrm>
-            <a:off x="822960" y="2011680"/>
-            <a:ext cx="10515600" cy="1097280"/>
-          </a:xfrm>
-          <a:prstGeom prst="rect">
-            <a:avLst/>
-          </a:prstGeom>
-          <a:noFill/>
-          <a:ln/>
-        </p:spPr>
-        <p:txBody>
-          <a:bodyPr wrap="square" lIns="0" tIns="0" rIns="0" bIns="0" rtlCol="0" anchor="ctr"/>
-          <a:lstStyle/>
-          <a:p>
-            <a:pPr indent="0" marL="0">
-              <a:buNone/>
-            </a:pPr>
-            <a:r>
-              <a:rPr lang="en-US" sz="5400" b="1" dirty="0">
-                <a:solidFill>
-                  <a:srgbClr val="FFFFFF"/>
-                </a:solidFill>
-                <a:latin typeface="Georgia" pitchFamily="34" charset="0"/>
-                <a:ea typeface="Georgia" pitchFamily="34" charset="-122"/>
-                <a:cs typeface="Georgia" pitchFamily="34" charset="-120"/>
-              </a:rPr>
-              <a:t>¡Gracias!</a:t>
-            </a:r>
-            <a:endParaRPr lang="en-US" sz="5400" dirty="0"/>
-          </a:p>
-        </p:txBody>
-      </p:sp>
-      <p:sp>
-        <p:nvSpPr>
-          <p:cNvPr id="3" name="Text 1"/>
-          <p:cNvSpPr/>
-          <p:nvPr/>
-        </p:nvSpPr>
-        <p:spPr>
-          <a:xfrm>
-            <a:off x="868680" y="3200400"/>
-            <a:ext cx="10058400" cy="548640"/>
-          </a:xfrm>
-          <a:prstGeom prst="rect">
-            <a:avLst/>
-          </a:prstGeom>
-          <a:noFill/>
-          <a:ln/>
-        </p:spPr>
-        <p:txBody>
-          <a:bodyPr wrap="square" lIns="0" tIns="0" rIns="0" bIns="0" rtlCol="0" anchor="ctr"/>
-          <a:lstStyle/>
-          <a:p>
-            <a:pPr indent="0" marL="0">
-              <a:buNone/>
-            </a:pPr>
-            <a:r>
-              <a:rPr lang="en-US" sz="2000" i="1" dirty="0">
-                <a:solidFill>
-                  <a:srgbClr val="CADCFC"/>
-                </a:solidFill>
-                <a:latin typeface="Calibri" pitchFamily="34" charset="0"/>
-                <a:ea typeface="Calibri" pitchFamily="34" charset="-122"/>
-                <a:cs typeface="Calibri" pitchFamily="34" charset="-120"/>
-              </a:rPr>
-              <a:t>Preguntas y experimentos en vivo</a:t>
-            </a:r>
-            <a:endParaRPr lang="en-US" sz="2000" dirty="0"/>
-          </a:p>
-        </p:txBody>
-      </p:sp>
-      <p:sp>
-        <p:nvSpPr>
-          <p:cNvPr id="4" name="Shape 2"/>
-          <p:cNvSpPr/>
-          <p:nvPr/>
-        </p:nvSpPr>
-        <p:spPr>
-          <a:xfrm>
-            <a:off x="822960" y="4023360"/>
-            <a:ext cx="10515600" cy="1371600"/>
-          </a:xfrm>
-          <a:prstGeom prst="roundRect">
-            <a:avLst>
-              <a:gd name="adj" fmla="val 5333"/>
-            </a:avLst>
-          </a:prstGeom>
-          <a:solidFill>
-            <a:srgbClr val="14375E"/>
-          </a:solidFill>
-          <a:ln w="12700">
-            <a:solidFill>
-              <a:srgbClr val="1C4A73"/>
-            </a:solidFill>
-            <a:prstDash val="solid"/>
-          </a:ln>
-        </p:spPr>
-      </p:sp>
-      <p:sp>
-        <p:nvSpPr>
-          <p:cNvPr id="5" name="Text 3"/>
-          <p:cNvSpPr/>
-          <p:nvPr/>
-        </p:nvSpPr>
-        <p:spPr>
-          <a:xfrm>
-            <a:off x="1097280" y="4206240"/>
-            <a:ext cx="10058400" cy="1005840"/>
-          </a:xfrm>
-          <a:prstGeom prst="rect">
-            <a:avLst/>
-          </a:prstGeom>
-          <a:noFill/>
-          <a:ln/>
-        </p:spPr>
-        <p:txBody>
-          <a:bodyPr wrap="square" lIns="0" tIns="0" rIns="0" bIns="0" rtlCol="0" anchor="ctr"/>
-          <a:lstStyle/>
-          <a:p>
-            <a:pPr indent="0" marL="0">
-              <a:buNone/>
-            </a:pPr>
-            <a:r>
-              <a:rPr lang="en-US" sz="1500" b="1" dirty="0">
-                <a:solidFill>
-                  <a:srgbClr val="2E8B57"/>
-                </a:solidFill>
-                <a:latin typeface="Calibri" pitchFamily="34" charset="0"/>
-                <a:ea typeface="Calibri" pitchFamily="34" charset="-122"/>
-                <a:cs typeface="Calibri" pitchFamily="34" charset="-120"/>
-              </a:rPr>
-              <a:t>Repositorio:  </a:t>
-            </a:r>
-            <a:pPr indent="0" marL="0">
-              <a:buNone/>
-            </a:pPr>
-            <a:r>
-              <a:rPr lang="en-US" sz="1500" dirty="0">
-                <a:solidFill>
-                  <a:srgbClr val="FFFFFF"/>
-                </a:solidFill>
-                <a:latin typeface="Calibri" pitchFamily="34" charset="0"/>
-                <a:ea typeface="Calibri" pitchFamily="34" charset="-122"/>
-                <a:cs typeface="Calibri" pitchFamily="34" charset="-120"/>
-              </a:rPr>
-              <a:t>github.com/jossuema/yolo-sahi-flisol2026</a:t>
-            </a:r>
-            <a:endParaRPr lang="en-US" sz="1500" dirty="0"/>
-          </a:p>
-          <a:p>
-            <a:pPr indent="0" marL="0">
-              <a:buNone/>
-            </a:pPr>
-            <a:r>
-              <a:rPr lang="en-US" sz="1500" b="1" dirty="0">
-                <a:solidFill>
-                  <a:srgbClr val="2E8B57"/>
-                </a:solidFill>
-                <a:latin typeface="Calibri" pitchFamily="34" charset="0"/>
-                <a:ea typeface="Calibri" pitchFamily="34" charset="-122"/>
-                <a:cs typeface="Calibri" pitchFamily="34" charset="-120"/>
-              </a:rPr>
-              <a:t>Recursos:  </a:t>
-            </a:r>
-            <a:pPr indent="0" marL="0">
-              <a:buNone/>
-            </a:pPr>
-            <a:r>
-              <a:rPr lang="en-US" sz="1500" dirty="0">
-                <a:solidFill>
-                  <a:srgbClr val="CADCFC"/>
-                </a:solidFill>
-                <a:latin typeface="Calibri" pitchFamily="34" charset="0"/>
-                <a:ea typeface="Calibri" pitchFamily="34" charset="-122"/>
-                <a:cs typeface="Calibri" pitchFamily="34" charset="-120"/>
-              </a:rPr>
-              <a:t>ultralytics.com  ·  github.com/obss/sahi  ·  VisDrone2019-DET</a:t>
-            </a:r>
-            <a:endParaRPr lang="en-US" sz="1500" dirty="0"/>
-          </a:p>
-        </p:txBody>
-      </p:sp>
-      <p:sp>
-        <p:nvSpPr>
-          <p:cNvPr id="6" name="Text 4"/>
-          <p:cNvSpPr/>
-          <p:nvPr/>
-        </p:nvSpPr>
-        <p:spPr>
-          <a:xfrm>
-            <a:off x="457200" y="6446520"/>
-            <a:ext cx="7315200" cy="274320"/>
-          </a:xfrm>
-          <a:prstGeom prst="rect">
-            <a:avLst/>
-          </a:prstGeom>
-          <a:noFill/>
-          <a:ln/>
-        </p:spPr>
-        <p:txBody>
-          <a:bodyPr wrap="square" rtlCol="0" anchor="ctr"/>
-          <a:lstStyle/>
-          <a:p>
-            <a:pPr algn="l" indent="0" marL="0">
-              <a:buNone/>
-            </a:pPr>
-            <a:r>
-              <a:rPr lang="en-US" sz="900" dirty="0">
-                <a:solidFill>
-                  <a:srgbClr val="9FB3C8"/>
-                </a:solidFill>
-                <a:latin typeface="Calibri" pitchFamily="34" charset="0"/>
-                <a:ea typeface="Calibri" pitchFamily="34" charset="-122"/>
-                <a:cs typeface="Calibri" pitchFamily="34" charset="-120"/>
-              </a:rPr>
-              <a:t>Computer Vision Open Source · YOLO + SAHI</a:t>
-            </a:r>
-            <a:endParaRPr lang="en-US" sz="900" dirty="0"/>
-          </a:p>
-        </p:txBody>
-      </p:sp>
-      <p:sp>
-        <p:nvSpPr>
-          <p:cNvPr id="7" name="Text 5"/>
           <p:cNvSpPr/>
           <p:nvPr/>
         </p:nvSpPr>
@@ -17811,6 +21773,305 @@
       <p:sp>
         <p:nvSpPr>
           <p:cNvPr id="15" name="Text 13"/>
+          <p:cNvSpPr/>
+          <p:nvPr/>
+        </p:nvSpPr>
+        <p:spPr>
+          <a:xfrm>
+            <a:off x="9905695" y="6446520"/>
+            <a:ext cx="1828800" cy="274320"/>
+          </a:xfrm>
+          <a:prstGeom prst="rect">
+            <a:avLst/>
+          </a:prstGeom>
+          <a:noFill/>
+          <a:ln/>
+        </p:spPr>
+        <p:txBody>
+          <a:bodyPr wrap="square" rtlCol="0" anchor="ctr"/>
+          <a:lstStyle/>
+          <a:p>
+            <a:pPr algn="r" indent="0" marL="0">
+              <a:buNone/>
+            </a:pPr>
+            <a:r>
+              <a:rPr lang="en-US" sz="900" dirty="0">
+                <a:solidFill>
+                  <a:srgbClr val="9FB3C8"/>
+                </a:solidFill>
+                <a:latin typeface="Calibri" pitchFamily="34" charset="0"/>
+                <a:ea typeface="Calibri" pitchFamily="34" charset="-122"/>
+                <a:cs typeface="Calibri" pitchFamily="34" charset="-120"/>
+              </a:rPr>
+              <a:t>FLISOL 2026</a:t>
+            </a:r>
+            <a:endParaRPr lang="en-US" sz="900" dirty="0"/>
+          </a:p>
+        </p:txBody>
+      </p:sp>
+    </p:spTree>
+  </p:cSld>
+  <p:clrMapOvr>
+    <a:masterClrMapping/>
+  </p:clrMapOvr>
+</p:sld>
+</file>
+
+<file path=ppt/slides/slide30.xml><?xml version="1.0" encoding="utf-8"?>
+<p:sld xmlns:a="http://schemas.openxmlformats.org/drawingml/2006/main" xmlns:r="http://schemas.openxmlformats.org/officeDocument/2006/relationships" xmlns:p="http://schemas.openxmlformats.org/presentationml/2006/main">
+  <p:cSld name="Slide 30">
+    <p:bg>
+      <p:bgPr>
+        <a:solidFill>
+          <a:srgbClr val="0F2A43"/>
+        </a:solidFill>
+      </p:bgPr>
+    </p:bg>
+    <p:spTree>
+      <p:nvGrpSpPr>
+        <p:cNvPr id="1" name=""/>
+        <p:cNvGrpSpPr/>
+        <p:nvPr/>
+      </p:nvGrpSpPr>
+      <p:grpSpPr>
+        <a:xfrm>
+          <a:off x="0" y="0"/>
+          <a:ext cx="0" cy="0"/>
+          <a:chOff x="0" y="0"/>
+          <a:chExt cx="0" cy="0"/>
+        </a:xfrm>
+      </p:grpSpPr>
+      <p:sp>
+        <p:nvSpPr>
+          <p:cNvPr id="2" name="Text 0"/>
+          <p:cNvSpPr/>
+          <p:nvPr/>
+        </p:nvSpPr>
+        <p:spPr>
+          <a:xfrm>
+            <a:off x="822960" y="2011680"/>
+            <a:ext cx="10515600" cy="1097280"/>
+          </a:xfrm>
+          <a:prstGeom prst="rect">
+            <a:avLst/>
+          </a:prstGeom>
+          <a:noFill/>
+          <a:ln/>
+        </p:spPr>
+        <p:txBody>
+          <a:bodyPr wrap="square" lIns="0" tIns="0" rIns="0" bIns="0" rtlCol="0" anchor="ctr"/>
+          <a:lstStyle/>
+          <a:p>
+            <a:pPr indent="0" marL="0">
+              <a:buNone/>
+            </a:pPr>
+            <a:r>
+              <a:rPr lang="en-US" sz="5400" b="1" dirty="0">
+                <a:solidFill>
+                  <a:srgbClr val="FFFFFF"/>
+                </a:solidFill>
+                <a:latin typeface="Georgia" pitchFamily="34" charset="0"/>
+                <a:ea typeface="Georgia" pitchFamily="34" charset="-122"/>
+                <a:cs typeface="Georgia" pitchFamily="34" charset="-120"/>
+              </a:rPr>
+              <a:t>¡Gracias!</a:t>
+            </a:r>
+            <a:endParaRPr lang="en-US" sz="5400" dirty="0"/>
+          </a:p>
+        </p:txBody>
+      </p:sp>
+      <p:sp>
+        <p:nvSpPr>
+          <p:cNvPr id="3" name="Text 1"/>
+          <p:cNvSpPr/>
+          <p:nvPr/>
+        </p:nvSpPr>
+        <p:spPr>
+          <a:xfrm>
+            <a:off x="868680" y="3200400"/>
+            <a:ext cx="10058400" cy="548640"/>
+          </a:xfrm>
+          <a:prstGeom prst="rect">
+            <a:avLst/>
+          </a:prstGeom>
+          <a:noFill/>
+          <a:ln/>
+        </p:spPr>
+        <p:txBody>
+          <a:bodyPr wrap="square" lIns="0" tIns="0" rIns="0" bIns="0" rtlCol="0" anchor="ctr"/>
+          <a:lstStyle/>
+          <a:p>
+            <a:pPr indent="0" marL="0">
+              <a:buNone/>
+            </a:pPr>
+            <a:r>
+              <a:rPr lang="en-US" sz="2000" i="1" dirty="0">
+                <a:solidFill>
+                  <a:srgbClr val="CADCFC"/>
+                </a:solidFill>
+                <a:latin typeface="Calibri" pitchFamily="34" charset="0"/>
+                <a:ea typeface="Calibri" pitchFamily="34" charset="-122"/>
+                <a:cs typeface="Calibri" pitchFamily="34" charset="-120"/>
+              </a:rPr>
+              <a:t>Preguntas y experimentos en vivo</a:t>
+            </a:r>
+            <a:endParaRPr lang="en-US" sz="2000" dirty="0"/>
+          </a:p>
+        </p:txBody>
+      </p:sp>
+      <p:sp>
+        <p:nvSpPr>
+          <p:cNvPr id="4" name="Shape 2"/>
+          <p:cNvSpPr/>
+          <p:nvPr/>
+        </p:nvSpPr>
+        <p:spPr>
+          <a:xfrm>
+            <a:off x="822960" y="4023360"/>
+            <a:ext cx="10515600" cy="1371600"/>
+          </a:xfrm>
+          <a:prstGeom prst="roundRect">
+            <a:avLst>
+              <a:gd name="adj" fmla="val 5333"/>
+            </a:avLst>
+          </a:prstGeom>
+          <a:solidFill>
+            <a:srgbClr val="14375E"/>
+          </a:solidFill>
+          <a:ln w="12700">
+            <a:solidFill>
+              <a:srgbClr val="1C4A73"/>
+            </a:solidFill>
+            <a:prstDash val="solid"/>
+          </a:ln>
+        </p:spPr>
+      </p:sp>
+      <p:sp>
+        <p:nvSpPr>
+          <p:cNvPr id="5" name="Text 3"/>
+          <p:cNvSpPr/>
+          <p:nvPr/>
+        </p:nvSpPr>
+        <p:spPr>
+          <a:xfrm>
+            <a:off x="1097280" y="4206240"/>
+            <a:ext cx="10058400" cy="1005840"/>
+          </a:xfrm>
+          <a:prstGeom prst="rect">
+            <a:avLst/>
+          </a:prstGeom>
+          <a:noFill/>
+          <a:ln/>
+        </p:spPr>
+        <p:txBody>
+          <a:bodyPr wrap="square" lIns="0" tIns="0" rIns="0" bIns="0" rtlCol="0" anchor="ctr"/>
+          <a:lstStyle/>
+          <a:p>
+            <a:pPr indent="0" marL="0">
+              <a:buNone/>
+            </a:pPr>
+            <a:r>
+              <a:rPr lang="en-US" sz="1500" b="1" dirty="0">
+                <a:solidFill>
+                  <a:srgbClr val="2E8B57"/>
+                </a:solidFill>
+                <a:latin typeface="Calibri" pitchFamily="34" charset="0"/>
+                <a:ea typeface="Calibri" pitchFamily="34" charset="-122"/>
+                <a:cs typeface="Calibri" pitchFamily="34" charset="-120"/>
+              </a:rPr>
+              <a:t>Repositorio:  </a:t>
+            </a:r>
+            <a:pPr indent="0" marL="0">
+              <a:buNone/>
+            </a:pPr>
+            <a:r>
+              <a:rPr lang="en-US" sz="1500" dirty="0">
+                <a:solidFill>
+                  <a:srgbClr val="FFFFFF"/>
+                </a:solidFill>
+                <a:latin typeface="Calibri" pitchFamily="34" charset="0"/>
+                <a:ea typeface="Calibri" pitchFamily="34" charset="-122"/>
+                <a:cs typeface="Calibri" pitchFamily="34" charset="-120"/>
+              </a:rPr>
+              <a:t>github.com/jossuema/yolo-sahi-flisol2026</a:t>
+            </a:r>
+            <a:endParaRPr lang="en-US" sz="1500" dirty="0"/>
+          </a:p>
+          <a:p>
+            <a:pPr indent="0" marL="0">
+              <a:buNone/>
+            </a:pPr>
+            <a:r>
+              <a:rPr lang="en-US" sz="1500" b="1" dirty="0">
+                <a:solidFill>
+                  <a:srgbClr val="2E8B57"/>
+                </a:solidFill>
+                <a:latin typeface="Calibri" pitchFamily="34" charset="0"/>
+                <a:ea typeface="Calibri" pitchFamily="34" charset="-122"/>
+                <a:cs typeface="Calibri" pitchFamily="34" charset="-120"/>
+              </a:rPr>
+              <a:t>Recursos:  </a:t>
+            </a:r>
+            <a:pPr indent="0" marL="0">
+              <a:buNone/>
+            </a:pPr>
+            <a:r>
+              <a:rPr lang="en-US" sz="1500" dirty="0">
+                <a:solidFill>
+                  <a:srgbClr val="CADCFC"/>
+                </a:solidFill>
+                <a:latin typeface="Calibri" pitchFamily="34" charset="0"/>
+                <a:ea typeface="Calibri" pitchFamily="34" charset="-122"/>
+                <a:cs typeface="Calibri" pitchFamily="34" charset="-120"/>
+              </a:rPr>
+              <a:t>ultralytics.com  ·  github.com/obss/sahi  ·  VisDrone2019-DET</a:t>
+            </a:r>
+            <a:endParaRPr lang="en-US" sz="1500" dirty="0"/>
+          </a:p>
+        </p:txBody>
+      </p:sp>
+      <p:sp>
+        <p:nvSpPr>
+          <p:cNvPr id="6" name="Text 4"/>
+          <p:cNvSpPr/>
+          <p:nvPr/>
+        </p:nvSpPr>
+        <p:spPr>
+          <a:xfrm>
+            <a:off x="457200" y="6446520"/>
+            <a:ext cx="7315200" cy="274320"/>
+          </a:xfrm>
+          <a:prstGeom prst="rect">
+            <a:avLst/>
+          </a:prstGeom>
+          <a:noFill/>
+          <a:ln/>
+        </p:spPr>
+        <p:txBody>
+          <a:bodyPr wrap="square" rtlCol="0" anchor="ctr"/>
+          <a:lstStyle/>
+          <a:p>
+            <a:pPr algn="l" indent="0" marL="0">
+              <a:buNone/>
+            </a:pPr>
+            <a:r>
+              <a:rPr lang="en-US" sz="900" dirty="0">
+                <a:solidFill>
+                  <a:srgbClr val="9FB3C8"/>
+                </a:solidFill>
+                <a:latin typeface="Calibri" pitchFamily="34" charset="0"/>
+                <a:ea typeface="Calibri" pitchFamily="34" charset="-122"/>
+                <a:cs typeface="Calibri" pitchFamily="34" charset="-120"/>
+              </a:rPr>
+              <a:t>Computer Vision Open Source · YOLO + SAHI</a:t>
+            </a:r>
+            <a:endParaRPr lang="en-US" sz="900" dirty="0"/>
+          </a:p>
+        </p:txBody>
+      </p:sp>
+      <p:sp>
+        <p:nvSpPr>
+          <p:cNvPr id="7" name="Text 5"/>
           <p:cNvSpPr/>
           <p:nvPr/>
         </p:nvSpPr>
